--- a/Документы/Декомпозиция.pptx
+++ b/Документы/Декомпозиция.pptx
@@ -105,6 +105,11 @@
       </a:defRPr>
     </a:lvl9pPr>
   </p:defaultTextStyle>
+  <p:extLst>
+    <p:ext uri="{EFAFB233-063F-42B5-8137-9DF3F51BA10A}">
+      <p15:sldGuideLst xmlns:p15="http://schemas.microsoft.com/office/powerpoint/2012/main"/>
+    </p:ext>
+  </p:extLst>
 </p:presentation>
 </file>
 
@@ -255,7 +260,7 @@
           <a:p>
             <a:fld id="{B739FDE5-2F62-4046-A005-6DEA85331DA5}" type="datetimeFigureOut">
               <a:rPr lang="ru-RU" smtClean="0"/>
-              <a:t>20.04.2026</a:t>
+              <a:t>06.05.2026</a:t>
             </a:fld>
             <a:endParaRPr lang="ru-RU"/>
           </a:p>
@@ -453,7 +458,7 @@
           <a:p>
             <a:fld id="{B739FDE5-2F62-4046-A005-6DEA85331DA5}" type="datetimeFigureOut">
               <a:rPr lang="ru-RU" smtClean="0"/>
-              <a:t>20.04.2026</a:t>
+              <a:t>06.05.2026</a:t>
             </a:fld>
             <a:endParaRPr lang="ru-RU"/>
           </a:p>
@@ -661,7 +666,7 @@
           <a:p>
             <a:fld id="{B739FDE5-2F62-4046-A005-6DEA85331DA5}" type="datetimeFigureOut">
               <a:rPr lang="ru-RU" smtClean="0"/>
-              <a:t>20.04.2026</a:t>
+              <a:t>06.05.2026</a:t>
             </a:fld>
             <a:endParaRPr lang="ru-RU"/>
           </a:p>
@@ -859,7 +864,7 @@
           <a:p>
             <a:fld id="{B739FDE5-2F62-4046-A005-6DEA85331DA5}" type="datetimeFigureOut">
               <a:rPr lang="ru-RU" smtClean="0"/>
-              <a:t>20.04.2026</a:t>
+              <a:t>06.05.2026</a:t>
             </a:fld>
             <a:endParaRPr lang="ru-RU"/>
           </a:p>
@@ -1134,7 +1139,7 @@
           <a:p>
             <a:fld id="{B739FDE5-2F62-4046-A005-6DEA85331DA5}" type="datetimeFigureOut">
               <a:rPr lang="ru-RU" smtClean="0"/>
-              <a:t>20.04.2026</a:t>
+              <a:t>06.05.2026</a:t>
             </a:fld>
             <a:endParaRPr lang="ru-RU"/>
           </a:p>
@@ -1399,7 +1404,7 @@
           <a:p>
             <a:fld id="{B739FDE5-2F62-4046-A005-6DEA85331DA5}" type="datetimeFigureOut">
               <a:rPr lang="ru-RU" smtClean="0"/>
-              <a:t>20.04.2026</a:t>
+              <a:t>06.05.2026</a:t>
             </a:fld>
             <a:endParaRPr lang="ru-RU"/>
           </a:p>
@@ -1811,7 +1816,7 @@
           <a:p>
             <a:fld id="{B739FDE5-2F62-4046-A005-6DEA85331DA5}" type="datetimeFigureOut">
               <a:rPr lang="ru-RU" smtClean="0"/>
-              <a:t>20.04.2026</a:t>
+              <a:t>06.05.2026</a:t>
             </a:fld>
             <a:endParaRPr lang="ru-RU"/>
           </a:p>
@@ -1952,7 +1957,7 @@
           <a:p>
             <a:fld id="{B739FDE5-2F62-4046-A005-6DEA85331DA5}" type="datetimeFigureOut">
               <a:rPr lang="ru-RU" smtClean="0"/>
-              <a:t>20.04.2026</a:t>
+              <a:t>06.05.2026</a:t>
             </a:fld>
             <a:endParaRPr lang="ru-RU"/>
           </a:p>
@@ -2065,7 +2070,7 @@
           <a:p>
             <a:fld id="{B739FDE5-2F62-4046-A005-6DEA85331DA5}" type="datetimeFigureOut">
               <a:rPr lang="ru-RU" smtClean="0"/>
-              <a:t>20.04.2026</a:t>
+              <a:t>06.05.2026</a:t>
             </a:fld>
             <a:endParaRPr lang="ru-RU"/>
           </a:p>
@@ -2376,7 +2381,7 @@
           <a:p>
             <a:fld id="{B739FDE5-2F62-4046-A005-6DEA85331DA5}" type="datetimeFigureOut">
               <a:rPr lang="ru-RU" smtClean="0"/>
-              <a:t>20.04.2026</a:t>
+              <a:t>06.05.2026</a:t>
             </a:fld>
             <a:endParaRPr lang="ru-RU"/>
           </a:p>
@@ -2664,7 +2669,7 @@
           <a:p>
             <a:fld id="{B739FDE5-2F62-4046-A005-6DEA85331DA5}" type="datetimeFigureOut">
               <a:rPr lang="ru-RU" smtClean="0"/>
-              <a:t>20.04.2026</a:t>
+              <a:t>06.05.2026</a:t>
             </a:fld>
             <a:endParaRPr lang="ru-RU"/>
           </a:p>
@@ -2905,7 +2910,7 @@
           <a:p>
             <a:fld id="{B739FDE5-2F62-4046-A005-6DEA85331DA5}" type="datetimeFigureOut">
               <a:rPr lang="ru-RU" smtClean="0"/>
-              <a:t>20.04.2026</a:t>
+              <a:t>06.05.2026</a:t>
             </a:fld>
             <a:endParaRPr lang="ru-RU"/>
           </a:p>
@@ -3402,960 +3407,3205 @@
           <a:chExt cx="0" cy="0"/>
         </a:xfrm>
       </p:grpSpPr>
-      <p:sp>
-        <p:nvSpPr>
-          <p:cNvPr id="2" name="Овал 1">
+      <p:grpSp>
+        <p:nvGrpSpPr>
+          <p:cNvPr id="142" name="Группа 141">
             <a:extLst>
               <a:ext uri="{FF2B5EF4-FFF2-40B4-BE49-F238E27FC236}">
-                <a16:creationId xmlns:a16="http://schemas.microsoft.com/office/drawing/2014/main" id="{906B369C-D05E-DA97-AB75-879183D56AF4}"/>
+                <a16:creationId xmlns:a16="http://schemas.microsoft.com/office/drawing/2014/main" id="{0BE605FC-9117-BF8F-69CF-24A8B23CC85A}"/>
               </a:ext>
             </a:extLst>
           </p:cNvPr>
-          <p:cNvSpPr/>
+          <p:cNvGrpSpPr/>
           <p:nvPr/>
-        </p:nvSpPr>
-        <p:spPr>
+        </p:nvGrpSpPr>
+        <p:grpSpPr>
           <a:xfrm>
-            <a:off x="5159654" y="2670048"/>
-            <a:ext cx="1872691" cy="943661"/>
+            <a:off x="484123" y="185644"/>
+            <a:ext cx="11439753" cy="6308486"/>
+            <a:chOff x="484123" y="185644"/>
+            <a:chExt cx="11439753" cy="6308486"/>
           </a:xfrm>
-          <a:prstGeom prst="ellipse">
-            <a:avLst/>
-          </a:prstGeom>
-        </p:spPr>
-        <p:style>
-          <a:lnRef idx="2">
-            <a:schemeClr val="dk1"/>
-          </a:lnRef>
-          <a:fillRef idx="1">
-            <a:schemeClr val="lt1"/>
-          </a:fillRef>
-          <a:effectRef idx="0">
-            <a:schemeClr val="dk1"/>
-          </a:effectRef>
-          <a:fontRef idx="minor">
-            <a:schemeClr val="dk1"/>
-          </a:fontRef>
-        </p:style>
-        <p:txBody>
-          <a:bodyPr rtlCol="0" anchor="ctr"/>
-          <a:lstStyle/>
-          <a:p>
-            <a:pPr algn="ctr"/>
-            <a:r>
-              <a:rPr lang="ru-RU" sz="1600" dirty="0">
-                <a:ln w="0"/>
-                <a:solidFill>
-                  <a:schemeClr val="tx1"/>
-                </a:solidFill>
-                <a:effectLst>
-                  <a:outerShdw blurRad="38100" dist="19050" dir="2700000" algn="tl" rotWithShape="0">
-                    <a:schemeClr val="dk1">
-                      <a:alpha val="40000"/>
-                    </a:schemeClr>
-                  </a:outerShdw>
-                </a:effectLst>
-              </a:rPr>
-              <a:t>Команды</a:t>
-            </a:r>
-            <a:endParaRPr lang="ru-RU" sz="1600" dirty="0"/>
-          </a:p>
-        </p:txBody>
-      </p:sp>
-      <p:sp>
-        <p:nvSpPr>
-          <p:cNvPr id="6" name="Овал 5">
-            <a:extLst>
-              <a:ext uri="{FF2B5EF4-FFF2-40B4-BE49-F238E27FC236}">
-                <a16:creationId xmlns:a16="http://schemas.microsoft.com/office/drawing/2014/main" id="{A711FD26-26B8-8FC3-1B0B-DE146F5CF4E3}"/>
-              </a:ext>
-            </a:extLst>
-          </p:cNvPr>
-          <p:cNvSpPr/>
-          <p:nvPr/>
-        </p:nvSpPr>
-        <p:spPr>
-          <a:xfrm>
-            <a:off x="5552236" y="1253337"/>
-            <a:ext cx="1072896" cy="943661"/>
-          </a:xfrm>
-          <a:prstGeom prst="ellipse">
-            <a:avLst/>
-          </a:prstGeom>
-        </p:spPr>
-        <p:style>
-          <a:lnRef idx="2">
-            <a:schemeClr val="dk1"/>
-          </a:lnRef>
-          <a:fillRef idx="1">
-            <a:schemeClr val="lt1"/>
-          </a:fillRef>
-          <a:effectRef idx="0">
-            <a:schemeClr val="dk1"/>
-          </a:effectRef>
-          <a:fontRef idx="minor">
-            <a:schemeClr val="dk1"/>
-          </a:fontRef>
-        </p:style>
-        <p:txBody>
-          <a:bodyPr rtlCol="0" anchor="ctr"/>
-          <a:lstStyle/>
-          <a:p>
-            <a:pPr algn="ctr"/>
-            <a:r>
-              <a:rPr lang="en-US" sz="1600" dirty="0">
-                <a:ln w="0"/>
-                <a:solidFill>
-                  <a:schemeClr val="tx1"/>
-                </a:solidFill>
-                <a:effectLst>
-                  <a:outerShdw blurRad="38100" dist="19050" dir="2700000" algn="tl" rotWithShape="0">
-                    <a:schemeClr val="dk1">
-                      <a:alpha val="40000"/>
-                    </a:schemeClr>
-                  </a:outerShdw>
-                </a:effectLst>
-              </a:rPr>
-              <a:t>All</a:t>
-            </a:r>
-            <a:endParaRPr lang="ru-RU" sz="1600" dirty="0"/>
-          </a:p>
-        </p:txBody>
-      </p:sp>
-      <p:sp>
-        <p:nvSpPr>
-          <p:cNvPr id="7" name="Овал 6">
-            <a:extLst>
-              <a:ext uri="{FF2B5EF4-FFF2-40B4-BE49-F238E27FC236}">
-                <a16:creationId xmlns:a16="http://schemas.microsoft.com/office/drawing/2014/main" id="{3516C54A-B370-56F5-4574-68E7A910A76C}"/>
-              </a:ext>
-            </a:extLst>
-          </p:cNvPr>
-          <p:cNvSpPr/>
-          <p:nvPr/>
-        </p:nvSpPr>
-        <p:spPr>
-          <a:xfrm>
-            <a:off x="3390596" y="2670046"/>
-            <a:ext cx="1072896" cy="943661"/>
-          </a:xfrm>
-          <a:prstGeom prst="ellipse">
-            <a:avLst/>
-          </a:prstGeom>
-        </p:spPr>
-        <p:style>
-          <a:lnRef idx="2">
-            <a:schemeClr val="dk1"/>
-          </a:lnRef>
-          <a:fillRef idx="1">
-            <a:schemeClr val="lt1"/>
-          </a:fillRef>
-          <a:effectRef idx="0">
-            <a:schemeClr val="dk1"/>
-          </a:effectRef>
-          <a:fontRef idx="minor">
-            <a:schemeClr val="dk1"/>
-          </a:fontRef>
-        </p:style>
-        <p:txBody>
-          <a:bodyPr rtlCol="0" anchor="ctr"/>
-          <a:lstStyle/>
-          <a:p>
-            <a:pPr algn="ctr"/>
-            <a:r>
-              <a:rPr lang="en-US" sz="1600" dirty="0">
-                <a:ln w="0"/>
-                <a:solidFill>
-                  <a:schemeClr val="tx1"/>
-                </a:solidFill>
-                <a:effectLst>
-                  <a:outerShdw blurRad="38100" dist="19050" dir="2700000" algn="tl" rotWithShape="0">
-                    <a:schemeClr val="dk1">
-                      <a:alpha val="40000"/>
-                    </a:schemeClr>
-                  </a:outerShdw>
-                </a:effectLst>
-              </a:rPr>
-              <a:t>User</a:t>
-            </a:r>
-            <a:endParaRPr lang="ru-RU" sz="1600" dirty="0"/>
-          </a:p>
-        </p:txBody>
-      </p:sp>
-      <p:sp>
-        <p:nvSpPr>
-          <p:cNvPr id="8" name="Овал 7">
-            <a:extLst>
-              <a:ext uri="{FF2B5EF4-FFF2-40B4-BE49-F238E27FC236}">
-                <a16:creationId xmlns:a16="http://schemas.microsoft.com/office/drawing/2014/main" id="{4B53E917-5FCC-A9A3-ADE8-B642A6DFC134}"/>
-              </a:ext>
-            </a:extLst>
-          </p:cNvPr>
-          <p:cNvSpPr/>
-          <p:nvPr/>
-        </p:nvSpPr>
-        <p:spPr>
-          <a:xfrm>
-            <a:off x="5559551" y="4220870"/>
-            <a:ext cx="1072896" cy="943661"/>
-          </a:xfrm>
-          <a:prstGeom prst="ellipse">
-            <a:avLst/>
-          </a:prstGeom>
-        </p:spPr>
-        <p:style>
-          <a:lnRef idx="2">
-            <a:schemeClr val="dk1"/>
-          </a:lnRef>
-          <a:fillRef idx="1">
-            <a:schemeClr val="lt1"/>
-          </a:fillRef>
-          <a:effectRef idx="0">
-            <a:schemeClr val="dk1"/>
-          </a:effectRef>
-          <a:fontRef idx="minor">
-            <a:schemeClr val="dk1"/>
-          </a:fontRef>
-        </p:style>
-        <p:txBody>
-          <a:bodyPr rtlCol="0" anchor="ctr"/>
-          <a:lstStyle/>
-          <a:p>
-            <a:pPr algn="ctr"/>
-            <a:r>
-              <a:rPr lang="en-US" sz="1050" dirty="0" err="1">
-                <a:ln w="0"/>
-                <a:solidFill>
-                  <a:schemeClr val="tx1"/>
-                </a:solidFill>
-                <a:effectLst>
-                  <a:outerShdw blurRad="38100" dist="19050" dir="2700000" algn="tl" rotWithShape="0">
-                    <a:schemeClr val="dk1">
-                      <a:alpha val="40000"/>
-                    </a:schemeClr>
-                  </a:outerShdw>
-                </a:effectLst>
-              </a:rPr>
-              <a:t>WatchDog</a:t>
-            </a:r>
-            <a:endParaRPr lang="ru-RU" sz="1600" dirty="0"/>
-          </a:p>
-        </p:txBody>
-      </p:sp>
-      <p:sp>
-        <p:nvSpPr>
-          <p:cNvPr id="9" name="Овал 8">
-            <a:extLst>
-              <a:ext uri="{FF2B5EF4-FFF2-40B4-BE49-F238E27FC236}">
-                <a16:creationId xmlns:a16="http://schemas.microsoft.com/office/drawing/2014/main" id="{37519999-932B-8810-DF43-42CFCB58FE65}"/>
-              </a:ext>
-            </a:extLst>
-          </p:cNvPr>
-          <p:cNvSpPr/>
-          <p:nvPr/>
-        </p:nvSpPr>
-        <p:spPr>
-          <a:xfrm>
-            <a:off x="7728507" y="2670047"/>
-            <a:ext cx="1072896" cy="943661"/>
-          </a:xfrm>
-          <a:prstGeom prst="ellipse">
-            <a:avLst/>
-          </a:prstGeom>
-        </p:spPr>
-        <p:style>
-          <a:lnRef idx="2">
-            <a:schemeClr val="dk1"/>
-          </a:lnRef>
-          <a:fillRef idx="1">
-            <a:schemeClr val="lt1"/>
-          </a:fillRef>
-          <a:effectRef idx="0">
-            <a:schemeClr val="dk1"/>
-          </a:effectRef>
-          <a:fontRef idx="minor">
-            <a:schemeClr val="dk1"/>
-          </a:fontRef>
-        </p:style>
-        <p:txBody>
-          <a:bodyPr rtlCol="0" anchor="ctr"/>
-          <a:lstStyle/>
-          <a:p>
-            <a:pPr algn="ctr"/>
-            <a:r>
-              <a:rPr lang="en-US" sz="1600" dirty="0">
-                <a:ln w="0"/>
-                <a:solidFill>
-                  <a:schemeClr val="tx1"/>
-                </a:solidFill>
-                <a:effectLst>
-                  <a:outerShdw blurRad="38100" dist="19050" dir="2700000" algn="tl" rotWithShape="0">
-                    <a:schemeClr val="dk1">
-                      <a:alpha val="40000"/>
-                    </a:schemeClr>
-                  </a:outerShdw>
-                </a:effectLst>
-              </a:rPr>
-              <a:t>Admin</a:t>
-            </a:r>
-            <a:endParaRPr lang="ru-RU" sz="1600" dirty="0"/>
-          </a:p>
-        </p:txBody>
-      </p:sp>
-      <p:cxnSp>
-        <p:nvCxnSpPr>
-          <p:cNvPr id="11" name="Прямая со стрелкой 10">
-            <a:extLst>
-              <a:ext uri="{FF2B5EF4-FFF2-40B4-BE49-F238E27FC236}">
-                <a16:creationId xmlns:a16="http://schemas.microsoft.com/office/drawing/2014/main" id="{167E1656-DFDF-C77A-314F-720A1E19243A}"/>
-              </a:ext>
-            </a:extLst>
-          </p:cNvPr>
-          <p:cNvCxnSpPr>
-            <a:stCxn id="2" idx="0"/>
-            <a:endCxn id="6" idx="4"/>
-          </p:cNvCxnSpPr>
-          <p:nvPr/>
-        </p:nvCxnSpPr>
-        <p:spPr>
-          <a:xfrm flipH="1" flipV="1">
-            <a:off x="6088684" y="2196998"/>
-            <a:ext cx="7316" cy="473050"/>
-          </a:xfrm>
-          <a:prstGeom prst="straightConnector1">
-            <a:avLst/>
-          </a:prstGeom>
-          <a:ln>
-            <a:tailEnd type="triangle"/>
-          </a:ln>
-        </p:spPr>
-        <p:style>
-          <a:lnRef idx="2">
-            <a:schemeClr val="dk1"/>
-          </a:lnRef>
-          <a:fillRef idx="0">
-            <a:schemeClr val="dk1"/>
-          </a:fillRef>
-          <a:effectRef idx="1">
-            <a:schemeClr val="dk1"/>
-          </a:effectRef>
-          <a:fontRef idx="minor">
-            <a:schemeClr val="tx1"/>
-          </a:fontRef>
-        </p:style>
-      </p:cxnSp>
-      <p:cxnSp>
-        <p:nvCxnSpPr>
-          <p:cNvPr id="13" name="Прямая со стрелкой 12">
-            <a:extLst>
-              <a:ext uri="{FF2B5EF4-FFF2-40B4-BE49-F238E27FC236}">
-                <a16:creationId xmlns:a16="http://schemas.microsoft.com/office/drawing/2014/main" id="{FEB5EA88-2926-6A10-799B-93DEAFB596DD}"/>
-              </a:ext>
-            </a:extLst>
-          </p:cNvPr>
-          <p:cNvCxnSpPr>
-            <a:stCxn id="2" idx="6"/>
-            <a:endCxn id="9" idx="2"/>
-          </p:cNvCxnSpPr>
-          <p:nvPr/>
-        </p:nvCxnSpPr>
-        <p:spPr>
-          <a:xfrm flipV="1">
-            <a:off x="7032345" y="3141878"/>
-            <a:ext cx="696162" cy="1"/>
-          </a:xfrm>
-          <a:prstGeom prst="straightConnector1">
-            <a:avLst/>
-          </a:prstGeom>
-          <a:ln>
-            <a:tailEnd type="triangle"/>
-          </a:ln>
-        </p:spPr>
-        <p:style>
-          <a:lnRef idx="2">
-            <a:schemeClr val="dk1"/>
-          </a:lnRef>
-          <a:fillRef idx="0">
-            <a:schemeClr val="dk1"/>
-          </a:fillRef>
-          <a:effectRef idx="1">
-            <a:schemeClr val="dk1"/>
-          </a:effectRef>
-          <a:fontRef idx="minor">
-            <a:schemeClr val="tx1"/>
-          </a:fontRef>
-        </p:style>
-      </p:cxnSp>
-      <p:cxnSp>
-        <p:nvCxnSpPr>
-          <p:cNvPr id="15" name="Прямая со стрелкой 14">
-            <a:extLst>
-              <a:ext uri="{FF2B5EF4-FFF2-40B4-BE49-F238E27FC236}">
-                <a16:creationId xmlns:a16="http://schemas.microsoft.com/office/drawing/2014/main" id="{11507C7C-1B8E-E56A-5F97-33F34A08CB73}"/>
-              </a:ext>
-            </a:extLst>
-          </p:cNvPr>
-          <p:cNvCxnSpPr>
-            <a:stCxn id="2" idx="4"/>
-            <a:endCxn id="8" idx="0"/>
-          </p:cNvCxnSpPr>
-          <p:nvPr/>
-        </p:nvCxnSpPr>
-        <p:spPr>
-          <a:xfrm flipH="1">
-            <a:off x="6095999" y="3613709"/>
-            <a:ext cx="1" cy="607161"/>
-          </a:xfrm>
-          <a:prstGeom prst="straightConnector1">
-            <a:avLst/>
-          </a:prstGeom>
-          <a:ln>
-            <a:tailEnd type="triangle"/>
-          </a:ln>
-        </p:spPr>
-        <p:style>
-          <a:lnRef idx="2">
-            <a:schemeClr val="dk1"/>
-          </a:lnRef>
-          <a:fillRef idx="0">
-            <a:schemeClr val="dk1"/>
-          </a:fillRef>
-          <a:effectRef idx="1">
-            <a:schemeClr val="dk1"/>
-          </a:effectRef>
-          <a:fontRef idx="minor">
-            <a:schemeClr val="tx1"/>
-          </a:fontRef>
-        </p:style>
-      </p:cxnSp>
-      <p:cxnSp>
-        <p:nvCxnSpPr>
-          <p:cNvPr id="17" name="Прямая со стрелкой 16">
-            <a:extLst>
-              <a:ext uri="{FF2B5EF4-FFF2-40B4-BE49-F238E27FC236}">
-                <a16:creationId xmlns:a16="http://schemas.microsoft.com/office/drawing/2014/main" id="{B5851DE7-7D71-B9E1-3345-EF60B4182CF4}"/>
-              </a:ext>
-            </a:extLst>
-          </p:cNvPr>
-          <p:cNvCxnSpPr>
-            <a:stCxn id="2" idx="2"/>
-            <a:endCxn id="7" idx="6"/>
-          </p:cNvCxnSpPr>
-          <p:nvPr/>
-        </p:nvCxnSpPr>
-        <p:spPr>
-          <a:xfrm flipH="1" flipV="1">
-            <a:off x="4463492" y="3141877"/>
-            <a:ext cx="696162" cy="2"/>
-          </a:xfrm>
-          <a:prstGeom prst="straightConnector1">
-            <a:avLst/>
-          </a:prstGeom>
-          <a:ln>
-            <a:tailEnd type="triangle"/>
-          </a:ln>
-        </p:spPr>
-        <p:style>
-          <a:lnRef idx="2">
-            <a:schemeClr val="dk1"/>
-          </a:lnRef>
-          <a:fillRef idx="0">
-            <a:schemeClr val="dk1"/>
-          </a:fillRef>
-          <a:effectRef idx="1">
-            <a:schemeClr val="dk1"/>
-          </a:effectRef>
-          <a:fontRef idx="minor">
-            <a:schemeClr val="tx1"/>
-          </a:fontRef>
-        </p:style>
-      </p:cxnSp>
-      <p:sp>
-        <p:nvSpPr>
-          <p:cNvPr id="18" name="Прямоугольник 17">
-            <a:extLst>
-              <a:ext uri="{FF2B5EF4-FFF2-40B4-BE49-F238E27FC236}">
-                <a16:creationId xmlns:a16="http://schemas.microsoft.com/office/drawing/2014/main" id="{DCEDFE66-AAC1-553D-A9E4-32B26558CAC3}"/>
-              </a:ext>
-            </a:extLst>
-          </p:cNvPr>
-          <p:cNvSpPr/>
-          <p:nvPr/>
-        </p:nvSpPr>
-        <p:spPr>
-          <a:xfrm>
-            <a:off x="960027" y="4092921"/>
-            <a:ext cx="2073752" cy="1364286"/>
-          </a:xfrm>
-          <a:prstGeom prst="rect">
-            <a:avLst/>
-          </a:prstGeom>
-        </p:spPr>
-        <p:style>
-          <a:lnRef idx="2">
-            <a:schemeClr val="dk1"/>
-          </a:lnRef>
-          <a:fillRef idx="1">
-            <a:schemeClr val="lt1"/>
-          </a:fillRef>
-          <a:effectRef idx="0">
-            <a:schemeClr val="dk1"/>
-          </a:effectRef>
-          <a:fontRef idx="minor">
-            <a:schemeClr val="dk1"/>
-          </a:fontRef>
-        </p:style>
-        <p:txBody>
-          <a:bodyPr rtlCol="0" anchor="ctr"/>
-          <a:lstStyle/>
-          <a:p>
-            <a:r>
-              <a:rPr lang="en-US" sz="1400" dirty="0"/>
-              <a:t>1)</a:t>
-            </a:r>
-            <a:r>
-              <a:rPr lang="ru-RU" sz="1400" dirty="0"/>
-              <a:t>Создание заметки</a:t>
-            </a:r>
-          </a:p>
-          <a:p>
-            <a:r>
-              <a:rPr lang="ru-RU" sz="1400" dirty="0"/>
-              <a:t>2) Вывод всех заметок</a:t>
-            </a:r>
-          </a:p>
-          <a:p>
-            <a:r>
-              <a:rPr lang="ru-RU" sz="1400" dirty="0"/>
-              <a:t>3)Редактирование существующей заметки</a:t>
-            </a:r>
-          </a:p>
-          <a:p>
-            <a:r>
-              <a:rPr lang="ru-RU" sz="1400" dirty="0"/>
-              <a:t>4)Удаление заметки</a:t>
-            </a:r>
-          </a:p>
-        </p:txBody>
-      </p:sp>
-      <p:sp>
-        <p:nvSpPr>
-          <p:cNvPr id="19" name="Прямоугольник 18">
-            <a:extLst>
-              <a:ext uri="{FF2B5EF4-FFF2-40B4-BE49-F238E27FC236}">
-                <a16:creationId xmlns:a16="http://schemas.microsoft.com/office/drawing/2014/main" id="{249A689B-8BAD-8920-AF81-33BB9A36DE2A}"/>
-              </a:ext>
-            </a:extLst>
-          </p:cNvPr>
-          <p:cNvSpPr/>
-          <p:nvPr/>
-        </p:nvSpPr>
-        <p:spPr>
-          <a:xfrm>
-            <a:off x="2933700" y="292099"/>
-            <a:ext cx="2351324" cy="1103981"/>
-          </a:xfrm>
-          <a:prstGeom prst="rect">
-            <a:avLst/>
-          </a:prstGeom>
-        </p:spPr>
-        <p:style>
-          <a:lnRef idx="2">
-            <a:schemeClr val="dk1"/>
-          </a:lnRef>
-          <a:fillRef idx="1">
-            <a:schemeClr val="lt1"/>
-          </a:fillRef>
-          <a:effectRef idx="0">
-            <a:schemeClr val="dk1"/>
-          </a:effectRef>
-          <a:fontRef idx="minor">
-            <a:schemeClr val="dk1"/>
-          </a:fontRef>
-        </p:style>
-        <p:txBody>
-          <a:bodyPr rtlCol="0" anchor="ctr"/>
-          <a:lstStyle/>
-          <a:p>
-            <a:pPr marL="342900" indent="-342900">
-              <a:buAutoNum type="arabicParenR"/>
-            </a:pPr>
-            <a:r>
-              <a:rPr lang="ru-RU" sz="1400" dirty="0"/>
-              <a:t>Вход в программу</a:t>
-            </a:r>
-          </a:p>
-          <a:p>
-            <a:pPr marL="342900" indent="-342900">
-              <a:buAutoNum type="arabicParenR"/>
-            </a:pPr>
-            <a:r>
-              <a:rPr lang="ru-RU" sz="1400" dirty="0"/>
-              <a:t>Выход из сессии</a:t>
-            </a:r>
-          </a:p>
-          <a:p>
-            <a:pPr marL="342900" indent="-342900">
-              <a:buAutoNum type="arabicParenR"/>
-            </a:pPr>
-            <a:r>
-              <a:rPr lang="ru-RU" sz="1400" dirty="0"/>
-              <a:t>Вывод списка команд</a:t>
-            </a:r>
-          </a:p>
-          <a:p>
-            <a:pPr marL="342900" indent="-342900">
-              <a:buAutoNum type="arabicParenR"/>
-            </a:pPr>
-            <a:r>
-              <a:rPr lang="ru-RU" sz="1400" dirty="0"/>
-              <a:t>Выход из программы</a:t>
-            </a:r>
-          </a:p>
-        </p:txBody>
-      </p:sp>
-      <p:cxnSp>
-        <p:nvCxnSpPr>
-          <p:cNvPr id="21" name="Прямая со стрелкой 20">
-            <a:extLst>
-              <a:ext uri="{FF2B5EF4-FFF2-40B4-BE49-F238E27FC236}">
-                <a16:creationId xmlns:a16="http://schemas.microsoft.com/office/drawing/2014/main" id="{6FAFE2D3-91BF-5DEC-3F43-A8985A4CAE26}"/>
-              </a:ext>
-            </a:extLst>
-          </p:cNvPr>
-          <p:cNvCxnSpPr>
-            <a:stCxn id="6" idx="1"/>
-            <a:endCxn id="19" idx="3"/>
-          </p:cNvCxnSpPr>
-          <p:nvPr/>
-        </p:nvCxnSpPr>
-        <p:spPr>
-          <a:xfrm flipH="1" flipV="1">
-            <a:off x="5285024" y="844090"/>
-            <a:ext cx="424334" cy="547443"/>
-          </a:xfrm>
-          <a:prstGeom prst="straightConnector1">
-            <a:avLst/>
-          </a:prstGeom>
-          <a:ln>
-            <a:tailEnd type="triangle"/>
-          </a:ln>
-        </p:spPr>
-        <p:style>
-          <a:lnRef idx="2">
-            <a:schemeClr val="dk1"/>
-          </a:lnRef>
-          <a:fillRef idx="0">
-            <a:schemeClr val="dk1"/>
-          </a:fillRef>
-          <a:effectRef idx="1">
-            <a:schemeClr val="dk1"/>
-          </a:effectRef>
-          <a:fontRef idx="minor">
-            <a:schemeClr val="tx1"/>
-          </a:fontRef>
-        </p:style>
-      </p:cxnSp>
-      <p:cxnSp>
-        <p:nvCxnSpPr>
-          <p:cNvPr id="23" name="Прямая со стрелкой 22">
-            <a:extLst>
-              <a:ext uri="{FF2B5EF4-FFF2-40B4-BE49-F238E27FC236}">
-                <a16:creationId xmlns:a16="http://schemas.microsoft.com/office/drawing/2014/main" id="{240A57AE-FDAA-4D66-F2DE-CD0296F156CC}"/>
-              </a:ext>
-            </a:extLst>
-          </p:cNvPr>
-          <p:cNvCxnSpPr>
-            <a:cxnSpLocks/>
-            <a:stCxn id="7" idx="4"/>
-            <a:endCxn id="18" idx="3"/>
-          </p:cNvCxnSpPr>
-          <p:nvPr/>
-        </p:nvCxnSpPr>
-        <p:spPr>
-          <a:xfrm flipH="1">
-            <a:off x="3033779" y="3613707"/>
-            <a:ext cx="893265" cy="1161357"/>
-          </a:xfrm>
-          <a:prstGeom prst="straightConnector1">
-            <a:avLst/>
-          </a:prstGeom>
-          <a:ln>
-            <a:tailEnd type="triangle"/>
-          </a:ln>
-        </p:spPr>
-        <p:style>
-          <a:lnRef idx="2">
-            <a:schemeClr val="dk1"/>
-          </a:lnRef>
-          <a:fillRef idx="0">
-            <a:schemeClr val="dk1"/>
-          </a:fillRef>
-          <a:effectRef idx="1">
-            <a:schemeClr val="dk1"/>
-          </a:effectRef>
-          <a:fontRef idx="minor">
-            <a:schemeClr val="tx1"/>
-          </a:fontRef>
-        </p:style>
-      </p:cxnSp>
-      <p:sp>
-        <p:nvSpPr>
-          <p:cNvPr id="24" name="Прямоугольник 23">
-            <a:extLst>
-              <a:ext uri="{FF2B5EF4-FFF2-40B4-BE49-F238E27FC236}">
-                <a16:creationId xmlns:a16="http://schemas.microsoft.com/office/drawing/2014/main" id="{E668E7EF-40C0-9955-F2B0-B145A012E71A}"/>
-              </a:ext>
-            </a:extLst>
-          </p:cNvPr>
-          <p:cNvSpPr/>
-          <p:nvPr/>
-        </p:nvSpPr>
-        <p:spPr>
-          <a:xfrm>
-            <a:off x="7494420" y="832712"/>
-            <a:ext cx="4194047" cy="1364286"/>
-          </a:xfrm>
-          <a:prstGeom prst="rect">
-            <a:avLst/>
-          </a:prstGeom>
-        </p:spPr>
-        <p:style>
-          <a:lnRef idx="2">
-            <a:schemeClr val="dk1"/>
-          </a:lnRef>
-          <a:fillRef idx="1">
-            <a:schemeClr val="lt1"/>
-          </a:fillRef>
-          <a:effectRef idx="0">
-            <a:schemeClr val="dk1"/>
-          </a:effectRef>
-          <a:fontRef idx="minor">
-            <a:schemeClr val="dk1"/>
-          </a:fontRef>
-        </p:style>
-        <p:txBody>
-          <a:bodyPr rtlCol="0" anchor="ctr"/>
-          <a:lstStyle/>
-          <a:p>
-            <a:pPr marL="342900" indent="-342900">
-              <a:buAutoNum type="arabicParenR"/>
-            </a:pPr>
-            <a:r>
-              <a:rPr lang="ru-RU" sz="1400" dirty="0"/>
-              <a:t>Создание пользователя с определённой ролью</a:t>
-            </a:r>
-          </a:p>
-          <a:p>
-            <a:pPr marL="342900" indent="-342900">
-              <a:buAutoNum type="arabicParenR"/>
-            </a:pPr>
-            <a:r>
-              <a:rPr lang="ru-RU" sz="1400" dirty="0"/>
-              <a:t>Вывод списка пользователей</a:t>
-            </a:r>
-          </a:p>
-          <a:p>
-            <a:pPr marL="342900" indent="-342900">
-              <a:buAutoNum type="arabicParenR"/>
-            </a:pPr>
-            <a:r>
-              <a:rPr lang="ru-RU" sz="1400" dirty="0"/>
-              <a:t>Блокировка учёток пользователей</a:t>
-            </a:r>
-          </a:p>
-          <a:p>
-            <a:pPr marL="342900" indent="-342900">
-              <a:buAutoNum type="arabicParenR"/>
-            </a:pPr>
-            <a:r>
-              <a:rPr lang="ru-RU" sz="1400" dirty="0"/>
-              <a:t>Удаление пользователей</a:t>
-            </a:r>
-          </a:p>
-          <a:p>
-            <a:pPr marL="342900" indent="-342900">
-              <a:buAutoNum type="arabicParenR"/>
-            </a:pPr>
-            <a:r>
-              <a:rPr lang="ru-RU" sz="1400" dirty="0"/>
-              <a:t>Вывод логов системы</a:t>
-            </a:r>
-          </a:p>
-          <a:p>
-            <a:pPr marL="342900" indent="-342900">
-              <a:buAutoNum type="arabicParenR"/>
-            </a:pPr>
-            <a:r>
-              <a:rPr lang="ru-RU" sz="1400" dirty="0"/>
-              <a:t>Запуск обновления</a:t>
-            </a:r>
-          </a:p>
-        </p:txBody>
-      </p:sp>
-      <p:sp>
-        <p:nvSpPr>
-          <p:cNvPr id="25" name="Прямоугольник 24">
-            <a:extLst>
-              <a:ext uri="{FF2B5EF4-FFF2-40B4-BE49-F238E27FC236}">
-                <a16:creationId xmlns:a16="http://schemas.microsoft.com/office/drawing/2014/main" id="{F1F5A985-C700-DD87-AFF3-3909353474B0}"/>
-              </a:ext>
-            </a:extLst>
-          </p:cNvPr>
-          <p:cNvSpPr/>
-          <p:nvPr/>
-        </p:nvSpPr>
-        <p:spPr>
-          <a:xfrm>
-            <a:off x="7637249" y="5090980"/>
-            <a:ext cx="3349190" cy="1364286"/>
-          </a:xfrm>
-          <a:prstGeom prst="rect">
-            <a:avLst/>
-          </a:prstGeom>
-        </p:spPr>
-        <p:style>
-          <a:lnRef idx="2">
-            <a:schemeClr val="dk1"/>
-          </a:lnRef>
-          <a:fillRef idx="1">
-            <a:schemeClr val="lt1"/>
-          </a:fillRef>
-          <a:effectRef idx="0">
-            <a:schemeClr val="dk1"/>
-          </a:effectRef>
-          <a:fontRef idx="minor">
-            <a:schemeClr val="dk1"/>
-          </a:fontRef>
-        </p:style>
-        <p:txBody>
-          <a:bodyPr rtlCol="0" anchor="ctr"/>
-          <a:lstStyle/>
-          <a:p>
-            <a:pPr marL="342900" indent="-342900">
-              <a:buAutoNum type="arabicParenR"/>
-            </a:pPr>
-            <a:r>
-              <a:rPr lang="ru-RU" sz="1400" dirty="0"/>
-              <a:t>Запуск сбора метрик</a:t>
-            </a:r>
-          </a:p>
-          <a:p>
-            <a:pPr marL="342900" indent="-342900">
-              <a:buAutoNum type="arabicParenR"/>
-            </a:pPr>
-            <a:r>
-              <a:rPr lang="ru-RU" sz="1400" dirty="0"/>
-              <a:t>Остановка сбора метрик</a:t>
-            </a:r>
-          </a:p>
-          <a:p>
-            <a:pPr marL="342900" indent="-342900">
-              <a:buAutoNum type="arabicParenR"/>
-            </a:pPr>
-            <a:r>
-              <a:rPr lang="ru-RU" sz="1400" dirty="0"/>
-              <a:t>Изменение интервала сбора данных</a:t>
-            </a:r>
-          </a:p>
-          <a:p>
-            <a:r>
-              <a:rPr lang="ru-RU" sz="1400" dirty="0"/>
-              <a:t>4)     Посмотреть статус сборки</a:t>
-            </a:r>
-          </a:p>
-          <a:p>
-            <a:r>
-              <a:rPr lang="ru-RU" sz="1400" dirty="0"/>
-              <a:t>5)     Вывод списка метрик</a:t>
-            </a:r>
-          </a:p>
-        </p:txBody>
-      </p:sp>
-      <p:cxnSp>
-        <p:nvCxnSpPr>
-          <p:cNvPr id="30" name="Прямая со стрелкой 29">
-            <a:extLst>
-              <a:ext uri="{FF2B5EF4-FFF2-40B4-BE49-F238E27FC236}">
-                <a16:creationId xmlns:a16="http://schemas.microsoft.com/office/drawing/2014/main" id="{9418FBC6-9032-0C12-B660-534AF62E5E94}"/>
-              </a:ext>
-            </a:extLst>
-          </p:cNvPr>
-          <p:cNvCxnSpPr>
-            <a:stCxn id="9" idx="7"/>
-            <a:endCxn id="24" idx="2"/>
-          </p:cNvCxnSpPr>
-          <p:nvPr/>
-        </p:nvCxnSpPr>
-        <p:spPr>
-          <a:xfrm flipV="1">
-            <a:off x="8644281" y="2196998"/>
-            <a:ext cx="947163" cy="611245"/>
-          </a:xfrm>
-          <a:prstGeom prst="straightConnector1">
-            <a:avLst/>
-          </a:prstGeom>
-          <a:ln>
-            <a:tailEnd type="triangle"/>
-          </a:ln>
-        </p:spPr>
-        <p:style>
-          <a:lnRef idx="2">
-            <a:schemeClr val="dk1"/>
-          </a:lnRef>
-          <a:fillRef idx="0">
-            <a:schemeClr val="dk1"/>
-          </a:fillRef>
-          <a:effectRef idx="1">
-            <a:schemeClr val="dk1"/>
-          </a:effectRef>
-          <a:fontRef idx="minor">
-            <a:schemeClr val="tx1"/>
-          </a:fontRef>
-        </p:style>
-      </p:cxnSp>
-      <p:cxnSp>
-        <p:nvCxnSpPr>
-          <p:cNvPr id="32" name="Прямая со стрелкой 31">
-            <a:extLst>
-              <a:ext uri="{FF2B5EF4-FFF2-40B4-BE49-F238E27FC236}">
-                <a16:creationId xmlns:a16="http://schemas.microsoft.com/office/drawing/2014/main" id="{8A508C49-7949-8EA7-8760-114BFE6D0A7C}"/>
-              </a:ext>
-            </a:extLst>
-          </p:cNvPr>
-          <p:cNvCxnSpPr>
-            <a:stCxn id="8" idx="5"/>
-            <a:endCxn id="25" idx="1"/>
-          </p:cNvCxnSpPr>
-          <p:nvPr/>
-        </p:nvCxnSpPr>
-        <p:spPr>
-          <a:xfrm>
-            <a:off x="6475325" y="5026335"/>
-            <a:ext cx="1161924" cy="746788"/>
-          </a:xfrm>
-          <a:prstGeom prst="straightConnector1">
-            <a:avLst/>
-          </a:prstGeom>
-          <a:ln>
-            <a:tailEnd type="triangle"/>
-          </a:ln>
-        </p:spPr>
-        <p:style>
-          <a:lnRef idx="2">
-            <a:schemeClr val="dk1"/>
-          </a:lnRef>
-          <a:fillRef idx="0">
-            <a:schemeClr val="dk1"/>
-          </a:fillRef>
-          <a:effectRef idx="1">
-            <a:schemeClr val="dk1"/>
-          </a:effectRef>
-          <a:fontRef idx="minor">
-            <a:schemeClr val="tx1"/>
-          </a:fontRef>
-        </p:style>
-      </p:cxnSp>
+        </p:grpSpPr>
+        <p:sp>
+          <p:nvSpPr>
+            <p:cNvPr id="2" name="Овал 1">
+              <a:extLst>
+                <a:ext uri="{FF2B5EF4-FFF2-40B4-BE49-F238E27FC236}">
+                  <a16:creationId xmlns:a16="http://schemas.microsoft.com/office/drawing/2014/main" id="{906B369C-D05E-DA97-AB75-879183D56AF4}"/>
+                </a:ext>
+              </a:extLst>
+            </p:cNvPr>
+            <p:cNvSpPr/>
+            <p:nvPr/>
+          </p:nvSpPr>
+          <p:spPr>
+            <a:xfrm>
+              <a:off x="5159654" y="2670048"/>
+              <a:ext cx="1872691" cy="943661"/>
+            </a:xfrm>
+            <a:prstGeom prst="ellipse">
+              <a:avLst/>
+            </a:prstGeom>
+          </p:spPr>
+          <p:style>
+            <a:lnRef idx="2">
+              <a:schemeClr val="dk1"/>
+            </a:lnRef>
+            <a:fillRef idx="1">
+              <a:schemeClr val="lt1"/>
+            </a:fillRef>
+            <a:effectRef idx="0">
+              <a:schemeClr val="dk1"/>
+            </a:effectRef>
+            <a:fontRef idx="minor">
+              <a:schemeClr val="dk1"/>
+            </a:fontRef>
+          </p:style>
+          <p:txBody>
+            <a:bodyPr rtlCol="0" anchor="ctr"/>
+            <a:lstStyle/>
+            <a:p>
+              <a:pPr algn="ctr"/>
+              <a:r>
+                <a:rPr lang="ru-RU" sz="1600" dirty="0">
+                  <a:ln w="0"/>
+                  <a:solidFill>
+                    <a:schemeClr val="tx1"/>
+                  </a:solidFill>
+                  <a:effectLst>
+                    <a:outerShdw blurRad="38100" dist="19050" dir="2700000" algn="tl" rotWithShape="0">
+                      <a:schemeClr val="dk1">
+                        <a:alpha val="40000"/>
+                      </a:schemeClr>
+                    </a:outerShdw>
+                  </a:effectLst>
+                </a:rPr>
+                <a:t>Команды</a:t>
+              </a:r>
+              <a:endParaRPr lang="ru-RU" sz="1600" dirty="0"/>
+            </a:p>
+          </p:txBody>
+        </p:sp>
+        <p:sp>
+          <p:nvSpPr>
+            <p:cNvPr id="6" name="Овал 5">
+              <a:extLst>
+                <a:ext uri="{FF2B5EF4-FFF2-40B4-BE49-F238E27FC236}">
+                  <a16:creationId xmlns:a16="http://schemas.microsoft.com/office/drawing/2014/main" id="{A711FD26-26B8-8FC3-1B0B-DE146F5CF4E3}"/>
+                </a:ext>
+              </a:extLst>
+            </p:cNvPr>
+            <p:cNvSpPr/>
+            <p:nvPr/>
+          </p:nvSpPr>
+          <p:spPr>
+            <a:xfrm>
+              <a:off x="5552236" y="1253337"/>
+              <a:ext cx="1072896" cy="943661"/>
+            </a:xfrm>
+            <a:prstGeom prst="ellipse">
+              <a:avLst/>
+            </a:prstGeom>
+          </p:spPr>
+          <p:style>
+            <a:lnRef idx="2">
+              <a:schemeClr val="dk1"/>
+            </a:lnRef>
+            <a:fillRef idx="1">
+              <a:schemeClr val="lt1"/>
+            </a:fillRef>
+            <a:effectRef idx="0">
+              <a:schemeClr val="dk1"/>
+            </a:effectRef>
+            <a:fontRef idx="minor">
+              <a:schemeClr val="dk1"/>
+            </a:fontRef>
+          </p:style>
+          <p:txBody>
+            <a:bodyPr rtlCol="0" anchor="ctr"/>
+            <a:lstStyle/>
+            <a:p>
+              <a:pPr algn="ctr"/>
+              <a:r>
+                <a:rPr lang="en-US" sz="1600" dirty="0">
+                  <a:ln w="0"/>
+                  <a:solidFill>
+                    <a:schemeClr val="tx1"/>
+                  </a:solidFill>
+                  <a:effectLst>
+                    <a:outerShdw blurRad="38100" dist="19050" dir="2700000" algn="tl" rotWithShape="0">
+                      <a:schemeClr val="dk1">
+                        <a:alpha val="40000"/>
+                      </a:schemeClr>
+                    </a:outerShdw>
+                  </a:effectLst>
+                </a:rPr>
+                <a:t>All</a:t>
+              </a:r>
+              <a:endParaRPr lang="ru-RU" sz="1600" dirty="0"/>
+            </a:p>
+          </p:txBody>
+        </p:sp>
+        <p:sp>
+          <p:nvSpPr>
+            <p:cNvPr id="7" name="Овал 6">
+              <a:extLst>
+                <a:ext uri="{FF2B5EF4-FFF2-40B4-BE49-F238E27FC236}">
+                  <a16:creationId xmlns:a16="http://schemas.microsoft.com/office/drawing/2014/main" id="{3516C54A-B370-56F5-4574-68E7A910A76C}"/>
+                </a:ext>
+              </a:extLst>
+            </p:cNvPr>
+            <p:cNvSpPr/>
+            <p:nvPr/>
+          </p:nvSpPr>
+          <p:spPr>
+            <a:xfrm>
+              <a:off x="3390596" y="2670046"/>
+              <a:ext cx="1072896" cy="943661"/>
+            </a:xfrm>
+            <a:prstGeom prst="ellipse">
+              <a:avLst/>
+            </a:prstGeom>
+          </p:spPr>
+          <p:style>
+            <a:lnRef idx="2">
+              <a:schemeClr val="dk1"/>
+            </a:lnRef>
+            <a:fillRef idx="1">
+              <a:schemeClr val="lt1"/>
+            </a:fillRef>
+            <a:effectRef idx="0">
+              <a:schemeClr val="dk1"/>
+            </a:effectRef>
+            <a:fontRef idx="minor">
+              <a:schemeClr val="dk1"/>
+            </a:fontRef>
+          </p:style>
+          <p:txBody>
+            <a:bodyPr rtlCol="0" anchor="ctr"/>
+            <a:lstStyle/>
+            <a:p>
+              <a:pPr algn="ctr"/>
+              <a:r>
+                <a:rPr lang="en-US" sz="1600" dirty="0">
+                  <a:ln w="0"/>
+                  <a:solidFill>
+                    <a:schemeClr val="tx1"/>
+                  </a:solidFill>
+                  <a:effectLst>
+                    <a:outerShdw blurRad="38100" dist="19050" dir="2700000" algn="tl" rotWithShape="0">
+                      <a:schemeClr val="dk1">
+                        <a:alpha val="40000"/>
+                      </a:schemeClr>
+                    </a:outerShdw>
+                  </a:effectLst>
+                </a:rPr>
+                <a:t>User</a:t>
+              </a:r>
+              <a:endParaRPr lang="ru-RU" sz="1600" dirty="0"/>
+            </a:p>
+          </p:txBody>
+        </p:sp>
+        <p:sp>
+          <p:nvSpPr>
+            <p:cNvPr id="8" name="Овал 7">
+              <a:extLst>
+                <a:ext uri="{FF2B5EF4-FFF2-40B4-BE49-F238E27FC236}">
+                  <a16:creationId xmlns:a16="http://schemas.microsoft.com/office/drawing/2014/main" id="{4B53E917-5FCC-A9A3-ADE8-B642A6DFC134}"/>
+                </a:ext>
+              </a:extLst>
+            </p:cNvPr>
+            <p:cNvSpPr/>
+            <p:nvPr/>
+          </p:nvSpPr>
+          <p:spPr>
+            <a:xfrm>
+              <a:off x="5559551" y="4220870"/>
+              <a:ext cx="1072896" cy="943661"/>
+            </a:xfrm>
+            <a:prstGeom prst="ellipse">
+              <a:avLst/>
+            </a:prstGeom>
+          </p:spPr>
+          <p:style>
+            <a:lnRef idx="2">
+              <a:schemeClr val="dk1"/>
+            </a:lnRef>
+            <a:fillRef idx="1">
+              <a:schemeClr val="lt1"/>
+            </a:fillRef>
+            <a:effectRef idx="0">
+              <a:schemeClr val="dk1"/>
+            </a:effectRef>
+            <a:fontRef idx="minor">
+              <a:schemeClr val="dk1"/>
+            </a:fontRef>
+          </p:style>
+          <p:txBody>
+            <a:bodyPr rtlCol="0" anchor="ctr"/>
+            <a:lstStyle/>
+            <a:p>
+              <a:pPr algn="ctr"/>
+              <a:r>
+                <a:rPr lang="en-US" sz="1050" dirty="0" err="1">
+                  <a:ln w="0"/>
+                  <a:solidFill>
+                    <a:schemeClr val="tx1"/>
+                  </a:solidFill>
+                  <a:effectLst>
+                    <a:outerShdw blurRad="38100" dist="19050" dir="2700000" algn="tl" rotWithShape="0">
+                      <a:schemeClr val="dk1">
+                        <a:alpha val="40000"/>
+                      </a:schemeClr>
+                    </a:outerShdw>
+                  </a:effectLst>
+                </a:rPr>
+                <a:t>WatchDog</a:t>
+              </a:r>
+              <a:endParaRPr lang="ru-RU" sz="1600" dirty="0"/>
+            </a:p>
+          </p:txBody>
+        </p:sp>
+        <p:sp>
+          <p:nvSpPr>
+            <p:cNvPr id="9" name="Овал 8">
+              <a:extLst>
+                <a:ext uri="{FF2B5EF4-FFF2-40B4-BE49-F238E27FC236}">
+                  <a16:creationId xmlns:a16="http://schemas.microsoft.com/office/drawing/2014/main" id="{37519999-932B-8810-DF43-42CFCB58FE65}"/>
+                </a:ext>
+              </a:extLst>
+            </p:cNvPr>
+            <p:cNvSpPr/>
+            <p:nvPr/>
+          </p:nvSpPr>
+          <p:spPr>
+            <a:xfrm>
+              <a:off x="7728507" y="2670047"/>
+              <a:ext cx="1072896" cy="943661"/>
+            </a:xfrm>
+            <a:prstGeom prst="ellipse">
+              <a:avLst/>
+            </a:prstGeom>
+          </p:spPr>
+          <p:style>
+            <a:lnRef idx="2">
+              <a:schemeClr val="dk1"/>
+            </a:lnRef>
+            <a:fillRef idx="1">
+              <a:schemeClr val="lt1"/>
+            </a:fillRef>
+            <a:effectRef idx="0">
+              <a:schemeClr val="dk1"/>
+            </a:effectRef>
+            <a:fontRef idx="minor">
+              <a:schemeClr val="dk1"/>
+            </a:fontRef>
+          </p:style>
+          <p:txBody>
+            <a:bodyPr rtlCol="0" anchor="ctr"/>
+            <a:lstStyle/>
+            <a:p>
+              <a:pPr algn="ctr"/>
+              <a:r>
+                <a:rPr lang="en-US" sz="1600" dirty="0">
+                  <a:ln w="0"/>
+                  <a:solidFill>
+                    <a:schemeClr val="tx1"/>
+                  </a:solidFill>
+                  <a:effectLst>
+                    <a:outerShdw blurRad="38100" dist="19050" dir="2700000" algn="tl" rotWithShape="0">
+                      <a:schemeClr val="dk1">
+                        <a:alpha val="40000"/>
+                      </a:schemeClr>
+                    </a:outerShdw>
+                  </a:effectLst>
+                </a:rPr>
+                <a:t>Admin</a:t>
+              </a:r>
+              <a:endParaRPr lang="ru-RU" sz="1600" dirty="0"/>
+            </a:p>
+          </p:txBody>
+        </p:sp>
+        <p:cxnSp>
+          <p:nvCxnSpPr>
+            <p:cNvPr id="11" name="Прямая со стрелкой 10">
+              <a:extLst>
+                <a:ext uri="{FF2B5EF4-FFF2-40B4-BE49-F238E27FC236}">
+                  <a16:creationId xmlns:a16="http://schemas.microsoft.com/office/drawing/2014/main" id="{167E1656-DFDF-C77A-314F-720A1E19243A}"/>
+                </a:ext>
+              </a:extLst>
+            </p:cNvPr>
+            <p:cNvCxnSpPr>
+              <a:stCxn id="2" idx="0"/>
+              <a:endCxn id="6" idx="4"/>
+            </p:cNvCxnSpPr>
+            <p:nvPr/>
+          </p:nvCxnSpPr>
+          <p:spPr>
+            <a:xfrm flipH="1" flipV="1">
+              <a:off x="6088684" y="2196998"/>
+              <a:ext cx="7316" cy="473050"/>
+            </a:xfrm>
+            <a:prstGeom prst="straightConnector1">
+              <a:avLst/>
+            </a:prstGeom>
+            <a:ln>
+              <a:tailEnd type="triangle"/>
+            </a:ln>
+          </p:spPr>
+          <p:style>
+            <a:lnRef idx="2">
+              <a:schemeClr val="dk1"/>
+            </a:lnRef>
+            <a:fillRef idx="0">
+              <a:schemeClr val="dk1"/>
+            </a:fillRef>
+            <a:effectRef idx="1">
+              <a:schemeClr val="dk1"/>
+            </a:effectRef>
+            <a:fontRef idx="minor">
+              <a:schemeClr val="tx1"/>
+            </a:fontRef>
+          </p:style>
+        </p:cxnSp>
+        <p:cxnSp>
+          <p:nvCxnSpPr>
+            <p:cNvPr id="13" name="Прямая со стрелкой 12">
+              <a:extLst>
+                <a:ext uri="{FF2B5EF4-FFF2-40B4-BE49-F238E27FC236}">
+                  <a16:creationId xmlns:a16="http://schemas.microsoft.com/office/drawing/2014/main" id="{FEB5EA88-2926-6A10-799B-93DEAFB596DD}"/>
+                </a:ext>
+              </a:extLst>
+            </p:cNvPr>
+            <p:cNvCxnSpPr>
+              <a:stCxn id="2" idx="6"/>
+              <a:endCxn id="9" idx="2"/>
+            </p:cNvCxnSpPr>
+            <p:nvPr/>
+          </p:nvCxnSpPr>
+          <p:spPr>
+            <a:xfrm flipV="1">
+              <a:off x="7032345" y="3141878"/>
+              <a:ext cx="696162" cy="1"/>
+            </a:xfrm>
+            <a:prstGeom prst="straightConnector1">
+              <a:avLst/>
+            </a:prstGeom>
+            <a:ln>
+              <a:tailEnd type="triangle"/>
+            </a:ln>
+          </p:spPr>
+          <p:style>
+            <a:lnRef idx="2">
+              <a:schemeClr val="dk1"/>
+            </a:lnRef>
+            <a:fillRef idx="0">
+              <a:schemeClr val="dk1"/>
+            </a:fillRef>
+            <a:effectRef idx="1">
+              <a:schemeClr val="dk1"/>
+            </a:effectRef>
+            <a:fontRef idx="minor">
+              <a:schemeClr val="tx1"/>
+            </a:fontRef>
+          </p:style>
+        </p:cxnSp>
+        <p:cxnSp>
+          <p:nvCxnSpPr>
+            <p:cNvPr id="15" name="Прямая со стрелкой 14">
+              <a:extLst>
+                <a:ext uri="{FF2B5EF4-FFF2-40B4-BE49-F238E27FC236}">
+                  <a16:creationId xmlns:a16="http://schemas.microsoft.com/office/drawing/2014/main" id="{11507C7C-1B8E-E56A-5F97-33F34A08CB73}"/>
+                </a:ext>
+              </a:extLst>
+            </p:cNvPr>
+            <p:cNvCxnSpPr>
+              <a:stCxn id="2" idx="4"/>
+              <a:endCxn id="8" idx="0"/>
+            </p:cNvCxnSpPr>
+            <p:nvPr/>
+          </p:nvCxnSpPr>
+          <p:spPr>
+            <a:xfrm flipH="1">
+              <a:off x="6095999" y="3613709"/>
+              <a:ext cx="1" cy="607161"/>
+            </a:xfrm>
+            <a:prstGeom prst="straightConnector1">
+              <a:avLst/>
+            </a:prstGeom>
+            <a:ln>
+              <a:tailEnd type="triangle"/>
+            </a:ln>
+          </p:spPr>
+          <p:style>
+            <a:lnRef idx="2">
+              <a:schemeClr val="dk1"/>
+            </a:lnRef>
+            <a:fillRef idx="0">
+              <a:schemeClr val="dk1"/>
+            </a:fillRef>
+            <a:effectRef idx="1">
+              <a:schemeClr val="dk1"/>
+            </a:effectRef>
+            <a:fontRef idx="minor">
+              <a:schemeClr val="tx1"/>
+            </a:fontRef>
+          </p:style>
+        </p:cxnSp>
+        <p:cxnSp>
+          <p:nvCxnSpPr>
+            <p:cNvPr id="17" name="Прямая со стрелкой 16">
+              <a:extLst>
+                <a:ext uri="{FF2B5EF4-FFF2-40B4-BE49-F238E27FC236}">
+                  <a16:creationId xmlns:a16="http://schemas.microsoft.com/office/drawing/2014/main" id="{B5851DE7-7D71-B9E1-3345-EF60B4182CF4}"/>
+                </a:ext>
+              </a:extLst>
+            </p:cNvPr>
+            <p:cNvCxnSpPr>
+              <a:stCxn id="2" idx="2"/>
+              <a:endCxn id="7" idx="6"/>
+            </p:cNvCxnSpPr>
+            <p:nvPr/>
+          </p:nvCxnSpPr>
+          <p:spPr>
+            <a:xfrm flipH="1" flipV="1">
+              <a:off x="4463492" y="3141877"/>
+              <a:ext cx="696162" cy="2"/>
+            </a:xfrm>
+            <a:prstGeom prst="straightConnector1">
+              <a:avLst/>
+            </a:prstGeom>
+            <a:ln>
+              <a:tailEnd type="triangle"/>
+            </a:ln>
+          </p:spPr>
+          <p:style>
+            <a:lnRef idx="2">
+              <a:schemeClr val="dk1"/>
+            </a:lnRef>
+            <a:fillRef idx="0">
+              <a:schemeClr val="dk1"/>
+            </a:fillRef>
+            <a:effectRef idx="1">
+              <a:schemeClr val="dk1"/>
+            </a:effectRef>
+            <a:fontRef idx="minor">
+              <a:schemeClr val="tx1"/>
+            </a:fontRef>
+          </p:style>
+        </p:cxnSp>
+        <p:grpSp>
+          <p:nvGrpSpPr>
+            <p:cNvPr id="44" name="Группа 43">
+              <a:extLst>
+                <a:ext uri="{FF2B5EF4-FFF2-40B4-BE49-F238E27FC236}">
+                  <a16:creationId xmlns:a16="http://schemas.microsoft.com/office/drawing/2014/main" id="{04078E4B-7F88-A263-DC07-AE631C5A45DF}"/>
+                </a:ext>
+              </a:extLst>
+            </p:cNvPr>
+            <p:cNvGrpSpPr/>
+            <p:nvPr/>
+          </p:nvGrpSpPr>
+          <p:grpSpPr>
+            <a:xfrm>
+              <a:off x="2735887" y="185644"/>
+              <a:ext cx="1805753" cy="438912"/>
+              <a:chOff x="3132765" y="185644"/>
+              <a:chExt cx="1408875" cy="438912"/>
+            </a:xfrm>
+          </p:grpSpPr>
+          <p:sp>
+            <p:nvSpPr>
+              <p:cNvPr id="43" name="Прямоугольник 42">
+                <a:extLst>
+                  <a:ext uri="{FF2B5EF4-FFF2-40B4-BE49-F238E27FC236}">
+                    <a16:creationId xmlns:a16="http://schemas.microsoft.com/office/drawing/2014/main" id="{195506E6-BF12-01C1-CB89-6832786BB1DA}"/>
+                  </a:ext>
+                </a:extLst>
+              </p:cNvPr>
+              <p:cNvSpPr/>
+              <p:nvPr/>
+            </p:nvSpPr>
+            <p:spPr>
+              <a:xfrm>
+                <a:off x="3132765" y="185644"/>
+                <a:ext cx="1330727" cy="438912"/>
+              </a:xfrm>
+              <a:prstGeom prst="rect">
+                <a:avLst/>
+              </a:prstGeom>
+            </p:spPr>
+            <p:style>
+              <a:lnRef idx="2">
+                <a:schemeClr val="dk1"/>
+              </a:lnRef>
+              <a:fillRef idx="1">
+                <a:schemeClr val="lt1"/>
+              </a:fillRef>
+              <a:effectRef idx="0">
+                <a:schemeClr val="dk1"/>
+              </a:effectRef>
+              <a:fontRef idx="minor">
+                <a:schemeClr val="dk1"/>
+              </a:fontRef>
+            </p:style>
+            <p:txBody>
+              <a:bodyPr rtlCol="0" anchor="ctr"/>
+              <a:lstStyle/>
+              <a:p>
+                <a:pPr algn="ctr"/>
+                <a:endParaRPr lang="ru-RU"/>
+              </a:p>
+            </p:txBody>
+          </p:sp>
+          <p:sp>
+            <p:nvSpPr>
+              <p:cNvPr id="28" name="TextBox 27">
+                <a:extLst>
+                  <a:ext uri="{FF2B5EF4-FFF2-40B4-BE49-F238E27FC236}">
+                    <a16:creationId xmlns:a16="http://schemas.microsoft.com/office/drawing/2014/main" id="{8ACEBD97-8120-FB53-FFB3-D864E51A8293}"/>
+                  </a:ext>
+                </a:extLst>
+              </p:cNvPr>
+              <p:cNvSpPr txBox="1"/>
+              <p:nvPr/>
+            </p:nvSpPr>
+            <p:spPr>
+              <a:xfrm>
+                <a:off x="3132765" y="266601"/>
+                <a:ext cx="1408875" cy="276999"/>
+              </a:xfrm>
+              <a:prstGeom prst="rect">
+                <a:avLst/>
+              </a:prstGeom>
+              <a:noFill/>
+            </p:spPr>
+            <p:txBody>
+              <a:bodyPr wrap="square" rtlCol="0">
+                <a:spAutoFit/>
+              </a:bodyPr>
+              <a:lstStyle/>
+              <a:p>
+                <a:pPr algn="ctr"/>
+                <a:r>
+                  <a:rPr lang="ru-RU" sz="1200" dirty="0"/>
+                  <a:t>Вход в программу</a:t>
+                </a:r>
+              </a:p>
+            </p:txBody>
+          </p:sp>
+        </p:grpSp>
+        <p:grpSp>
+          <p:nvGrpSpPr>
+            <p:cNvPr id="45" name="Группа 44">
+              <a:extLst>
+                <a:ext uri="{FF2B5EF4-FFF2-40B4-BE49-F238E27FC236}">
+                  <a16:creationId xmlns:a16="http://schemas.microsoft.com/office/drawing/2014/main" id="{B0BB8745-C723-E689-CD51-75723BFEF544}"/>
+                </a:ext>
+              </a:extLst>
+            </p:cNvPr>
+            <p:cNvGrpSpPr/>
+            <p:nvPr/>
+          </p:nvGrpSpPr>
+          <p:grpSpPr>
+            <a:xfrm>
+              <a:off x="2735887" y="712540"/>
+              <a:ext cx="1805753" cy="438912"/>
+              <a:chOff x="3132765" y="185644"/>
+              <a:chExt cx="1408875" cy="438912"/>
+            </a:xfrm>
+          </p:grpSpPr>
+          <p:sp>
+            <p:nvSpPr>
+              <p:cNvPr id="46" name="Прямоугольник 45">
+                <a:extLst>
+                  <a:ext uri="{FF2B5EF4-FFF2-40B4-BE49-F238E27FC236}">
+                    <a16:creationId xmlns:a16="http://schemas.microsoft.com/office/drawing/2014/main" id="{FBC59D71-2BC8-BFCF-B1BD-4C2235CEDED6}"/>
+                  </a:ext>
+                </a:extLst>
+              </p:cNvPr>
+              <p:cNvSpPr/>
+              <p:nvPr/>
+            </p:nvSpPr>
+            <p:spPr>
+              <a:xfrm>
+                <a:off x="3132765" y="185644"/>
+                <a:ext cx="1330727" cy="438912"/>
+              </a:xfrm>
+              <a:prstGeom prst="rect">
+                <a:avLst/>
+              </a:prstGeom>
+            </p:spPr>
+            <p:style>
+              <a:lnRef idx="2">
+                <a:schemeClr val="dk1"/>
+              </a:lnRef>
+              <a:fillRef idx="1">
+                <a:schemeClr val="lt1"/>
+              </a:fillRef>
+              <a:effectRef idx="0">
+                <a:schemeClr val="dk1"/>
+              </a:effectRef>
+              <a:fontRef idx="minor">
+                <a:schemeClr val="dk1"/>
+              </a:fontRef>
+            </p:style>
+            <p:txBody>
+              <a:bodyPr rtlCol="0" anchor="ctr"/>
+              <a:lstStyle/>
+              <a:p>
+                <a:pPr algn="ctr"/>
+                <a:endParaRPr lang="ru-RU"/>
+              </a:p>
+            </p:txBody>
+          </p:sp>
+          <p:sp>
+            <p:nvSpPr>
+              <p:cNvPr id="47" name="TextBox 46">
+                <a:extLst>
+                  <a:ext uri="{FF2B5EF4-FFF2-40B4-BE49-F238E27FC236}">
+                    <a16:creationId xmlns:a16="http://schemas.microsoft.com/office/drawing/2014/main" id="{E8D7B7E7-6844-5DB7-9E58-515FE0799CB2}"/>
+                  </a:ext>
+                </a:extLst>
+              </p:cNvPr>
+              <p:cNvSpPr txBox="1"/>
+              <p:nvPr/>
+            </p:nvSpPr>
+            <p:spPr>
+              <a:xfrm>
+                <a:off x="3132765" y="266601"/>
+                <a:ext cx="1408875" cy="276999"/>
+              </a:xfrm>
+              <a:prstGeom prst="rect">
+                <a:avLst/>
+              </a:prstGeom>
+              <a:noFill/>
+            </p:spPr>
+            <p:txBody>
+              <a:bodyPr wrap="square" rtlCol="0">
+                <a:spAutoFit/>
+              </a:bodyPr>
+              <a:lstStyle/>
+              <a:p>
+                <a:pPr algn="ctr"/>
+                <a:r>
+                  <a:rPr lang="ru-RU" sz="1200" dirty="0"/>
+                  <a:t>Выход из сессии</a:t>
+                </a:r>
+              </a:p>
+            </p:txBody>
+          </p:sp>
+        </p:grpSp>
+        <p:grpSp>
+          <p:nvGrpSpPr>
+            <p:cNvPr id="48" name="Группа 47">
+              <a:extLst>
+                <a:ext uri="{FF2B5EF4-FFF2-40B4-BE49-F238E27FC236}">
+                  <a16:creationId xmlns:a16="http://schemas.microsoft.com/office/drawing/2014/main" id="{906D28DC-E277-B40A-66D1-647FC8B9BBED}"/>
+                </a:ext>
+              </a:extLst>
+            </p:cNvPr>
+            <p:cNvGrpSpPr/>
+            <p:nvPr/>
+          </p:nvGrpSpPr>
+          <p:grpSpPr>
+            <a:xfrm>
+              <a:off x="2735885" y="1231677"/>
+              <a:ext cx="1805753" cy="438912"/>
+              <a:chOff x="3132765" y="185644"/>
+              <a:chExt cx="1666007" cy="438912"/>
+            </a:xfrm>
+          </p:grpSpPr>
+          <p:sp>
+            <p:nvSpPr>
+              <p:cNvPr id="49" name="Прямоугольник 48">
+                <a:extLst>
+                  <a:ext uri="{FF2B5EF4-FFF2-40B4-BE49-F238E27FC236}">
+                    <a16:creationId xmlns:a16="http://schemas.microsoft.com/office/drawing/2014/main" id="{CA7670B2-DAC8-E449-2CF8-59E5022D0093}"/>
+                  </a:ext>
+                </a:extLst>
+              </p:cNvPr>
+              <p:cNvSpPr/>
+              <p:nvPr/>
+            </p:nvSpPr>
+            <p:spPr>
+              <a:xfrm>
+                <a:off x="3132765" y="185644"/>
+                <a:ext cx="1564817" cy="438912"/>
+              </a:xfrm>
+              <a:prstGeom prst="rect">
+                <a:avLst/>
+              </a:prstGeom>
+            </p:spPr>
+            <p:style>
+              <a:lnRef idx="2">
+                <a:schemeClr val="dk1"/>
+              </a:lnRef>
+              <a:fillRef idx="1">
+                <a:schemeClr val="lt1"/>
+              </a:fillRef>
+              <a:effectRef idx="0">
+                <a:schemeClr val="dk1"/>
+              </a:effectRef>
+              <a:fontRef idx="minor">
+                <a:schemeClr val="dk1"/>
+              </a:fontRef>
+            </p:style>
+            <p:txBody>
+              <a:bodyPr rtlCol="0" anchor="ctr"/>
+              <a:lstStyle/>
+              <a:p>
+                <a:pPr algn="ctr"/>
+                <a:endParaRPr lang="ru-RU"/>
+              </a:p>
+            </p:txBody>
+          </p:sp>
+          <p:sp>
+            <p:nvSpPr>
+              <p:cNvPr id="50" name="TextBox 49">
+                <a:extLst>
+                  <a:ext uri="{FF2B5EF4-FFF2-40B4-BE49-F238E27FC236}">
+                    <a16:creationId xmlns:a16="http://schemas.microsoft.com/office/drawing/2014/main" id="{F96F22FA-DD45-B5CA-3948-FD8DFF8B84D7}"/>
+                  </a:ext>
+                </a:extLst>
+              </p:cNvPr>
+              <p:cNvSpPr txBox="1"/>
+              <p:nvPr/>
+            </p:nvSpPr>
+            <p:spPr>
+              <a:xfrm>
+                <a:off x="3132765" y="266601"/>
+                <a:ext cx="1666007" cy="276999"/>
+              </a:xfrm>
+              <a:prstGeom prst="rect">
+                <a:avLst/>
+              </a:prstGeom>
+              <a:noFill/>
+            </p:spPr>
+            <p:txBody>
+              <a:bodyPr wrap="square" rtlCol="0">
+                <a:spAutoFit/>
+              </a:bodyPr>
+              <a:lstStyle/>
+              <a:p>
+                <a:pPr algn="ctr"/>
+                <a:r>
+                  <a:rPr lang="ru-RU" sz="1200" dirty="0"/>
+                  <a:t>Вывод списка команд</a:t>
+                </a:r>
+              </a:p>
+            </p:txBody>
+          </p:sp>
+        </p:grpSp>
+        <p:grpSp>
+          <p:nvGrpSpPr>
+            <p:cNvPr id="51" name="Группа 50">
+              <a:extLst>
+                <a:ext uri="{FF2B5EF4-FFF2-40B4-BE49-F238E27FC236}">
+                  <a16:creationId xmlns:a16="http://schemas.microsoft.com/office/drawing/2014/main" id="{564AE370-E95B-07D7-102A-B73FA5C6DEFB}"/>
+                </a:ext>
+              </a:extLst>
+            </p:cNvPr>
+            <p:cNvGrpSpPr/>
+            <p:nvPr/>
+          </p:nvGrpSpPr>
+          <p:grpSpPr>
+            <a:xfrm>
+              <a:off x="2735885" y="1750815"/>
+              <a:ext cx="1805753" cy="438912"/>
+              <a:chOff x="3132765" y="185644"/>
+              <a:chExt cx="1408875" cy="438912"/>
+            </a:xfrm>
+          </p:grpSpPr>
+          <p:sp>
+            <p:nvSpPr>
+              <p:cNvPr id="52" name="Прямоугольник 51">
+                <a:extLst>
+                  <a:ext uri="{FF2B5EF4-FFF2-40B4-BE49-F238E27FC236}">
+                    <a16:creationId xmlns:a16="http://schemas.microsoft.com/office/drawing/2014/main" id="{E668141D-2422-1762-51CF-B3D9D1DC16DB}"/>
+                  </a:ext>
+                </a:extLst>
+              </p:cNvPr>
+              <p:cNvSpPr/>
+              <p:nvPr/>
+            </p:nvSpPr>
+            <p:spPr>
+              <a:xfrm>
+                <a:off x="3132765" y="185644"/>
+                <a:ext cx="1330727" cy="438912"/>
+              </a:xfrm>
+              <a:prstGeom prst="rect">
+                <a:avLst/>
+              </a:prstGeom>
+            </p:spPr>
+            <p:style>
+              <a:lnRef idx="2">
+                <a:schemeClr val="dk1"/>
+              </a:lnRef>
+              <a:fillRef idx="1">
+                <a:schemeClr val="lt1"/>
+              </a:fillRef>
+              <a:effectRef idx="0">
+                <a:schemeClr val="dk1"/>
+              </a:effectRef>
+              <a:fontRef idx="minor">
+                <a:schemeClr val="dk1"/>
+              </a:fontRef>
+            </p:style>
+            <p:txBody>
+              <a:bodyPr rtlCol="0" anchor="ctr"/>
+              <a:lstStyle/>
+              <a:p>
+                <a:pPr algn="ctr"/>
+                <a:endParaRPr lang="ru-RU"/>
+              </a:p>
+            </p:txBody>
+          </p:sp>
+          <p:sp>
+            <p:nvSpPr>
+              <p:cNvPr id="53" name="TextBox 52">
+                <a:extLst>
+                  <a:ext uri="{FF2B5EF4-FFF2-40B4-BE49-F238E27FC236}">
+                    <a16:creationId xmlns:a16="http://schemas.microsoft.com/office/drawing/2014/main" id="{D06C980A-3BFC-CFFB-B649-31BE4B3DCFA4}"/>
+                  </a:ext>
+                </a:extLst>
+              </p:cNvPr>
+              <p:cNvSpPr txBox="1"/>
+              <p:nvPr/>
+            </p:nvSpPr>
+            <p:spPr>
+              <a:xfrm>
+                <a:off x="3132765" y="266601"/>
+                <a:ext cx="1408875" cy="276999"/>
+              </a:xfrm>
+              <a:prstGeom prst="rect">
+                <a:avLst/>
+              </a:prstGeom>
+              <a:noFill/>
+            </p:spPr>
+            <p:txBody>
+              <a:bodyPr wrap="square" rtlCol="0">
+                <a:spAutoFit/>
+              </a:bodyPr>
+              <a:lstStyle/>
+              <a:p>
+                <a:pPr algn="ctr"/>
+                <a:r>
+                  <a:rPr lang="ru-RU" sz="1200" dirty="0"/>
+                  <a:t>Выход из программы</a:t>
+                </a:r>
+              </a:p>
+            </p:txBody>
+          </p:sp>
+        </p:grpSp>
+        <p:cxnSp>
+          <p:nvCxnSpPr>
+            <p:cNvPr id="55" name="Прямая со стрелкой 54">
+              <a:extLst>
+                <a:ext uri="{FF2B5EF4-FFF2-40B4-BE49-F238E27FC236}">
+                  <a16:creationId xmlns:a16="http://schemas.microsoft.com/office/drawing/2014/main" id="{04F98EB0-A464-B94E-60BD-E2867536AE15}"/>
+                </a:ext>
+              </a:extLst>
+            </p:cNvPr>
+            <p:cNvCxnSpPr>
+              <a:cxnSpLocks/>
+              <a:stCxn id="6" idx="1"/>
+            </p:cNvCxnSpPr>
+            <p:nvPr/>
+          </p:nvCxnSpPr>
+          <p:spPr>
+            <a:xfrm flipH="1" flipV="1">
+              <a:off x="4431960" y="447872"/>
+              <a:ext cx="1277398" cy="943661"/>
+            </a:xfrm>
+            <a:prstGeom prst="straightConnector1">
+              <a:avLst/>
+            </a:prstGeom>
+            <a:ln>
+              <a:tailEnd type="triangle"/>
+            </a:ln>
+          </p:spPr>
+          <p:style>
+            <a:lnRef idx="1">
+              <a:schemeClr val="dk1"/>
+            </a:lnRef>
+            <a:fillRef idx="0">
+              <a:schemeClr val="dk1"/>
+            </a:fillRef>
+            <a:effectRef idx="0">
+              <a:schemeClr val="dk1"/>
+            </a:effectRef>
+            <a:fontRef idx="minor">
+              <a:schemeClr val="tx1"/>
+            </a:fontRef>
+          </p:style>
+        </p:cxnSp>
+        <p:cxnSp>
+          <p:nvCxnSpPr>
+            <p:cNvPr id="58" name="Прямая со стрелкой 57">
+              <a:extLst>
+                <a:ext uri="{FF2B5EF4-FFF2-40B4-BE49-F238E27FC236}">
+                  <a16:creationId xmlns:a16="http://schemas.microsoft.com/office/drawing/2014/main" id="{94831B9A-36D6-C249-0113-66F0BC04D291}"/>
+                </a:ext>
+              </a:extLst>
+            </p:cNvPr>
+            <p:cNvCxnSpPr>
+              <a:stCxn id="6" idx="1"/>
+            </p:cNvCxnSpPr>
+            <p:nvPr/>
+          </p:nvCxnSpPr>
+          <p:spPr>
+            <a:xfrm flipH="1" flipV="1">
+              <a:off x="4431960" y="929030"/>
+              <a:ext cx="1277398" cy="462503"/>
+            </a:xfrm>
+            <a:prstGeom prst="straightConnector1">
+              <a:avLst/>
+            </a:prstGeom>
+            <a:ln>
+              <a:tailEnd type="triangle"/>
+            </a:ln>
+          </p:spPr>
+          <p:style>
+            <a:lnRef idx="1">
+              <a:schemeClr val="dk1"/>
+            </a:lnRef>
+            <a:fillRef idx="0">
+              <a:schemeClr val="dk1"/>
+            </a:fillRef>
+            <a:effectRef idx="0">
+              <a:schemeClr val="dk1"/>
+            </a:effectRef>
+            <a:fontRef idx="minor">
+              <a:schemeClr val="tx1"/>
+            </a:fontRef>
+          </p:style>
+        </p:cxnSp>
+        <p:cxnSp>
+          <p:nvCxnSpPr>
+            <p:cNvPr id="60" name="Прямая со стрелкой 59">
+              <a:extLst>
+                <a:ext uri="{FF2B5EF4-FFF2-40B4-BE49-F238E27FC236}">
+                  <a16:creationId xmlns:a16="http://schemas.microsoft.com/office/drawing/2014/main" id="{2EAD57E1-D808-E54E-300A-143B463D3678}"/>
+                </a:ext>
+              </a:extLst>
+            </p:cNvPr>
+            <p:cNvCxnSpPr>
+              <a:stCxn id="6" idx="1"/>
+            </p:cNvCxnSpPr>
+            <p:nvPr/>
+          </p:nvCxnSpPr>
+          <p:spPr>
+            <a:xfrm flipH="1">
+              <a:off x="4431960" y="1391533"/>
+              <a:ext cx="1277398" cy="71507"/>
+            </a:xfrm>
+            <a:prstGeom prst="straightConnector1">
+              <a:avLst/>
+            </a:prstGeom>
+            <a:ln>
+              <a:tailEnd type="triangle"/>
+            </a:ln>
+          </p:spPr>
+          <p:style>
+            <a:lnRef idx="1">
+              <a:schemeClr val="dk1"/>
+            </a:lnRef>
+            <a:fillRef idx="0">
+              <a:schemeClr val="dk1"/>
+            </a:fillRef>
+            <a:effectRef idx="0">
+              <a:schemeClr val="dk1"/>
+            </a:effectRef>
+            <a:fontRef idx="minor">
+              <a:schemeClr val="tx1"/>
+            </a:fontRef>
+          </p:style>
+        </p:cxnSp>
+        <p:cxnSp>
+          <p:nvCxnSpPr>
+            <p:cNvPr id="62" name="Прямая со стрелкой 61">
+              <a:extLst>
+                <a:ext uri="{FF2B5EF4-FFF2-40B4-BE49-F238E27FC236}">
+                  <a16:creationId xmlns:a16="http://schemas.microsoft.com/office/drawing/2014/main" id="{F5B234B3-E566-9314-6481-F2EE561838EF}"/>
+                </a:ext>
+              </a:extLst>
+            </p:cNvPr>
+            <p:cNvCxnSpPr>
+              <a:stCxn id="6" idx="1"/>
+            </p:cNvCxnSpPr>
+            <p:nvPr/>
+          </p:nvCxnSpPr>
+          <p:spPr>
+            <a:xfrm flipH="1">
+              <a:off x="4431960" y="1391533"/>
+              <a:ext cx="1277398" cy="576256"/>
+            </a:xfrm>
+            <a:prstGeom prst="straightConnector1">
+              <a:avLst/>
+            </a:prstGeom>
+            <a:ln>
+              <a:tailEnd type="triangle"/>
+            </a:ln>
+          </p:spPr>
+          <p:style>
+            <a:lnRef idx="1">
+              <a:schemeClr val="dk1"/>
+            </a:lnRef>
+            <a:fillRef idx="0">
+              <a:schemeClr val="dk1"/>
+            </a:fillRef>
+            <a:effectRef idx="0">
+              <a:schemeClr val="dk1"/>
+            </a:effectRef>
+            <a:fontRef idx="minor">
+              <a:schemeClr val="tx1"/>
+            </a:fontRef>
+          </p:style>
+        </p:cxnSp>
+        <p:grpSp>
+          <p:nvGrpSpPr>
+            <p:cNvPr id="63" name="Группа 62">
+              <a:extLst>
+                <a:ext uri="{FF2B5EF4-FFF2-40B4-BE49-F238E27FC236}">
+                  <a16:creationId xmlns:a16="http://schemas.microsoft.com/office/drawing/2014/main" id="{08111E10-5F2E-93F3-8216-2D66DB0F5C10}"/>
+                </a:ext>
+              </a:extLst>
+            </p:cNvPr>
+            <p:cNvGrpSpPr/>
+            <p:nvPr/>
+          </p:nvGrpSpPr>
+          <p:grpSpPr>
+            <a:xfrm>
+              <a:off x="484127" y="2296902"/>
+              <a:ext cx="1705591" cy="438912"/>
+              <a:chOff x="3132765" y="185644"/>
+              <a:chExt cx="1330727" cy="438912"/>
+            </a:xfrm>
+          </p:grpSpPr>
+          <p:sp>
+            <p:nvSpPr>
+              <p:cNvPr id="64" name="Прямоугольник 63">
+                <a:extLst>
+                  <a:ext uri="{FF2B5EF4-FFF2-40B4-BE49-F238E27FC236}">
+                    <a16:creationId xmlns:a16="http://schemas.microsoft.com/office/drawing/2014/main" id="{16B2FBF9-7E33-B807-2B8B-65CB5EBB0BAE}"/>
+                  </a:ext>
+                </a:extLst>
+              </p:cNvPr>
+              <p:cNvSpPr/>
+              <p:nvPr/>
+            </p:nvSpPr>
+            <p:spPr>
+              <a:xfrm>
+                <a:off x="3132765" y="185644"/>
+                <a:ext cx="1330727" cy="438912"/>
+              </a:xfrm>
+              <a:prstGeom prst="rect">
+                <a:avLst/>
+              </a:prstGeom>
+            </p:spPr>
+            <p:style>
+              <a:lnRef idx="2">
+                <a:schemeClr val="dk1"/>
+              </a:lnRef>
+              <a:fillRef idx="1">
+                <a:schemeClr val="lt1"/>
+              </a:fillRef>
+              <a:effectRef idx="0">
+                <a:schemeClr val="dk1"/>
+              </a:effectRef>
+              <a:fontRef idx="minor">
+                <a:schemeClr val="dk1"/>
+              </a:fontRef>
+            </p:style>
+            <p:txBody>
+              <a:bodyPr rtlCol="0" anchor="ctr"/>
+              <a:lstStyle/>
+              <a:p>
+                <a:pPr algn="ctr"/>
+                <a:endParaRPr lang="ru-RU"/>
+              </a:p>
+            </p:txBody>
+          </p:sp>
+          <p:sp>
+            <p:nvSpPr>
+              <p:cNvPr id="65" name="TextBox 64">
+                <a:extLst>
+                  <a:ext uri="{FF2B5EF4-FFF2-40B4-BE49-F238E27FC236}">
+                    <a16:creationId xmlns:a16="http://schemas.microsoft.com/office/drawing/2014/main" id="{36ED46B9-417D-DC87-D315-8309DF1339D9}"/>
+                  </a:ext>
+                </a:extLst>
+              </p:cNvPr>
+              <p:cNvSpPr txBox="1"/>
+              <p:nvPr/>
+            </p:nvSpPr>
+            <p:spPr>
+              <a:xfrm>
+                <a:off x="3132765" y="266601"/>
+                <a:ext cx="1323301" cy="284757"/>
+              </a:xfrm>
+              <a:prstGeom prst="rect">
+                <a:avLst/>
+              </a:prstGeom>
+              <a:noFill/>
+            </p:spPr>
+            <p:txBody>
+              <a:bodyPr wrap="square" rtlCol="0">
+                <a:spAutoFit/>
+              </a:bodyPr>
+              <a:lstStyle/>
+              <a:p>
+                <a:pPr algn="ctr"/>
+                <a:r>
+                  <a:rPr lang="ru-RU" sz="1200" dirty="0"/>
+                  <a:t>Создание заметки</a:t>
+                </a:r>
+              </a:p>
+            </p:txBody>
+          </p:sp>
+        </p:grpSp>
+        <p:grpSp>
+          <p:nvGrpSpPr>
+            <p:cNvPr id="66" name="Группа 65">
+              <a:extLst>
+                <a:ext uri="{FF2B5EF4-FFF2-40B4-BE49-F238E27FC236}">
+                  <a16:creationId xmlns:a16="http://schemas.microsoft.com/office/drawing/2014/main" id="{24A98C34-92C7-8A4A-914A-5D67B4F8C36C}"/>
+                </a:ext>
+              </a:extLst>
+            </p:cNvPr>
+            <p:cNvGrpSpPr/>
+            <p:nvPr/>
+          </p:nvGrpSpPr>
+          <p:grpSpPr>
+            <a:xfrm>
+              <a:off x="484127" y="2823798"/>
+              <a:ext cx="1705591" cy="438912"/>
+              <a:chOff x="3132765" y="185644"/>
+              <a:chExt cx="1330727" cy="438912"/>
+            </a:xfrm>
+          </p:grpSpPr>
+          <p:sp>
+            <p:nvSpPr>
+              <p:cNvPr id="67" name="Прямоугольник 66">
+                <a:extLst>
+                  <a:ext uri="{FF2B5EF4-FFF2-40B4-BE49-F238E27FC236}">
+                    <a16:creationId xmlns:a16="http://schemas.microsoft.com/office/drawing/2014/main" id="{89FDC152-2BEC-F1C4-FFCE-74EE18753D00}"/>
+                  </a:ext>
+                </a:extLst>
+              </p:cNvPr>
+              <p:cNvSpPr/>
+              <p:nvPr/>
+            </p:nvSpPr>
+            <p:spPr>
+              <a:xfrm>
+                <a:off x="3132765" y="185644"/>
+                <a:ext cx="1330727" cy="438912"/>
+              </a:xfrm>
+              <a:prstGeom prst="rect">
+                <a:avLst/>
+              </a:prstGeom>
+            </p:spPr>
+            <p:style>
+              <a:lnRef idx="2">
+                <a:schemeClr val="dk1"/>
+              </a:lnRef>
+              <a:fillRef idx="1">
+                <a:schemeClr val="lt1"/>
+              </a:fillRef>
+              <a:effectRef idx="0">
+                <a:schemeClr val="dk1"/>
+              </a:effectRef>
+              <a:fontRef idx="minor">
+                <a:schemeClr val="dk1"/>
+              </a:fontRef>
+            </p:style>
+            <p:txBody>
+              <a:bodyPr rtlCol="0" anchor="ctr"/>
+              <a:lstStyle/>
+              <a:p>
+                <a:pPr algn="ctr"/>
+                <a:endParaRPr lang="ru-RU"/>
+              </a:p>
+            </p:txBody>
+          </p:sp>
+          <p:sp>
+            <p:nvSpPr>
+              <p:cNvPr id="68" name="TextBox 67">
+                <a:extLst>
+                  <a:ext uri="{FF2B5EF4-FFF2-40B4-BE49-F238E27FC236}">
+                    <a16:creationId xmlns:a16="http://schemas.microsoft.com/office/drawing/2014/main" id="{5807AAFE-9F96-0656-41F2-9F35415791A7}"/>
+                  </a:ext>
+                </a:extLst>
+              </p:cNvPr>
+              <p:cNvSpPr txBox="1"/>
+              <p:nvPr/>
+            </p:nvSpPr>
+            <p:spPr>
+              <a:xfrm>
+                <a:off x="3132765" y="266601"/>
+                <a:ext cx="1323301" cy="276999"/>
+              </a:xfrm>
+              <a:prstGeom prst="rect">
+                <a:avLst/>
+              </a:prstGeom>
+              <a:noFill/>
+            </p:spPr>
+            <p:txBody>
+              <a:bodyPr wrap="square" rtlCol="0">
+                <a:spAutoFit/>
+              </a:bodyPr>
+              <a:lstStyle/>
+              <a:p>
+                <a:pPr algn="ctr"/>
+                <a:r>
+                  <a:rPr lang="ru-RU" sz="1200" dirty="0"/>
+                  <a:t>Вывод всех заметок</a:t>
+                </a:r>
+              </a:p>
+            </p:txBody>
+          </p:sp>
+        </p:grpSp>
+        <p:grpSp>
+          <p:nvGrpSpPr>
+            <p:cNvPr id="69" name="Группа 68">
+              <a:extLst>
+                <a:ext uri="{FF2B5EF4-FFF2-40B4-BE49-F238E27FC236}">
+                  <a16:creationId xmlns:a16="http://schemas.microsoft.com/office/drawing/2014/main" id="{A560959B-8FBA-1387-BF6D-3B1E7A9D7E8C}"/>
+                </a:ext>
+              </a:extLst>
+            </p:cNvPr>
+            <p:cNvGrpSpPr/>
+            <p:nvPr/>
+          </p:nvGrpSpPr>
+          <p:grpSpPr>
+            <a:xfrm>
+              <a:off x="484123" y="3342935"/>
+              <a:ext cx="1705594" cy="688708"/>
+              <a:chOff x="3132765" y="185644"/>
+              <a:chExt cx="1573600" cy="688708"/>
+            </a:xfrm>
+          </p:grpSpPr>
+          <p:sp>
+            <p:nvSpPr>
+              <p:cNvPr id="70" name="Прямоугольник 69">
+                <a:extLst>
+                  <a:ext uri="{FF2B5EF4-FFF2-40B4-BE49-F238E27FC236}">
+                    <a16:creationId xmlns:a16="http://schemas.microsoft.com/office/drawing/2014/main" id="{0FA3C2F3-3E1A-602E-CC7A-AAD79C0AB78F}"/>
+                  </a:ext>
+                </a:extLst>
+              </p:cNvPr>
+              <p:cNvSpPr/>
+              <p:nvPr/>
+            </p:nvSpPr>
+            <p:spPr>
+              <a:xfrm>
+                <a:off x="3132765" y="185644"/>
+                <a:ext cx="1564817" cy="688708"/>
+              </a:xfrm>
+              <a:prstGeom prst="rect">
+                <a:avLst/>
+              </a:prstGeom>
+            </p:spPr>
+            <p:style>
+              <a:lnRef idx="2">
+                <a:schemeClr val="dk1"/>
+              </a:lnRef>
+              <a:fillRef idx="1">
+                <a:schemeClr val="lt1"/>
+              </a:fillRef>
+              <a:effectRef idx="0">
+                <a:schemeClr val="dk1"/>
+              </a:effectRef>
+              <a:fontRef idx="minor">
+                <a:schemeClr val="dk1"/>
+              </a:fontRef>
+            </p:style>
+            <p:txBody>
+              <a:bodyPr rtlCol="0" anchor="ctr"/>
+              <a:lstStyle/>
+              <a:p>
+                <a:pPr algn="ctr"/>
+                <a:endParaRPr lang="ru-RU"/>
+              </a:p>
+            </p:txBody>
+          </p:sp>
+          <p:sp>
+            <p:nvSpPr>
+              <p:cNvPr id="71" name="TextBox 70">
+                <a:extLst>
+                  <a:ext uri="{FF2B5EF4-FFF2-40B4-BE49-F238E27FC236}">
+                    <a16:creationId xmlns:a16="http://schemas.microsoft.com/office/drawing/2014/main" id="{86119AAE-4081-40B0-386F-3DF554BBBAF3}"/>
+                  </a:ext>
+                </a:extLst>
+              </p:cNvPr>
+              <p:cNvSpPr txBox="1"/>
+              <p:nvPr/>
+            </p:nvSpPr>
+            <p:spPr>
+              <a:xfrm>
+                <a:off x="3132769" y="221191"/>
+                <a:ext cx="1573596" cy="646331"/>
+              </a:xfrm>
+              <a:prstGeom prst="rect">
+                <a:avLst/>
+              </a:prstGeom>
+              <a:noFill/>
+            </p:spPr>
+            <p:txBody>
+              <a:bodyPr wrap="square" rtlCol="0">
+                <a:spAutoFit/>
+              </a:bodyPr>
+              <a:lstStyle/>
+              <a:p>
+                <a:pPr algn="ctr"/>
+                <a:r>
+                  <a:rPr lang="ru-RU" sz="1200" dirty="0"/>
+                  <a:t>Редактирование существующей заметки</a:t>
+                </a:r>
+              </a:p>
+            </p:txBody>
+          </p:sp>
+        </p:grpSp>
+        <p:grpSp>
+          <p:nvGrpSpPr>
+            <p:cNvPr id="72" name="Группа 71">
+              <a:extLst>
+                <a:ext uri="{FF2B5EF4-FFF2-40B4-BE49-F238E27FC236}">
+                  <a16:creationId xmlns:a16="http://schemas.microsoft.com/office/drawing/2014/main" id="{1CB79804-2F7A-816D-71DF-F864CBA7910E}"/>
+                </a:ext>
+              </a:extLst>
+            </p:cNvPr>
+            <p:cNvGrpSpPr/>
+            <p:nvPr/>
+          </p:nvGrpSpPr>
+          <p:grpSpPr>
+            <a:xfrm>
+              <a:off x="484126" y="4140585"/>
+              <a:ext cx="1705591" cy="438912"/>
+              <a:chOff x="3132765" y="185644"/>
+              <a:chExt cx="1330727" cy="438912"/>
+            </a:xfrm>
+          </p:grpSpPr>
+          <p:sp>
+            <p:nvSpPr>
+              <p:cNvPr id="73" name="Прямоугольник 72">
+                <a:extLst>
+                  <a:ext uri="{FF2B5EF4-FFF2-40B4-BE49-F238E27FC236}">
+                    <a16:creationId xmlns:a16="http://schemas.microsoft.com/office/drawing/2014/main" id="{BD3352F5-CCEE-1ED4-8A0C-63ECF0E405A5}"/>
+                  </a:ext>
+                </a:extLst>
+              </p:cNvPr>
+              <p:cNvSpPr/>
+              <p:nvPr/>
+            </p:nvSpPr>
+            <p:spPr>
+              <a:xfrm>
+                <a:off x="3132765" y="185644"/>
+                <a:ext cx="1330727" cy="438912"/>
+              </a:xfrm>
+              <a:prstGeom prst="rect">
+                <a:avLst/>
+              </a:prstGeom>
+            </p:spPr>
+            <p:style>
+              <a:lnRef idx="2">
+                <a:schemeClr val="dk1"/>
+              </a:lnRef>
+              <a:fillRef idx="1">
+                <a:schemeClr val="lt1"/>
+              </a:fillRef>
+              <a:effectRef idx="0">
+                <a:schemeClr val="dk1"/>
+              </a:effectRef>
+              <a:fontRef idx="minor">
+                <a:schemeClr val="dk1"/>
+              </a:fontRef>
+            </p:style>
+            <p:txBody>
+              <a:bodyPr rtlCol="0" anchor="ctr"/>
+              <a:lstStyle/>
+              <a:p>
+                <a:pPr algn="ctr"/>
+                <a:endParaRPr lang="ru-RU"/>
+              </a:p>
+            </p:txBody>
+          </p:sp>
+          <p:sp>
+            <p:nvSpPr>
+              <p:cNvPr id="74" name="TextBox 73">
+                <a:extLst>
+                  <a:ext uri="{FF2B5EF4-FFF2-40B4-BE49-F238E27FC236}">
+                    <a16:creationId xmlns:a16="http://schemas.microsoft.com/office/drawing/2014/main" id="{AF78DB61-1577-F171-BAF9-EB4D65403ADD}"/>
+                  </a:ext>
+                </a:extLst>
+              </p:cNvPr>
+              <p:cNvSpPr txBox="1"/>
+              <p:nvPr/>
+            </p:nvSpPr>
+            <p:spPr>
+              <a:xfrm>
+                <a:off x="3132766" y="266601"/>
+                <a:ext cx="1323302" cy="276999"/>
+              </a:xfrm>
+              <a:prstGeom prst="rect">
+                <a:avLst/>
+              </a:prstGeom>
+              <a:noFill/>
+            </p:spPr>
+            <p:txBody>
+              <a:bodyPr wrap="square" rtlCol="0">
+                <a:spAutoFit/>
+              </a:bodyPr>
+              <a:lstStyle/>
+              <a:p>
+                <a:pPr algn="ctr"/>
+                <a:r>
+                  <a:rPr lang="ru-RU" sz="1200" dirty="0"/>
+                  <a:t>Удаление заметки</a:t>
+                </a:r>
+              </a:p>
+            </p:txBody>
+          </p:sp>
+        </p:grpSp>
+        <p:cxnSp>
+          <p:nvCxnSpPr>
+            <p:cNvPr id="77" name="Прямая со стрелкой 76">
+              <a:extLst>
+                <a:ext uri="{FF2B5EF4-FFF2-40B4-BE49-F238E27FC236}">
+                  <a16:creationId xmlns:a16="http://schemas.microsoft.com/office/drawing/2014/main" id="{BF412B64-D7D8-7BF0-6F72-234DF75BBAF3}"/>
+                </a:ext>
+              </a:extLst>
+            </p:cNvPr>
+            <p:cNvCxnSpPr>
+              <a:stCxn id="7" idx="2"/>
+              <a:endCxn id="65" idx="3"/>
+            </p:cNvCxnSpPr>
+            <p:nvPr/>
+          </p:nvCxnSpPr>
+          <p:spPr>
+            <a:xfrm flipH="1" flipV="1">
+              <a:off x="2180200" y="2520238"/>
+              <a:ext cx="1210396" cy="621639"/>
+            </a:xfrm>
+            <a:prstGeom prst="straightConnector1">
+              <a:avLst/>
+            </a:prstGeom>
+            <a:ln>
+              <a:tailEnd type="triangle"/>
+            </a:ln>
+          </p:spPr>
+          <p:style>
+            <a:lnRef idx="1">
+              <a:schemeClr val="dk1"/>
+            </a:lnRef>
+            <a:fillRef idx="0">
+              <a:schemeClr val="dk1"/>
+            </a:fillRef>
+            <a:effectRef idx="0">
+              <a:schemeClr val="dk1"/>
+            </a:effectRef>
+            <a:fontRef idx="minor">
+              <a:schemeClr val="tx1"/>
+            </a:fontRef>
+          </p:style>
+        </p:cxnSp>
+        <p:cxnSp>
+          <p:nvCxnSpPr>
+            <p:cNvPr id="79" name="Прямая со стрелкой 78">
+              <a:extLst>
+                <a:ext uri="{FF2B5EF4-FFF2-40B4-BE49-F238E27FC236}">
+                  <a16:creationId xmlns:a16="http://schemas.microsoft.com/office/drawing/2014/main" id="{845D6C81-90F8-8757-24B7-4320FDF7C130}"/>
+                </a:ext>
+              </a:extLst>
+            </p:cNvPr>
+            <p:cNvCxnSpPr>
+              <a:stCxn id="7" idx="2"/>
+              <a:endCxn id="68" idx="3"/>
+            </p:cNvCxnSpPr>
+            <p:nvPr/>
+          </p:nvCxnSpPr>
+          <p:spPr>
+            <a:xfrm flipH="1" flipV="1">
+              <a:off x="2180200" y="3043255"/>
+              <a:ext cx="1210396" cy="98622"/>
+            </a:xfrm>
+            <a:prstGeom prst="straightConnector1">
+              <a:avLst/>
+            </a:prstGeom>
+            <a:ln>
+              <a:tailEnd type="triangle"/>
+            </a:ln>
+          </p:spPr>
+          <p:style>
+            <a:lnRef idx="1">
+              <a:schemeClr val="dk1"/>
+            </a:lnRef>
+            <a:fillRef idx="0">
+              <a:schemeClr val="dk1"/>
+            </a:fillRef>
+            <a:effectRef idx="0">
+              <a:schemeClr val="dk1"/>
+            </a:effectRef>
+            <a:fontRef idx="minor">
+              <a:schemeClr val="tx1"/>
+            </a:fontRef>
+          </p:style>
+        </p:cxnSp>
+        <p:cxnSp>
+          <p:nvCxnSpPr>
+            <p:cNvPr id="81" name="Прямая со стрелкой 80">
+              <a:extLst>
+                <a:ext uri="{FF2B5EF4-FFF2-40B4-BE49-F238E27FC236}">
+                  <a16:creationId xmlns:a16="http://schemas.microsoft.com/office/drawing/2014/main" id="{28200E69-D22C-86BC-914D-51857699A0AD}"/>
+                </a:ext>
+              </a:extLst>
+            </p:cNvPr>
+            <p:cNvCxnSpPr>
+              <a:stCxn id="7" idx="2"/>
+              <a:endCxn id="71" idx="3"/>
+            </p:cNvCxnSpPr>
+            <p:nvPr/>
+          </p:nvCxnSpPr>
+          <p:spPr>
+            <a:xfrm flipH="1">
+              <a:off x="2189717" y="3141877"/>
+              <a:ext cx="1200879" cy="559771"/>
+            </a:xfrm>
+            <a:prstGeom prst="straightConnector1">
+              <a:avLst/>
+            </a:prstGeom>
+            <a:ln>
+              <a:tailEnd type="triangle"/>
+            </a:ln>
+          </p:spPr>
+          <p:style>
+            <a:lnRef idx="1">
+              <a:schemeClr val="dk1"/>
+            </a:lnRef>
+            <a:fillRef idx="0">
+              <a:schemeClr val="dk1"/>
+            </a:fillRef>
+            <a:effectRef idx="0">
+              <a:schemeClr val="dk1"/>
+            </a:effectRef>
+            <a:fontRef idx="minor">
+              <a:schemeClr val="tx1"/>
+            </a:fontRef>
+          </p:style>
+        </p:cxnSp>
+        <p:cxnSp>
+          <p:nvCxnSpPr>
+            <p:cNvPr id="83" name="Прямая со стрелкой 82">
+              <a:extLst>
+                <a:ext uri="{FF2B5EF4-FFF2-40B4-BE49-F238E27FC236}">
+                  <a16:creationId xmlns:a16="http://schemas.microsoft.com/office/drawing/2014/main" id="{851E5720-9838-5156-817A-9396CF77ED1B}"/>
+                </a:ext>
+              </a:extLst>
+            </p:cNvPr>
+            <p:cNvCxnSpPr>
+              <a:stCxn id="7" idx="2"/>
+              <a:endCxn id="74" idx="3"/>
+            </p:cNvCxnSpPr>
+            <p:nvPr/>
+          </p:nvCxnSpPr>
+          <p:spPr>
+            <a:xfrm flipH="1">
+              <a:off x="2180201" y="3141877"/>
+              <a:ext cx="1210395" cy="1218165"/>
+            </a:xfrm>
+            <a:prstGeom prst="straightConnector1">
+              <a:avLst/>
+            </a:prstGeom>
+            <a:ln>
+              <a:tailEnd type="triangle"/>
+            </a:ln>
+          </p:spPr>
+          <p:style>
+            <a:lnRef idx="1">
+              <a:schemeClr val="dk1"/>
+            </a:lnRef>
+            <a:fillRef idx="0">
+              <a:schemeClr val="dk1"/>
+            </a:fillRef>
+            <a:effectRef idx="0">
+              <a:schemeClr val="dk1"/>
+            </a:effectRef>
+            <a:fontRef idx="minor">
+              <a:schemeClr val="tx1"/>
+            </a:fontRef>
+          </p:style>
+        </p:cxnSp>
+        <p:grpSp>
+          <p:nvGrpSpPr>
+            <p:cNvPr id="84" name="Группа 83">
+              <a:extLst>
+                <a:ext uri="{FF2B5EF4-FFF2-40B4-BE49-F238E27FC236}">
+                  <a16:creationId xmlns:a16="http://schemas.microsoft.com/office/drawing/2014/main" id="{74C3BE4C-AA2E-44ED-B821-D3AED6034942}"/>
+                </a:ext>
+              </a:extLst>
+            </p:cNvPr>
+            <p:cNvGrpSpPr/>
+            <p:nvPr/>
+          </p:nvGrpSpPr>
+          <p:grpSpPr>
+            <a:xfrm>
+              <a:off x="7503941" y="3917328"/>
+              <a:ext cx="1715108" cy="438912"/>
+              <a:chOff x="3132765" y="185644"/>
+              <a:chExt cx="1338152" cy="438912"/>
+            </a:xfrm>
+          </p:grpSpPr>
+          <p:sp>
+            <p:nvSpPr>
+              <p:cNvPr id="85" name="Прямоугольник 84">
+                <a:extLst>
+                  <a:ext uri="{FF2B5EF4-FFF2-40B4-BE49-F238E27FC236}">
+                    <a16:creationId xmlns:a16="http://schemas.microsoft.com/office/drawing/2014/main" id="{D16B1A19-57B8-245C-70C9-E43EA73AB5F2}"/>
+                  </a:ext>
+                </a:extLst>
+              </p:cNvPr>
+              <p:cNvSpPr/>
+              <p:nvPr/>
+            </p:nvSpPr>
+            <p:spPr>
+              <a:xfrm>
+                <a:off x="3132765" y="185644"/>
+                <a:ext cx="1330727" cy="438912"/>
+              </a:xfrm>
+              <a:prstGeom prst="rect">
+                <a:avLst/>
+              </a:prstGeom>
+            </p:spPr>
+            <p:style>
+              <a:lnRef idx="2">
+                <a:schemeClr val="dk1"/>
+              </a:lnRef>
+              <a:fillRef idx="1">
+                <a:schemeClr val="lt1"/>
+              </a:fillRef>
+              <a:effectRef idx="0">
+                <a:schemeClr val="dk1"/>
+              </a:effectRef>
+              <a:fontRef idx="minor">
+                <a:schemeClr val="dk1"/>
+              </a:fontRef>
+            </p:style>
+            <p:txBody>
+              <a:bodyPr rtlCol="0" anchor="ctr"/>
+              <a:lstStyle/>
+              <a:p>
+                <a:pPr algn="ctr"/>
+                <a:endParaRPr lang="ru-RU"/>
+              </a:p>
+            </p:txBody>
+          </p:sp>
+          <p:sp>
+            <p:nvSpPr>
+              <p:cNvPr id="86" name="TextBox 85">
+                <a:extLst>
+                  <a:ext uri="{FF2B5EF4-FFF2-40B4-BE49-F238E27FC236}">
+                    <a16:creationId xmlns:a16="http://schemas.microsoft.com/office/drawing/2014/main" id="{CD7CBEE8-1DCC-54B4-CC2A-BEAAFA4687F0}"/>
+                  </a:ext>
+                </a:extLst>
+              </p:cNvPr>
+              <p:cNvSpPr txBox="1"/>
+              <p:nvPr/>
+            </p:nvSpPr>
+            <p:spPr>
+              <a:xfrm>
+                <a:off x="3147616" y="266705"/>
+                <a:ext cx="1323301" cy="276999"/>
+              </a:xfrm>
+              <a:prstGeom prst="rect">
+                <a:avLst/>
+              </a:prstGeom>
+              <a:noFill/>
+            </p:spPr>
+            <p:txBody>
+              <a:bodyPr wrap="square" rtlCol="0">
+                <a:spAutoFit/>
+              </a:bodyPr>
+              <a:lstStyle/>
+              <a:p>
+                <a:r>
+                  <a:rPr lang="ru-RU" sz="1200" dirty="0"/>
+                  <a:t>Запуск сбора метрик</a:t>
+                </a:r>
+              </a:p>
+            </p:txBody>
+          </p:sp>
+        </p:grpSp>
+        <p:grpSp>
+          <p:nvGrpSpPr>
+            <p:cNvPr id="87" name="Группа 86">
+              <a:extLst>
+                <a:ext uri="{FF2B5EF4-FFF2-40B4-BE49-F238E27FC236}">
+                  <a16:creationId xmlns:a16="http://schemas.microsoft.com/office/drawing/2014/main" id="{F08D2B92-4090-A598-2C60-0195523F4B7D}"/>
+                </a:ext>
+              </a:extLst>
+            </p:cNvPr>
+            <p:cNvGrpSpPr/>
+            <p:nvPr/>
+          </p:nvGrpSpPr>
+          <p:grpSpPr>
+            <a:xfrm>
+              <a:off x="7494420" y="4444224"/>
+              <a:ext cx="1715112" cy="537814"/>
+              <a:chOff x="3125337" y="185644"/>
+              <a:chExt cx="1338155" cy="486307"/>
+            </a:xfrm>
+          </p:grpSpPr>
+          <p:sp>
+            <p:nvSpPr>
+              <p:cNvPr id="88" name="Прямоугольник 87">
+                <a:extLst>
+                  <a:ext uri="{FF2B5EF4-FFF2-40B4-BE49-F238E27FC236}">
+                    <a16:creationId xmlns:a16="http://schemas.microsoft.com/office/drawing/2014/main" id="{CCE0D82C-47B8-1CDC-78C4-8B02D178E024}"/>
+                  </a:ext>
+                </a:extLst>
+              </p:cNvPr>
+              <p:cNvSpPr/>
+              <p:nvPr/>
+            </p:nvSpPr>
+            <p:spPr>
+              <a:xfrm>
+                <a:off x="3132765" y="185644"/>
+                <a:ext cx="1330727" cy="438912"/>
+              </a:xfrm>
+              <a:prstGeom prst="rect">
+                <a:avLst/>
+              </a:prstGeom>
+            </p:spPr>
+            <p:style>
+              <a:lnRef idx="2">
+                <a:schemeClr val="dk1"/>
+              </a:lnRef>
+              <a:fillRef idx="1">
+                <a:schemeClr val="lt1"/>
+              </a:fillRef>
+              <a:effectRef idx="0">
+                <a:schemeClr val="dk1"/>
+              </a:effectRef>
+              <a:fontRef idx="minor">
+                <a:schemeClr val="dk1"/>
+              </a:fontRef>
+            </p:style>
+            <p:txBody>
+              <a:bodyPr rtlCol="0" anchor="ctr"/>
+              <a:lstStyle/>
+              <a:p>
+                <a:pPr algn="ctr"/>
+                <a:endParaRPr lang="ru-RU"/>
+              </a:p>
+            </p:txBody>
+          </p:sp>
+          <p:sp>
+            <p:nvSpPr>
+              <p:cNvPr id="89" name="TextBox 88">
+                <a:extLst>
+                  <a:ext uri="{FF2B5EF4-FFF2-40B4-BE49-F238E27FC236}">
+                    <a16:creationId xmlns:a16="http://schemas.microsoft.com/office/drawing/2014/main" id="{457CA485-0E09-344D-8906-0C6A55DA25EE}"/>
+                  </a:ext>
+                </a:extLst>
+              </p:cNvPr>
+              <p:cNvSpPr txBox="1"/>
+              <p:nvPr/>
+            </p:nvSpPr>
+            <p:spPr>
+              <a:xfrm>
+                <a:off x="3125337" y="210286"/>
+                <a:ext cx="1330727" cy="461665"/>
+              </a:xfrm>
+              <a:prstGeom prst="rect">
+                <a:avLst/>
+              </a:prstGeom>
+              <a:noFill/>
+            </p:spPr>
+            <p:txBody>
+              <a:bodyPr wrap="square" rtlCol="0">
+                <a:spAutoFit/>
+              </a:bodyPr>
+              <a:lstStyle/>
+              <a:p>
+                <a:pPr algn="ctr"/>
+                <a:r>
+                  <a:rPr lang="ru-RU" sz="1200" dirty="0"/>
+                  <a:t>Остановка сбора метрик</a:t>
+                </a:r>
+              </a:p>
+            </p:txBody>
+          </p:sp>
+        </p:grpSp>
+        <p:grpSp>
+          <p:nvGrpSpPr>
+            <p:cNvPr id="90" name="Группа 89">
+              <a:extLst>
+                <a:ext uri="{FF2B5EF4-FFF2-40B4-BE49-F238E27FC236}">
+                  <a16:creationId xmlns:a16="http://schemas.microsoft.com/office/drawing/2014/main" id="{A1511543-CB25-5315-08CC-96C052B03069}"/>
+                </a:ext>
+              </a:extLst>
+            </p:cNvPr>
+            <p:cNvGrpSpPr/>
+            <p:nvPr/>
+          </p:nvGrpSpPr>
+          <p:grpSpPr>
+            <a:xfrm>
+              <a:off x="7499180" y="4974279"/>
+              <a:ext cx="1719868" cy="461665"/>
+              <a:chOff x="3121626" y="185644"/>
+              <a:chExt cx="1341866" cy="461665"/>
+            </a:xfrm>
+          </p:grpSpPr>
+          <p:sp>
+            <p:nvSpPr>
+              <p:cNvPr id="91" name="Прямоугольник 90">
+                <a:extLst>
+                  <a:ext uri="{FF2B5EF4-FFF2-40B4-BE49-F238E27FC236}">
+                    <a16:creationId xmlns:a16="http://schemas.microsoft.com/office/drawing/2014/main" id="{86A7889C-DEF7-A58C-E939-6A47F6BE1C92}"/>
+                  </a:ext>
+                </a:extLst>
+              </p:cNvPr>
+              <p:cNvSpPr/>
+              <p:nvPr/>
+            </p:nvSpPr>
+            <p:spPr>
+              <a:xfrm>
+                <a:off x="3132765" y="185644"/>
+                <a:ext cx="1330727" cy="438912"/>
+              </a:xfrm>
+              <a:prstGeom prst="rect">
+                <a:avLst/>
+              </a:prstGeom>
+            </p:spPr>
+            <p:style>
+              <a:lnRef idx="2">
+                <a:schemeClr val="dk1"/>
+              </a:lnRef>
+              <a:fillRef idx="1">
+                <a:schemeClr val="lt1"/>
+              </a:fillRef>
+              <a:effectRef idx="0">
+                <a:schemeClr val="dk1"/>
+              </a:effectRef>
+              <a:fontRef idx="minor">
+                <a:schemeClr val="dk1"/>
+              </a:fontRef>
+            </p:style>
+            <p:txBody>
+              <a:bodyPr rtlCol="0" anchor="ctr"/>
+              <a:lstStyle/>
+              <a:p>
+                <a:pPr algn="ctr"/>
+                <a:endParaRPr lang="ru-RU"/>
+              </a:p>
+            </p:txBody>
+          </p:sp>
+          <p:sp>
+            <p:nvSpPr>
+              <p:cNvPr id="92" name="TextBox 91">
+                <a:extLst>
+                  <a:ext uri="{FF2B5EF4-FFF2-40B4-BE49-F238E27FC236}">
+                    <a16:creationId xmlns:a16="http://schemas.microsoft.com/office/drawing/2014/main" id="{FF4F3838-08CF-3232-40A0-9C23D58B26D5}"/>
+                  </a:ext>
+                </a:extLst>
+              </p:cNvPr>
+              <p:cNvSpPr txBox="1"/>
+              <p:nvPr/>
+            </p:nvSpPr>
+            <p:spPr>
+              <a:xfrm>
+                <a:off x="3121626" y="185644"/>
+                <a:ext cx="1323301" cy="461665"/>
+              </a:xfrm>
+              <a:prstGeom prst="rect">
+                <a:avLst/>
+              </a:prstGeom>
+              <a:noFill/>
+            </p:spPr>
+            <p:txBody>
+              <a:bodyPr wrap="square" rtlCol="0">
+                <a:spAutoFit/>
+              </a:bodyPr>
+              <a:lstStyle/>
+              <a:p>
+                <a:pPr algn="ctr"/>
+                <a:r>
+                  <a:rPr lang="ru-RU" sz="1200" dirty="0"/>
+                  <a:t>Изменение интервала сбора данных</a:t>
+                </a:r>
+              </a:p>
+            </p:txBody>
+          </p:sp>
+        </p:grpSp>
+        <p:grpSp>
+          <p:nvGrpSpPr>
+            <p:cNvPr id="93" name="Группа 92">
+              <a:extLst>
+                <a:ext uri="{FF2B5EF4-FFF2-40B4-BE49-F238E27FC236}">
+                  <a16:creationId xmlns:a16="http://schemas.microsoft.com/office/drawing/2014/main" id="{0E1CAB7A-925C-6352-ED13-5BC758DD29DE}"/>
+                </a:ext>
+              </a:extLst>
+            </p:cNvPr>
+            <p:cNvGrpSpPr/>
+            <p:nvPr/>
+          </p:nvGrpSpPr>
+          <p:grpSpPr>
+            <a:xfrm>
+              <a:off x="7513460" y="5501070"/>
+              <a:ext cx="1715108" cy="490417"/>
+              <a:chOff x="3125340" y="185644"/>
+              <a:chExt cx="1338152" cy="490417"/>
+            </a:xfrm>
+          </p:grpSpPr>
+          <p:sp>
+            <p:nvSpPr>
+              <p:cNvPr id="94" name="Прямоугольник 93">
+                <a:extLst>
+                  <a:ext uri="{FF2B5EF4-FFF2-40B4-BE49-F238E27FC236}">
+                    <a16:creationId xmlns:a16="http://schemas.microsoft.com/office/drawing/2014/main" id="{B6CADA4E-6489-DF6B-CA9B-0C0762E7A9D2}"/>
+                  </a:ext>
+                </a:extLst>
+              </p:cNvPr>
+              <p:cNvSpPr/>
+              <p:nvPr/>
+            </p:nvSpPr>
+            <p:spPr>
+              <a:xfrm>
+                <a:off x="3132765" y="185644"/>
+                <a:ext cx="1330727" cy="438912"/>
+              </a:xfrm>
+              <a:prstGeom prst="rect">
+                <a:avLst/>
+              </a:prstGeom>
+            </p:spPr>
+            <p:style>
+              <a:lnRef idx="2">
+                <a:schemeClr val="dk1"/>
+              </a:lnRef>
+              <a:fillRef idx="1">
+                <a:schemeClr val="lt1"/>
+              </a:fillRef>
+              <a:effectRef idx="0">
+                <a:schemeClr val="dk1"/>
+              </a:effectRef>
+              <a:fontRef idx="minor">
+                <a:schemeClr val="dk1"/>
+              </a:fontRef>
+            </p:style>
+            <p:txBody>
+              <a:bodyPr rtlCol="0" anchor="ctr"/>
+              <a:lstStyle/>
+              <a:p>
+                <a:pPr algn="ctr"/>
+                <a:endParaRPr lang="ru-RU"/>
+              </a:p>
+            </p:txBody>
+          </p:sp>
+          <p:sp>
+            <p:nvSpPr>
+              <p:cNvPr id="95" name="TextBox 94">
+                <a:extLst>
+                  <a:ext uri="{FF2B5EF4-FFF2-40B4-BE49-F238E27FC236}">
+                    <a16:creationId xmlns:a16="http://schemas.microsoft.com/office/drawing/2014/main" id="{6EC3C4DD-273D-5327-6035-3CA6D15B1ABC}"/>
+                  </a:ext>
+                </a:extLst>
+              </p:cNvPr>
+              <p:cNvSpPr txBox="1"/>
+              <p:nvPr/>
+            </p:nvSpPr>
+            <p:spPr>
+              <a:xfrm>
+                <a:off x="3125340" y="214396"/>
+                <a:ext cx="1323301" cy="461665"/>
+              </a:xfrm>
+              <a:prstGeom prst="rect">
+                <a:avLst/>
+              </a:prstGeom>
+              <a:noFill/>
+            </p:spPr>
+            <p:txBody>
+              <a:bodyPr wrap="square" rtlCol="0">
+                <a:spAutoFit/>
+              </a:bodyPr>
+              <a:lstStyle/>
+              <a:p>
+                <a:pPr algn="ctr"/>
+                <a:r>
+                  <a:rPr lang="ru-RU" sz="1200" dirty="0"/>
+                  <a:t>Посмотреть статус сборки метрик</a:t>
+                </a:r>
+              </a:p>
+            </p:txBody>
+          </p:sp>
+        </p:grpSp>
+        <p:grpSp>
+          <p:nvGrpSpPr>
+            <p:cNvPr id="96" name="Группа 95">
+              <a:extLst>
+                <a:ext uri="{FF2B5EF4-FFF2-40B4-BE49-F238E27FC236}">
+                  <a16:creationId xmlns:a16="http://schemas.microsoft.com/office/drawing/2014/main" id="{4E741641-9D06-0F5F-D31A-23ECE12EA7AD}"/>
+                </a:ext>
+              </a:extLst>
+            </p:cNvPr>
+            <p:cNvGrpSpPr/>
+            <p:nvPr/>
+          </p:nvGrpSpPr>
+          <p:grpSpPr>
+            <a:xfrm>
+              <a:off x="7494420" y="6055218"/>
+              <a:ext cx="1705591" cy="438912"/>
+              <a:chOff x="3132765" y="185644"/>
+              <a:chExt cx="1330727" cy="438912"/>
+            </a:xfrm>
+          </p:grpSpPr>
+          <p:sp>
+            <p:nvSpPr>
+              <p:cNvPr id="97" name="Прямоугольник 96">
+                <a:extLst>
+                  <a:ext uri="{FF2B5EF4-FFF2-40B4-BE49-F238E27FC236}">
+                    <a16:creationId xmlns:a16="http://schemas.microsoft.com/office/drawing/2014/main" id="{3935F209-DF9A-61F6-362C-66E1B5DC5F8D}"/>
+                  </a:ext>
+                </a:extLst>
+              </p:cNvPr>
+              <p:cNvSpPr/>
+              <p:nvPr/>
+            </p:nvSpPr>
+            <p:spPr>
+              <a:xfrm>
+                <a:off x="3132765" y="185644"/>
+                <a:ext cx="1330727" cy="438912"/>
+              </a:xfrm>
+              <a:prstGeom prst="rect">
+                <a:avLst/>
+              </a:prstGeom>
+            </p:spPr>
+            <p:style>
+              <a:lnRef idx="2">
+                <a:schemeClr val="dk1"/>
+              </a:lnRef>
+              <a:fillRef idx="1">
+                <a:schemeClr val="lt1"/>
+              </a:fillRef>
+              <a:effectRef idx="0">
+                <a:schemeClr val="dk1"/>
+              </a:effectRef>
+              <a:fontRef idx="minor">
+                <a:schemeClr val="dk1"/>
+              </a:fontRef>
+            </p:style>
+            <p:txBody>
+              <a:bodyPr rtlCol="0" anchor="ctr"/>
+              <a:lstStyle/>
+              <a:p>
+                <a:pPr algn="ctr"/>
+                <a:endParaRPr lang="ru-RU"/>
+              </a:p>
+            </p:txBody>
+          </p:sp>
+          <p:sp>
+            <p:nvSpPr>
+              <p:cNvPr id="98" name="TextBox 97">
+                <a:extLst>
+                  <a:ext uri="{FF2B5EF4-FFF2-40B4-BE49-F238E27FC236}">
+                    <a16:creationId xmlns:a16="http://schemas.microsoft.com/office/drawing/2014/main" id="{831C7BF2-D972-AE4E-BA7D-AA2E11E0C4D4}"/>
+                  </a:ext>
+                </a:extLst>
+              </p:cNvPr>
+              <p:cNvSpPr txBox="1"/>
+              <p:nvPr/>
+            </p:nvSpPr>
+            <p:spPr>
+              <a:xfrm>
+                <a:off x="3132765" y="266601"/>
+                <a:ext cx="1323301" cy="276999"/>
+              </a:xfrm>
+              <a:prstGeom prst="rect">
+                <a:avLst/>
+              </a:prstGeom>
+              <a:noFill/>
+            </p:spPr>
+            <p:txBody>
+              <a:bodyPr wrap="square" rtlCol="0">
+                <a:spAutoFit/>
+              </a:bodyPr>
+              <a:lstStyle/>
+              <a:p>
+                <a:pPr algn="ctr"/>
+                <a:r>
+                  <a:rPr lang="ru-RU" sz="1200" dirty="0"/>
+                  <a:t>Вывод списка метрик</a:t>
+                </a:r>
+              </a:p>
+            </p:txBody>
+          </p:sp>
+        </p:grpSp>
+        <p:cxnSp>
+          <p:nvCxnSpPr>
+            <p:cNvPr id="102" name="Прямая со стрелкой 101">
+              <a:extLst>
+                <a:ext uri="{FF2B5EF4-FFF2-40B4-BE49-F238E27FC236}">
+                  <a16:creationId xmlns:a16="http://schemas.microsoft.com/office/drawing/2014/main" id="{7A6B6342-8B9E-DB48-CF7F-CF0C35F77D07}"/>
+                </a:ext>
+              </a:extLst>
+            </p:cNvPr>
+            <p:cNvCxnSpPr>
+              <a:stCxn id="8" idx="6"/>
+              <a:endCxn id="86" idx="1"/>
+            </p:cNvCxnSpPr>
+            <p:nvPr/>
+          </p:nvCxnSpPr>
+          <p:spPr>
+            <a:xfrm flipV="1">
+              <a:off x="6632447" y="4136889"/>
+              <a:ext cx="890529" cy="555812"/>
+            </a:xfrm>
+            <a:prstGeom prst="straightConnector1">
+              <a:avLst/>
+            </a:prstGeom>
+            <a:ln>
+              <a:tailEnd type="triangle"/>
+            </a:ln>
+          </p:spPr>
+          <p:style>
+            <a:lnRef idx="1">
+              <a:schemeClr val="dk1"/>
+            </a:lnRef>
+            <a:fillRef idx="0">
+              <a:schemeClr val="dk1"/>
+            </a:fillRef>
+            <a:effectRef idx="0">
+              <a:schemeClr val="dk1"/>
+            </a:effectRef>
+            <a:fontRef idx="minor">
+              <a:schemeClr val="tx1"/>
+            </a:fontRef>
+          </p:style>
+        </p:cxnSp>
+        <p:cxnSp>
+          <p:nvCxnSpPr>
+            <p:cNvPr id="104" name="Прямая со стрелкой 103">
+              <a:extLst>
+                <a:ext uri="{FF2B5EF4-FFF2-40B4-BE49-F238E27FC236}">
+                  <a16:creationId xmlns:a16="http://schemas.microsoft.com/office/drawing/2014/main" id="{D187E933-2236-F05A-1ED0-55F080448BFC}"/>
+                </a:ext>
+              </a:extLst>
+            </p:cNvPr>
+            <p:cNvCxnSpPr>
+              <a:stCxn id="8" idx="6"/>
+              <a:endCxn id="89" idx="1"/>
+            </p:cNvCxnSpPr>
+            <p:nvPr/>
+          </p:nvCxnSpPr>
+          <p:spPr>
+            <a:xfrm>
+              <a:off x="6632447" y="4692701"/>
+              <a:ext cx="861973" cy="34056"/>
+            </a:xfrm>
+            <a:prstGeom prst="straightConnector1">
+              <a:avLst/>
+            </a:prstGeom>
+            <a:ln>
+              <a:tailEnd type="triangle"/>
+            </a:ln>
+          </p:spPr>
+          <p:style>
+            <a:lnRef idx="1">
+              <a:schemeClr val="dk1"/>
+            </a:lnRef>
+            <a:fillRef idx="0">
+              <a:schemeClr val="dk1"/>
+            </a:fillRef>
+            <a:effectRef idx="0">
+              <a:schemeClr val="dk1"/>
+            </a:effectRef>
+            <a:fontRef idx="minor">
+              <a:schemeClr val="tx1"/>
+            </a:fontRef>
+          </p:style>
+        </p:cxnSp>
+        <p:cxnSp>
+          <p:nvCxnSpPr>
+            <p:cNvPr id="106" name="Прямая со стрелкой 105">
+              <a:extLst>
+                <a:ext uri="{FF2B5EF4-FFF2-40B4-BE49-F238E27FC236}">
+                  <a16:creationId xmlns:a16="http://schemas.microsoft.com/office/drawing/2014/main" id="{DD8FA45D-4F73-CC49-B268-A3F151572091}"/>
+                </a:ext>
+              </a:extLst>
+            </p:cNvPr>
+            <p:cNvCxnSpPr>
+              <a:stCxn id="8" idx="6"/>
+              <a:endCxn id="92" idx="1"/>
+            </p:cNvCxnSpPr>
+            <p:nvPr/>
+          </p:nvCxnSpPr>
+          <p:spPr>
+            <a:xfrm>
+              <a:off x="6632447" y="4692701"/>
+              <a:ext cx="866733" cy="512411"/>
+            </a:xfrm>
+            <a:prstGeom prst="straightConnector1">
+              <a:avLst/>
+            </a:prstGeom>
+            <a:ln>
+              <a:tailEnd type="triangle"/>
+            </a:ln>
+          </p:spPr>
+          <p:style>
+            <a:lnRef idx="1">
+              <a:schemeClr val="dk1"/>
+            </a:lnRef>
+            <a:fillRef idx="0">
+              <a:schemeClr val="dk1"/>
+            </a:fillRef>
+            <a:effectRef idx="0">
+              <a:schemeClr val="dk1"/>
+            </a:effectRef>
+            <a:fontRef idx="minor">
+              <a:schemeClr val="tx1"/>
+            </a:fontRef>
+          </p:style>
+        </p:cxnSp>
+        <p:cxnSp>
+          <p:nvCxnSpPr>
+            <p:cNvPr id="108" name="Прямая со стрелкой 107">
+              <a:extLst>
+                <a:ext uri="{FF2B5EF4-FFF2-40B4-BE49-F238E27FC236}">
+                  <a16:creationId xmlns:a16="http://schemas.microsoft.com/office/drawing/2014/main" id="{27379544-768E-7320-9DAC-DA4B2CE54528}"/>
+                </a:ext>
+              </a:extLst>
+            </p:cNvPr>
+            <p:cNvCxnSpPr>
+              <a:stCxn id="8" idx="6"/>
+              <a:endCxn id="95" idx="1"/>
+            </p:cNvCxnSpPr>
+            <p:nvPr/>
+          </p:nvCxnSpPr>
+          <p:spPr>
+            <a:xfrm>
+              <a:off x="6632447" y="4692701"/>
+              <a:ext cx="881013" cy="1067954"/>
+            </a:xfrm>
+            <a:prstGeom prst="straightConnector1">
+              <a:avLst/>
+            </a:prstGeom>
+            <a:ln>
+              <a:tailEnd type="triangle"/>
+            </a:ln>
+          </p:spPr>
+          <p:style>
+            <a:lnRef idx="1">
+              <a:schemeClr val="dk1"/>
+            </a:lnRef>
+            <a:fillRef idx="0">
+              <a:schemeClr val="dk1"/>
+            </a:fillRef>
+            <a:effectRef idx="0">
+              <a:schemeClr val="dk1"/>
+            </a:effectRef>
+            <a:fontRef idx="minor">
+              <a:schemeClr val="tx1"/>
+            </a:fontRef>
+          </p:style>
+        </p:cxnSp>
+        <p:cxnSp>
+          <p:nvCxnSpPr>
+            <p:cNvPr id="110" name="Прямая со стрелкой 109">
+              <a:extLst>
+                <a:ext uri="{FF2B5EF4-FFF2-40B4-BE49-F238E27FC236}">
+                  <a16:creationId xmlns:a16="http://schemas.microsoft.com/office/drawing/2014/main" id="{DCB55E75-81B6-A09D-3BE5-33E5DF3DCD16}"/>
+                </a:ext>
+              </a:extLst>
+            </p:cNvPr>
+            <p:cNvCxnSpPr>
+              <a:stCxn id="8" idx="6"/>
+              <a:endCxn id="98" idx="1"/>
+            </p:cNvCxnSpPr>
+            <p:nvPr/>
+          </p:nvCxnSpPr>
+          <p:spPr>
+            <a:xfrm>
+              <a:off x="6632447" y="4692701"/>
+              <a:ext cx="861973" cy="1581974"/>
+            </a:xfrm>
+            <a:prstGeom prst="straightConnector1">
+              <a:avLst/>
+            </a:prstGeom>
+            <a:ln>
+              <a:tailEnd type="triangle"/>
+            </a:ln>
+          </p:spPr>
+          <p:style>
+            <a:lnRef idx="1">
+              <a:schemeClr val="dk1"/>
+            </a:lnRef>
+            <a:fillRef idx="0">
+              <a:schemeClr val="dk1"/>
+            </a:fillRef>
+            <a:effectRef idx="0">
+              <a:schemeClr val="dk1"/>
+            </a:effectRef>
+            <a:fontRef idx="minor">
+              <a:schemeClr val="tx1"/>
+            </a:fontRef>
+          </p:style>
+        </p:cxnSp>
+        <p:grpSp>
+          <p:nvGrpSpPr>
+            <p:cNvPr id="111" name="Группа 110">
+              <a:extLst>
+                <a:ext uri="{FF2B5EF4-FFF2-40B4-BE49-F238E27FC236}">
+                  <a16:creationId xmlns:a16="http://schemas.microsoft.com/office/drawing/2014/main" id="{FBD0554F-836F-7AEF-D132-2F6A20AEFCC3}"/>
+                </a:ext>
+              </a:extLst>
+            </p:cNvPr>
+            <p:cNvGrpSpPr/>
+            <p:nvPr/>
+          </p:nvGrpSpPr>
+          <p:grpSpPr>
+            <a:xfrm>
+              <a:off x="10175457" y="384840"/>
+              <a:ext cx="1715108" cy="754241"/>
+              <a:chOff x="3132765" y="185643"/>
+              <a:chExt cx="1338152" cy="754241"/>
+            </a:xfrm>
+          </p:grpSpPr>
+          <p:sp>
+            <p:nvSpPr>
+              <p:cNvPr id="112" name="Прямоугольник 111">
+                <a:extLst>
+                  <a:ext uri="{FF2B5EF4-FFF2-40B4-BE49-F238E27FC236}">
+                    <a16:creationId xmlns:a16="http://schemas.microsoft.com/office/drawing/2014/main" id="{308D05CD-D966-DCB9-8999-703451C5F5BE}"/>
+                  </a:ext>
+                </a:extLst>
+              </p:cNvPr>
+              <p:cNvSpPr/>
+              <p:nvPr/>
+            </p:nvSpPr>
+            <p:spPr>
+              <a:xfrm>
+                <a:off x="3132765" y="185643"/>
+                <a:ext cx="1330727" cy="754241"/>
+              </a:xfrm>
+              <a:prstGeom prst="rect">
+                <a:avLst/>
+              </a:prstGeom>
+            </p:spPr>
+            <p:style>
+              <a:lnRef idx="2">
+                <a:schemeClr val="dk1"/>
+              </a:lnRef>
+              <a:fillRef idx="1">
+                <a:schemeClr val="lt1"/>
+              </a:fillRef>
+              <a:effectRef idx="0">
+                <a:schemeClr val="dk1"/>
+              </a:effectRef>
+              <a:fontRef idx="minor">
+                <a:schemeClr val="dk1"/>
+              </a:fontRef>
+            </p:style>
+            <p:txBody>
+              <a:bodyPr rtlCol="0" anchor="ctr"/>
+              <a:lstStyle/>
+              <a:p>
+                <a:pPr algn="ctr"/>
+                <a:endParaRPr lang="ru-RU"/>
+              </a:p>
+            </p:txBody>
+          </p:sp>
+          <p:sp>
+            <p:nvSpPr>
+              <p:cNvPr id="113" name="TextBox 112">
+                <a:extLst>
+                  <a:ext uri="{FF2B5EF4-FFF2-40B4-BE49-F238E27FC236}">
+                    <a16:creationId xmlns:a16="http://schemas.microsoft.com/office/drawing/2014/main" id="{6C1602A6-6963-9EE4-8FF4-BDA79CD4E61C}"/>
+                  </a:ext>
+                </a:extLst>
+              </p:cNvPr>
+              <p:cNvSpPr txBox="1"/>
+              <p:nvPr/>
+            </p:nvSpPr>
+            <p:spPr>
+              <a:xfrm>
+                <a:off x="3147616" y="266705"/>
+                <a:ext cx="1323301" cy="646331"/>
+              </a:xfrm>
+              <a:prstGeom prst="rect">
+                <a:avLst/>
+              </a:prstGeom>
+              <a:noFill/>
+            </p:spPr>
+            <p:txBody>
+              <a:bodyPr wrap="square" rtlCol="0">
+                <a:spAutoFit/>
+              </a:bodyPr>
+              <a:lstStyle/>
+              <a:p>
+                <a:pPr algn="ctr"/>
+                <a:r>
+                  <a:rPr lang="ru-RU" sz="1200" dirty="0"/>
+                  <a:t>Создание пользователя с определённой ролью</a:t>
+                </a:r>
+              </a:p>
+            </p:txBody>
+          </p:sp>
+        </p:grpSp>
+        <p:grpSp>
+          <p:nvGrpSpPr>
+            <p:cNvPr id="115" name="Группа 114">
+              <a:extLst>
+                <a:ext uri="{FF2B5EF4-FFF2-40B4-BE49-F238E27FC236}">
+                  <a16:creationId xmlns:a16="http://schemas.microsoft.com/office/drawing/2014/main" id="{898ADC2C-520B-6DFA-C749-76E491D2CC8B}"/>
+                </a:ext>
+              </a:extLst>
+            </p:cNvPr>
+            <p:cNvGrpSpPr/>
+            <p:nvPr/>
+          </p:nvGrpSpPr>
+          <p:grpSpPr>
+            <a:xfrm>
+              <a:off x="10184979" y="1270643"/>
+              <a:ext cx="1715103" cy="754240"/>
+              <a:chOff x="3132765" y="185644"/>
+              <a:chExt cx="1338152" cy="542726"/>
+            </a:xfrm>
+          </p:grpSpPr>
+          <p:sp>
+            <p:nvSpPr>
+              <p:cNvPr id="116" name="Прямоугольник 115">
+                <a:extLst>
+                  <a:ext uri="{FF2B5EF4-FFF2-40B4-BE49-F238E27FC236}">
+                    <a16:creationId xmlns:a16="http://schemas.microsoft.com/office/drawing/2014/main" id="{7B1D5E37-5D35-014A-EE02-4FDC0B533E23}"/>
+                  </a:ext>
+                </a:extLst>
+              </p:cNvPr>
+              <p:cNvSpPr/>
+              <p:nvPr/>
+            </p:nvSpPr>
+            <p:spPr>
+              <a:xfrm>
+                <a:off x="3132765" y="185644"/>
+                <a:ext cx="1330727" cy="438912"/>
+              </a:xfrm>
+              <a:prstGeom prst="rect">
+                <a:avLst/>
+              </a:prstGeom>
+            </p:spPr>
+            <p:style>
+              <a:lnRef idx="2">
+                <a:schemeClr val="dk1"/>
+              </a:lnRef>
+              <a:fillRef idx="1">
+                <a:schemeClr val="lt1"/>
+              </a:fillRef>
+              <a:effectRef idx="0">
+                <a:schemeClr val="dk1"/>
+              </a:effectRef>
+              <a:fontRef idx="minor">
+                <a:schemeClr val="dk1"/>
+              </a:fontRef>
+            </p:style>
+            <p:txBody>
+              <a:bodyPr rtlCol="0" anchor="ctr"/>
+              <a:lstStyle/>
+              <a:p>
+                <a:pPr algn="ctr"/>
+                <a:endParaRPr lang="ru-RU"/>
+              </a:p>
+            </p:txBody>
+          </p:sp>
+          <p:sp>
+            <p:nvSpPr>
+              <p:cNvPr id="117" name="TextBox 116">
+                <a:extLst>
+                  <a:ext uri="{FF2B5EF4-FFF2-40B4-BE49-F238E27FC236}">
+                    <a16:creationId xmlns:a16="http://schemas.microsoft.com/office/drawing/2014/main" id="{A7A3EA35-8DA7-BA41-CD71-A9FA03B0ACFC}"/>
+                  </a:ext>
+                </a:extLst>
+              </p:cNvPr>
+              <p:cNvSpPr txBox="1"/>
+              <p:nvPr/>
+            </p:nvSpPr>
+            <p:spPr>
+              <a:xfrm>
+                <a:off x="3147616" y="266705"/>
+                <a:ext cx="1323301" cy="461665"/>
+              </a:xfrm>
+              <a:prstGeom prst="rect">
+                <a:avLst/>
+              </a:prstGeom>
+              <a:noFill/>
+            </p:spPr>
+            <p:txBody>
+              <a:bodyPr wrap="square" rtlCol="0">
+                <a:spAutoFit/>
+              </a:bodyPr>
+              <a:lstStyle/>
+              <a:p>
+                <a:pPr algn="ctr"/>
+                <a:r>
+                  <a:rPr lang="ru-RU" sz="1200" dirty="0"/>
+                  <a:t>Вывод списка пользователей</a:t>
+                </a:r>
+              </a:p>
+            </p:txBody>
+          </p:sp>
+        </p:grpSp>
+        <p:grpSp>
+          <p:nvGrpSpPr>
+            <p:cNvPr id="118" name="Группа 117">
+              <a:extLst>
+                <a:ext uri="{FF2B5EF4-FFF2-40B4-BE49-F238E27FC236}">
+                  <a16:creationId xmlns:a16="http://schemas.microsoft.com/office/drawing/2014/main" id="{79F502DC-5862-6752-5C49-9BFB7D222E2E}"/>
+                </a:ext>
+              </a:extLst>
+            </p:cNvPr>
+            <p:cNvGrpSpPr/>
+            <p:nvPr/>
+          </p:nvGrpSpPr>
+          <p:grpSpPr>
+            <a:xfrm>
+              <a:off x="10194494" y="2007129"/>
+              <a:ext cx="1715106" cy="1148423"/>
+              <a:chOff x="3132767" y="221301"/>
+              <a:chExt cx="1338150" cy="691735"/>
+            </a:xfrm>
+          </p:grpSpPr>
+          <p:sp>
+            <p:nvSpPr>
+              <p:cNvPr id="119" name="Прямоугольник 118">
+                <a:extLst>
+                  <a:ext uri="{FF2B5EF4-FFF2-40B4-BE49-F238E27FC236}">
+                    <a16:creationId xmlns:a16="http://schemas.microsoft.com/office/drawing/2014/main" id="{104D1880-5DB5-E5BC-0708-DD5C95BE94A2}"/>
+                  </a:ext>
+                </a:extLst>
+              </p:cNvPr>
+              <p:cNvSpPr/>
+              <p:nvPr/>
+            </p:nvSpPr>
+            <p:spPr>
+              <a:xfrm>
+                <a:off x="3132767" y="221301"/>
+                <a:ext cx="1330727" cy="438912"/>
+              </a:xfrm>
+              <a:prstGeom prst="rect">
+                <a:avLst/>
+              </a:prstGeom>
+            </p:spPr>
+            <p:style>
+              <a:lnRef idx="2">
+                <a:schemeClr val="dk1"/>
+              </a:lnRef>
+              <a:fillRef idx="1">
+                <a:schemeClr val="lt1"/>
+              </a:fillRef>
+              <a:effectRef idx="0">
+                <a:schemeClr val="dk1"/>
+              </a:effectRef>
+              <a:fontRef idx="minor">
+                <a:schemeClr val="dk1"/>
+              </a:fontRef>
+            </p:style>
+            <p:txBody>
+              <a:bodyPr rtlCol="0" anchor="ctr"/>
+              <a:lstStyle/>
+              <a:p>
+                <a:pPr algn="ctr"/>
+                <a:endParaRPr lang="ru-RU"/>
+              </a:p>
+            </p:txBody>
+          </p:sp>
+          <p:sp>
+            <p:nvSpPr>
+              <p:cNvPr id="120" name="TextBox 119">
+                <a:extLst>
+                  <a:ext uri="{FF2B5EF4-FFF2-40B4-BE49-F238E27FC236}">
+                    <a16:creationId xmlns:a16="http://schemas.microsoft.com/office/drawing/2014/main" id="{EBDDE23A-96EA-CA40-8025-9D7A67CD182D}"/>
+                  </a:ext>
+                </a:extLst>
+              </p:cNvPr>
+              <p:cNvSpPr txBox="1"/>
+              <p:nvPr/>
+            </p:nvSpPr>
+            <p:spPr>
+              <a:xfrm>
+                <a:off x="3147616" y="266705"/>
+                <a:ext cx="1323301" cy="646331"/>
+              </a:xfrm>
+              <a:prstGeom prst="rect">
+                <a:avLst/>
+              </a:prstGeom>
+              <a:noFill/>
+            </p:spPr>
+            <p:txBody>
+              <a:bodyPr wrap="square" rtlCol="0">
+                <a:spAutoFit/>
+              </a:bodyPr>
+              <a:lstStyle/>
+              <a:p>
+                <a:pPr algn="ctr"/>
+                <a:r>
+                  <a:rPr lang="ru-RU" sz="1200" dirty="0"/>
+                  <a:t>Блокировка учётных записей пользователей</a:t>
+                </a:r>
+              </a:p>
+            </p:txBody>
+          </p:sp>
+        </p:grpSp>
+        <p:grpSp>
+          <p:nvGrpSpPr>
+            <p:cNvPr id="121" name="Группа 120">
+              <a:extLst>
+                <a:ext uri="{FF2B5EF4-FFF2-40B4-BE49-F238E27FC236}">
+                  <a16:creationId xmlns:a16="http://schemas.microsoft.com/office/drawing/2014/main" id="{64302286-C6AB-2A3B-DC94-09A3E7234DA9}"/>
+                </a:ext>
+              </a:extLst>
+            </p:cNvPr>
+            <p:cNvGrpSpPr/>
+            <p:nvPr/>
+          </p:nvGrpSpPr>
+          <p:grpSpPr>
+            <a:xfrm>
+              <a:off x="10199250" y="2855389"/>
+              <a:ext cx="1724626" cy="490259"/>
+              <a:chOff x="3125339" y="238111"/>
+              <a:chExt cx="1345578" cy="490259"/>
+            </a:xfrm>
+          </p:grpSpPr>
+          <p:sp>
+            <p:nvSpPr>
+              <p:cNvPr id="122" name="Прямоугольник 121">
+                <a:extLst>
+                  <a:ext uri="{FF2B5EF4-FFF2-40B4-BE49-F238E27FC236}">
+                    <a16:creationId xmlns:a16="http://schemas.microsoft.com/office/drawing/2014/main" id="{7E48E41C-F73B-9A37-8E16-E37EE37AB4DD}"/>
+                  </a:ext>
+                </a:extLst>
+              </p:cNvPr>
+              <p:cNvSpPr/>
+              <p:nvPr/>
+            </p:nvSpPr>
+            <p:spPr>
+              <a:xfrm>
+                <a:off x="3125339" y="238111"/>
+                <a:ext cx="1330727" cy="438912"/>
+              </a:xfrm>
+              <a:prstGeom prst="rect">
+                <a:avLst/>
+              </a:prstGeom>
+            </p:spPr>
+            <p:style>
+              <a:lnRef idx="2">
+                <a:schemeClr val="dk1"/>
+              </a:lnRef>
+              <a:fillRef idx="1">
+                <a:schemeClr val="lt1"/>
+              </a:fillRef>
+              <a:effectRef idx="0">
+                <a:schemeClr val="dk1"/>
+              </a:effectRef>
+              <a:fontRef idx="minor">
+                <a:schemeClr val="dk1"/>
+              </a:fontRef>
+            </p:style>
+            <p:txBody>
+              <a:bodyPr rtlCol="0" anchor="ctr"/>
+              <a:lstStyle/>
+              <a:p>
+                <a:pPr algn="ctr"/>
+                <a:endParaRPr lang="ru-RU"/>
+              </a:p>
+            </p:txBody>
+          </p:sp>
+          <p:sp>
+            <p:nvSpPr>
+              <p:cNvPr id="123" name="TextBox 122">
+                <a:extLst>
+                  <a:ext uri="{FF2B5EF4-FFF2-40B4-BE49-F238E27FC236}">
+                    <a16:creationId xmlns:a16="http://schemas.microsoft.com/office/drawing/2014/main" id="{40489D4C-F3A2-1009-E5C2-4D3C593904E1}"/>
+                  </a:ext>
+                </a:extLst>
+              </p:cNvPr>
+              <p:cNvSpPr txBox="1"/>
+              <p:nvPr/>
+            </p:nvSpPr>
+            <p:spPr>
+              <a:xfrm>
+                <a:off x="3147616" y="266705"/>
+                <a:ext cx="1323301" cy="461665"/>
+              </a:xfrm>
+              <a:prstGeom prst="rect">
+                <a:avLst/>
+              </a:prstGeom>
+              <a:noFill/>
+            </p:spPr>
+            <p:txBody>
+              <a:bodyPr wrap="square" rtlCol="0">
+                <a:spAutoFit/>
+              </a:bodyPr>
+              <a:lstStyle/>
+              <a:p>
+                <a:pPr algn="ctr"/>
+                <a:r>
+                  <a:rPr lang="ru-RU" sz="1200" dirty="0"/>
+                  <a:t>Удаление пользователей</a:t>
+                </a:r>
+              </a:p>
+            </p:txBody>
+          </p:sp>
+        </p:grpSp>
+        <p:grpSp>
+          <p:nvGrpSpPr>
+            <p:cNvPr id="124" name="Группа 123">
+              <a:extLst>
+                <a:ext uri="{FF2B5EF4-FFF2-40B4-BE49-F238E27FC236}">
+                  <a16:creationId xmlns:a16="http://schemas.microsoft.com/office/drawing/2014/main" id="{3A594E63-3914-B928-F1A2-D545670DE86D}"/>
+                </a:ext>
+              </a:extLst>
+            </p:cNvPr>
+            <p:cNvGrpSpPr/>
+            <p:nvPr/>
+          </p:nvGrpSpPr>
+          <p:grpSpPr>
+            <a:xfrm>
+              <a:off x="10194492" y="3429000"/>
+              <a:ext cx="1715108" cy="438912"/>
+              <a:chOff x="3132765" y="185644"/>
+              <a:chExt cx="1338152" cy="438912"/>
+            </a:xfrm>
+          </p:grpSpPr>
+          <p:sp>
+            <p:nvSpPr>
+              <p:cNvPr id="125" name="Прямоугольник 124">
+                <a:extLst>
+                  <a:ext uri="{FF2B5EF4-FFF2-40B4-BE49-F238E27FC236}">
+                    <a16:creationId xmlns:a16="http://schemas.microsoft.com/office/drawing/2014/main" id="{9C471486-4ED4-2BD4-70A8-04F1C9EE1FB7}"/>
+                  </a:ext>
+                </a:extLst>
+              </p:cNvPr>
+              <p:cNvSpPr/>
+              <p:nvPr/>
+            </p:nvSpPr>
+            <p:spPr>
+              <a:xfrm>
+                <a:off x="3132765" y="185644"/>
+                <a:ext cx="1330727" cy="438912"/>
+              </a:xfrm>
+              <a:prstGeom prst="rect">
+                <a:avLst/>
+              </a:prstGeom>
+            </p:spPr>
+            <p:style>
+              <a:lnRef idx="2">
+                <a:schemeClr val="dk1"/>
+              </a:lnRef>
+              <a:fillRef idx="1">
+                <a:schemeClr val="lt1"/>
+              </a:fillRef>
+              <a:effectRef idx="0">
+                <a:schemeClr val="dk1"/>
+              </a:effectRef>
+              <a:fontRef idx="minor">
+                <a:schemeClr val="dk1"/>
+              </a:fontRef>
+            </p:style>
+            <p:txBody>
+              <a:bodyPr rtlCol="0" anchor="ctr"/>
+              <a:lstStyle/>
+              <a:p>
+                <a:pPr algn="ctr"/>
+                <a:endParaRPr lang="ru-RU"/>
+              </a:p>
+            </p:txBody>
+          </p:sp>
+          <p:sp>
+            <p:nvSpPr>
+              <p:cNvPr id="126" name="TextBox 125">
+                <a:extLst>
+                  <a:ext uri="{FF2B5EF4-FFF2-40B4-BE49-F238E27FC236}">
+                    <a16:creationId xmlns:a16="http://schemas.microsoft.com/office/drawing/2014/main" id="{AF2E2BA7-8588-023E-E304-35A30395FFD7}"/>
+                  </a:ext>
+                </a:extLst>
+              </p:cNvPr>
+              <p:cNvSpPr txBox="1"/>
+              <p:nvPr/>
+            </p:nvSpPr>
+            <p:spPr>
+              <a:xfrm>
+                <a:off x="3147616" y="266705"/>
+                <a:ext cx="1323301" cy="276999"/>
+              </a:xfrm>
+              <a:prstGeom prst="rect">
+                <a:avLst/>
+              </a:prstGeom>
+              <a:noFill/>
+            </p:spPr>
+            <p:txBody>
+              <a:bodyPr wrap="square" rtlCol="0">
+                <a:spAutoFit/>
+              </a:bodyPr>
+              <a:lstStyle/>
+              <a:p>
+                <a:r>
+                  <a:rPr lang="ru-RU" sz="1200" dirty="0"/>
+                  <a:t>Вывод логов системы</a:t>
+                </a:r>
+              </a:p>
+            </p:txBody>
+          </p:sp>
+        </p:grpSp>
+        <p:grpSp>
+          <p:nvGrpSpPr>
+            <p:cNvPr id="127" name="Группа 126">
+              <a:extLst>
+                <a:ext uri="{FF2B5EF4-FFF2-40B4-BE49-F238E27FC236}">
+                  <a16:creationId xmlns:a16="http://schemas.microsoft.com/office/drawing/2014/main" id="{E7820DEB-56C7-BF7A-E10E-B6A72C8456EF}"/>
+                </a:ext>
+              </a:extLst>
+            </p:cNvPr>
+            <p:cNvGrpSpPr/>
+            <p:nvPr/>
+          </p:nvGrpSpPr>
+          <p:grpSpPr>
+            <a:xfrm>
+              <a:off x="10194492" y="4032817"/>
+              <a:ext cx="1715108" cy="438912"/>
+              <a:chOff x="3132765" y="185644"/>
+              <a:chExt cx="1338152" cy="438912"/>
+            </a:xfrm>
+          </p:grpSpPr>
+          <p:sp>
+            <p:nvSpPr>
+              <p:cNvPr id="128" name="Прямоугольник 127">
+                <a:extLst>
+                  <a:ext uri="{FF2B5EF4-FFF2-40B4-BE49-F238E27FC236}">
+                    <a16:creationId xmlns:a16="http://schemas.microsoft.com/office/drawing/2014/main" id="{F7950E21-15B0-429D-E778-ABF446C1B10E}"/>
+                  </a:ext>
+                </a:extLst>
+              </p:cNvPr>
+              <p:cNvSpPr/>
+              <p:nvPr/>
+            </p:nvSpPr>
+            <p:spPr>
+              <a:xfrm>
+                <a:off x="3132765" y="185644"/>
+                <a:ext cx="1330727" cy="438912"/>
+              </a:xfrm>
+              <a:prstGeom prst="rect">
+                <a:avLst/>
+              </a:prstGeom>
+            </p:spPr>
+            <p:style>
+              <a:lnRef idx="2">
+                <a:schemeClr val="dk1"/>
+              </a:lnRef>
+              <a:fillRef idx="1">
+                <a:schemeClr val="lt1"/>
+              </a:fillRef>
+              <a:effectRef idx="0">
+                <a:schemeClr val="dk1"/>
+              </a:effectRef>
+              <a:fontRef idx="minor">
+                <a:schemeClr val="dk1"/>
+              </a:fontRef>
+            </p:style>
+            <p:txBody>
+              <a:bodyPr rtlCol="0" anchor="ctr"/>
+              <a:lstStyle/>
+              <a:p>
+                <a:pPr algn="ctr"/>
+                <a:endParaRPr lang="ru-RU"/>
+              </a:p>
+            </p:txBody>
+          </p:sp>
+          <p:sp>
+            <p:nvSpPr>
+              <p:cNvPr id="129" name="TextBox 128">
+                <a:extLst>
+                  <a:ext uri="{FF2B5EF4-FFF2-40B4-BE49-F238E27FC236}">
+                    <a16:creationId xmlns:a16="http://schemas.microsoft.com/office/drawing/2014/main" id="{731EDDA3-6486-FE41-6B9F-034B636B22F4}"/>
+                  </a:ext>
+                </a:extLst>
+              </p:cNvPr>
+              <p:cNvSpPr txBox="1"/>
+              <p:nvPr/>
+            </p:nvSpPr>
+            <p:spPr>
+              <a:xfrm>
+                <a:off x="3147616" y="266705"/>
+                <a:ext cx="1323301" cy="276999"/>
+              </a:xfrm>
+              <a:prstGeom prst="rect">
+                <a:avLst/>
+              </a:prstGeom>
+              <a:noFill/>
+            </p:spPr>
+            <p:txBody>
+              <a:bodyPr wrap="square" rtlCol="0">
+                <a:spAutoFit/>
+              </a:bodyPr>
+              <a:lstStyle/>
+              <a:p>
+                <a:pPr algn="ctr"/>
+                <a:r>
+                  <a:rPr lang="ru-RU" sz="1200" dirty="0"/>
+                  <a:t>Запуск обновления</a:t>
+                </a:r>
+              </a:p>
+            </p:txBody>
+          </p:sp>
+        </p:grpSp>
+        <p:cxnSp>
+          <p:nvCxnSpPr>
+            <p:cNvPr id="131" name="Прямая со стрелкой 130">
+              <a:extLst>
+                <a:ext uri="{FF2B5EF4-FFF2-40B4-BE49-F238E27FC236}">
+                  <a16:creationId xmlns:a16="http://schemas.microsoft.com/office/drawing/2014/main" id="{06B90C8B-2C87-A8AD-CF0E-6B2706670F70}"/>
+                </a:ext>
+              </a:extLst>
+            </p:cNvPr>
+            <p:cNvCxnSpPr>
+              <a:stCxn id="9" idx="6"/>
+              <a:endCxn id="112" idx="1"/>
+            </p:cNvCxnSpPr>
+            <p:nvPr/>
+          </p:nvCxnSpPr>
+          <p:spPr>
+            <a:xfrm flipV="1">
+              <a:off x="8801403" y="761961"/>
+              <a:ext cx="1374054" cy="2379917"/>
+            </a:xfrm>
+            <a:prstGeom prst="straightConnector1">
+              <a:avLst/>
+            </a:prstGeom>
+            <a:ln>
+              <a:tailEnd type="triangle"/>
+            </a:ln>
+          </p:spPr>
+          <p:style>
+            <a:lnRef idx="1">
+              <a:schemeClr val="dk1"/>
+            </a:lnRef>
+            <a:fillRef idx="0">
+              <a:schemeClr val="dk1"/>
+            </a:fillRef>
+            <a:effectRef idx="0">
+              <a:schemeClr val="dk1"/>
+            </a:effectRef>
+            <a:fontRef idx="minor">
+              <a:schemeClr val="tx1"/>
+            </a:fontRef>
+          </p:style>
+        </p:cxnSp>
+        <p:cxnSp>
+          <p:nvCxnSpPr>
+            <p:cNvPr id="133" name="Прямая со стрелкой 132">
+              <a:extLst>
+                <a:ext uri="{FF2B5EF4-FFF2-40B4-BE49-F238E27FC236}">
+                  <a16:creationId xmlns:a16="http://schemas.microsoft.com/office/drawing/2014/main" id="{010B91F2-A572-C832-AB66-2DAA9E0C3C54}"/>
+                </a:ext>
+              </a:extLst>
+            </p:cNvPr>
+            <p:cNvCxnSpPr>
+              <a:stCxn id="9" idx="6"/>
+            </p:cNvCxnSpPr>
+            <p:nvPr/>
+          </p:nvCxnSpPr>
+          <p:spPr>
+            <a:xfrm flipV="1">
+              <a:off x="8801403" y="1521562"/>
+              <a:ext cx="1374054" cy="1620316"/>
+            </a:xfrm>
+            <a:prstGeom prst="straightConnector1">
+              <a:avLst/>
+            </a:prstGeom>
+            <a:ln>
+              <a:tailEnd type="triangle"/>
+            </a:ln>
+          </p:spPr>
+          <p:style>
+            <a:lnRef idx="1">
+              <a:schemeClr val="dk1"/>
+            </a:lnRef>
+            <a:fillRef idx="0">
+              <a:schemeClr val="dk1"/>
+            </a:fillRef>
+            <a:effectRef idx="0">
+              <a:schemeClr val="dk1"/>
+            </a:effectRef>
+            <a:fontRef idx="minor">
+              <a:schemeClr val="tx1"/>
+            </a:fontRef>
+          </p:style>
+        </p:cxnSp>
+        <p:cxnSp>
+          <p:nvCxnSpPr>
+            <p:cNvPr id="135" name="Прямая со стрелкой 134">
+              <a:extLst>
+                <a:ext uri="{FF2B5EF4-FFF2-40B4-BE49-F238E27FC236}">
+                  <a16:creationId xmlns:a16="http://schemas.microsoft.com/office/drawing/2014/main" id="{AD62EBD0-B078-DF5E-D565-C2FD3A98160C}"/>
+                </a:ext>
+              </a:extLst>
+            </p:cNvPr>
+            <p:cNvCxnSpPr>
+              <a:stCxn id="9" idx="6"/>
+            </p:cNvCxnSpPr>
+            <p:nvPr/>
+          </p:nvCxnSpPr>
+          <p:spPr>
+            <a:xfrm flipV="1">
+              <a:off x="8801403" y="2371471"/>
+              <a:ext cx="1374054" cy="770407"/>
+            </a:xfrm>
+            <a:prstGeom prst="straightConnector1">
+              <a:avLst/>
+            </a:prstGeom>
+            <a:ln>
+              <a:tailEnd type="triangle"/>
+            </a:ln>
+          </p:spPr>
+          <p:style>
+            <a:lnRef idx="1">
+              <a:schemeClr val="dk1"/>
+            </a:lnRef>
+            <a:fillRef idx="0">
+              <a:schemeClr val="dk1"/>
+            </a:fillRef>
+            <a:effectRef idx="0">
+              <a:schemeClr val="dk1"/>
+            </a:effectRef>
+            <a:fontRef idx="minor">
+              <a:schemeClr val="tx1"/>
+            </a:fontRef>
+          </p:style>
+        </p:cxnSp>
+        <p:cxnSp>
+          <p:nvCxnSpPr>
+            <p:cNvPr id="137" name="Прямая со стрелкой 136">
+              <a:extLst>
+                <a:ext uri="{FF2B5EF4-FFF2-40B4-BE49-F238E27FC236}">
+                  <a16:creationId xmlns:a16="http://schemas.microsoft.com/office/drawing/2014/main" id="{D53F3B6F-CF07-00E5-C810-60A15E47F699}"/>
+                </a:ext>
+              </a:extLst>
+            </p:cNvPr>
+            <p:cNvCxnSpPr>
+              <a:stCxn id="9" idx="6"/>
+              <a:endCxn id="122" idx="1"/>
+            </p:cNvCxnSpPr>
+            <p:nvPr/>
+          </p:nvCxnSpPr>
+          <p:spPr>
+            <a:xfrm flipV="1">
+              <a:off x="8801403" y="3114816"/>
+              <a:ext cx="1426399" cy="27062"/>
+            </a:xfrm>
+            <a:prstGeom prst="straightConnector1">
+              <a:avLst/>
+            </a:prstGeom>
+            <a:ln>
+              <a:tailEnd type="triangle"/>
+            </a:ln>
+          </p:spPr>
+          <p:style>
+            <a:lnRef idx="1">
+              <a:schemeClr val="dk1"/>
+            </a:lnRef>
+            <a:fillRef idx="0">
+              <a:schemeClr val="dk1"/>
+            </a:fillRef>
+            <a:effectRef idx="0">
+              <a:schemeClr val="dk1"/>
+            </a:effectRef>
+            <a:fontRef idx="minor">
+              <a:schemeClr val="tx1"/>
+            </a:fontRef>
+          </p:style>
+        </p:cxnSp>
+        <p:cxnSp>
+          <p:nvCxnSpPr>
+            <p:cNvPr id="139" name="Прямая со стрелкой 138">
+              <a:extLst>
+                <a:ext uri="{FF2B5EF4-FFF2-40B4-BE49-F238E27FC236}">
+                  <a16:creationId xmlns:a16="http://schemas.microsoft.com/office/drawing/2014/main" id="{90125AB2-7104-F5F9-C18B-AA2FFD81E829}"/>
+                </a:ext>
+              </a:extLst>
+            </p:cNvPr>
+            <p:cNvCxnSpPr>
+              <a:stCxn id="9" idx="6"/>
+              <a:endCxn id="126" idx="1"/>
+            </p:cNvCxnSpPr>
+            <p:nvPr/>
+          </p:nvCxnSpPr>
+          <p:spPr>
+            <a:xfrm>
+              <a:off x="8801403" y="3141878"/>
+              <a:ext cx="1412124" cy="506683"/>
+            </a:xfrm>
+            <a:prstGeom prst="straightConnector1">
+              <a:avLst/>
+            </a:prstGeom>
+            <a:ln>
+              <a:tailEnd type="triangle"/>
+            </a:ln>
+          </p:spPr>
+          <p:style>
+            <a:lnRef idx="1">
+              <a:schemeClr val="dk1"/>
+            </a:lnRef>
+            <a:fillRef idx="0">
+              <a:schemeClr val="dk1"/>
+            </a:fillRef>
+            <a:effectRef idx="0">
+              <a:schemeClr val="dk1"/>
+            </a:effectRef>
+            <a:fontRef idx="minor">
+              <a:schemeClr val="tx1"/>
+            </a:fontRef>
+          </p:style>
+        </p:cxnSp>
+        <p:cxnSp>
+          <p:nvCxnSpPr>
+            <p:cNvPr id="141" name="Прямая со стрелкой 140">
+              <a:extLst>
+                <a:ext uri="{FF2B5EF4-FFF2-40B4-BE49-F238E27FC236}">
+                  <a16:creationId xmlns:a16="http://schemas.microsoft.com/office/drawing/2014/main" id="{1D7CE346-08B2-22CD-182A-C4367B9B37DB}"/>
+                </a:ext>
+              </a:extLst>
+            </p:cNvPr>
+            <p:cNvCxnSpPr>
+              <a:stCxn id="9" idx="6"/>
+              <a:endCxn id="129" idx="1"/>
+            </p:cNvCxnSpPr>
+            <p:nvPr/>
+          </p:nvCxnSpPr>
+          <p:spPr>
+            <a:xfrm>
+              <a:off x="8801403" y="3141878"/>
+              <a:ext cx="1412124" cy="1110500"/>
+            </a:xfrm>
+            <a:prstGeom prst="straightConnector1">
+              <a:avLst/>
+            </a:prstGeom>
+            <a:ln>
+              <a:tailEnd type="triangle"/>
+            </a:ln>
+          </p:spPr>
+          <p:style>
+            <a:lnRef idx="1">
+              <a:schemeClr val="dk1"/>
+            </a:lnRef>
+            <a:fillRef idx="0">
+              <a:schemeClr val="dk1"/>
+            </a:fillRef>
+            <a:effectRef idx="0">
+              <a:schemeClr val="dk1"/>
+            </a:effectRef>
+            <a:fontRef idx="minor">
+              <a:schemeClr val="tx1"/>
+            </a:fontRef>
+          </p:style>
+        </p:cxnSp>
+      </p:grpSp>
     </p:spTree>
     <p:extLst>
       <p:ext uri="{BB962C8B-B14F-4D97-AF65-F5344CB8AC3E}">

--- a/Документы/Декомпозиция.pptx
+++ b/Документы/Декомпозиция.pptx
@@ -260,7 +260,7 @@
           <a:p>
             <a:fld id="{B739FDE5-2F62-4046-A005-6DEA85331DA5}" type="datetimeFigureOut">
               <a:rPr lang="ru-RU" smtClean="0"/>
-              <a:t>06.05.2026</a:t>
+              <a:t>13.05.2026</a:t>
             </a:fld>
             <a:endParaRPr lang="ru-RU"/>
           </a:p>
@@ -458,7 +458,7 @@
           <a:p>
             <a:fld id="{B739FDE5-2F62-4046-A005-6DEA85331DA5}" type="datetimeFigureOut">
               <a:rPr lang="ru-RU" smtClean="0"/>
-              <a:t>06.05.2026</a:t>
+              <a:t>13.05.2026</a:t>
             </a:fld>
             <a:endParaRPr lang="ru-RU"/>
           </a:p>
@@ -666,7 +666,7 @@
           <a:p>
             <a:fld id="{B739FDE5-2F62-4046-A005-6DEA85331DA5}" type="datetimeFigureOut">
               <a:rPr lang="ru-RU" smtClean="0"/>
-              <a:t>06.05.2026</a:t>
+              <a:t>13.05.2026</a:t>
             </a:fld>
             <a:endParaRPr lang="ru-RU"/>
           </a:p>
@@ -864,7 +864,7 @@
           <a:p>
             <a:fld id="{B739FDE5-2F62-4046-A005-6DEA85331DA5}" type="datetimeFigureOut">
               <a:rPr lang="ru-RU" smtClean="0"/>
-              <a:t>06.05.2026</a:t>
+              <a:t>13.05.2026</a:t>
             </a:fld>
             <a:endParaRPr lang="ru-RU"/>
           </a:p>
@@ -1139,7 +1139,7 @@
           <a:p>
             <a:fld id="{B739FDE5-2F62-4046-A005-6DEA85331DA5}" type="datetimeFigureOut">
               <a:rPr lang="ru-RU" smtClean="0"/>
-              <a:t>06.05.2026</a:t>
+              <a:t>13.05.2026</a:t>
             </a:fld>
             <a:endParaRPr lang="ru-RU"/>
           </a:p>
@@ -1404,7 +1404,7 @@
           <a:p>
             <a:fld id="{B739FDE5-2F62-4046-A005-6DEA85331DA5}" type="datetimeFigureOut">
               <a:rPr lang="ru-RU" smtClean="0"/>
-              <a:t>06.05.2026</a:t>
+              <a:t>13.05.2026</a:t>
             </a:fld>
             <a:endParaRPr lang="ru-RU"/>
           </a:p>
@@ -1816,7 +1816,7 @@
           <a:p>
             <a:fld id="{B739FDE5-2F62-4046-A005-6DEA85331DA5}" type="datetimeFigureOut">
               <a:rPr lang="ru-RU" smtClean="0"/>
-              <a:t>06.05.2026</a:t>
+              <a:t>13.05.2026</a:t>
             </a:fld>
             <a:endParaRPr lang="ru-RU"/>
           </a:p>
@@ -1957,7 +1957,7 @@
           <a:p>
             <a:fld id="{B739FDE5-2F62-4046-A005-6DEA85331DA5}" type="datetimeFigureOut">
               <a:rPr lang="ru-RU" smtClean="0"/>
-              <a:t>06.05.2026</a:t>
+              <a:t>13.05.2026</a:t>
             </a:fld>
             <a:endParaRPr lang="ru-RU"/>
           </a:p>
@@ -2070,7 +2070,7 @@
           <a:p>
             <a:fld id="{B739FDE5-2F62-4046-A005-6DEA85331DA5}" type="datetimeFigureOut">
               <a:rPr lang="ru-RU" smtClean="0"/>
-              <a:t>06.05.2026</a:t>
+              <a:t>13.05.2026</a:t>
             </a:fld>
             <a:endParaRPr lang="ru-RU"/>
           </a:p>
@@ -2381,7 +2381,7 @@
           <a:p>
             <a:fld id="{B739FDE5-2F62-4046-A005-6DEA85331DA5}" type="datetimeFigureOut">
               <a:rPr lang="ru-RU" smtClean="0"/>
-              <a:t>06.05.2026</a:t>
+              <a:t>13.05.2026</a:t>
             </a:fld>
             <a:endParaRPr lang="ru-RU"/>
           </a:p>
@@ -2669,7 +2669,7 @@
           <a:p>
             <a:fld id="{B739FDE5-2F62-4046-A005-6DEA85331DA5}" type="datetimeFigureOut">
               <a:rPr lang="ru-RU" smtClean="0"/>
-              <a:t>06.05.2026</a:t>
+              <a:t>13.05.2026</a:t>
             </a:fld>
             <a:endParaRPr lang="ru-RU"/>
           </a:p>
@@ -2910,7 +2910,7 @@
           <a:p>
             <a:fld id="{B739FDE5-2F62-4046-A005-6DEA85331DA5}" type="datetimeFigureOut">
               <a:rPr lang="ru-RU" smtClean="0"/>
-              <a:t>06.05.2026</a:t>
+              <a:t>13.05.2026</a:t>
             </a:fld>
             <a:endParaRPr lang="ru-RU"/>
           </a:p>
@@ -3409,10 +3409,10 @@
       </p:grpSpPr>
       <p:grpSp>
         <p:nvGrpSpPr>
-          <p:cNvPr id="142" name="Группа 141">
+          <p:cNvPr id="12" name="Группа 11">
             <a:extLst>
               <a:ext uri="{FF2B5EF4-FFF2-40B4-BE49-F238E27FC236}">
-                <a16:creationId xmlns:a16="http://schemas.microsoft.com/office/drawing/2014/main" id="{0BE605FC-9117-BF8F-69CF-24A8B23CC85A}"/>
+                <a16:creationId xmlns:a16="http://schemas.microsoft.com/office/drawing/2014/main" id="{2A6A040F-D257-D1CA-5717-04F2E6E166A5}"/>
               </a:ext>
             </a:extLst>
           </p:cNvPr>
@@ -3427,12 +3427,3211 @@
             <a:chExt cx="11439753" cy="6308486"/>
           </a:xfrm>
         </p:grpSpPr>
+        <p:grpSp>
+          <p:nvGrpSpPr>
+            <p:cNvPr id="142" name="Группа 141">
+              <a:extLst>
+                <a:ext uri="{FF2B5EF4-FFF2-40B4-BE49-F238E27FC236}">
+                  <a16:creationId xmlns:a16="http://schemas.microsoft.com/office/drawing/2014/main" id="{0BE605FC-9117-BF8F-69CF-24A8B23CC85A}"/>
+                </a:ext>
+              </a:extLst>
+            </p:cNvPr>
+            <p:cNvGrpSpPr/>
+            <p:nvPr/>
+          </p:nvGrpSpPr>
+          <p:grpSpPr>
+            <a:xfrm>
+              <a:off x="484123" y="185644"/>
+              <a:ext cx="11439753" cy="6308486"/>
+              <a:chOff x="484123" y="185644"/>
+              <a:chExt cx="11439753" cy="6308486"/>
+            </a:xfrm>
+          </p:grpSpPr>
+          <p:sp>
+            <p:nvSpPr>
+              <p:cNvPr id="2" name="Овал 1">
+                <a:extLst>
+                  <a:ext uri="{FF2B5EF4-FFF2-40B4-BE49-F238E27FC236}">
+                    <a16:creationId xmlns:a16="http://schemas.microsoft.com/office/drawing/2014/main" id="{906B369C-D05E-DA97-AB75-879183D56AF4}"/>
+                  </a:ext>
+                </a:extLst>
+              </p:cNvPr>
+              <p:cNvSpPr/>
+              <p:nvPr/>
+            </p:nvSpPr>
+            <p:spPr>
+              <a:xfrm>
+                <a:off x="5159654" y="2670048"/>
+                <a:ext cx="1872691" cy="943661"/>
+              </a:xfrm>
+              <a:prstGeom prst="ellipse">
+                <a:avLst/>
+              </a:prstGeom>
+            </p:spPr>
+            <p:style>
+              <a:lnRef idx="2">
+                <a:schemeClr val="dk1"/>
+              </a:lnRef>
+              <a:fillRef idx="1">
+                <a:schemeClr val="lt1"/>
+              </a:fillRef>
+              <a:effectRef idx="0">
+                <a:schemeClr val="dk1"/>
+              </a:effectRef>
+              <a:fontRef idx="minor">
+                <a:schemeClr val="dk1"/>
+              </a:fontRef>
+            </p:style>
+            <p:txBody>
+              <a:bodyPr rtlCol="0" anchor="ctr"/>
+              <a:lstStyle/>
+              <a:p>
+                <a:pPr algn="ctr"/>
+                <a:r>
+                  <a:rPr lang="ru-RU" sz="1600" dirty="0">
+                    <a:ln w="0"/>
+                    <a:solidFill>
+                      <a:schemeClr val="tx1"/>
+                    </a:solidFill>
+                    <a:effectLst>
+                      <a:outerShdw blurRad="38100" dist="19050" dir="2700000" algn="tl" rotWithShape="0">
+                        <a:schemeClr val="dk1">
+                          <a:alpha val="40000"/>
+                        </a:schemeClr>
+                      </a:outerShdw>
+                    </a:effectLst>
+                  </a:rPr>
+                  <a:t>Команды</a:t>
+                </a:r>
+                <a:endParaRPr lang="ru-RU" sz="1600" dirty="0"/>
+              </a:p>
+            </p:txBody>
+          </p:sp>
+          <p:sp>
+            <p:nvSpPr>
+              <p:cNvPr id="6" name="Овал 5">
+                <a:extLst>
+                  <a:ext uri="{FF2B5EF4-FFF2-40B4-BE49-F238E27FC236}">
+                    <a16:creationId xmlns:a16="http://schemas.microsoft.com/office/drawing/2014/main" id="{A711FD26-26B8-8FC3-1B0B-DE146F5CF4E3}"/>
+                  </a:ext>
+                </a:extLst>
+              </p:cNvPr>
+              <p:cNvSpPr/>
+              <p:nvPr/>
+            </p:nvSpPr>
+            <p:spPr>
+              <a:xfrm>
+                <a:off x="5552236" y="1253337"/>
+                <a:ext cx="1072896" cy="943661"/>
+              </a:xfrm>
+              <a:prstGeom prst="ellipse">
+                <a:avLst/>
+              </a:prstGeom>
+            </p:spPr>
+            <p:style>
+              <a:lnRef idx="2">
+                <a:schemeClr val="dk1"/>
+              </a:lnRef>
+              <a:fillRef idx="1">
+                <a:schemeClr val="lt1"/>
+              </a:fillRef>
+              <a:effectRef idx="0">
+                <a:schemeClr val="dk1"/>
+              </a:effectRef>
+              <a:fontRef idx="minor">
+                <a:schemeClr val="dk1"/>
+              </a:fontRef>
+            </p:style>
+            <p:txBody>
+              <a:bodyPr rtlCol="0" anchor="ctr"/>
+              <a:lstStyle/>
+              <a:p>
+                <a:pPr algn="ctr"/>
+                <a:r>
+                  <a:rPr lang="en-US" sz="1600" dirty="0">
+                    <a:ln w="0"/>
+                    <a:solidFill>
+                      <a:schemeClr val="tx1"/>
+                    </a:solidFill>
+                    <a:effectLst>
+                      <a:outerShdw blurRad="38100" dist="19050" dir="2700000" algn="tl" rotWithShape="0">
+                        <a:schemeClr val="dk1">
+                          <a:alpha val="40000"/>
+                        </a:schemeClr>
+                      </a:outerShdw>
+                    </a:effectLst>
+                  </a:rPr>
+                  <a:t>All</a:t>
+                </a:r>
+                <a:endParaRPr lang="ru-RU" sz="1600" dirty="0"/>
+              </a:p>
+            </p:txBody>
+          </p:sp>
+          <p:sp>
+            <p:nvSpPr>
+              <p:cNvPr id="7" name="Овал 6">
+                <a:extLst>
+                  <a:ext uri="{FF2B5EF4-FFF2-40B4-BE49-F238E27FC236}">
+                    <a16:creationId xmlns:a16="http://schemas.microsoft.com/office/drawing/2014/main" id="{3516C54A-B370-56F5-4574-68E7A910A76C}"/>
+                  </a:ext>
+                </a:extLst>
+              </p:cNvPr>
+              <p:cNvSpPr/>
+              <p:nvPr/>
+            </p:nvSpPr>
+            <p:spPr>
+              <a:xfrm>
+                <a:off x="3390596" y="2670046"/>
+                <a:ext cx="1072896" cy="943661"/>
+              </a:xfrm>
+              <a:prstGeom prst="ellipse">
+                <a:avLst/>
+              </a:prstGeom>
+            </p:spPr>
+            <p:style>
+              <a:lnRef idx="2">
+                <a:schemeClr val="dk1"/>
+              </a:lnRef>
+              <a:fillRef idx="1">
+                <a:schemeClr val="lt1"/>
+              </a:fillRef>
+              <a:effectRef idx="0">
+                <a:schemeClr val="dk1"/>
+              </a:effectRef>
+              <a:fontRef idx="minor">
+                <a:schemeClr val="dk1"/>
+              </a:fontRef>
+            </p:style>
+            <p:txBody>
+              <a:bodyPr rtlCol="0" anchor="ctr"/>
+              <a:lstStyle/>
+              <a:p>
+                <a:pPr algn="ctr"/>
+                <a:r>
+                  <a:rPr lang="en-US" sz="1600" dirty="0">
+                    <a:ln w="0"/>
+                    <a:solidFill>
+                      <a:schemeClr val="tx1"/>
+                    </a:solidFill>
+                    <a:effectLst>
+                      <a:outerShdw blurRad="38100" dist="19050" dir="2700000" algn="tl" rotWithShape="0">
+                        <a:schemeClr val="dk1">
+                          <a:alpha val="40000"/>
+                        </a:schemeClr>
+                      </a:outerShdw>
+                    </a:effectLst>
+                  </a:rPr>
+                  <a:t>User</a:t>
+                </a:r>
+                <a:endParaRPr lang="ru-RU" sz="1600" dirty="0"/>
+              </a:p>
+            </p:txBody>
+          </p:sp>
+          <p:sp>
+            <p:nvSpPr>
+              <p:cNvPr id="8" name="Овал 7">
+                <a:extLst>
+                  <a:ext uri="{FF2B5EF4-FFF2-40B4-BE49-F238E27FC236}">
+                    <a16:creationId xmlns:a16="http://schemas.microsoft.com/office/drawing/2014/main" id="{4B53E917-5FCC-A9A3-ADE8-B642A6DFC134}"/>
+                  </a:ext>
+                </a:extLst>
+              </p:cNvPr>
+              <p:cNvSpPr/>
+              <p:nvPr/>
+            </p:nvSpPr>
+            <p:spPr>
+              <a:xfrm>
+                <a:off x="5559551" y="4220870"/>
+                <a:ext cx="1072896" cy="943661"/>
+              </a:xfrm>
+              <a:prstGeom prst="ellipse">
+                <a:avLst/>
+              </a:prstGeom>
+            </p:spPr>
+            <p:style>
+              <a:lnRef idx="2">
+                <a:schemeClr val="dk1"/>
+              </a:lnRef>
+              <a:fillRef idx="1">
+                <a:schemeClr val="lt1"/>
+              </a:fillRef>
+              <a:effectRef idx="0">
+                <a:schemeClr val="dk1"/>
+              </a:effectRef>
+              <a:fontRef idx="minor">
+                <a:schemeClr val="dk1"/>
+              </a:fontRef>
+            </p:style>
+            <p:txBody>
+              <a:bodyPr rtlCol="0" anchor="ctr"/>
+              <a:lstStyle/>
+              <a:p>
+                <a:pPr algn="ctr"/>
+                <a:r>
+                  <a:rPr lang="en-US" sz="1050" dirty="0" err="1">
+                    <a:ln w="0"/>
+                    <a:solidFill>
+                      <a:schemeClr val="tx1"/>
+                    </a:solidFill>
+                    <a:effectLst>
+                      <a:outerShdw blurRad="38100" dist="19050" dir="2700000" algn="tl" rotWithShape="0">
+                        <a:schemeClr val="dk1">
+                          <a:alpha val="40000"/>
+                        </a:schemeClr>
+                      </a:outerShdw>
+                    </a:effectLst>
+                  </a:rPr>
+                  <a:t>WatchDog</a:t>
+                </a:r>
+                <a:endParaRPr lang="ru-RU" sz="1600" dirty="0"/>
+              </a:p>
+            </p:txBody>
+          </p:sp>
+          <p:sp>
+            <p:nvSpPr>
+              <p:cNvPr id="9" name="Овал 8">
+                <a:extLst>
+                  <a:ext uri="{FF2B5EF4-FFF2-40B4-BE49-F238E27FC236}">
+                    <a16:creationId xmlns:a16="http://schemas.microsoft.com/office/drawing/2014/main" id="{37519999-932B-8810-DF43-42CFCB58FE65}"/>
+                  </a:ext>
+                </a:extLst>
+              </p:cNvPr>
+              <p:cNvSpPr/>
+              <p:nvPr/>
+            </p:nvSpPr>
+            <p:spPr>
+              <a:xfrm>
+                <a:off x="7728507" y="2670047"/>
+                <a:ext cx="1072896" cy="943661"/>
+              </a:xfrm>
+              <a:prstGeom prst="ellipse">
+                <a:avLst/>
+              </a:prstGeom>
+            </p:spPr>
+            <p:style>
+              <a:lnRef idx="2">
+                <a:schemeClr val="dk1"/>
+              </a:lnRef>
+              <a:fillRef idx="1">
+                <a:schemeClr val="lt1"/>
+              </a:fillRef>
+              <a:effectRef idx="0">
+                <a:schemeClr val="dk1"/>
+              </a:effectRef>
+              <a:fontRef idx="minor">
+                <a:schemeClr val="dk1"/>
+              </a:fontRef>
+            </p:style>
+            <p:txBody>
+              <a:bodyPr rtlCol="0" anchor="ctr"/>
+              <a:lstStyle/>
+              <a:p>
+                <a:pPr algn="ctr"/>
+                <a:r>
+                  <a:rPr lang="en-US" sz="1600" dirty="0">
+                    <a:ln w="0"/>
+                    <a:solidFill>
+                      <a:schemeClr val="tx1"/>
+                    </a:solidFill>
+                    <a:effectLst>
+                      <a:outerShdw blurRad="38100" dist="19050" dir="2700000" algn="tl" rotWithShape="0">
+                        <a:schemeClr val="dk1">
+                          <a:alpha val="40000"/>
+                        </a:schemeClr>
+                      </a:outerShdw>
+                    </a:effectLst>
+                  </a:rPr>
+                  <a:t>Admin</a:t>
+                </a:r>
+                <a:endParaRPr lang="ru-RU" sz="1600" dirty="0"/>
+              </a:p>
+            </p:txBody>
+          </p:sp>
+          <p:cxnSp>
+            <p:nvCxnSpPr>
+              <p:cNvPr id="11" name="Прямая со стрелкой 10">
+                <a:extLst>
+                  <a:ext uri="{FF2B5EF4-FFF2-40B4-BE49-F238E27FC236}">
+                    <a16:creationId xmlns:a16="http://schemas.microsoft.com/office/drawing/2014/main" id="{167E1656-DFDF-C77A-314F-720A1E19243A}"/>
+                  </a:ext>
+                </a:extLst>
+              </p:cNvPr>
+              <p:cNvCxnSpPr>
+                <a:stCxn id="2" idx="0"/>
+                <a:endCxn id="6" idx="4"/>
+              </p:cNvCxnSpPr>
+              <p:nvPr/>
+            </p:nvCxnSpPr>
+            <p:spPr>
+              <a:xfrm flipH="1" flipV="1">
+                <a:off x="6088684" y="2196998"/>
+                <a:ext cx="7316" cy="473050"/>
+              </a:xfrm>
+              <a:prstGeom prst="straightConnector1">
+                <a:avLst/>
+              </a:prstGeom>
+              <a:ln>
+                <a:tailEnd type="triangle"/>
+              </a:ln>
+            </p:spPr>
+            <p:style>
+              <a:lnRef idx="2">
+                <a:schemeClr val="dk1"/>
+              </a:lnRef>
+              <a:fillRef idx="0">
+                <a:schemeClr val="dk1"/>
+              </a:fillRef>
+              <a:effectRef idx="1">
+                <a:schemeClr val="dk1"/>
+              </a:effectRef>
+              <a:fontRef idx="minor">
+                <a:schemeClr val="tx1"/>
+              </a:fontRef>
+            </p:style>
+          </p:cxnSp>
+          <p:cxnSp>
+            <p:nvCxnSpPr>
+              <p:cNvPr id="13" name="Прямая со стрелкой 12">
+                <a:extLst>
+                  <a:ext uri="{FF2B5EF4-FFF2-40B4-BE49-F238E27FC236}">
+                    <a16:creationId xmlns:a16="http://schemas.microsoft.com/office/drawing/2014/main" id="{FEB5EA88-2926-6A10-799B-93DEAFB596DD}"/>
+                  </a:ext>
+                </a:extLst>
+              </p:cNvPr>
+              <p:cNvCxnSpPr>
+                <a:stCxn id="2" idx="6"/>
+                <a:endCxn id="9" idx="2"/>
+              </p:cNvCxnSpPr>
+              <p:nvPr/>
+            </p:nvCxnSpPr>
+            <p:spPr>
+              <a:xfrm flipV="1">
+                <a:off x="7032345" y="3141878"/>
+                <a:ext cx="696162" cy="1"/>
+              </a:xfrm>
+              <a:prstGeom prst="straightConnector1">
+                <a:avLst/>
+              </a:prstGeom>
+              <a:ln>
+                <a:tailEnd type="triangle"/>
+              </a:ln>
+            </p:spPr>
+            <p:style>
+              <a:lnRef idx="2">
+                <a:schemeClr val="dk1"/>
+              </a:lnRef>
+              <a:fillRef idx="0">
+                <a:schemeClr val="dk1"/>
+              </a:fillRef>
+              <a:effectRef idx="1">
+                <a:schemeClr val="dk1"/>
+              </a:effectRef>
+              <a:fontRef idx="minor">
+                <a:schemeClr val="tx1"/>
+              </a:fontRef>
+            </p:style>
+          </p:cxnSp>
+          <p:cxnSp>
+            <p:nvCxnSpPr>
+              <p:cNvPr id="15" name="Прямая со стрелкой 14">
+                <a:extLst>
+                  <a:ext uri="{FF2B5EF4-FFF2-40B4-BE49-F238E27FC236}">
+                    <a16:creationId xmlns:a16="http://schemas.microsoft.com/office/drawing/2014/main" id="{11507C7C-1B8E-E56A-5F97-33F34A08CB73}"/>
+                  </a:ext>
+                </a:extLst>
+              </p:cNvPr>
+              <p:cNvCxnSpPr>
+                <a:stCxn id="2" idx="4"/>
+                <a:endCxn id="8" idx="0"/>
+              </p:cNvCxnSpPr>
+              <p:nvPr/>
+            </p:nvCxnSpPr>
+            <p:spPr>
+              <a:xfrm flipH="1">
+                <a:off x="6095999" y="3613709"/>
+                <a:ext cx="1" cy="607161"/>
+              </a:xfrm>
+              <a:prstGeom prst="straightConnector1">
+                <a:avLst/>
+              </a:prstGeom>
+              <a:ln>
+                <a:tailEnd type="triangle"/>
+              </a:ln>
+            </p:spPr>
+            <p:style>
+              <a:lnRef idx="2">
+                <a:schemeClr val="dk1"/>
+              </a:lnRef>
+              <a:fillRef idx="0">
+                <a:schemeClr val="dk1"/>
+              </a:fillRef>
+              <a:effectRef idx="1">
+                <a:schemeClr val="dk1"/>
+              </a:effectRef>
+              <a:fontRef idx="minor">
+                <a:schemeClr val="tx1"/>
+              </a:fontRef>
+            </p:style>
+          </p:cxnSp>
+          <p:cxnSp>
+            <p:nvCxnSpPr>
+              <p:cNvPr id="17" name="Прямая со стрелкой 16">
+                <a:extLst>
+                  <a:ext uri="{FF2B5EF4-FFF2-40B4-BE49-F238E27FC236}">
+                    <a16:creationId xmlns:a16="http://schemas.microsoft.com/office/drawing/2014/main" id="{B5851DE7-7D71-B9E1-3345-EF60B4182CF4}"/>
+                  </a:ext>
+                </a:extLst>
+              </p:cNvPr>
+              <p:cNvCxnSpPr>
+                <a:stCxn id="2" idx="2"/>
+                <a:endCxn id="7" idx="6"/>
+              </p:cNvCxnSpPr>
+              <p:nvPr/>
+            </p:nvCxnSpPr>
+            <p:spPr>
+              <a:xfrm flipH="1" flipV="1">
+                <a:off x="4463492" y="3141877"/>
+                <a:ext cx="696162" cy="2"/>
+              </a:xfrm>
+              <a:prstGeom prst="straightConnector1">
+                <a:avLst/>
+              </a:prstGeom>
+              <a:ln>
+                <a:tailEnd type="triangle"/>
+              </a:ln>
+            </p:spPr>
+            <p:style>
+              <a:lnRef idx="2">
+                <a:schemeClr val="dk1"/>
+              </a:lnRef>
+              <a:fillRef idx="0">
+                <a:schemeClr val="dk1"/>
+              </a:fillRef>
+              <a:effectRef idx="1">
+                <a:schemeClr val="dk1"/>
+              </a:effectRef>
+              <a:fontRef idx="minor">
+                <a:schemeClr val="tx1"/>
+              </a:fontRef>
+            </p:style>
+          </p:cxnSp>
+          <p:grpSp>
+            <p:nvGrpSpPr>
+              <p:cNvPr id="44" name="Группа 43">
+                <a:extLst>
+                  <a:ext uri="{FF2B5EF4-FFF2-40B4-BE49-F238E27FC236}">
+                    <a16:creationId xmlns:a16="http://schemas.microsoft.com/office/drawing/2014/main" id="{04078E4B-7F88-A263-DC07-AE631C5A45DF}"/>
+                  </a:ext>
+                </a:extLst>
+              </p:cNvPr>
+              <p:cNvGrpSpPr/>
+              <p:nvPr/>
+            </p:nvGrpSpPr>
+            <p:grpSpPr>
+              <a:xfrm>
+                <a:off x="2735887" y="185644"/>
+                <a:ext cx="1805753" cy="438912"/>
+                <a:chOff x="3132765" y="185644"/>
+                <a:chExt cx="1408875" cy="438912"/>
+              </a:xfrm>
+            </p:grpSpPr>
+            <p:sp>
+              <p:nvSpPr>
+                <p:cNvPr id="43" name="Прямоугольник 42">
+                  <a:extLst>
+                    <a:ext uri="{FF2B5EF4-FFF2-40B4-BE49-F238E27FC236}">
+                      <a16:creationId xmlns:a16="http://schemas.microsoft.com/office/drawing/2014/main" id="{195506E6-BF12-01C1-CB89-6832786BB1DA}"/>
+                    </a:ext>
+                  </a:extLst>
+                </p:cNvPr>
+                <p:cNvSpPr/>
+                <p:nvPr/>
+              </p:nvSpPr>
+              <p:spPr>
+                <a:xfrm>
+                  <a:off x="3132765" y="185644"/>
+                  <a:ext cx="1330727" cy="438912"/>
+                </a:xfrm>
+                <a:prstGeom prst="rect">
+                  <a:avLst/>
+                </a:prstGeom>
+              </p:spPr>
+              <p:style>
+                <a:lnRef idx="2">
+                  <a:schemeClr val="dk1"/>
+                </a:lnRef>
+                <a:fillRef idx="1">
+                  <a:schemeClr val="lt1"/>
+                </a:fillRef>
+                <a:effectRef idx="0">
+                  <a:schemeClr val="dk1"/>
+                </a:effectRef>
+                <a:fontRef idx="minor">
+                  <a:schemeClr val="dk1"/>
+                </a:fontRef>
+              </p:style>
+              <p:txBody>
+                <a:bodyPr rtlCol="0" anchor="ctr"/>
+                <a:lstStyle/>
+                <a:p>
+                  <a:pPr algn="ctr"/>
+                  <a:endParaRPr lang="ru-RU"/>
+                </a:p>
+              </p:txBody>
+            </p:sp>
+            <p:sp>
+              <p:nvSpPr>
+                <p:cNvPr id="28" name="TextBox 27">
+                  <a:extLst>
+                    <a:ext uri="{FF2B5EF4-FFF2-40B4-BE49-F238E27FC236}">
+                      <a16:creationId xmlns:a16="http://schemas.microsoft.com/office/drawing/2014/main" id="{8ACEBD97-8120-FB53-FFB3-D864E51A8293}"/>
+                    </a:ext>
+                  </a:extLst>
+                </p:cNvPr>
+                <p:cNvSpPr txBox="1"/>
+                <p:nvPr/>
+              </p:nvSpPr>
+              <p:spPr>
+                <a:xfrm>
+                  <a:off x="3132765" y="266601"/>
+                  <a:ext cx="1408875" cy="276999"/>
+                </a:xfrm>
+                <a:prstGeom prst="rect">
+                  <a:avLst/>
+                </a:prstGeom>
+                <a:noFill/>
+              </p:spPr>
+              <p:txBody>
+                <a:bodyPr wrap="square" rtlCol="0">
+                  <a:spAutoFit/>
+                </a:bodyPr>
+                <a:lstStyle/>
+                <a:p>
+                  <a:pPr algn="ctr"/>
+                  <a:r>
+                    <a:rPr lang="ru-RU" sz="1200" dirty="0"/>
+                    <a:t>Вход в программу</a:t>
+                  </a:r>
+                </a:p>
+              </p:txBody>
+            </p:sp>
+          </p:grpSp>
+          <p:grpSp>
+            <p:nvGrpSpPr>
+              <p:cNvPr id="45" name="Группа 44">
+                <a:extLst>
+                  <a:ext uri="{FF2B5EF4-FFF2-40B4-BE49-F238E27FC236}">
+                    <a16:creationId xmlns:a16="http://schemas.microsoft.com/office/drawing/2014/main" id="{B0BB8745-C723-E689-CD51-75723BFEF544}"/>
+                  </a:ext>
+                </a:extLst>
+              </p:cNvPr>
+              <p:cNvGrpSpPr/>
+              <p:nvPr/>
+            </p:nvGrpSpPr>
+            <p:grpSpPr>
+              <a:xfrm>
+                <a:off x="2735887" y="712540"/>
+                <a:ext cx="1805753" cy="438912"/>
+                <a:chOff x="3132765" y="185644"/>
+                <a:chExt cx="1408875" cy="438912"/>
+              </a:xfrm>
+            </p:grpSpPr>
+            <p:sp>
+              <p:nvSpPr>
+                <p:cNvPr id="46" name="Прямоугольник 45">
+                  <a:extLst>
+                    <a:ext uri="{FF2B5EF4-FFF2-40B4-BE49-F238E27FC236}">
+                      <a16:creationId xmlns:a16="http://schemas.microsoft.com/office/drawing/2014/main" id="{FBC59D71-2BC8-BFCF-B1BD-4C2235CEDED6}"/>
+                    </a:ext>
+                  </a:extLst>
+                </p:cNvPr>
+                <p:cNvSpPr/>
+                <p:nvPr/>
+              </p:nvSpPr>
+              <p:spPr>
+                <a:xfrm>
+                  <a:off x="3132765" y="185644"/>
+                  <a:ext cx="1330727" cy="438912"/>
+                </a:xfrm>
+                <a:prstGeom prst="rect">
+                  <a:avLst/>
+                </a:prstGeom>
+              </p:spPr>
+              <p:style>
+                <a:lnRef idx="2">
+                  <a:schemeClr val="dk1"/>
+                </a:lnRef>
+                <a:fillRef idx="1">
+                  <a:schemeClr val="lt1"/>
+                </a:fillRef>
+                <a:effectRef idx="0">
+                  <a:schemeClr val="dk1"/>
+                </a:effectRef>
+                <a:fontRef idx="minor">
+                  <a:schemeClr val="dk1"/>
+                </a:fontRef>
+              </p:style>
+              <p:txBody>
+                <a:bodyPr rtlCol="0" anchor="ctr"/>
+                <a:lstStyle/>
+                <a:p>
+                  <a:pPr algn="ctr"/>
+                  <a:endParaRPr lang="ru-RU"/>
+                </a:p>
+              </p:txBody>
+            </p:sp>
+            <p:sp>
+              <p:nvSpPr>
+                <p:cNvPr id="47" name="TextBox 46">
+                  <a:extLst>
+                    <a:ext uri="{FF2B5EF4-FFF2-40B4-BE49-F238E27FC236}">
+                      <a16:creationId xmlns:a16="http://schemas.microsoft.com/office/drawing/2014/main" id="{E8D7B7E7-6844-5DB7-9E58-515FE0799CB2}"/>
+                    </a:ext>
+                  </a:extLst>
+                </p:cNvPr>
+                <p:cNvSpPr txBox="1"/>
+                <p:nvPr/>
+              </p:nvSpPr>
+              <p:spPr>
+                <a:xfrm>
+                  <a:off x="3132765" y="266601"/>
+                  <a:ext cx="1408875" cy="276999"/>
+                </a:xfrm>
+                <a:prstGeom prst="rect">
+                  <a:avLst/>
+                </a:prstGeom>
+                <a:noFill/>
+              </p:spPr>
+              <p:txBody>
+                <a:bodyPr wrap="square" rtlCol="0">
+                  <a:spAutoFit/>
+                </a:bodyPr>
+                <a:lstStyle/>
+                <a:p>
+                  <a:pPr algn="ctr"/>
+                  <a:r>
+                    <a:rPr lang="ru-RU" sz="1200" dirty="0"/>
+                    <a:t>Выход из сессии</a:t>
+                  </a:r>
+                </a:p>
+              </p:txBody>
+            </p:sp>
+          </p:grpSp>
+          <p:grpSp>
+            <p:nvGrpSpPr>
+              <p:cNvPr id="48" name="Группа 47">
+                <a:extLst>
+                  <a:ext uri="{FF2B5EF4-FFF2-40B4-BE49-F238E27FC236}">
+                    <a16:creationId xmlns:a16="http://schemas.microsoft.com/office/drawing/2014/main" id="{906D28DC-E277-B40A-66D1-647FC8B9BBED}"/>
+                  </a:ext>
+                </a:extLst>
+              </p:cNvPr>
+              <p:cNvGrpSpPr/>
+              <p:nvPr/>
+            </p:nvGrpSpPr>
+            <p:grpSpPr>
+              <a:xfrm>
+                <a:off x="2735885" y="1231677"/>
+                <a:ext cx="1805753" cy="438912"/>
+                <a:chOff x="3132765" y="185644"/>
+                <a:chExt cx="1666007" cy="438912"/>
+              </a:xfrm>
+            </p:grpSpPr>
+            <p:sp>
+              <p:nvSpPr>
+                <p:cNvPr id="49" name="Прямоугольник 48">
+                  <a:extLst>
+                    <a:ext uri="{FF2B5EF4-FFF2-40B4-BE49-F238E27FC236}">
+                      <a16:creationId xmlns:a16="http://schemas.microsoft.com/office/drawing/2014/main" id="{CA7670B2-DAC8-E449-2CF8-59E5022D0093}"/>
+                    </a:ext>
+                  </a:extLst>
+                </p:cNvPr>
+                <p:cNvSpPr/>
+                <p:nvPr/>
+              </p:nvSpPr>
+              <p:spPr>
+                <a:xfrm>
+                  <a:off x="3132765" y="185644"/>
+                  <a:ext cx="1564817" cy="438912"/>
+                </a:xfrm>
+                <a:prstGeom prst="rect">
+                  <a:avLst/>
+                </a:prstGeom>
+              </p:spPr>
+              <p:style>
+                <a:lnRef idx="2">
+                  <a:schemeClr val="dk1"/>
+                </a:lnRef>
+                <a:fillRef idx="1">
+                  <a:schemeClr val="lt1"/>
+                </a:fillRef>
+                <a:effectRef idx="0">
+                  <a:schemeClr val="dk1"/>
+                </a:effectRef>
+                <a:fontRef idx="minor">
+                  <a:schemeClr val="dk1"/>
+                </a:fontRef>
+              </p:style>
+              <p:txBody>
+                <a:bodyPr rtlCol="0" anchor="ctr"/>
+                <a:lstStyle/>
+                <a:p>
+                  <a:pPr algn="ctr"/>
+                  <a:endParaRPr lang="ru-RU"/>
+                </a:p>
+              </p:txBody>
+            </p:sp>
+            <p:sp>
+              <p:nvSpPr>
+                <p:cNvPr id="50" name="TextBox 49">
+                  <a:extLst>
+                    <a:ext uri="{FF2B5EF4-FFF2-40B4-BE49-F238E27FC236}">
+                      <a16:creationId xmlns:a16="http://schemas.microsoft.com/office/drawing/2014/main" id="{F96F22FA-DD45-B5CA-3948-FD8DFF8B84D7}"/>
+                    </a:ext>
+                  </a:extLst>
+                </p:cNvPr>
+                <p:cNvSpPr txBox="1"/>
+                <p:nvPr/>
+              </p:nvSpPr>
+              <p:spPr>
+                <a:xfrm>
+                  <a:off x="3132765" y="266601"/>
+                  <a:ext cx="1666007" cy="276999"/>
+                </a:xfrm>
+                <a:prstGeom prst="rect">
+                  <a:avLst/>
+                </a:prstGeom>
+                <a:noFill/>
+              </p:spPr>
+              <p:txBody>
+                <a:bodyPr wrap="square" rtlCol="0">
+                  <a:spAutoFit/>
+                </a:bodyPr>
+                <a:lstStyle/>
+                <a:p>
+                  <a:pPr algn="ctr"/>
+                  <a:r>
+                    <a:rPr lang="ru-RU" sz="1200" dirty="0"/>
+                    <a:t>Вывод списка команд</a:t>
+                  </a:r>
+                </a:p>
+              </p:txBody>
+            </p:sp>
+          </p:grpSp>
+          <p:grpSp>
+            <p:nvGrpSpPr>
+              <p:cNvPr id="51" name="Группа 50">
+                <a:extLst>
+                  <a:ext uri="{FF2B5EF4-FFF2-40B4-BE49-F238E27FC236}">
+                    <a16:creationId xmlns:a16="http://schemas.microsoft.com/office/drawing/2014/main" id="{564AE370-E95B-07D7-102A-B73FA5C6DEFB}"/>
+                  </a:ext>
+                </a:extLst>
+              </p:cNvPr>
+              <p:cNvGrpSpPr/>
+              <p:nvPr/>
+            </p:nvGrpSpPr>
+            <p:grpSpPr>
+              <a:xfrm>
+                <a:off x="2735885" y="1750815"/>
+                <a:ext cx="1805753" cy="438912"/>
+                <a:chOff x="3132765" y="185644"/>
+                <a:chExt cx="1408875" cy="438912"/>
+              </a:xfrm>
+            </p:grpSpPr>
+            <p:sp>
+              <p:nvSpPr>
+                <p:cNvPr id="52" name="Прямоугольник 51">
+                  <a:extLst>
+                    <a:ext uri="{FF2B5EF4-FFF2-40B4-BE49-F238E27FC236}">
+                      <a16:creationId xmlns:a16="http://schemas.microsoft.com/office/drawing/2014/main" id="{E668141D-2422-1762-51CF-B3D9D1DC16DB}"/>
+                    </a:ext>
+                  </a:extLst>
+                </p:cNvPr>
+                <p:cNvSpPr/>
+                <p:nvPr/>
+              </p:nvSpPr>
+              <p:spPr>
+                <a:xfrm>
+                  <a:off x="3132765" y="185644"/>
+                  <a:ext cx="1330727" cy="438912"/>
+                </a:xfrm>
+                <a:prstGeom prst="rect">
+                  <a:avLst/>
+                </a:prstGeom>
+              </p:spPr>
+              <p:style>
+                <a:lnRef idx="2">
+                  <a:schemeClr val="dk1"/>
+                </a:lnRef>
+                <a:fillRef idx="1">
+                  <a:schemeClr val="lt1"/>
+                </a:fillRef>
+                <a:effectRef idx="0">
+                  <a:schemeClr val="dk1"/>
+                </a:effectRef>
+                <a:fontRef idx="minor">
+                  <a:schemeClr val="dk1"/>
+                </a:fontRef>
+              </p:style>
+              <p:txBody>
+                <a:bodyPr rtlCol="0" anchor="ctr"/>
+                <a:lstStyle/>
+                <a:p>
+                  <a:pPr algn="ctr"/>
+                  <a:endParaRPr lang="ru-RU"/>
+                </a:p>
+              </p:txBody>
+            </p:sp>
+            <p:sp>
+              <p:nvSpPr>
+                <p:cNvPr id="53" name="TextBox 52">
+                  <a:extLst>
+                    <a:ext uri="{FF2B5EF4-FFF2-40B4-BE49-F238E27FC236}">
+                      <a16:creationId xmlns:a16="http://schemas.microsoft.com/office/drawing/2014/main" id="{D06C980A-3BFC-CFFB-B649-31BE4B3DCFA4}"/>
+                    </a:ext>
+                  </a:extLst>
+                </p:cNvPr>
+                <p:cNvSpPr txBox="1"/>
+                <p:nvPr/>
+              </p:nvSpPr>
+              <p:spPr>
+                <a:xfrm>
+                  <a:off x="3132765" y="266601"/>
+                  <a:ext cx="1408875" cy="276999"/>
+                </a:xfrm>
+                <a:prstGeom prst="rect">
+                  <a:avLst/>
+                </a:prstGeom>
+                <a:noFill/>
+              </p:spPr>
+              <p:txBody>
+                <a:bodyPr wrap="square" rtlCol="0">
+                  <a:spAutoFit/>
+                </a:bodyPr>
+                <a:lstStyle/>
+                <a:p>
+                  <a:pPr algn="ctr"/>
+                  <a:r>
+                    <a:rPr lang="ru-RU" sz="1200" dirty="0"/>
+                    <a:t>Выход из программы</a:t>
+                  </a:r>
+                </a:p>
+              </p:txBody>
+            </p:sp>
+          </p:grpSp>
+          <p:cxnSp>
+            <p:nvCxnSpPr>
+              <p:cNvPr id="55" name="Прямая со стрелкой 54">
+                <a:extLst>
+                  <a:ext uri="{FF2B5EF4-FFF2-40B4-BE49-F238E27FC236}">
+                    <a16:creationId xmlns:a16="http://schemas.microsoft.com/office/drawing/2014/main" id="{04F98EB0-A464-B94E-60BD-E2867536AE15}"/>
+                  </a:ext>
+                </a:extLst>
+              </p:cNvPr>
+              <p:cNvCxnSpPr>
+                <a:cxnSpLocks/>
+                <a:stCxn id="6" idx="1"/>
+              </p:cNvCxnSpPr>
+              <p:nvPr/>
+            </p:nvCxnSpPr>
+            <p:spPr>
+              <a:xfrm flipH="1" flipV="1">
+                <a:off x="4431960" y="447872"/>
+                <a:ext cx="1277398" cy="943661"/>
+              </a:xfrm>
+              <a:prstGeom prst="straightConnector1">
+                <a:avLst/>
+              </a:prstGeom>
+              <a:ln>
+                <a:tailEnd type="triangle"/>
+              </a:ln>
+            </p:spPr>
+            <p:style>
+              <a:lnRef idx="1">
+                <a:schemeClr val="dk1"/>
+              </a:lnRef>
+              <a:fillRef idx="0">
+                <a:schemeClr val="dk1"/>
+              </a:fillRef>
+              <a:effectRef idx="0">
+                <a:schemeClr val="dk1"/>
+              </a:effectRef>
+              <a:fontRef idx="minor">
+                <a:schemeClr val="tx1"/>
+              </a:fontRef>
+            </p:style>
+          </p:cxnSp>
+          <p:cxnSp>
+            <p:nvCxnSpPr>
+              <p:cNvPr id="58" name="Прямая со стрелкой 57">
+                <a:extLst>
+                  <a:ext uri="{FF2B5EF4-FFF2-40B4-BE49-F238E27FC236}">
+                    <a16:creationId xmlns:a16="http://schemas.microsoft.com/office/drawing/2014/main" id="{94831B9A-36D6-C249-0113-66F0BC04D291}"/>
+                  </a:ext>
+                </a:extLst>
+              </p:cNvPr>
+              <p:cNvCxnSpPr>
+                <a:stCxn id="6" idx="1"/>
+              </p:cNvCxnSpPr>
+              <p:nvPr/>
+            </p:nvCxnSpPr>
+            <p:spPr>
+              <a:xfrm flipH="1" flipV="1">
+                <a:off x="4431960" y="929030"/>
+                <a:ext cx="1277398" cy="462503"/>
+              </a:xfrm>
+              <a:prstGeom prst="straightConnector1">
+                <a:avLst/>
+              </a:prstGeom>
+              <a:ln>
+                <a:tailEnd type="triangle"/>
+              </a:ln>
+            </p:spPr>
+            <p:style>
+              <a:lnRef idx="1">
+                <a:schemeClr val="dk1"/>
+              </a:lnRef>
+              <a:fillRef idx="0">
+                <a:schemeClr val="dk1"/>
+              </a:fillRef>
+              <a:effectRef idx="0">
+                <a:schemeClr val="dk1"/>
+              </a:effectRef>
+              <a:fontRef idx="minor">
+                <a:schemeClr val="tx1"/>
+              </a:fontRef>
+            </p:style>
+          </p:cxnSp>
+          <p:cxnSp>
+            <p:nvCxnSpPr>
+              <p:cNvPr id="60" name="Прямая со стрелкой 59">
+                <a:extLst>
+                  <a:ext uri="{FF2B5EF4-FFF2-40B4-BE49-F238E27FC236}">
+                    <a16:creationId xmlns:a16="http://schemas.microsoft.com/office/drawing/2014/main" id="{2EAD57E1-D808-E54E-300A-143B463D3678}"/>
+                  </a:ext>
+                </a:extLst>
+              </p:cNvPr>
+              <p:cNvCxnSpPr>
+                <a:stCxn id="6" idx="1"/>
+              </p:cNvCxnSpPr>
+              <p:nvPr/>
+            </p:nvCxnSpPr>
+            <p:spPr>
+              <a:xfrm flipH="1">
+                <a:off x="4431960" y="1391533"/>
+                <a:ext cx="1277398" cy="71507"/>
+              </a:xfrm>
+              <a:prstGeom prst="straightConnector1">
+                <a:avLst/>
+              </a:prstGeom>
+              <a:ln>
+                <a:tailEnd type="triangle"/>
+              </a:ln>
+            </p:spPr>
+            <p:style>
+              <a:lnRef idx="1">
+                <a:schemeClr val="dk1"/>
+              </a:lnRef>
+              <a:fillRef idx="0">
+                <a:schemeClr val="dk1"/>
+              </a:fillRef>
+              <a:effectRef idx="0">
+                <a:schemeClr val="dk1"/>
+              </a:effectRef>
+              <a:fontRef idx="minor">
+                <a:schemeClr val="tx1"/>
+              </a:fontRef>
+            </p:style>
+          </p:cxnSp>
+          <p:cxnSp>
+            <p:nvCxnSpPr>
+              <p:cNvPr id="62" name="Прямая со стрелкой 61">
+                <a:extLst>
+                  <a:ext uri="{FF2B5EF4-FFF2-40B4-BE49-F238E27FC236}">
+                    <a16:creationId xmlns:a16="http://schemas.microsoft.com/office/drawing/2014/main" id="{F5B234B3-E566-9314-6481-F2EE561838EF}"/>
+                  </a:ext>
+                </a:extLst>
+              </p:cNvPr>
+              <p:cNvCxnSpPr>
+                <a:stCxn id="6" idx="1"/>
+              </p:cNvCxnSpPr>
+              <p:nvPr/>
+            </p:nvCxnSpPr>
+            <p:spPr>
+              <a:xfrm flipH="1">
+                <a:off x="4431960" y="1391533"/>
+                <a:ext cx="1277398" cy="576256"/>
+              </a:xfrm>
+              <a:prstGeom prst="straightConnector1">
+                <a:avLst/>
+              </a:prstGeom>
+              <a:ln>
+                <a:tailEnd type="triangle"/>
+              </a:ln>
+            </p:spPr>
+            <p:style>
+              <a:lnRef idx="1">
+                <a:schemeClr val="dk1"/>
+              </a:lnRef>
+              <a:fillRef idx="0">
+                <a:schemeClr val="dk1"/>
+              </a:fillRef>
+              <a:effectRef idx="0">
+                <a:schemeClr val="dk1"/>
+              </a:effectRef>
+              <a:fontRef idx="minor">
+                <a:schemeClr val="tx1"/>
+              </a:fontRef>
+            </p:style>
+          </p:cxnSp>
+          <p:grpSp>
+            <p:nvGrpSpPr>
+              <p:cNvPr id="63" name="Группа 62">
+                <a:extLst>
+                  <a:ext uri="{FF2B5EF4-FFF2-40B4-BE49-F238E27FC236}">
+                    <a16:creationId xmlns:a16="http://schemas.microsoft.com/office/drawing/2014/main" id="{08111E10-5F2E-93F3-8216-2D66DB0F5C10}"/>
+                  </a:ext>
+                </a:extLst>
+              </p:cNvPr>
+              <p:cNvGrpSpPr/>
+              <p:nvPr/>
+            </p:nvGrpSpPr>
+            <p:grpSpPr>
+              <a:xfrm>
+                <a:off x="484127" y="2296902"/>
+                <a:ext cx="1705591" cy="438912"/>
+                <a:chOff x="3132765" y="185644"/>
+                <a:chExt cx="1330727" cy="438912"/>
+              </a:xfrm>
+            </p:grpSpPr>
+            <p:sp>
+              <p:nvSpPr>
+                <p:cNvPr id="64" name="Прямоугольник 63">
+                  <a:extLst>
+                    <a:ext uri="{FF2B5EF4-FFF2-40B4-BE49-F238E27FC236}">
+                      <a16:creationId xmlns:a16="http://schemas.microsoft.com/office/drawing/2014/main" id="{16B2FBF9-7E33-B807-2B8B-65CB5EBB0BAE}"/>
+                    </a:ext>
+                  </a:extLst>
+                </p:cNvPr>
+                <p:cNvSpPr/>
+                <p:nvPr/>
+              </p:nvSpPr>
+              <p:spPr>
+                <a:xfrm>
+                  <a:off x="3132765" y="185644"/>
+                  <a:ext cx="1330727" cy="438912"/>
+                </a:xfrm>
+                <a:prstGeom prst="rect">
+                  <a:avLst/>
+                </a:prstGeom>
+              </p:spPr>
+              <p:style>
+                <a:lnRef idx="2">
+                  <a:schemeClr val="dk1"/>
+                </a:lnRef>
+                <a:fillRef idx="1">
+                  <a:schemeClr val="lt1"/>
+                </a:fillRef>
+                <a:effectRef idx="0">
+                  <a:schemeClr val="dk1"/>
+                </a:effectRef>
+                <a:fontRef idx="minor">
+                  <a:schemeClr val="dk1"/>
+                </a:fontRef>
+              </p:style>
+              <p:txBody>
+                <a:bodyPr rtlCol="0" anchor="ctr"/>
+                <a:lstStyle/>
+                <a:p>
+                  <a:pPr algn="ctr"/>
+                  <a:endParaRPr lang="ru-RU"/>
+                </a:p>
+              </p:txBody>
+            </p:sp>
+            <p:sp>
+              <p:nvSpPr>
+                <p:cNvPr id="65" name="TextBox 64">
+                  <a:extLst>
+                    <a:ext uri="{FF2B5EF4-FFF2-40B4-BE49-F238E27FC236}">
+                      <a16:creationId xmlns:a16="http://schemas.microsoft.com/office/drawing/2014/main" id="{36ED46B9-417D-DC87-D315-8309DF1339D9}"/>
+                    </a:ext>
+                  </a:extLst>
+                </p:cNvPr>
+                <p:cNvSpPr txBox="1"/>
+                <p:nvPr/>
+              </p:nvSpPr>
+              <p:spPr>
+                <a:xfrm>
+                  <a:off x="3132765" y="266601"/>
+                  <a:ext cx="1323301" cy="284757"/>
+                </a:xfrm>
+                <a:prstGeom prst="rect">
+                  <a:avLst/>
+                </a:prstGeom>
+                <a:noFill/>
+              </p:spPr>
+              <p:txBody>
+                <a:bodyPr wrap="square" rtlCol="0">
+                  <a:spAutoFit/>
+                </a:bodyPr>
+                <a:lstStyle/>
+                <a:p>
+                  <a:pPr algn="ctr"/>
+                  <a:r>
+                    <a:rPr lang="ru-RU" sz="1200" dirty="0"/>
+                    <a:t>Создание заметки</a:t>
+                  </a:r>
+                </a:p>
+              </p:txBody>
+            </p:sp>
+          </p:grpSp>
+          <p:grpSp>
+            <p:nvGrpSpPr>
+              <p:cNvPr id="66" name="Группа 65">
+                <a:extLst>
+                  <a:ext uri="{FF2B5EF4-FFF2-40B4-BE49-F238E27FC236}">
+                    <a16:creationId xmlns:a16="http://schemas.microsoft.com/office/drawing/2014/main" id="{24A98C34-92C7-8A4A-914A-5D67B4F8C36C}"/>
+                  </a:ext>
+                </a:extLst>
+              </p:cNvPr>
+              <p:cNvGrpSpPr/>
+              <p:nvPr/>
+            </p:nvGrpSpPr>
+            <p:grpSpPr>
+              <a:xfrm>
+                <a:off x="484127" y="2823798"/>
+                <a:ext cx="1705591" cy="438912"/>
+                <a:chOff x="3132765" y="185644"/>
+                <a:chExt cx="1330727" cy="438912"/>
+              </a:xfrm>
+            </p:grpSpPr>
+            <p:sp>
+              <p:nvSpPr>
+                <p:cNvPr id="67" name="Прямоугольник 66">
+                  <a:extLst>
+                    <a:ext uri="{FF2B5EF4-FFF2-40B4-BE49-F238E27FC236}">
+                      <a16:creationId xmlns:a16="http://schemas.microsoft.com/office/drawing/2014/main" id="{89FDC152-2BEC-F1C4-FFCE-74EE18753D00}"/>
+                    </a:ext>
+                  </a:extLst>
+                </p:cNvPr>
+                <p:cNvSpPr/>
+                <p:nvPr/>
+              </p:nvSpPr>
+              <p:spPr>
+                <a:xfrm>
+                  <a:off x="3132765" y="185644"/>
+                  <a:ext cx="1330727" cy="438912"/>
+                </a:xfrm>
+                <a:prstGeom prst="rect">
+                  <a:avLst/>
+                </a:prstGeom>
+              </p:spPr>
+              <p:style>
+                <a:lnRef idx="2">
+                  <a:schemeClr val="dk1"/>
+                </a:lnRef>
+                <a:fillRef idx="1">
+                  <a:schemeClr val="lt1"/>
+                </a:fillRef>
+                <a:effectRef idx="0">
+                  <a:schemeClr val="dk1"/>
+                </a:effectRef>
+                <a:fontRef idx="minor">
+                  <a:schemeClr val="dk1"/>
+                </a:fontRef>
+              </p:style>
+              <p:txBody>
+                <a:bodyPr rtlCol="0" anchor="ctr"/>
+                <a:lstStyle/>
+                <a:p>
+                  <a:pPr algn="ctr"/>
+                  <a:endParaRPr lang="ru-RU"/>
+                </a:p>
+              </p:txBody>
+            </p:sp>
+            <p:sp>
+              <p:nvSpPr>
+                <p:cNvPr id="68" name="TextBox 67">
+                  <a:extLst>
+                    <a:ext uri="{FF2B5EF4-FFF2-40B4-BE49-F238E27FC236}">
+                      <a16:creationId xmlns:a16="http://schemas.microsoft.com/office/drawing/2014/main" id="{5807AAFE-9F96-0656-41F2-9F35415791A7}"/>
+                    </a:ext>
+                  </a:extLst>
+                </p:cNvPr>
+                <p:cNvSpPr txBox="1"/>
+                <p:nvPr/>
+              </p:nvSpPr>
+              <p:spPr>
+                <a:xfrm>
+                  <a:off x="3132765" y="266601"/>
+                  <a:ext cx="1323301" cy="276999"/>
+                </a:xfrm>
+                <a:prstGeom prst="rect">
+                  <a:avLst/>
+                </a:prstGeom>
+                <a:noFill/>
+              </p:spPr>
+              <p:txBody>
+                <a:bodyPr wrap="square" rtlCol="0">
+                  <a:spAutoFit/>
+                </a:bodyPr>
+                <a:lstStyle/>
+                <a:p>
+                  <a:pPr algn="ctr"/>
+                  <a:r>
+                    <a:rPr lang="ru-RU" sz="1200" dirty="0"/>
+                    <a:t>Вывод всех заметок</a:t>
+                  </a:r>
+                </a:p>
+              </p:txBody>
+            </p:sp>
+          </p:grpSp>
+          <p:grpSp>
+            <p:nvGrpSpPr>
+              <p:cNvPr id="69" name="Группа 68">
+                <a:extLst>
+                  <a:ext uri="{FF2B5EF4-FFF2-40B4-BE49-F238E27FC236}">
+                    <a16:creationId xmlns:a16="http://schemas.microsoft.com/office/drawing/2014/main" id="{A560959B-8FBA-1387-BF6D-3B1E7A9D7E8C}"/>
+                  </a:ext>
+                </a:extLst>
+              </p:cNvPr>
+              <p:cNvGrpSpPr/>
+              <p:nvPr/>
+            </p:nvGrpSpPr>
+            <p:grpSpPr>
+              <a:xfrm>
+                <a:off x="484123" y="3342935"/>
+                <a:ext cx="1705594" cy="688708"/>
+                <a:chOff x="3132765" y="185644"/>
+                <a:chExt cx="1573600" cy="688708"/>
+              </a:xfrm>
+            </p:grpSpPr>
+            <p:sp>
+              <p:nvSpPr>
+                <p:cNvPr id="70" name="Прямоугольник 69">
+                  <a:extLst>
+                    <a:ext uri="{FF2B5EF4-FFF2-40B4-BE49-F238E27FC236}">
+                      <a16:creationId xmlns:a16="http://schemas.microsoft.com/office/drawing/2014/main" id="{0FA3C2F3-3E1A-602E-CC7A-AAD79C0AB78F}"/>
+                    </a:ext>
+                  </a:extLst>
+                </p:cNvPr>
+                <p:cNvSpPr/>
+                <p:nvPr/>
+              </p:nvSpPr>
+              <p:spPr>
+                <a:xfrm>
+                  <a:off x="3132765" y="185644"/>
+                  <a:ext cx="1564817" cy="688708"/>
+                </a:xfrm>
+                <a:prstGeom prst="rect">
+                  <a:avLst/>
+                </a:prstGeom>
+              </p:spPr>
+              <p:style>
+                <a:lnRef idx="2">
+                  <a:schemeClr val="dk1"/>
+                </a:lnRef>
+                <a:fillRef idx="1">
+                  <a:schemeClr val="lt1"/>
+                </a:fillRef>
+                <a:effectRef idx="0">
+                  <a:schemeClr val="dk1"/>
+                </a:effectRef>
+                <a:fontRef idx="minor">
+                  <a:schemeClr val="dk1"/>
+                </a:fontRef>
+              </p:style>
+              <p:txBody>
+                <a:bodyPr rtlCol="0" anchor="ctr"/>
+                <a:lstStyle/>
+                <a:p>
+                  <a:pPr algn="ctr"/>
+                  <a:endParaRPr lang="ru-RU"/>
+                </a:p>
+              </p:txBody>
+            </p:sp>
+            <p:sp>
+              <p:nvSpPr>
+                <p:cNvPr id="71" name="TextBox 70">
+                  <a:extLst>
+                    <a:ext uri="{FF2B5EF4-FFF2-40B4-BE49-F238E27FC236}">
+                      <a16:creationId xmlns:a16="http://schemas.microsoft.com/office/drawing/2014/main" id="{86119AAE-4081-40B0-386F-3DF554BBBAF3}"/>
+                    </a:ext>
+                  </a:extLst>
+                </p:cNvPr>
+                <p:cNvSpPr txBox="1"/>
+                <p:nvPr/>
+              </p:nvSpPr>
+              <p:spPr>
+                <a:xfrm>
+                  <a:off x="3132769" y="221191"/>
+                  <a:ext cx="1573596" cy="646331"/>
+                </a:xfrm>
+                <a:prstGeom prst="rect">
+                  <a:avLst/>
+                </a:prstGeom>
+                <a:noFill/>
+              </p:spPr>
+              <p:txBody>
+                <a:bodyPr wrap="square" rtlCol="0">
+                  <a:spAutoFit/>
+                </a:bodyPr>
+                <a:lstStyle/>
+                <a:p>
+                  <a:pPr algn="ctr"/>
+                  <a:r>
+                    <a:rPr lang="ru-RU" sz="1200" dirty="0"/>
+                    <a:t>Редактирование существующей заметки</a:t>
+                  </a:r>
+                </a:p>
+              </p:txBody>
+            </p:sp>
+          </p:grpSp>
+          <p:grpSp>
+            <p:nvGrpSpPr>
+              <p:cNvPr id="72" name="Группа 71">
+                <a:extLst>
+                  <a:ext uri="{FF2B5EF4-FFF2-40B4-BE49-F238E27FC236}">
+                    <a16:creationId xmlns:a16="http://schemas.microsoft.com/office/drawing/2014/main" id="{1CB79804-2F7A-816D-71DF-F864CBA7910E}"/>
+                  </a:ext>
+                </a:extLst>
+              </p:cNvPr>
+              <p:cNvGrpSpPr/>
+              <p:nvPr/>
+            </p:nvGrpSpPr>
+            <p:grpSpPr>
+              <a:xfrm>
+                <a:off x="484126" y="4140585"/>
+                <a:ext cx="1705591" cy="438912"/>
+                <a:chOff x="3132765" y="185644"/>
+                <a:chExt cx="1330727" cy="438912"/>
+              </a:xfrm>
+            </p:grpSpPr>
+            <p:sp>
+              <p:nvSpPr>
+                <p:cNvPr id="73" name="Прямоугольник 72">
+                  <a:extLst>
+                    <a:ext uri="{FF2B5EF4-FFF2-40B4-BE49-F238E27FC236}">
+                      <a16:creationId xmlns:a16="http://schemas.microsoft.com/office/drawing/2014/main" id="{BD3352F5-CCEE-1ED4-8A0C-63ECF0E405A5}"/>
+                    </a:ext>
+                  </a:extLst>
+                </p:cNvPr>
+                <p:cNvSpPr/>
+                <p:nvPr/>
+              </p:nvSpPr>
+              <p:spPr>
+                <a:xfrm>
+                  <a:off x="3132765" y="185644"/>
+                  <a:ext cx="1330727" cy="438912"/>
+                </a:xfrm>
+                <a:prstGeom prst="rect">
+                  <a:avLst/>
+                </a:prstGeom>
+              </p:spPr>
+              <p:style>
+                <a:lnRef idx="2">
+                  <a:schemeClr val="dk1"/>
+                </a:lnRef>
+                <a:fillRef idx="1">
+                  <a:schemeClr val="lt1"/>
+                </a:fillRef>
+                <a:effectRef idx="0">
+                  <a:schemeClr val="dk1"/>
+                </a:effectRef>
+                <a:fontRef idx="minor">
+                  <a:schemeClr val="dk1"/>
+                </a:fontRef>
+              </p:style>
+              <p:txBody>
+                <a:bodyPr rtlCol="0" anchor="ctr"/>
+                <a:lstStyle/>
+                <a:p>
+                  <a:pPr algn="ctr"/>
+                  <a:endParaRPr lang="ru-RU"/>
+                </a:p>
+              </p:txBody>
+            </p:sp>
+            <p:sp>
+              <p:nvSpPr>
+                <p:cNvPr id="74" name="TextBox 73">
+                  <a:extLst>
+                    <a:ext uri="{FF2B5EF4-FFF2-40B4-BE49-F238E27FC236}">
+                      <a16:creationId xmlns:a16="http://schemas.microsoft.com/office/drawing/2014/main" id="{AF78DB61-1577-F171-BAF9-EB4D65403ADD}"/>
+                    </a:ext>
+                  </a:extLst>
+                </p:cNvPr>
+                <p:cNvSpPr txBox="1"/>
+                <p:nvPr/>
+              </p:nvSpPr>
+              <p:spPr>
+                <a:xfrm>
+                  <a:off x="3132766" y="266601"/>
+                  <a:ext cx="1323302" cy="276999"/>
+                </a:xfrm>
+                <a:prstGeom prst="rect">
+                  <a:avLst/>
+                </a:prstGeom>
+                <a:noFill/>
+              </p:spPr>
+              <p:txBody>
+                <a:bodyPr wrap="square" rtlCol="0">
+                  <a:spAutoFit/>
+                </a:bodyPr>
+                <a:lstStyle/>
+                <a:p>
+                  <a:pPr algn="ctr"/>
+                  <a:r>
+                    <a:rPr lang="ru-RU" sz="1200" dirty="0"/>
+                    <a:t>Удаление заметки</a:t>
+                  </a:r>
+                </a:p>
+              </p:txBody>
+            </p:sp>
+          </p:grpSp>
+          <p:cxnSp>
+            <p:nvCxnSpPr>
+              <p:cNvPr id="77" name="Прямая со стрелкой 76">
+                <a:extLst>
+                  <a:ext uri="{FF2B5EF4-FFF2-40B4-BE49-F238E27FC236}">
+                    <a16:creationId xmlns:a16="http://schemas.microsoft.com/office/drawing/2014/main" id="{BF412B64-D7D8-7BF0-6F72-234DF75BBAF3}"/>
+                  </a:ext>
+                </a:extLst>
+              </p:cNvPr>
+              <p:cNvCxnSpPr>
+                <a:stCxn id="7" idx="2"/>
+                <a:endCxn id="65" idx="3"/>
+              </p:cNvCxnSpPr>
+              <p:nvPr/>
+            </p:nvCxnSpPr>
+            <p:spPr>
+              <a:xfrm flipH="1" flipV="1">
+                <a:off x="2180200" y="2520238"/>
+                <a:ext cx="1210396" cy="621639"/>
+              </a:xfrm>
+              <a:prstGeom prst="straightConnector1">
+                <a:avLst/>
+              </a:prstGeom>
+              <a:ln>
+                <a:tailEnd type="triangle"/>
+              </a:ln>
+            </p:spPr>
+            <p:style>
+              <a:lnRef idx="1">
+                <a:schemeClr val="dk1"/>
+              </a:lnRef>
+              <a:fillRef idx="0">
+                <a:schemeClr val="dk1"/>
+              </a:fillRef>
+              <a:effectRef idx="0">
+                <a:schemeClr val="dk1"/>
+              </a:effectRef>
+              <a:fontRef idx="minor">
+                <a:schemeClr val="tx1"/>
+              </a:fontRef>
+            </p:style>
+          </p:cxnSp>
+          <p:cxnSp>
+            <p:nvCxnSpPr>
+              <p:cNvPr id="79" name="Прямая со стрелкой 78">
+                <a:extLst>
+                  <a:ext uri="{FF2B5EF4-FFF2-40B4-BE49-F238E27FC236}">
+                    <a16:creationId xmlns:a16="http://schemas.microsoft.com/office/drawing/2014/main" id="{845D6C81-90F8-8757-24B7-4320FDF7C130}"/>
+                  </a:ext>
+                </a:extLst>
+              </p:cNvPr>
+              <p:cNvCxnSpPr>
+                <a:stCxn id="7" idx="2"/>
+                <a:endCxn id="68" idx="3"/>
+              </p:cNvCxnSpPr>
+              <p:nvPr/>
+            </p:nvCxnSpPr>
+            <p:spPr>
+              <a:xfrm flipH="1" flipV="1">
+                <a:off x="2180200" y="3043255"/>
+                <a:ext cx="1210396" cy="98622"/>
+              </a:xfrm>
+              <a:prstGeom prst="straightConnector1">
+                <a:avLst/>
+              </a:prstGeom>
+              <a:ln>
+                <a:tailEnd type="triangle"/>
+              </a:ln>
+            </p:spPr>
+            <p:style>
+              <a:lnRef idx="1">
+                <a:schemeClr val="dk1"/>
+              </a:lnRef>
+              <a:fillRef idx="0">
+                <a:schemeClr val="dk1"/>
+              </a:fillRef>
+              <a:effectRef idx="0">
+                <a:schemeClr val="dk1"/>
+              </a:effectRef>
+              <a:fontRef idx="minor">
+                <a:schemeClr val="tx1"/>
+              </a:fontRef>
+            </p:style>
+          </p:cxnSp>
+          <p:cxnSp>
+            <p:nvCxnSpPr>
+              <p:cNvPr id="81" name="Прямая со стрелкой 80">
+                <a:extLst>
+                  <a:ext uri="{FF2B5EF4-FFF2-40B4-BE49-F238E27FC236}">
+                    <a16:creationId xmlns:a16="http://schemas.microsoft.com/office/drawing/2014/main" id="{28200E69-D22C-86BC-914D-51857699A0AD}"/>
+                  </a:ext>
+                </a:extLst>
+              </p:cNvPr>
+              <p:cNvCxnSpPr>
+                <a:stCxn id="7" idx="2"/>
+                <a:endCxn id="71" idx="3"/>
+              </p:cNvCxnSpPr>
+              <p:nvPr/>
+            </p:nvCxnSpPr>
+            <p:spPr>
+              <a:xfrm flipH="1">
+                <a:off x="2189717" y="3141877"/>
+                <a:ext cx="1200879" cy="559771"/>
+              </a:xfrm>
+              <a:prstGeom prst="straightConnector1">
+                <a:avLst/>
+              </a:prstGeom>
+              <a:ln>
+                <a:tailEnd type="triangle"/>
+              </a:ln>
+            </p:spPr>
+            <p:style>
+              <a:lnRef idx="1">
+                <a:schemeClr val="dk1"/>
+              </a:lnRef>
+              <a:fillRef idx="0">
+                <a:schemeClr val="dk1"/>
+              </a:fillRef>
+              <a:effectRef idx="0">
+                <a:schemeClr val="dk1"/>
+              </a:effectRef>
+              <a:fontRef idx="minor">
+                <a:schemeClr val="tx1"/>
+              </a:fontRef>
+            </p:style>
+          </p:cxnSp>
+          <p:cxnSp>
+            <p:nvCxnSpPr>
+              <p:cNvPr id="83" name="Прямая со стрелкой 82">
+                <a:extLst>
+                  <a:ext uri="{FF2B5EF4-FFF2-40B4-BE49-F238E27FC236}">
+                    <a16:creationId xmlns:a16="http://schemas.microsoft.com/office/drawing/2014/main" id="{851E5720-9838-5156-817A-9396CF77ED1B}"/>
+                  </a:ext>
+                </a:extLst>
+              </p:cNvPr>
+              <p:cNvCxnSpPr>
+                <a:stCxn id="7" idx="2"/>
+                <a:endCxn id="74" idx="3"/>
+              </p:cNvCxnSpPr>
+              <p:nvPr/>
+            </p:nvCxnSpPr>
+            <p:spPr>
+              <a:xfrm flipH="1">
+                <a:off x="2180201" y="3141877"/>
+                <a:ext cx="1210395" cy="1218165"/>
+              </a:xfrm>
+              <a:prstGeom prst="straightConnector1">
+                <a:avLst/>
+              </a:prstGeom>
+              <a:ln>
+                <a:tailEnd type="triangle"/>
+              </a:ln>
+            </p:spPr>
+            <p:style>
+              <a:lnRef idx="1">
+                <a:schemeClr val="dk1"/>
+              </a:lnRef>
+              <a:fillRef idx="0">
+                <a:schemeClr val="dk1"/>
+              </a:fillRef>
+              <a:effectRef idx="0">
+                <a:schemeClr val="dk1"/>
+              </a:effectRef>
+              <a:fontRef idx="minor">
+                <a:schemeClr val="tx1"/>
+              </a:fontRef>
+            </p:style>
+          </p:cxnSp>
+          <p:grpSp>
+            <p:nvGrpSpPr>
+              <p:cNvPr id="84" name="Группа 83">
+                <a:extLst>
+                  <a:ext uri="{FF2B5EF4-FFF2-40B4-BE49-F238E27FC236}">
+                    <a16:creationId xmlns:a16="http://schemas.microsoft.com/office/drawing/2014/main" id="{74C3BE4C-AA2E-44ED-B821-D3AED6034942}"/>
+                  </a:ext>
+                </a:extLst>
+              </p:cNvPr>
+              <p:cNvGrpSpPr/>
+              <p:nvPr/>
+            </p:nvGrpSpPr>
+            <p:grpSpPr>
+              <a:xfrm>
+                <a:off x="7503941" y="3917328"/>
+                <a:ext cx="1715108" cy="438912"/>
+                <a:chOff x="3132765" y="185644"/>
+                <a:chExt cx="1338152" cy="438912"/>
+              </a:xfrm>
+            </p:grpSpPr>
+            <p:sp>
+              <p:nvSpPr>
+                <p:cNvPr id="85" name="Прямоугольник 84">
+                  <a:extLst>
+                    <a:ext uri="{FF2B5EF4-FFF2-40B4-BE49-F238E27FC236}">
+                      <a16:creationId xmlns:a16="http://schemas.microsoft.com/office/drawing/2014/main" id="{D16B1A19-57B8-245C-70C9-E43EA73AB5F2}"/>
+                    </a:ext>
+                  </a:extLst>
+                </p:cNvPr>
+                <p:cNvSpPr/>
+                <p:nvPr/>
+              </p:nvSpPr>
+              <p:spPr>
+                <a:xfrm>
+                  <a:off x="3132765" y="185644"/>
+                  <a:ext cx="1330727" cy="438912"/>
+                </a:xfrm>
+                <a:prstGeom prst="rect">
+                  <a:avLst/>
+                </a:prstGeom>
+              </p:spPr>
+              <p:style>
+                <a:lnRef idx="2">
+                  <a:schemeClr val="dk1"/>
+                </a:lnRef>
+                <a:fillRef idx="1">
+                  <a:schemeClr val="lt1"/>
+                </a:fillRef>
+                <a:effectRef idx="0">
+                  <a:schemeClr val="dk1"/>
+                </a:effectRef>
+                <a:fontRef idx="minor">
+                  <a:schemeClr val="dk1"/>
+                </a:fontRef>
+              </p:style>
+              <p:txBody>
+                <a:bodyPr rtlCol="0" anchor="ctr"/>
+                <a:lstStyle/>
+                <a:p>
+                  <a:pPr algn="ctr"/>
+                  <a:endParaRPr lang="ru-RU"/>
+                </a:p>
+              </p:txBody>
+            </p:sp>
+            <p:sp>
+              <p:nvSpPr>
+                <p:cNvPr id="86" name="TextBox 85">
+                  <a:extLst>
+                    <a:ext uri="{FF2B5EF4-FFF2-40B4-BE49-F238E27FC236}">
+                      <a16:creationId xmlns:a16="http://schemas.microsoft.com/office/drawing/2014/main" id="{CD7CBEE8-1DCC-54B4-CC2A-BEAAFA4687F0}"/>
+                    </a:ext>
+                  </a:extLst>
+                </p:cNvPr>
+                <p:cNvSpPr txBox="1"/>
+                <p:nvPr/>
+              </p:nvSpPr>
+              <p:spPr>
+                <a:xfrm>
+                  <a:off x="3147616" y="266705"/>
+                  <a:ext cx="1323301" cy="276999"/>
+                </a:xfrm>
+                <a:prstGeom prst="rect">
+                  <a:avLst/>
+                </a:prstGeom>
+                <a:noFill/>
+              </p:spPr>
+              <p:txBody>
+                <a:bodyPr wrap="square" rtlCol="0">
+                  <a:spAutoFit/>
+                </a:bodyPr>
+                <a:lstStyle/>
+                <a:p>
+                  <a:r>
+                    <a:rPr lang="ru-RU" sz="1200" dirty="0"/>
+                    <a:t>Запуск сбора метрик</a:t>
+                  </a:r>
+                </a:p>
+              </p:txBody>
+            </p:sp>
+          </p:grpSp>
+          <p:grpSp>
+            <p:nvGrpSpPr>
+              <p:cNvPr id="87" name="Группа 86">
+                <a:extLst>
+                  <a:ext uri="{FF2B5EF4-FFF2-40B4-BE49-F238E27FC236}">
+                    <a16:creationId xmlns:a16="http://schemas.microsoft.com/office/drawing/2014/main" id="{F08D2B92-4090-A598-2C60-0195523F4B7D}"/>
+                  </a:ext>
+                </a:extLst>
+              </p:cNvPr>
+              <p:cNvGrpSpPr/>
+              <p:nvPr/>
+            </p:nvGrpSpPr>
+            <p:grpSpPr>
+              <a:xfrm>
+                <a:off x="7494420" y="4444224"/>
+                <a:ext cx="1715112" cy="537814"/>
+                <a:chOff x="3125337" y="185644"/>
+                <a:chExt cx="1338155" cy="486307"/>
+              </a:xfrm>
+            </p:grpSpPr>
+            <p:sp>
+              <p:nvSpPr>
+                <p:cNvPr id="88" name="Прямоугольник 87">
+                  <a:extLst>
+                    <a:ext uri="{FF2B5EF4-FFF2-40B4-BE49-F238E27FC236}">
+                      <a16:creationId xmlns:a16="http://schemas.microsoft.com/office/drawing/2014/main" id="{CCE0D82C-47B8-1CDC-78C4-8B02D178E024}"/>
+                    </a:ext>
+                  </a:extLst>
+                </p:cNvPr>
+                <p:cNvSpPr/>
+                <p:nvPr/>
+              </p:nvSpPr>
+              <p:spPr>
+                <a:xfrm>
+                  <a:off x="3132765" y="185644"/>
+                  <a:ext cx="1330727" cy="438912"/>
+                </a:xfrm>
+                <a:prstGeom prst="rect">
+                  <a:avLst/>
+                </a:prstGeom>
+              </p:spPr>
+              <p:style>
+                <a:lnRef idx="2">
+                  <a:schemeClr val="dk1"/>
+                </a:lnRef>
+                <a:fillRef idx="1">
+                  <a:schemeClr val="lt1"/>
+                </a:fillRef>
+                <a:effectRef idx="0">
+                  <a:schemeClr val="dk1"/>
+                </a:effectRef>
+                <a:fontRef idx="minor">
+                  <a:schemeClr val="dk1"/>
+                </a:fontRef>
+              </p:style>
+              <p:txBody>
+                <a:bodyPr rtlCol="0" anchor="ctr"/>
+                <a:lstStyle/>
+                <a:p>
+                  <a:pPr algn="ctr"/>
+                  <a:endParaRPr lang="ru-RU"/>
+                </a:p>
+              </p:txBody>
+            </p:sp>
+            <p:sp>
+              <p:nvSpPr>
+                <p:cNvPr id="89" name="TextBox 88">
+                  <a:extLst>
+                    <a:ext uri="{FF2B5EF4-FFF2-40B4-BE49-F238E27FC236}">
+                      <a16:creationId xmlns:a16="http://schemas.microsoft.com/office/drawing/2014/main" id="{457CA485-0E09-344D-8906-0C6A55DA25EE}"/>
+                    </a:ext>
+                  </a:extLst>
+                </p:cNvPr>
+                <p:cNvSpPr txBox="1"/>
+                <p:nvPr/>
+              </p:nvSpPr>
+              <p:spPr>
+                <a:xfrm>
+                  <a:off x="3125337" y="210286"/>
+                  <a:ext cx="1330727" cy="461665"/>
+                </a:xfrm>
+                <a:prstGeom prst="rect">
+                  <a:avLst/>
+                </a:prstGeom>
+                <a:noFill/>
+              </p:spPr>
+              <p:txBody>
+                <a:bodyPr wrap="square" rtlCol="0">
+                  <a:spAutoFit/>
+                </a:bodyPr>
+                <a:lstStyle/>
+                <a:p>
+                  <a:pPr algn="ctr"/>
+                  <a:r>
+                    <a:rPr lang="ru-RU" sz="1200" dirty="0"/>
+                    <a:t>Остановка сбора метрик</a:t>
+                  </a:r>
+                </a:p>
+              </p:txBody>
+            </p:sp>
+          </p:grpSp>
+          <p:grpSp>
+            <p:nvGrpSpPr>
+              <p:cNvPr id="90" name="Группа 89">
+                <a:extLst>
+                  <a:ext uri="{FF2B5EF4-FFF2-40B4-BE49-F238E27FC236}">
+                    <a16:creationId xmlns:a16="http://schemas.microsoft.com/office/drawing/2014/main" id="{A1511543-CB25-5315-08CC-96C052B03069}"/>
+                  </a:ext>
+                </a:extLst>
+              </p:cNvPr>
+              <p:cNvGrpSpPr/>
+              <p:nvPr/>
+            </p:nvGrpSpPr>
+            <p:grpSpPr>
+              <a:xfrm>
+                <a:off x="7499180" y="4974279"/>
+                <a:ext cx="1719868" cy="461665"/>
+                <a:chOff x="3121626" y="185644"/>
+                <a:chExt cx="1341866" cy="461665"/>
+              </a:xfrm>
+            </p:grpSpPr>
+            <p:sp>
+              <p:nvSpPr>
+                <p:cNvPr id="91" name="Прямоугольник 90">
+                  <a:extLst>
+                    <a:ext uri="{FF2B5EF4-FFF2-40B4-BE49-F238E27FC236}">
+                      <a16:creationId xmlns:a16="http://schemas.microsoft.com/office/drawing/2014/main" id="{86A7889C-DEF7-A58C-E939-6A47F6BE1C92}"/>
+                    </a:ext>
+                  </a:extLst>
+                </p:cNvPr>
+                <p:cNvSpPr/>
+                <p:nvPr/>
+              </p:nvSpPr>
+              <p:spPr>
+                <a:xfrm>
+                  <a:off x="3132765" y="185644"/>
+                  <a:ext cx="1330727" cy="438912"/>
+                </a:xfrm>
+                <a:prstGeom prst="rect">
+                  <a:avLst/>
+                </a:prstGeom>
+              </p:spPr>
+              <p:style>
+                <a:lnRef idx="2">
+                  <a:schemeClr val="dk1"/>
+                </a:lnRef>
+                <a:fillRef idx="1">
+                  <a:schemeClr val="lt1"/>
+                </a:fillRef>
+                <a:effectRef idx="0">
+                  <a:schemeClr val="dk1"/>
+                </a:effectRef>
+                <a:fontRef idx="minor">
+                  <a:schemeClr val="dk1"/>
+                </a:fontRef>
+              </p:style>
+              <p:txBody>
+                <a:bodyPr rtlCol="0" anchor="ctr"/>
+                <a:lstStyle/>
+                <a:p>
+                  <a:pPr algn="ctr"/>
+                  <a:endParaRPr lang="ru-RU"/>
+                </a:p>
+              </p:txBody>
+            </p:sp>
+            <p:sp>
+              <p:nvSpPr>
+                <p:cNvPr id="92" name="TextBox 91">
+                  <a:extLst>
+                    <a:ext uri="{FF2B5EF4-FFF2-40B4-BE49-F238E27FC236}">
+                      <a16:creationId xmlns:a16="http://schemas.microsoft.com/office/drawing/2014/main" id="{FF4F3838-08CF-3232-40A0-9C23D58B26D5}"/>
+                    </a:ext>
+                  </a:extLst>
+                </p:cNvPr>
+                <p:cNvSpPr txBox="1"/>
+                <p:nvPr/>
+              </p:nvSpPr>
+              <p:spPr>
+                <a:xfrm>
+                  <a:off x="3121626" y="185644"/>
+                  <a:ext cx="1323301" cy="461665"/>
+                </a:xfrm>
+                <a:prstGeom prst="rect">
+                  <a:avLst/>
+                </a:prstGeom>
+                <a:noFill/>
+              </p:spPr>
+              <p:txBody>
+                <a:bodyPr wrap="square" rtlCol="0">
+                  <a:spAutoFit/>
+                </a:bodyPr>
+                <a:lstStyle/>
+                <a:p>
+                  <a:pPr algn="ctr"/>
+                  <a:r>
+                    <a:rPr lang="ru-RU" sz="1200" dirty="0"/>
+                    <a:t>Изменение интервала сбора данных</a:t>
+                  </a:r>
+                </a:p>
+              </p:txBody>
+            </p:sp>
+          </p:grpSp>
+          <p:grpSp>
+            <p:nvGrpSpPr>
+              <p:cNvPr id="93" name="Группа 92">
+                <a:extLst>
+                  <a:ext uri="{FF2B5EF4-FFF2-40B4-BE49-F238E27FC236}">
+                    <a16:creationId xmlns:a16="http://schemas.microsoft.com/office/drawing/2014/main" id="{0E1CAB7A-925C-6352-ED13-5BC758DD29DE}"/>
+                  </a:ext>
+                </a:extLst>
+              </p:cNvPr>
+              <p:cNvGrpSpPr/>
+              <p:nvPr/>
+            </p:nvGrpSpPr>
+            <p:grpSpPr>
+              <a:xfrm>
+                <a:off x="7513460" y="5501070"/>
+                <a:ext cx="1715108" cy="490417"/>
+                <a:chOff x="3125340" y="185644"/>
+                <a:chExt cx="1338152" cy="490417"/>
+              </a:xfrm>
+            </p:grpSpPr>
+            <p:sp>
+              <p:nvSpPr>
+                <p:cNvPr id="94" name="Прямоугольник 93">
+                  <a:extLst>
+                    <a:ext uri="{FF2B5EF4-FFF2-40B4-BE49-F238E27FC236}">
+                      <a16:creationId xmlns:a16="http://schemas.microsoft.com/office/drawing/2014/main" id="{B6CADA4E-6489-DF6B-CA9B-0C0762E7A9D2}"/>
+                    </a:ext>
+                  </a:extLst>
+                </p:cNvPr>
+                <p:cNvSpPr/>
+                <p:nvPr/>
+              </p:nvSpPr>
+              <p:spPr>
+                <a:xfrm>
+                  <a:off x="3132765" y="185644"/>
+                  <a:ext cx="1330727" cy="438912"/>
+                </a:xfrm>
+                <a:prstGeom prst="rect">
+                  <a:avLst/>
+                </a:prstGeom>
+              </p:spPr>
+              <p:style>
+                <a:lnRef idx="2">
+                  <a:schemeClr val="dk1"/>
+                </a:lnRef>
+                <a:fillRef idx="1">
+                  <a:schemeClr val="lt1"/>
+                </a:fillRef>
+                <a:effectRef idx="0">
+                  <a:schemeClr val="dk1"/>
+                </a:effectRef>
+                <a:fontRef idx="minor">
+                  <a:schemeClr val="dk1"/>
+                </a:fontRef>
+              </p:style>
+              <p:txBody>
+                <a:bodyPr rtlCol="0" anchor="ctr"/>
+                <a:lstStyle/>
+                <a:p>
+                  <a:pPr algn="ctr"/>
+                  <a:endParaRPr lang="ru-RU"/>
+                </a:p>
+              </p:txBody>
+            </p:sp>
+            <p:sp>
+              <p:nvSpPr>
+                <p:cNvPr id="95" name="TextBox 94">
+                  <a:extLst>
+                    <a:ext uri="{FF2B5EF4-FFF2-40B4-BE49-F238E27FC236}">
+                      <a16:creationId xmlns:a16="http://schemas.microsoft.com/office/drawing/2014/main" id="{6EC3C4DD-273D-5327-6035-3CA6D15B1ABC}"/>
+                    </a:ext>
+                  </a:extLst>
+                </p:cNvPr>
+                <p:cNvSpPr txBox="1"/>
+                <p:nvPr/>
+              </p:nvSpPr>
+              <p:spPr>
+                <a:xfrm>
+                  <a:off x="3125340" y="214396"/>
+                  <a:ext cx="1323301" cy="461665"/>
+                </a:xfrm>
+                <a:prstGeom prst="rect">
+                  <a:avLst/>
+                </a:prstGeom>
+                <a:noFill/>
+              </p:spPr>
+              <p:txBody>
+                <a:bodyPr wrap="square" rtlCol="0">
+                  <a:spAutoFit/>
+                </a:bodyPr>
+                <a:lstStyle/>
+                <a:p>
+                  <a:pPr algn="ctr"/>
+                  <a:r>
+                    <a:rPr lang="ru-RU" sz="1200" dirty="0"/>
+                    <a:t>Посмотреть статус сборки метрик</a:t>
+                  </a:r>
+                </a:p>
+              </p:txBody>
+            </p:sp>
+          </p:grpSp>
+          <p:grpSp>
+            <p:nvGrpSpPr>
+              <p:cNvPr id="96" name="Группа 95">
+                <a:extLst>
+                  <a:ext uri="{FF2B5EF4-FFF2-40B4-BE49-F238E27FC236}">
+                    <a16:creationId xmlns:a16="http://schemas.microsoft.com/office/drawing/2014/main" id="{4E741641-9D06-0F5F-D31A-23ECE12EA7AD}"/>
+                  </a:ext>
+                </a:extLst>
+              </p:cNvPr>
+              <p:cNvGrpSpPr/>
+              <p:nvPr/>
+            </p:nvGrpSpPr>
+            <p:grpSpPr>
+              <a:xfrm>
+                <a:off x="7494420" y="6055218"/>
+                <a:ext cx="1705591" cy="438912"/>
+                <a:chOff x="3132765" y="185644"/>
+                <a:chExt cx="1330727" cy="438912"/>
+              </a:xfrm>
+            </p:grpSpPr>
+            <p:sp>
+              <p:nvSpPr>
+                <p:cNvPr id="97" name="Прямоугольник 96">
+                  <a:extLst>
+                    <a:ext uri="{FF2B5EF4-FFF2-40B4-BE49-F238E27FC236}">
+                      <a16:creationId xmlns:a16="http://schemas.microsoft.com/office/drawing/2014/main" id="{3935F209-DF9A-61F6-362C-66E1B5DC5F8D}"/>
+                    </a:ext>
+                  </a:extLst>
+                </p:cNvPr>
+                <p:cNvSpPr/>
+                <p:nvPr/>
+              </p:nvSpPr>
+              <p:spPr>
+                <a:xfrm>
+                  <a:off x="3132765" y="185644"/>
+                  <a:ext cx="1330727" cy="438912"/>
+                </a:xfrm>
+                <a:prstGeom prst="rect">
+                  <a:avLst/>
+                </a:prstGeom>
+              </p:spPr>
+              <p:style>
+                <a:lnRef idx="2">
+                  <a:schemeClr val="dk1"/>
+                </a:lnRef>
+                <a:fillRef idx="1">
+                  <a:schemeClr val="lt1"/>
+                </a:fillRef>
+                <a:effectRef idx="0">
+                  <a:schemeClr val="dk1"/>
+                </a:effectRef>
+                <a:fontRef idx="minor">
+                  <a:schemeClr val="dk1"/>
+                </a:fontRef>
+              </p:style>
+              <p:txBody>
+                <a:bodyPr rtlCol="0" anchor="ctr"/>
+                <a:lstStyle/>
+                <a:p>
+                  <a:pPr algn="ctr"/>
+                  <a:endParaRPr lang="ru-RU"/>
+                </a:p>
+              </p:txBody>
+            </p:sp>
+            <p:sp>
+              <p:nvSpPr>
+                <p:cNvPr id="98" name="TextBox 97">
+                  <a:extLst>
+                    <a:ext uri="{FF2B5EF4-FFF2-40B4-BE49-F238E27FC236}">
+                      <a16:creationId xmlns:a16="http://schemas.microsoft.com/office/drawing/2014/main" id="{831C7BF2-D972-AE4E-BA7D-AA2E11E0C4D4}"/>
+                    </a:ext>
+                  </a:extLst>
+                </p:cNvPr>
+                <p:cNvSpPr txBox="1"/>
+                <p:nvPr/>
+              </p:nvSpPr>
+              <p:spPr>
+                <a:xfrm>
+                  <a:off x="3132765" y="266601"/>
+                  <a:ext cx="1323301" cy="276999"/>
+                </a:xfrm>
+                <a:prstGeom prst="rect">
+                  <a:avLst/>
+                </a:prstGeom>
+                <a:noFill/>
+              </p:spPr>
+              <p:txBody>
+                <a:bodyPr wrap="square" rtlCol="0">
+                  <a:spAutoFit/>
+                </a:bodyPr>
+                <a:lstStyle/>
+                <a:p>
+                  <a:pPr algn="ctr"/>
+                  <a:r>
+                    <a:rPr lang="ru-RU" sz="1200" dirty="0"/>
+                    <a:t>Вывод списка метрик</a:t>
+                  </a:r>
+                </a:p>
+              </p:txBody>
+            </p:sp>
+          </p:grpSp>
+          <p:cxnSp>
+            <p:nvCxnSpPr>
+              <p:cNvPr id="102" name="Прямая со стрелкой 101">
+                <a:extLst>
+                  <a:ext uri="{FF2B5EF4-FFF2-40B4-BE49-F238E27FC236}">
+                    <a16:creationId xmlns:a16="http://schemas.microsoft.com/office/drawing/2014/main" id="{7A6B6342-8B9E-DB48-CF7F-CF0C35F77D07}"/>
+                  </a:ext>
+                </a:extLst>
+              </p:cNvPr>
+              <p:cNvCxnSpPr>
+                <a:stCxn id="8" idx="6"/>
+                <a:endCxn id="86" idx="1"/>
+              </p:cNvCxnSpPr>
+              <p:nvPr/>
+            </p:nvCxnSpPr>
+            <p:spPr>
+              <a:xfrm flipV="1">
+                <a:off x="6632447" y="4136889"/>
+                <a:ext cx="890529" cy="555812"/>
+              </a:xfrm>
+              <a:prstGeom prst="straightConnector1">
+                <a:avLst/>
+              </a:prstGeom>
+              <a:ln>
+                <a:tailEnd type="triangle"/>
+              </a:ln>
+            </p:spPr>
+            <p:style>
+              <a:lnRef idx="1">
+                <a:schemeClr val="dk1"/>
+              </a:lnRef>
+              <a:fillRef idx="0">
+                <a:schemeClr val="dk1"/>
+              </a:fillRef>
+              <a:effectRef idx="0">
+                <a:schemeClr val="dk1"/>
+              </a:effectRef>
+              <a:fontRef idx="minor">
+                <a:schemeClr val="tx1"/>
+              </a:fontRef>
+            </p:style>
+          </p:cxnSp>
+          <p:cxnSp>
+            <p:nvCxnSpPr>
+              <p:cNvPr id="104" name="Прямая со стрелкой 103">
+                <a:extLst>
+                  <a:ext uri="{FF2B5EF4-FFF2-40B4-BE49-F238E27FC236}">
+                    <a16:creationId xmlns:a16="http://schemas.microsoft.com/office/drawing/2014/main" id="{D187E933-2236-F05A-1ED0-55F080448BFC}"/>
+                  </a:ext>
+                </a:extLst>
+              </p:cNvPr>
+              <p:cNvCxnSpPr>
+                <a:stCxn id="8" idx="6"/>
+                <a:endCxn id="89" idx="1"/>
+              </p:cNvCxnSpPr>
+              <p:nvPr/>
+            </p:nvCxnSpPr>
+            <p:spPr>
+              <a:xfrm>
+                <a:off x="6632447" y="4692701"/>
+                <a:ext cx="861973" cy="34056"/>
+              </a:xfrm>
+              <a:prstGeom prst="straightConnector1">
+                <a:avLst/>
+              </a:prstGeom>
+              <a:ln>
+                <a:tailEnd type="triangle"/>
+              </a:ln>
+            </p:spPr>
+            <p:style>
+              <a:lnRef idx="1">
+                <a:schemeClr val="dk1"/>
+              </a:lnRef>
+              <a:fillRef idx="0">
+                <a:schemeClr val="dk1"/>
+              </a:fillRef>
+              <a:effectRef idx="0">
+                <a:schemeClr val="dk1"/>
+              </a:effectRef>
+              <a:fontRef idx="minor">
+                <a:schemeClr val="tx1"/>
+              </a:fontRef>
+            </p:style>
+          </p:cxnSp>
+          <p:cxnSp>
+            <p:nvCxnSpPr>
+              <p:cNvPr id="106" name="Прямая со стрелкой 105">
+                <a:extLst>
+                  <a:ext uri="{FF2B5EF4-FFF2-40B4-BE49-F238E27FC236}">
+                    <a16:creationId xmlns:a16="http://schemas.microsoft.com/office/drawing/2014/main" id="{DD8FA45D-4F73-CC49-B268-A3F151572091}"/>
+                  </a:ext>
+                </a:extLst>
+              </p:cNvPr>
+              <p:cNvCxnSpPr>
+                <a:stCxn id="8" idx="6"/>
+                <a:endCxn id="92" idx="1"/>
+              </p:cNvCxnSpPr>
+              <p:nvPr/>
+            </p:nvCxnSpPr>
+            <p:spPr>
+              <a:xfrm>
+                <a:off x="6632447" y="4692701"/>
+                <a:ext cx="866733" cy="512411"/>
+              </a:xfrm>
+              <a:prstGeom prst="straightConnector1">
+                <a:avLst/>
+              </a:prstGeom>
+              <a:ln>
+                <a:tailEnd type="triangle"/>
+              </a:ln>
+            </p:spPr>
+            <p:style>
+              <a:lnRef idx="1">
+                <a:schemeClr val="dk1"/>
+              </a:lnRef>
+              <a:fillRef idx="0">
+                <a:schemeClr val="dk1"/>
+              </a:fillRef>
+              <a:effectRef idx="0">
+                <a:schemeClr val="dk1"/>
+              </a:effectRef>
+              <a:fontRef idx="minor">
+                <a:schemeClr val="tx1"/>
+              </a:fontRef>
+            </p:style>
+          </p:cxnSp>
+          <p:cxnSp>
+            <p:nvCxnSpPr>
+              <p:cNvPr id="108" name="Прямая со стрелкой 107">
+                <a:extLst>
+                  <a:ext uri="{FF2B5EF4-FFF2-40B4-BE49-F238E27FC236}">
+                    <a16:creationId xmlns:a16="http://schemas.microsoft.com/office/drawing/2014/main" id="{27379544-768E-7320-9DAC-DA4B2CE54528}"/>
+                  </a:ext>
+                </a:extLst>
+              </p:cNvPr>
+              <p:cNvCxnSpPr>
+                <a:stCxn id="8" idx="6"/>
+                <a:endCxn id="95" idx="1"/>
+              </p:cNvCxnSpPr>
+              <p:nvPr/>
+            </p:nvCxnSpPr>
+            <p:spPr>
+              <a:xfrm>
+                <a:off x="6632447" y="4692701"/>
+                <a:ext cx="881013" cy="1067954"/>
+              </a:xfrm>
+              <a:prstGeom prst="straightConnector1">
+                <a:avLst/>
+              </a:prstGeom>
+              <a:ln>
+                <a:tailEnd type="triangle"/>
+              </a:ln>
+            </p:spPr>
+            <p:style>
+              <a:lnRef idx="1">
+                <a:schemeClr val="dk1"/>
+              </a:lnRef>
+              <a:fillRef idx="0">
+                <a:schemeClr val="dk1"/>
+              </a:fillRef>
+              <a:effectRef idx="0">
+                <a:schemeClr val="dk1"/>
+              </a:effectRef>
+              <a:fontRef idx="minor">
+                <a:schemeClr val="tx1"/>
+              </a:fontRef>
+            </p:style>
+          </p:cxnSp>
+          <p:cxnSp>
+            <p:nvCxnSpPr>
+              <p:cNvPr id="110" name="Прямая со стрелкой 109">
+                <a:extLst>
+                  <a:ext uri="{FF2B5EF4-FFF2-40B4-BE49-F238E27FC236}">
+                    <a16:creationId xmlns:a16="http://schemas.microsoft.com/office/drawing/2014/main" id="{DCB55E75-81B6-A09D-3BE5-33E5DF3DCD16}"/>
+                  </a:ext>
+                </a:extLst>
+              </p:cNvPr>
+              <p:cNvCxnSpPr>
+                <a:stCxn id="8" idx="6"/>
+                <a:endCxn id="98" idx="1"/>
+              </p:cNvCxnSpPr>
+              <p:nvPr/>
+            </p:nvCxnSpPr>
+            <p:spPr>
+              <a:xfrm>
+                <a:off x="6632447" y="4692701"/>
+                <a:ext cx="861973" cy="1581974"/>
+              </a:xfrm>
+              <a:prstGeom prst="straightConnector1">
+                <a:avLst/>
+              </a:prstGeom>
+              <a:ln>
+                <a:tailEnd type="triangle"/>
+              </a:ln>
+            </p:spPr>
+            <p:style>
+              <a:lnRef idx="1">
+                <a:schemeClr val="dk1"/>
+              </a:lnRef>
+              <a:fillRef idx="0">
+                <a:schemeClr val="dk1"/>
+              </a:fillRef>
+              <a:effectRef idx="0">
+                <a:schemeClr val="dk1"/>
+              </a:effectRef>
+              <a:fontRef idx="minor">
+                <a:schemeClr val="tx1"/>
+              </a:fontRef>
+            </p:style>
+          </p:cxnSp>
+          <p:grpSp>
+            <p:nvGrpSpPr>
+              <p:cNvPr id="111" name="Группа 110">
+                <a:extLst>
+                  <a:ext uri="{FF2B5EF4-FFF2-40B4-BE49-F238E27FC236}">
+                    <a16:creationId xmlns:a16="http://schemas.microsoft.com/office/drawing/2014/main" id="{FBD0554F-836F-7AEF-D132-2F6A20AEFCC3}"/>
+                  </a:ext>
+                </a:extLst>
+              </p:cNvPr>
+              <p:cNvGrpSpPr/>
+              <p:nvPr/>
+            </p:nvGrpSpPr>
+            <p:grpSpPr>
+              <a:xfrm>
+                <a:off x="10175457" y="384840"/>
+                <a:ext cx="1715108" cy="754241"/>
+                <a:chOff x="3132765" y="185643"/>
+                <a:chExt cx="1338152" cy="754241"/>
+              </a:xfrm>
+            </p:grpSpPr>
+            <p:sp>
+              <p:nvSpPr>
+                <p:cNvPr id="112" name="Прямоугольник 111">
+                  <a:extLst>
+                    <a:ext uri="{FF2B5EF4-FFF2-40B4-BE49-F238E27FC236}">
+                      <a16:creationId xmlns:a16="http://schemas.microsoft.com/office/drawing/2014/main" id="{308D05CD-D966-DCB9-8999-703451C5F5BE}"/>
+                    </a:ext>
+                  </a:extLst>
+                </p:cNvPr>
+                <p:cNvSpPr/>
+                <p:nvPr/>
+              </p:nvSpPr>
+              <p:spPr>
+                <a:xfrm>
+                  <a:off x="3132765" y="185643"/>
+                  <a:ext cx="1330727" cy="754241"/>
+                </a:xfrm>
+                <a:prstGeom prst="rect">
+                  <a:avLst/>
+                </a:prstGeom>
+              </p:spPr>
+              <p:style>
+                <a:lnRef idx="2">
+                  <a:schemeClr val="dk1"/>
+                </a:lnRef>
+                <a:fillRef idx="1">
+                  <a:schemeClr val="lt1"/>
+                </a:fillRef>
+                <a:effectRef idx="0">
+                  <a:schemeClr val="dk1"/>
+                </a:effectRef>
+                <a:fontRef idx="minor">
+                  <a:schemeClr val="dk1"/>
+                </a:fontRef>
+              </p:style>
+              <p:txBody>
+                <a:bodyPr rtlCol="0" anchor="ctr"/>
+                <a:lstStyle/>
+                <a:p>
+                  <a:pPr algn="ctr"/>
+                  <a:endParaRPr lang="ru-RU"/>
+                </a:p>
+              </p:txBody>
+            </p:sp>
+            <p:sp>
+              <p:nvSpPr>
+                <p:cNvPr id="113" name="TextBox 112">
+                  <a:extLst>
+                    <a:ext uri="{FF2B5EF4-FFF2-40B4-BE49-F238E27FC236}">
+                      <a16:creationId xmlns:a16="http://schemas.microsoft.com/office/drawing/2014/main" id="{6C1602A6-6963-9EE4-8FF4-BDA79CD4E61C}"/>
+                    </a:ext>
+                  </a:extLst>
+                </p:cNvPr>
+                <p:cNvSpPr txBox="1"/>
+                <p:nvPr/>
+              </p:nvSpPr>
+              <p:spPr>
+                <a:xfrm>
+                  <a:off x="3147616" y="266705"/>
+                  <a:ext cx="1323301" cy="646331"/>
+                </a:xfrm>
+                <a:prstGeom prst="rect">
+                  <a:avLst/>
+                </a:prstGeom>
+                <a:noFill/>
+              </p:spPr>
+              <p:txBody>
+                <a:bodyPr wrap="square" rtlCol="0">
+                  <a:spAutoFit/>
+                </a:bodyPr>
+                <a:lstStyle/>
+                <a:p>
+                  <a:pPr algn="ctr"/>
+                  <a:r>
+                    <a:rPr lang="ru-RU" sz="1200" dirty="0"/>
+                    <a:t>Создание пользователя с определённой ролью</a:t>
+                  </a:r>
+                </a:p>
+              </p:txBody>
+            </p:sp>
+          </p:grpSp>
+          <p:grpSp>
+            <p:nvGrpSpPr>
+              <p:cNvPr id="115" name="Группа 114">
+                <a:extLst>
+                  <a:ext uri="{FF2B5EF4-FFF2-40B4-BE49-F238E27FC236}">
+                    <a16:creationId xmlns:a16="http://schemas.microsoft.com/office/drawing/2014/main" id="{898ADC2C-520B-6DFA-C749-76E491D2CC8B}"/>
+                  </a:ext>
+                </a:extLst>
+              </p:cNvPr>
+              <p:cNvGrpSpPr/>
+              <p:nvPr/>
+            </p:nvGrpSpPr>
+            <p:grpSpPr>
+              <a:xfrm>
+                <a:off x="10184979" y="1270643"/>
+                <a:ext cx="1715103" cy="754240"/>
+                <a:chOff x="3132765" y="185644"/>
+                <a:chExt cx="1338152" cy="542726"/>
+              </a:xfrm>
+            </p:grpSpPr>
+            <p:sp>
+              <p:nvSpPr>
+                <p:cNvPr id="116" name="Прямоугольник 115">
+                  <a:extLst>
+                    <a:ext uri="{FF2B5EF4-FFF2-40B4-BE49-F238E27FC236}">
+                      <a16:creationId xmlns:a16="http://schemas.microsoft.com/office/drawing/2014/main" id="{7B1D5E37-5D35-014A-EE02-4FDC0B533E23}"/>
+                    </a:ext>
+                  </a:extLst>
+                </p:cNvPr>
+                <p:cNvSpPr/>
+                <p:nvPr/>
+              </p:nvSpPr>
+              <p:spPr>
+                <a:xfrm>
+                  <a:off x="3132765" y="185644"/>
+                  <a:ext cx="1330727" cy="438912"/>
+                </a:xfrm>
+                <a:prstGeom prst="rect">
+                  <a:avLst/>
+                </a:prstGeom>
+              </p:spPr>
+              <p:style>
+                <a:lnRef idx="2">
+                  <a:schemeClr val="dk1"/>
+                </a:lnRef>
+                <a:fillRef idx="1">
+                  <a:schemeClr val="lt1"/>
+                </a:fillRef>
+                <a:effectRef idx="0">
+                  <a:schemeClr val="dk1"/>
+                </a:effectRef>
+                <a:fontRef idx="minor">
+                  <a:schemeClr val="dk1"/>
+                </a:fontRef>
+              </p:style>
+              <p:txBody>
+                <a:bodyPr rtlCol="0" anchor="ctr"/>
+                <a:lstStyle/>
+                <a:p>
+                  <a:pPr algn="ctr"/>
+                  <a:endParaRPr lang="ru-RU"/>
+                </a:p>
+              </p:txBody>
+            </p:sp>
+            <p:sp>
+              <p:nvSpPr>
+                <p:cNvPr id="117" name="TextBox 116">
+                  <a:extLst>
+                    <a:ext uri="{FF2B5EF4-FFF2-40B4-BE49-F238E27FC236}">
+                      <a16:creationId xmlns:a16="http://schemas.microsoft.com/office/drawing/2014/main" id="{A7A3EA35-8DA7-BA41-CD71-A9FA03B0ACFC}"/>
+                    </a:ext>
+                  </a:extLst>
+                </p:cNvPr>
+                <p:cNvSpPr txBox="1"/>
+                <p:nvPr/>
+              </p:nvSpPr>
+              <p:spPr>
+                <a:xfrm>
+                  <a:off x="3147616" y="266705"/>
+                  <a:ext cx="1323301" cy="461665"/>
+                </a:xfrm>
+                <a:prstGeom prst="rect">
+                  <a:avLst/>
+                </a:prstGeom>
+                <a:noFill/>
+              </p:spPr>
+              <p:txBody>
+                <a:bodyPr wrap="square" rtlCol="0">
+                  <a:spAutoFit/>
+                </a:bodyPr>
+                <a:lstStyle/>
+                <a:p>
+                  <a:pPr algn="ctr"/>
+                  <a:r>
+                    <a:rPr lang="ru-RU" sz="1200" dirty="0"/>
+                    <a:t>Вывод списка пользователей</a:t>
+                  </a:r>
+                </a:p>
+              </p:txBody>
+            </p:sp>
+          </p:grpSp>
+          <p:grpSp>
+            <p:nvGrpSpPr>
+              <p:cNvPr id="118" name="Группа 117">
+                <a:extLst>
+                  <a:ext uri="{FF2B5EF4-FFF2-40B4-BE49-F238E27FC236}">
+                    <a16:creationId xmlns:a16="http://schemas.microsoft.com/office/drawing/2014/main" id="{79F502DC-5862-6752-5C49-9BFB7D222E2E}"/>
+                  </a:ext>
+                </a:extLst>
+              </p:cNvPr>
+              <p:cNvGrpSpPr/>
+              <p:nvPr/>
+            </p:nvGrpSpPr>
+            <p:grpSpPr>
+              <a:xfrm>
+                <a:off x="10194494" y="2007129"/>
+                <a:ext cx="1715106" cy="1148423"/>
+                <a:chOff x="3132767" y="221301"/>
+                <a:chExt cx="1338150" cy="691735"/>
+              </a:xfrm>
+            </p:grpSpPr>
+            <p:sp>
+              <p:nvSpPr>
+                <p:cNvPr id="119" name="Прямоугольник 118">
+                  <a:extLst>
+                    <a:ext uri="{FF2B5EF4-FFF2-40B4-BE49-F238E27FC236}">
+                      <a16:creationId xmlns:a16="http://schemas.microsoft.com/office/drawing/2014/main" id="{104D1880-5DB5-E5BC-0708-DD5C95BE94A2}"/>
+                    </a:ext>
+                  </a:extLst>
+                </p:cNvPr>
+                <p:cNvSpPr/>
+                <p:nvPr/>
+              </p:nvSpPr>
+              <p:spPr>
+                <a:xfrm>
+                  <a:off x="3132767" y="221301"/>
+                  <a:ext cx="1330727" cy="438912"/>
+                </a:xfrm>
+                <a:prstGeom prst="rect">
+                  <a:avLst/>
+                </a:prstGeom>
+              </p:spPr>
+              <p:style>
+                <a:lnRef idx="2">
+                  <a:schemeClr val="dk1"/>
+                </a:lnRef>
+                <a:fillRef idx="1">
+                  <a:schemeClr val="lt1"/>
+                </a:fillRef>
+                <a:effectRef idx="0">
+                  <a:schemeClr val="dk1"/>
+                </a:effectRef>
+                <a:fontRef idx="minor">
+                  <a:schemeClr val="dk1"/>
+                </a:fontRef>
+              </p:style>
+              <p:txBody>
+                <a:bodyPr rtlCol="0" anchor="ctr"/>
+                <a:lstStyle/>
+                <a:p>
+                  <a:pPr algn="ctr"/>
+                  <a:endParaRPr lang="ru-RU"/>
+                </a:p>
+              </p:txBody>
+            </p:sp>
+            <p:sp>
+              <p:nvSpPr>
+                <p:cNvPr id="120" name="TextBox 119">
+                  <a:extLst>
+                    <a:ext uri="{FF2B5EF4-FFF2-40B4-BE49-F238E27FC236}">
+                      <a16:creationId xmlns:a16="http://schemas.microsoft.com/office/drawing/2014/main" id="{EBDDE23A-96EA-CA40-8025-9D7A67CD182D}"/>
+                    </a:ext>
+                  </a:extLst>
+                </p:cNvPr>
+                <p:cNvSpPr txBox="1"/>
+                <p:nvPr/>
+              </p:nvSpPr>
+              <p:spPr>
+                <a:xfrm>
+                  <a:off x="3147616" y="266705"/>
+                  <a:ext cx="1323301" cy="646331"/>
+                </a:xfrm>
+                <a:prstGeom prst="rect">
+                  <a:avLst/>
+                </a:prstGeom>
+                <a:noFill/>
+              </p:spPr>
+              <p:txBody>
+                <a:bodyPr wrap="square" rtlCol="0">
+                  <a:spAutoFit/>
+                </a:bodyPr>
+                <a:lstStyle/>
+                <a:p>
+                  <a:pPr algn="ctr"/>
+                  <a:r>
+                    <a:rPr lang="ru-RU" sz="1200" dirty="0"/>
+                    <a:t>Блокировка учётных записей пользователей</a:t>
+                  </a:r>
+                </a:p>
+              </p:txBody>
+            </p:sp>
+          </p:grpSp>
+          <p:grpSp>
+            <p:nvGrpSpPr>
+              <p:cNvPr id="121" name="Группа 120">
+                <a:extLst>
+                  <a:ext uri="{FF2B5EF4-FFF2-40B4-BE49-F238E27FC236}">
+                    <a16:creationId xmlns:a16="http://schemas.microsoft.com/office/drawing/2014/main" id="{64302286-C6AB-2A3B-DC94-09A3E7234DA9}"/>
+                  </a:ext>
+                </a:extLst>
+              </p:cNvPr>
+              <p:cNvGrpSpPr/>
+              <p:nvPr/>
+            </p:nvGrpSpPr>
+            <p:grpSpPr>
+              <a:xfrm>
+                <a:off x="10199250" y="2855389"/>
+                <a:ext cx="1724626" cy="490259"/>
+                <a:chOff x="3125339" y="238111"/>
+                <a:chExt cx="1345578" cy="490259"/>
+              </a:xfrm>
+            </p:grpSpPr>
+            <p:sp>
+              <p:nvSpPr>
+                <p:cNvPr id="122" name="Прямоугольник 121">
+                  <a:extLst>
+                    <a:ext uri="{FF2B5EF4-FFF2-40B4-BE49-F238E27FC236}">
+                      <a16:creationId xmlns:a16="http://schemas.microsoft.com/office/drawing/2014/main" id="{7E48E41C-F73B-9A37-8E16-E37EE37AB4DD}"/>
+                    </a:ext>
+                  </a:extLst>
+                </p:cNvPr>
+                <p:cNvSpPr/>
+                <p:nvPr/>
+              </p:nvSpPr>
+              <p:spPr>
+                <a:xfrm>
+                  <a:off x="3125339" y="238111"/>
+                  <a:ext cx="1330727" cy="438912"/>
+                </a:xfrm>
+                <a:prstGeom prst="rect">
+                  <a:avLst/>
+                </a:prstGeom>
+              </p:spPr>
+              <p:style>
+                <a:lnRef idx="2">
+                  <a:schemeClr val="dk1"/>
+                </a:lnRef>
+                <a:fillRef idx="1">
+                  <a:schemeClr val="lt1"/>
+                </a:fillRef>
+                <a:effectRef idx="0">
+                  <a:schemeClr val="dk1"/>
+                </a:effectRef>
+                <a:fontRef idx="minor">
+                  <a:schemeClr val="dk1"/>
+                </a:fontRef>
+              </p:style>
+              <p:txBody>
+                <a:bodyPr rtlCol="0" anchor="ctr"/>
+                <a:lstStyle/>
+                <a:p>
+                  <a:pPr algn="ctr"/>
+                  <a:endParaRPr lang="ru-RU"/>
+                </a:p>
+              </p:txBody>
+            </p:sp>
+            <p:sp>
+              <p:nvSpPr>
+                <p:cNvPr id="123" name="TextBox 122">
+                  <a:extLst>
+                    <a:ext uri="{FF2B5EF4-FFF2-40B4-BE49-F238E27FC236}">
+                      <a16:creationId xmlns:a16="http://schemas.microsoft.com/office/drawing/2014/main" id="{40489D4C-F3A2-1009-E5C2-4D3C593904E1}"/>
+                    </a:ext>
+                  </a:extLst>
+                </p:cNvPr>
+                <p:cNvSpPr txBox="1"/>
+                <p:nvPr/>
+              </p:nvSpPr>
+              <p:spPr>
+                <a:xfrm>
+                  <a:off x="3147616" y="266705"/>
+                  <a:ext cx="1323301" cy="461665"/>
+                </a:xfrm>
+                <a:prstGeom prst="rect">
+                  <a:avLst/>
+                </a:prstGeom>
+                <a:noFill/>
+              </p:spPr>
+              <p:txBody>
+                <a:bodyPr wrap="square" rtlCol="0">
+                  <a:spAutoFit/>
+                </a:bodyPr>
+                <a:lstStyle/>
+                <a:p>
+                  <a:pPr algn="ctr"/>
+                  <a:r>
+                    <a:rPr lang="ru-RU" sz="1200" dirty="0"/>
+                    <a:t>Удаление пользователей</a:t>
+                  </a:r>
+                </a:p>
+              </p:txBody>
+            </p:sp>
+          </p:grpSp>
+          <p:grpSp>
+            <p:nvGrpSpPr>
+              <p:cNvPr id="124" name="Группа 123">
+                <a:extLst>
+                  <a:ext uri="{FF2B5EF4-FFF2-40B4-BE49-F238E27FC236}">
+                    <a16:creationId xmlns:a16="http://schemas.microsoft.com/office/drawing/2014/main" id="{3A594E63-3914-B928-F1A2-D545670DE86D}"/>
+                  </a:ext>
+                </a:extLst>
+              </p:cNvPr>
+              <p:cNvGrpSpPr/>
+              <p:nvPr/>
+            </p:nvGrpSpPr>
+            <p:grpSpPr>
+              <a:xfrm>
+                <a:off x="10194492" y="3429000"/>
+                <a:ext cx="1715108" cy="438912"/>
+                <a:chOff x="3132765" y="185644"/>
+                <a:chExt cx="1338152" cy="438912"/>
+              </a:xfrm>
+            </p:grpSpPr>
+            <p:sp>
+              <p:nvSpPr>
+                <p:cNvPr id="125" name="Прямоугольник 124">
+                  <a:extLst>
+                    <a:ext uri="{FF2B5EF4-FFF2-40B4-BE49-F238E27FC236}">
+                      <a16:creationId xmlns:a16="http://schemas.microsoft.com/office/drawing/2014/main" id="{9C471486-4ED4-2BD4-70A8-04F1C9EE1FB7}"/>
+                    </a:ext>
+                  </a:extLst>
+                </p:cNvPr>
+                <p:cNvSpPr/>
+                <p:nvPr/>
+              </p:nvSpPr>
+              <p:spPr>
+                <a:xfrm>
+                  <a:off x="3132765" y="185644"/>
+                  <a:ext cx="1330727" cy="438912"/>
+                </a:xfrm>
+                <a:prstGeom prst="rect">
+                  <a:avLst/>
+                </a:prstGeom>
+              </p:spPr>
+              <p:style>
+                <a:lnRef idx="2">
+                  <a:schemeClr val="dk1"/>
+                </a:lnRef>
+                <a:fillRef idx="1">
+                  <a:schemeClr val="lt1"/>
+                </a:fillRef>
+                <a:effectRef idx="0">
+                  <a:schemeClr val="dk1"/>
+                </a:effectRef>
+                <a:fontRef idx="minor">
+                  <a:schemeClr val="dk1"/>
+                </a:fontRef>
+              </p:style>
+              <p:txBody>
+                <a:bodyPr rtlCol="0" anchor="ctr"/>
+                <a:lstStyle/>
+                <a:p>
+                  <a:pPr algn="ctr"/>
+                  <a:endParaRPr lang="ru-RU"/>
+                </a:p>
+              </p:txBody>
+            </p:sp>
+            <p:sp>
+              <p:nvSpPr>
+                <p:cNvPr id="126" name="TextBox 125">
+                  <a:extLst>
+                    <a:ext uri="{FF2B5EF4-FFF2-40B4-BE49-F238E27FC236}">
+                      <a16:creationId xmlns:a16="http://schemas.microsoft.com/office/drawing/2014/main" id="{AF2E2BA7-8588-023E-E304-35A30395FFD7}"/>
+                    </a:ext>
+                  </a:extLst>
+                </p:cNvPr>
+                <p:cNvSpPr txBox="1"/>
+                <p:nvPr/>
+              </p:nvSpPr>
+              <p:spPr>
+                <a:xfrm>
+                  <a:off x="3147616" y="266705"/>
+                  <a:ext cx="1323301" cy="276999"/>
+                </a:xfrm>
+                <a:prstGeom prst="rect">
+                  <a:avLst/>
+                </a:prstGeom>
+                <a:noFill/>
+              </p:spPr>
+              <p:txBody>
+                <a:bodyPr wrap="square" rtlCol="0">
+                  <a:spAutoFit/>
+                </a:bodyPr>
+                <a:lstStyle/>
+                <a:p>
+                  <a:r>
+                    <a:rPr lang="ru-RU" sz="1200" dirty="0"/>
+                    <a:t>Вывод логов системы</a:t>
+                  </a:r>
+                </a:p>
+              </p:txBody>
+            </p:sp>
+          </p:grpSp>
+          <p:grpSp>
+            <p:nvGrpSpPr>
+              <p:cNvPr id="127" name="Группа 126">
+                <a:extLst>
+                  <a:ext uri="{FF2B5EF4-FFF2-40B4-BE49-F238E27FC236}">
+                    <a16:creationId xmlns:a16="http://schemas.microsoft.com/office/drawing/2014/main" id="{E7820DEB-56C7-BF7A-E10E-B6A72C8456EF}"/>
+                  </a:ext>
+                </a:extLst>
+              </p:cNvPr>
+              <p:cNvGrpSpPr/>
+              <p:nvPr/>
+            </p:nvGrpSpPr>
+            <p:grpSpPr>
+              <a:xfrm>
+                <a:off x="10194492" y="4032817"/>
+                <a:ext cx="1715108" cy="438912"/>
+                <a:chOff x="3132765" y="185644"/>
+                <a:chExt cx="1338152" cy="438912"/>
+              </a:xfrm>
+            </p:grpSpPr>
+            <p:sp>
+              <p:nvSpPr>
+                <p:cNvPr id="128" name="Прямоугольник 127">
+                  <a:extLst>
+                    <a:ext uri="{FF2B5EF4-FFF2-40B4-BE49-F238E27FC236}">
+                      <a16:creationId xmlns:a16="http://schemas.microsoft.com/office/drawing/2014/main" id="{F7950E21-15B0-429D-E778-ABF446C1B10E}"/>
+                    </a:ext>
+                  </a:extLst>
+                </p:cNvPr>
+                <p:cNvSpPr/>
+                <p:nvPr/>
+              </p:nvSpPr>
+              <p:spPr>
+                <a:xfrm>
+                  <a:off x="3132765" y="185644"/>
+                  <a:ext cx="1330727" cy="438912"/>
+                </a:xfrm>
+                <a:prstGeom prst="rect">
+                  <a:avLst/>
+                </a:prstGeom>
+              </p:spPr>
+              <p:style>
+                <a:lnRef idx="2">
+                  <a:schemeClr val="dk1"/>
+                </a:lnRef>
+                <a:fillRef idx="1">
+                  <a:schemeClr val="lt1"/>
+                </a:fillRef>
+                <a:effectRef idx="0">
+                  <a:schemeClr val="dk1"/>
+                </a:effectRef>
+                <a:fontRef idx="minor">
+                  <a:schemeClr val="dk1"/>
+                </a:fontRef>
+              </p:style>
+              <p:txBody>
+                <a:bodyPr rtlCol="0" anchor="ctr"/>
+                <a:lstStyle/>
+                <a:p>
+                  <a:pPr algn="ctr"/>
+                  <a:endParaRPr lang="ru-RU"/>
+                </a:p>
+              </p:txBody>
+            </p:sp>
+            <p:sp>
+              <p:nvSpPr>
+                <p:cNvPr id="129" name="TextBox 128">
+                  <a:extLst>
+                    <a:ext uri="{FF2B5EF4-FFF2-40B4-BE49-F238E27FC236}">
+                      <a16:creationId xmlns:a16="http://schemas.microsoft.com/office/drawing/2014/main" id="{731EDDA3-6486-FE41-6B9F-034B636B22F4}"/>
+                    </a:ext>
+                  </a:extLst>
+                </p:cNvPr>
+                <p:cNvSpPr txBox="1"/>
+                <p:nvPr/>
+              </p:nvSpPr>
+              <p:spPr>
+                <a:xfrm>
+                  <a:off x="3147616" y="266705"/>
+                  <a:ext cx="1323301" cy="276999"/>
+                </a:xfrm>
+                <a:prstGeom prst="rect">
+                  <a:avLst/>
+                </a:prstGeom>
+                <a:noFill/>
+              </p:spPr>
+              <p:txBody>
+                <a:bodyPr wrap="square" rtlCol="0">
+                  <a:spAutoFit/>
+                </a:bodyPr>
+                <a:lstStyle/>
+                <a:p>
+                  <a:pPr algn="ctr"/>
+                  <a:r>
+                    <a:rPr lang="ru-RU" sz="1200" dirty="0"/>
+                    <a:t>Запуск обновления</a:t>
+                  </a:r>
+                </a:p>
+              </p:txBody>
+            </p:sp>
+          </p:grpSp>
+          <p:cxnSp>
+            <p:nvCxnSpPr>
+              <p:cNvPr id="131" name="Прямая со стрелкой 130">
+                <a:extLst>
+                  <a:ext uri="{FF2B5EF4-FFF2-40B4-BE49-F238E27FC236}">
+                    <a16:creationId xmlns:a16="http://schemas.microsoft.com/office/drawing/2014/main" id="{06B90C8B-2C87-A8AD-CF0E-6B2706670F70}"/>
+                  </a:ext>
+                </a:extLst>
+              </p:cNvPr>
+              <p:cNvCxnSpPr>
+                <a:stCxn id="9" idx="6"/>
+                <a:endCxn id="112" idx="1"/>
+              </p:cNvCxnSpPr>
+              <p:nvPr/>
+            </p:nvCxnSpPr>
+            <p:spPr>
+              <a:xfrm flipV="1">
+                <a:off x="8801403" y="761961"/>
+                <a:ext cx="1374054" cy="2379917"/>
+              </a:xfrm>
+              <a:prstGeom prst="straightConnector1">
+                <a:avLst/>
+              </a:prstGeom>
+              <a:ln>
+                <a:tailEnd type="triangle"/>
+              </a:ln>
+            </p:spPr>
+            <p:style>
+              <a:lnRef idx="1">
+                <a:schemeClr val="dk1"/>
+              </a:lnRef>
+              <a:fillRef idx="0">
+                <a:schemeClr val="dk1"/>
+              </a:fillRef>
+              <a:effectRef idx="0">
+                <a:schemeClr val="dk1"/>
+              </a:effectRef>
+              <a:fontRef idx="minor">
+                <a:schemeClr val="tx1"/>
+              </a:fontRef>
+            </p:style>
+          </p:cxnSp>
+          <p:cxnSp>
+            <p:nvCxnSpPr>
+              <p:cNvPr id="133" name="Прямая со стрелкой 132">
+                <a:extLst>
+                  <a:ext uri="{FF2B5EF4-FFF2-40B4-BE49-F238E27FC236}">
+                    <a16:creationId xmlns:a16="http://schemas.microsoft.com/office/drawing/2014/main" id="{010B91F2-A572-C832-AB66-2DAA9E0C3C54}"/>
+                  </a:ext>
+                </a:extLst>
+              </p:cNvPr>
+              <p:cNvCxnSpPr>
+                <a:stCxn id="9" idx="6"/>
+              </p:cNvCxnSpPr>
+              <p:nvPr/>
+            </p:nvCxnSpPr>
+            <p:spPr>
+              <a:xfrm flipV="1">
+                <a:off x="8801403" y="1521562"/>
+                <a:ext cx="1374054" cy="1620316"/>
+              </a:xfrm>
+              <a:prstGeom prst="straightConnector1">
+                <a:avLst/>
+              </a:prstGeom>
+              <a:ln>
+                <a:tailEnd type="triangle"/>
+              </a:ln>
+            </p:spPr>
+            <p:style>
+              <a:lnRef idx="1">
+                <a:schemeClr val="dk1"/>
+              </a:lnRef>
+              <a:fillRef idx="0">
+                <a:schemeClr val="dk1"/>
+              </a:fillRef>
+              <a:effectRef idx="0">
+                <a:schemeClr val="dk1"/>
+              </a:effectRef>
+              <a:fontRef idx="minor">
+                <a:schemeClr val="tx1"/>
+              </a:fontRef>
+            </p:style>
+          </p:cxnSp>
+          <p:cxnSp>
+            <p:nvCxnSpPr>
+              <p:cNvPr id="135" name="Прямая со стрелкой 134">
+                <a:extLst>
+                  <a:ext uri="{FF2B5EF4-FFF2-40B4-BE49-F238E27FC236}">
+                    <a16:creationId xmlns:a16="http://schemas.microsoft.com/office/drawing/2014/main" id="{AD62EBD0-B078-DF5E-D565-C2FD3A98160C}"/>
+                  </a:ext>
+                </a:extLst>
+              </p:cNvPr>
+              <p:cNvCxnSpPr>
+                <a:stCxn id="9" idx="6"/>
+              </p:cNvCxnSpPr>
+              <p:nvPr/>
+            </p:nvCxnSpPr>
+            <p:spPr>
+              <a:xfrm flipV="1">
+                <a:off x="8801403" y="2371471"/>
+                <a:ext cx="1374054" cy="770407"/>
+              </a:xfrm>
+              <a:prstGeom prst="straightConnector1">
+                <a:avLst/>
+              </a:prstGeom>
+              <a:ln>
+                <a:tailEnd type="triangle"/>
+              </a:ln>
+            </p:spPr>
+            <p:style>
+              <a:lnRef idx="1">
+                <a:schemeClr val="dk1"/>
+              </a:lnRef>
+              <a:fillRef idx="0">
+                <a:schemeClr val="dk1"/>
+              </a:fillRef>
+              <a:effectRef idx="0">
+                <a:schemeClr val="dk1"/>
+              </a:effectRef>
+              <a:fontRef idx="minor">
+                <a:schemeClr val="tx1"/>
+              </a:fontRef>
+            </p:style>
+          </p:cxnSp>
+          <p:cxnSp>
+            <p:nvCxnSpPr>
+              <p:cNvPr id="137" name="Прямая со стрелкой 136">
+                <a:extLst>
+                  <a:ext uri="{FF2B5EF4-FFF2-40B4-BE49-F238E27FC236}">
+                    <a16:creationId xmlns:a16="http://schemas.microsoft.com/office/drawing/2014/main" id="{D53F3B6F-CF07-00E5-C810-60A15E47F699}"/>
+                  </a:ext>
+                </a:extLst>
+              </p:cNvPr>
+              <p:cNvCxnSpPr>
+                <a:stCxn id="9" idx="6"/>
+                <a:endCxn id="122" idx="1"/>
+              </p:cNvCxnSpPr>
+              <p:nvPr/>
+            </p:nvCxnSpPr>
+            <p:spPr>
+              <a:xfrm flipV="1">
+                <a:off x="8801403" y="3114816"/>
+                <a:ext cx="1426399" cy="27062"/>
+              </a:xfrm>
+              <a:prstGeom prst="straightConnector1">
+                <a:avLst/>
+              </a:prstGeom>
+              <a:ln>
+                <a:tailEnd type="triangle"/>
+              </a:ln>
+            </p:spPr>
+            <p:style>
+              <a:lnRef idx="1">
+                <a:schemeClr val="dk1"/>
+              </a:lnRef>
+              <a:fillRef idx="0">
+                <a:schemeClr val="dk1"/>
+              </a:fillRef>
+              <a:effectRef idx="0">
+                <a:schemeClr val="dk1"/>
+              </a:effectRef>
+              <a:fontRef idx="minor">
+                <a:schemeClr val="tx1"/>
+              </a:fontRef>
+            </p:style>
+          </p:cxnSp>
+          <p:cxnSp>
+            <p:nvCxnSpPr>
+              <p:cNvPr id="139" name="Прямая со стрелкой 138">
+                <a:extLst>
+                  <a:ext uri="{FF2B5EF4-FFF2-40B4-BE49-F238E27FC236}">
+                    <a16:creationId xmlns:a16="http://schemas.microsoft.com/office/drawing/2014/main" id="{90125AB2-7104-F5F9-C18B-AA2FFD81E829}"/>
+                  </a:ext>
+                </a:extLst>
+              </p:cNvPr>
+              <p:cNvCxnSpPr>
+                <a:stCxn id="9" idx="6"/>
+                <a:endCxn id="126" idx="1"/>
+              </p:cNvCxnSpPr>
+              <p:nvPr/>
+            </p:nvCxnSpPr>
+            <p:spPr>
+              <a:xfrm>
+                <a:off x="8801403" y="3141878"/>
+                <a:ext cx="1412124" cy="506683"/>
+              </a:xfrm>
+              <a:prstGeom prst="straightConnector1">
+                <a:avLst/>
+              </a:prstGeom>
+              <a:ln>
+                <a:tailEnd type="triangle"/>
+              </a:ln>
+            </p:spPr>
+            <p:style>
+              <a:lnRef idx="1">
+                <a:schemeClr val="dk1"/>
+              </a:lnRef>
+              <a:fillRef idx="0">
+                <a:schemeClr val="dk1"/>
+              </a:fillRef>
+              <a:effectRef idx="0">
+                <a:schemeClr val="dk1"/>
+              </a:effectRef>
+              <a:fontRef idx="minor">
+                <a:schemeClr val="tx1"/>
+              </a:fontRef>
+            </p:style>
+          </p:cxnSp>
+          <p:cxnSp>
+            <p:nvCxnSpPr>
+              <p:cNvPr id="141" name="Прямая со стрелкой 140">
+                <a:extLst>
+                  <a:ext uri="{FF2B5EF4-FFF2-40B4-BE49-F238E27FC236}">
+                    <a16:creationId xmlns:a16="http://schemas.microsoft.com/office/drawing/2014/main" id="{1D7CE346-08B2-22CD-182A-C4367B9B37DB}"/>
+                  </a:ext>
+                </a:extLst>
+              </p:cNvPr>
+              <p:cNvCxnSpPr>
+                <a:stCxn id="9" idx="6"/>
+                <a:endCxn id="129" idx="1"/>
+              </p:cNvCxnSpPr>
+              <p:nvPr/>
+            </p:nvCxnSpPr>
+            <p:spPr>
+              <a:xfrm>
+                <a:off x="8801403" y="3141878"/>
+                <a:ext cx="1412124" cy="1110500"/>
+              </a:xfrm>
+              <a:prstGeom prst="straightConnector1">
+                <a:avLst/>
+              </a:prstGeom>
+              <a:ln>
+                <a:tailEnd type="triangle"/>
+              </a:ln>
+            </p:spPr>
+            <p:style>
+              <a:lnRef idx="1">
+                <a:schemeClr val="dk1"/>
+              </a:lnRef>
+              <a:fillRef idx="0">
+                <a:schemeClr val="dk1"/>
+              </a:fillRef>
+              <a:effectRef idx="0">
+                <a:schemeClr val="dk1"/>
+              </a:effectRef>
+              <a:fontRef idx="minor">
+                <a:schemeClr val="tx1"/>
+              </a:fontRef>
+            </p:style>
+          </p:cxnSp>
+        </p:grpSp>
         <p:sp>
           <p:nvSpPr>
-            <p:cNvPr id="2" name="Овал 1">
+            <p:cNvPr id="3" name="Прямоугольник 2">
               <a:extLst>
                 <a:ext uri="{FF2B5EF4-FFF2-40B4-BE49-F238E27FC236}">
-                  <a16:creationId xmlns:a16="http://schemas.microsoft.com/office/drawing/2014/main" id="{906B369C-D05E-DA97-AB75-879183D56AF4}"/>
+                  <a16:creationId xmlns:a16="http://schemas.microsoft.com/office/drawing/2014/main" id="{67C9DDD8-033B-8F4B-04B8-4608005254A6}"/>
                 </a:ext>
               </a:extLst>
             </p:cNvPr>
@@ -3441,10 +6640,10 @@
           </p:nvSpPr>
           <p:spPr>
             <a:xfrm>
-              <a:off x="5159654" y="2670048"/>
-              <a:ext cx="1872691" cy="943661"/>
+              <a:off x="10175457" y="4636634"/>
+              <a:ext cx="1705591" cy="438912"/>
             </a:xfrm>
-            <a:prstGeom prst="ellipse">
+            <a:prstGeom prst="rect">
               <a:avLst/>
             </a:prstGeom>
           </p:spPr>
@@ -3467,3121 +6666,65 @@
             <a:lstStyle/>
             <a:p>
               <a:pPr algn="ctr"/>
-              <a:r>
-                <a:rPr lang="ru-RU" sz="1600" dirty="0">
-                  <a:ln w="0"/>
-                  <a:solidFill>
-                    <a:schemeClr val="tx1"/>
-                  </a:solidFill>
-                  <a:effectLst>
-                    <a:outerShdw blurRad="38100" dist="19050" dir="2700000" algn="tl" rotWithShape="0">
-                      <a:schemeClr val="dk1">
-                        <a:alpha val="40000"/>
-                      </a:schemeClr>
-                    </a:outerShdw>
-                  </a:effectLst>
-                </a:rPr>
-                <a:t>Команды</a:t>
-              </a:r>
-              <a:endParaRPr lang="ru-RU" sz="1600" dirty="0"/>
+              <a:endParaRPr lang="ru-RU"/>
             </a:p>
           </p:txBody>
         </p:sp>
         <p:sp>
           <p:nvSpPr>
-            <p:cNvPr id="6" name="Овал 5">
+            <p:cNvPr id="4" name="TextBox 3">
               <a:extLst>
                 <a:ext uri="{FF2B5EF4-FFF2-40B4-BE49-F238E27FC236}">
-                  <a16:creationId xmlns:a16="http://schemas.microsoft.com/office/drawing/2014/main" id="{A711FD26-26B8-8FC3-1B0B-DE146F5CF4E3}"/>
+                  <a16:creationId xmlns:a16="http://schemas.microsoft.com/office/drawing/2014/main" id="{3DB91B2D-9DAD-DDDB-189E-FD1FCC1B28BE}"/>
                 </a:ext>
               </a:extLst>
             </p:cNvPr>
-            <p:cNvSpPr/>
+            <p:cNvSpPr txBox="1"/>
             <p:nvPr/>
           </p:nvSpPr>
           <p:spPr>
             <a:xfrm>
-              <a:off x="5552236" y="1253337"/>
-              <a:ext cx="1072896" cy="943661"/>
+              <a:off x="10184975" y="4645891"/>
+              <a:ext cx="1696073" cy="461665"/>
             </a:xfrm>
-            <a:prstGeom prst="ellipse">
+            <a:prstGeom prst="rect">
               <a:avLst/>
             </a:prstGeom>
+            <a:noFill/>
           </p:spPr>
-          <p:style>
-            <a:lnRef idx="2">
-              <a:schemeClr val="dk1"/>
-            </a:lnRef>
-            <a:fillRef idx="1">
-              <a:schemeClr val="lt1"/>
-            </a:fillRef>
-            <a:effectRef idx="0">
-              <a:schemeClr val="dk1"/>
-            </a:effectRef>
-            <a:fontRef idx="minor">
-              <a:schemeClr val="dk1"/>
-            </a:fontRef>
-          </p:style>
           <p:txBody>
-            <a:bodyPr rtlCol="0" anchor="ctr"/>
+            <a:bodyPr wrap="square" rtlCol="0">
+              <a:spAutoFit/>
+            </a:bodyPr>
             <a:lstStyle/>
             <a:p>
               <a:pPr algn="ctr"/>
               <a:r>
-                <a:rPr lang="en-US" sz="1600" dirty="0">
-                  <a:ln w="0"/>
-                  <a:solidFill>
-                    <a:schemeClr val="tx1"/>
-                  </a:solidFill>
-                  <a:effectLst>
-                    <a:outerShdw blurRad="38100" dist="19050" dir="2700000" algn="tl" rotWithShape="0">
-                      <a:schemeClr val="dk1">
-                        <a:alpha val="40000"/>
-                      </a:schemeClr>
-                    </a:outerShdw>
-                  </a:effectLst>
-                </a:rPr>
-                <a:t>All</a:t>
+                <a:rPr lang="ru-RU" sz="1200" dirty="0"/>
+                <a:t>Разблокировка учётной записи</a:t>
               </a:r>
-              <a:endParaRPr lang="ru-RU" sz="1600" dirty="0"/>
-            </a:p>
-          </p:txBody>
-        </p:sp>
-        <p:sp>
-          <p:nvSpPr>
-            <p:cNvPr id="7" name="Овал 6">
-              <a:extLst>
-                <a:ext uri="{FF2B5EF4-FFF2-40B4-BE49-F238E27FC236}">
-                  <a16:creationId xmlns:a16="http://schemas.microsoft.com/office/drawing/2014/main" id="{3516C54A-B370-56F5-4574-68E7A910A76C}"/>
-                </a:ext>
-              </a:extLst>
-            </p:cNvPr>
-            <p:cNvSpPr/>
-            <p:nvPr/>
-          </p:nvSpPr>
-          <p:spPr>
-            <a:xfrm>
-              <a:off x="3390596" y="2670046"/>
-              <a:ext cx="1072896" cy="943661"/>
-            </a:xfrm>
-            <a:prstGeom prst="ellipse">
-              <a:avLst/>
-            </a:prstGeom>
-          </p:spPr>
-          <p:style>
-            <a:lnRef idx="2">
-              <a:schemeClr val="dk1"/>
-            </a:lnRef>
-            <a:fillRef idx="1">
-              <a:schemeClr val="lt1"/>
-            </a:fillRef>
-            <a:effectRef idx="0">
-              <a:schemeClr val="dk1"/>
-            </a:effectRef>
-            <a:fontRef idx="minor">
-              <a:schemeClr val="dk1"/>
-            </a:fontRef>
-          </p:style>
-          <p:txBody>
-            <a:bodyPr rtlCol="0" anchor="ctr"/>
-            <a:lstStyle/>
-            <a:p>
-              <a:pPr algn="ctr"/>
-              <a:r>
-                <a:rPr lang="en-US" sz="1600" dirty="0">
-                  <a:ln w="0"/>
-                  <a:solidFill>
-                    <a:schemeClr val="tx1"/>
-                  </a:solidFill>
-                  <a:effectLst>
-                    <a:outerShdw blurRad="38100" dist="19050" dir="2700000" algn="tl" rotWithShape="0">
-                      <a:schemeClr val="dk1">
-                        <a:alpha val="40000"/>
-                      </a:schemeClr>
-                    </a:outerShdw>
-                  </a:effectLst>
-                </a:rPr>
-                <a:t>User</a:t>
-              </a:r>
-              <a:endParaRPr lang="ru-RU" sz="1600" dirty="0"/>
-            </a:p>
-          </p:txBody>
-        </p:sp>
-        <p:sp>
-          <p:nvSpPr>
-            <p:cNvPr id="8" name="Овал 7">
-              <a:extLst>
-                <a:ext uri="{FF2B5EF4-FFF2-40B4-BE49-F238E27FC236}">
-                  <a16:creationId xmlns:a16="http://schemas.microsoft.com/office/drawing/2014/main" id="{4B53E917-5FCC-A9A3-ADE8-B642A6DFC134}"/>
-                </a:ext>
-              </a:extLst>
-            </p:cNvPr>
-            <p:cNvSpPr/>
-            <p:nvPr/>
-          </p:nvSpPr>
-          <p:spPr>
-            <a:xfrm>
-              <a:off x="5559551" y="4220870"/>
-              <a:ext cx="1072896" cy="943661"/>
-            </a:xfrm>
-            <a:prstGeom prst="ellipse">
-              <a:avLst/>
-            </a:prstGeom>
-          </p:spPr>
-          <p:style>
-            <a:lnRef idx="2">
-              <a:schemeClr val="dk1"/>
-            </a:lnRef>
-            <a:fillRef idx="1">
-              <a:schemeClr val="lt1"/>
-            </a:fillRef>
-            <a:effectRef idx="0">
-              <a:schemeClr val="dk1"/>
-            </a:effectRef>
-            <a:fontRef idx="minor">
-              <a:schemeClr val="dk1"/>
-            </a:fontRef>
-          </p:style>
-          <p:txBody>
-            <a:bodyPr rtlCol="0" anchor="ctr"/>
-            <a:lstStyle/>
-            <a:p>
-              <a:pPr algn="ctr"/>
-              <a:r>
-                <a:rPr lang="en-US" sz="1050" dirty="0" err="1">
-                  <a:ln w="0"/>
-                  <a:solidFill>
-                    <a:schemeClr val="tx1"/>
-                  </a:solidFill>
-                  <a:effectLst>
-                    <a:outerShdw blurRad="38100" dist="19050" dir="2700000" algn="tl" rotWithShape="0">
-                      <a:schemeClr val="dk1">
-                        <a:alpha val="40000"/>
-                      </a:schemeClr>
-                    </a:outerShdw>
-                  </a:effectLst>
-                </a:rPr>
-                <a:t>WatchDog</a:t>
-              </a:r>
-              <a:endParaRPr lang="ru-RU" sz="1600" dirty="0"/>
-            </a:p>
-          </p:txBody>
-        </p:sp>
-        <p:sp>
-          <p:nvSpPr>
-            <p:cNvPr id="9" name="Овал 8">
-              <a:extLst>
-                <a:ext uri="{FF2B5EF4-FFF2-40B4-BE49-F238E27FC236}">
-                  <a16:creationId xmlns:a16="http://schemas.microsoft.com/office/drawing/2014/main" id="{37519999-932B-8810-DF43-42CFCB58FE65}"/>
-                </a:ext>
-              </a:extLst>
-            </p:cNvPr>
-            <p:cNvSpPr/>
-            <p:nvPr/>
-          </p:nvSpPr>
-          <p:spPr>
-            <a:xfrm>
-              <a:off x="7728507" y="2670047"/>
-              <a:ext cx="1072896" cy="943661"/>
-            </a:xfrm>
-            <a:prstGeom prst="ellipse">
-              <a:avLst/>
-            </a:prstGeom>
-          </p:spPr>
-          <p:style>
-            <a:lnRef idx="2">
-              <a:schemeClr val="dk1"/>
-            </a:lnRef>
-            <a:fillRef idx="1">
-              <a:schemeClr val="lt1"/>
-            </a:fillRef>
-            <a:effectRef idx="0">
-              <a:schemeClr val="dk1"/>
-            </a:effectRef>
-            <a:fontRef idx="minor">
-              <a:schemeClr val="dk1"/>
-            </a:fontRef>
-          </p:style>
-          <p:txBody>
-            <a:bodyPr rtlCol="0" anchor="ctr"/>
-            <a:lstStyle/>
-            <a:p>
-              <a:pPr algn="ctr"/>
-              <a:r>
-                <a:rPr lang="en-US" sz="1600" dirty="0">
-                  <a:ln w="0"/>
-                  <a:solidFill>
-                    <a:schemeClr val="tx1"/>
-                  </a:solidFill>
-                  <a:effectLst>
-                    <a:outerShdw blurRad="38100" dist="19050" dir="2700000" algn="tl" rotWithShape="0">
-                      <a:schemeClr val="dk1">
-                        <a:alpha val="40000"/>
-                      </a:schemeClr>
-                    </a:outerShdw>
-                  </a:effectLst>
-                </a:rPr>
-                <a:t>Admin</a:t>
-              </a:r>
-              <a:endParaRPr lang="ru-RU" sz="1600" dirty="0"/>
             </a:p>
           </p:txBody>
         </p:sp>
         <p:cxnSp>
           <p:nvCxnSpPr>
-            <p:cNvPr id="11" name="Прямая со стрелкой 10">
+            <p:cNvPr id="10" name="Прямая со стрелкой 9">
               <a:extLst>
                 <a:ext uri="{FF2B5EF4-FFF2-40B4-BE49-F238E27FC236}">
-                  <a16:creationId xmlns:a16="http://schemas.microsoft.com/office/drawing/2014/main" id="{167E1656-DFDF-C77A-314F-720A1E19243A}"/>
-                </a:ext>
-              </a:extLst>
-            </p:cNvPr>
-            <p:cNvCxnSpPr>
-              <a:stCxn id="2" idx="0"/>
-              <a:endCxn id="6" idx="4"/>
-            </p:cNvCxnSpPr>
-            <p:nvPr/>
-          </p:nvCxnSpPr>
-          <p:spPr>
-            <a:xfrm flipH="1" flipV="1">
-              <a:off x="6088684" y="2196998"/>
-              <a:ext cx="7316" cy="473050"/>
-            </a:xfrm>
-            <a:prstGeom prst="straightConnector1">
-              <a:avLst/>
-            </a:prstGeom>
-            <a:ln>
-              <a:tailEnd type="triangle"/>
-            </a:ln>
-          </p:spPr>
-          <p:style>
-            <a:lnRef idx="2">
-              <a:schemeClr val="dk1"/>
-            </a:lnRef>
-            <a:fillRef idx="0">
-              <a:schemeClr val="dk1"/>
-            </a:fillRef>
-            <a:effectRef idx="1">
-              <a:schemeClr val="dk1"/>
-            </a:effectRef>
-            <a:fontRef idx="minor">
-              <a:schemeClr val="tx1"/>
-            </a:fontRef>
-          </p:style>
-        </p:cxnSp>
-        <p:cxnSp>
-          <p:nvCxnSpPr>
-            <p:cNvPr id="13" name="Прямая со стрелкой 12">
-              <a:extLst>
-                <a:ext uri="{FF2B5EF4-FFF2-40B4-BE49-F238E27FC236}">
-                  <a16:creationId xmlns:a16="http://schemas.microsoft.com/office/drawing/2014/main" id="{FEB5EA88-2926-6A10-799B-93DEAFB596DD}"/>
-                </a:ext>
-              </a:extLst>
-            </p:cNvPr>
-            <p:cNvCxnSpPr>
-              <a:stCxn id="2" idx="6"/>
-              <a:endCxn id="9" idx="2"/>
-            </p:cNvCxnSpPr>
-            <p:nvPr/>
-          </p:nvCxnSpPr>
-          <p:spPr>
-            <a:xfrm flipV="1">
-              <a:off x="7032345" y="3141878"/>
-              <a:ext cx="696162" cy="1"/>
-            </a:xfrm>
-            <a:prstGeom prst="straightConnector1">
-              <a:avLst/>
-            </a:prstGeom>
-            <a:ln>
-              <a:tailEnd type="triangle"/>
-            </a:ln>
-          </p:spPr>
-          <p:style>
-            <a:lnRef idx="2">
-              <a:schemeClr val="dk1"/>
-            </a:lnRef>
-            <a:fillRef idx="0">
-              <a:schemeClr val="dk1"/>
-            </a:fillRef>
-            <a:effectRef idx="1">
-              <a:schemeClr val="dk1"/>
-            </a:effectRef>
-            <a:fontRef idx="minor">
-              <a:schemeClr val="tx1"/>
-            </a:fontRef>
-          </p:style>
-        </p:cxnSp>
-        <p:cxnSp>
-          <p:nvCxnSpPr>
-            <p:cNvPr id="15" name="Прямая со стрелкой 14">
-              <a:extLst>
-                <a:ext uri="{FF2B5EF4-FFF2-40B4-BE49-F238E27FC236}">
-                  <a16:creationId xmlns:a16="http://schemas.microsoft.com/office/drawing/2014/main" id="{11507C7C-1B8E-E56A-5F97-33F34A08CB73}"/>
-                </a:ext>
-              </a:extLst>
-            </p:cNvPr>
-            <p:cNvCxnSpPr>
-              <a:stCxn id="2" idx="4"/>
-              <a:endCxn id="8" idx="0"/>
-            </p:cNvCxnSpPr>
-            <p:nvPr/>
-          </p:nvCxnSpPr>
-          <p:spPr>
-            <a:xfrm flipH="1">
-              <a:off x="6095999" y="3613709"/>
-              <a:ext cx="1" cy="607161"/>
-            </a:xfrm>
-            <a:prstGeom prst="straightConnector1">
-              <a:avLst/>
-            </a:prstGeom>
-            <a:ln>
-              <a:tailEnd type="triangle"/>
-            </a:ln>
-          </p:spPr>
-          <p:style>
-            <a:lnRef idx="2">
-              <a:schemeClr val="dk1"/>
-            </a:lnRef>
-            <a:fillRef idx="0">
-              <a:schemeClr val="dk1"/>
-            </a:fillRef>
-            <a:effectRef idx="1">
-              <a:schemeClr val="dk1"/>
-            </a:effectRef>
-            <a:fontRef idx="minor">
-              <a:schemeClr val="tx1"/>
-            </a:fontRef>
-          </p:style>
-        </p:cxnSp>
-        <p:cxnSp>
-          <p:nvCxnSpPr>
-            <p:cNvPr id="17" name="Прямая со стрелкой 16">
-              <a:extLst>
-                <a:ext uri="{FF2B5EF4-FFF2-40B4-BE49-F238E27FC236}">
-                  <a16:creationId xmlns:a16="http://schemas.microsoft.com/office/drawing/2014/main" id="{B5851DE7-7D71-B9E1-3345-EF60B4182CF4}"/>
-                </a:ext>
-              </a:extLst>
-            </p:cNvPr>
-            <p:cNvCxnSpPr>
-              <a:stCxn id="2" idx="2"/>
-              <a:endCxn id="7" idx="6"/>
-            </p:cNvCxnSpPr>
-            <p:nvPr/>
-          </p:nvCxnSpPr>
-          <p:spPr>
-            <a:xfrm flipH="1" flipV="1">
-              <a:off x="4463492" y="3141877"/>
-              <a:ext cx="696162" cy="2"/>
-            </a:xfrm>
-            <a:prstGeom prst="straightConnector1">
-              <a:avLst/>
-            </a:prstGeom>
-            <a:ln>
-              <a:tailEnd type="triangle"/>
-            </a:ln>
-          </p:spPr>
-          <p:style>
-            <a:lnRef idx="2">
-              <a:schemeClr val="dk1"/>
-            </a:lnRef>
-            <a:fillRef idx="0">
-              <a:schemeClr val="dk1"/>
-            </a:fillRef>
-            <a:effectRef idx="1">
-              <a:schemeClr val="dk1"/>
-            </a:effectRef>
-            <a:fontRef idx="minor">
-              <a:schemeClr val="tx1"/>
-            </a:fontRef>
-          </p:style>
-        </p:cxnSp>
-        <p:grpSp>
-          <p:nvGrpSpPr>
-            <p:cNvPr id="44" name="Группа 43">
-              <a:extLst>
-                <a:ext uri="{FF2B5EF4-FFF2-40B4-BE49-F238E27FC236}">
-                  <a16:creationId xmlns:a16="http://schemas.microsoft.com/office/drawing/2014/main" id="{04078E4B-7F88-A263-DC07-AE631C5A45DF}"/>
-                </a:ext>
-              </a:extLst>
-            </p:cNvPr>
-            <p:cNvGrpSpPr/>
-            <p:nvPr/>
-          </p:nvGrpSpPr>
-          <p:grpSpPr>
-            <a:xfrm>
-              <a:off x="2735887" y="185644"/>
-              <a:ext cx="1805753" cy="438912"/>
-              <a:chOff x="3132765" y="185644"/>
-              <a:chExt cx="1408875" cy="438912"/>
-            </a:xfrm>
-          </p:grpSpPr>
-          <p:sp>
-            <p:nvSpPr>
-              <p:cNvPr id="43" name="Прямоугольник 42">
-                <a:extLst>
-                  <a:ext uri="{FF2B5EF4-FFF2-40B4-BE49-F238E27FC236}">
-                    <a16:creationId xmlns:a16="http://schemas.microsoft.com/office/drawing/2014/main" id="{195506E6-BF12-01C1-CB89-6832786BB1DA}"/>
-                  </a:ext>
-                </a:extLst>
-              </p:cNvPr>
-              <p:cNvSpPr/>
-              <p:nvPr/>
-            </p:nvSpPr>
-            <p:spPr>
-              <a:xfrm>
-                <a:off x="3132765" y="185644"/>
-                <a:ext cx="1330727" cy="438912"/>
-              </a:xfrm>
-              <a:prstGeom prst="rect">
-                <a:avLst/>
-              </a:prstGeom>
-            </p:spPr>
-            <p:style>
-              <a:lnRef idx="2">
-                <a:schemeClr val="dk1"/>
-              </a:lnRef>
-              <a:fillRef idx="1">
-                <a:schemeClr val="lt1"/>
-              </a:fillRef>
-              <a:effectRef idx="0">
-                <a:schemeClr val="dk1"/>
-              </a:effectRef>
-              <a:fontRef idx="minor">
-                <a:schemeClr val="dk1"/>
-              </a:fontRef>
-            </p:style>
-            <p:txBody>
-              <a:bodyPr rtlCol="0" anchor="ctr"/>
-              <a:lstStyle/>
-              <a:p>
-                <a:pPr algn="ctr"/>
-                <a:endParaRPr lang="ru-RU"/>
-              </a:p>
-            </p:txBody>
-          </p:sp>
-          <p:sp>
-            <p:nvSpPr>
-              <p:cNvPr id="28" name="TextBox 27">
-                <a:extLst>
-                  <a:ext uri="{FF2B5EF4-FFF2-40B4-BE49-F238E27FC236}">
-                    <a16:creationId xmlns:a16="http://schemas.microsoft.com/office/drawing/2014/main" id="{8ACEBD97-8120-FB53-FFB3-D864E51A8293}"/>
-                  </a:ext>
-                </a:extLst>
-              </p:cNvPr>
-              <p:cNvSpPr txBox="1"/>
-              <p:nvPr/>
-            </p:nvSpPr>
-            <p:spPr>
-              <a:xfrm>
-                <a:off x="3132765" y="266601"/>
-                <a:ext cx="1408875" cy="276999"/>
-              </a:xfrm>
-              <a:prstGeom prst="rect">
-                <a:avLst/>
-              </a:prstGeom>
-              <a:noFill/>
-            </p:spPr>
-            <p:txBody>
-              <a:bodyPr wrap="square" rtlCol="0">
-                <a:spAutoFit/>
-              </a:bodyPr>
-              <a:lstStyle/>
-              <a:p>
-                <a:pPr algn="ctr"/>
-                <a:r>
-                  <a:rPr lang="ru-RU" sz="1200" dirty="0"/>
-                  <a:t>Вход в программу</a:t>
-                </a:r>
-              </a:p>
-            </p:txBody>
-          </p:sp>
-        </p:grpSp>
-        <p:grpSp>
-          <p:nvGrpSpPr>
-            <p:cNvPr id="45" name="Группа 44">
-              <a:extLst>
-                <a:ext uri="{FF2B5EF4-FFF2-40B4-BE49-F238E27FC236}">
-                  <a16:creationId xmlns:a16="http://schemas.microsoft.com/office/drawing/2014/main" id="{B0BB8745-C723-E689-CD51-75723BFEF544}"/>
-                </a:ext>
-              </a:extLst>
-            </p:cNvPr>
-            <p:cNvGrpSpPr/>
-            <p:nvPr/>
-          </p:nvGrpSpPr>
-          <p:grpSpPr>
-            <a:xfrm>
-              <a:off x="2735887" y="712540"/>
-              <a:ext cx="1805753" cy="438912"/>
-              <a:chOff x="3132765" y="185644"/>
-              <a:chExt cx="1408875" cy="438912"/>
-            </a:xfrm>
-          </p:grpSpPr>
-          <p:sp>
-            <p:nvSpPr>
-              <p:cNvPr id="46" name="Прямоугольник 45">
-                <a:extLst>
-                  <a:ext uri="{FF2B5EF4-FFF2-40B4-BE49-F238E27FC236}">
-                    <a16:creationId xmlns:a16="http://schemas.microsoft.com/office/drawing/2014/main" id="{FBC59D71-2BC8-BFCF-B1BD-4C2235CEDED6}"/>
-                  </a:ext>
-                </a:extLst>
-              </p:cNvPr>
-              <p:cNvSpPr/>
-              <p:nvPr/>
-            </p:nvSpPr>
-            <p:spPr>
-              <a:xfrm>
-                <a:off x="3132765" y="185644"/>
-                <a:ext cx="1330727" cy="438912"/>
-              </a:xfrm>
-              <a:prstGeom prst="rect">
-                <a:avLst/>
-              </a:prstGeom>
-            </p:spPr>
-            <p:style>
-              <a:lnRef idx="2">
-                <a:schemeClr val="dk1"/>
-              </a:lnRef>
-              <a:fillRef idx="1">
-                <a:schemeClr val="lt1"/>
-              </a:fillRef>
-              <a:effectRef idx="0">
-                <a:schemeClr val="dk1"/>
-              </a:effectRef>
-              <a:fontRef idx="minor">
-                <a:schemeClr val="dk1"/>
-              </a:fontRef>
-            </p:style>
-            <p:txBody>
-              <a:bodyPr rtlCol="0" anchor="ctr"/>
-              <a:lstStyle/>
-              <a:p>
-                <a:pPr algn="ctr"/>
-                <a:endParaRPr lang="ru-RU"/>
-              </a:p>
-            </p:txBody>
-          </p:sp>
-          <p:sp>
-            <p:nvSpPr>
-              <p:cNvPr id="47" name="TextBox 46">
-                <a:extLst>
-                  <a:ext uri="{FF2B5EF4-FFF2-40B4-BE49-F238E27FC236}">
-                    <a16:creationId xmlns:a16="http://schemas.microsoft.com/office/drawing/2014/main" id="{E8D7B7E7-6844-5DB7-9E58-515FE0799CB2}"/>
-                  </a:ext>
-                </a:extLst>
-              </p:cNvPr>
-              <p:cNvSpPr txBox="1"/>
-              <p:nvPr/>
-            </p:nvSpPr>
-            <p:spPr>
-              <a:xfrm>
-                <a:off x="3132765" y="266601"/>
-                <a:ext cx="1408875" cy="276999"/>
-              </a:xfrm>
-              <a:prstGeom prst="rect">
-                <a:avLst/>
-              </a:prstGeom>
-              <a:noFill/>
-            </p:spPr>
-            <p:txBody>
-              <a:bodyPr wrap="square" rtlCol="0">
-                <a:spAutoFit/>
-              </a:bodyPr>
-              <a:lstStyle/>
-              <a:p>
-                <a:pPr algn="ctr"/>
-                <a:r>
-                  <a:rPr lang="ru-RU" sz="1200" dirty="0"/>
-                  <a:t>Выход из сессии</a:t>
-                </a:r>
-              </a:p>
-            </p:txBody>
-          </p:sp>
-        </p:grpSp>
-        <p:grpSp>
-          <p:nvGrpSpPr>
-            <p:cNvPr id="48" name="Группа 47">
-              <a:extLst>
-                <a:ext uri="{FF2B5EF4-FFF2-40B4-BE49-F238E27FC236}">
-                  <a16:creationId xmlns:a16="http://schemas.microsoft.com/office/drawing/2014/main" id="{906D28DC-E277-B40A-66D1-647FC8B9BBED}"/>
-                </a:ext>
-              </a:extLst>
-            </p:cNvPr>
-            <p:cNvGrpSpPr/>
-            <p:nvPr/>
-          </p:nvGrpSpPr>
-          <p:grpSpPr>
-            <a:xfrm>
-              <a:off x="2735885" y="1231677"/>
-              <a:ext cx="1805753" cy="438912"/>
-              <a:chOff x="3132765" y="185644"/>
-              <a:chExt cx="1666007" cy="438912"/>
-            </a:xfrm>
-          </p:grpSpPr>
-          <p:sp>
-            <p:nvSpPr>
-              <p:cNvPr id="49" name="Прямоугольник 48">
-                <a:extLst>
-                  <a:ext uri="{FF2B5EF4-FFF2-40B4-BE49-F238E27FC236}">
-                    <a16:creationId xmlns:a16="http://schemas.microsoft.com/office/drawing/2014/main" id="{CA7670B2-DAC8-E449-2CF8-59E5022D0093}"/>
-                  </a:ext>
-                </a:extLst>
-              </p:cNvPr>
-              <p:cNvSpPr/>
-              <p:nvPr/>
-            </p:nvSpPr>
-            <p:spPr>
-              <a:xfrm>
-                <a:off x="3132765" y="185644"/>
-                <a:ext cx="1564817" cy="438912"/>
-              </a:xfrm>
-              <a:prstGeom prst="rect">
-                <a:avLst/>
-              </a:prstGeom>
-            </p:spPr>
-            <p:style>
-              <a:lnRef idx="2">
-                <a:schemeClr val="dk1"/>
-              </a:lnRef>
-              <a:fillRef idx="1">
-                <a:schemeClr val="lt1"/>
-              </a:fillRef>
-              <a:effectRef idx="0">
-                <a:schemeClr val="dk1"/>
-              </a:effectRef>
-              <a:fontRef idx="minor">
-                <a:schemeClr val="dk1"/>
-              </a:fontRef>
-            </p:style>
-            <p:txBody>
-              <a:bodyPr rtlCol="0" anchor="ctr"/>
-              <a:lstStyle/>
-              <a:p>
-                <a:pPr algn="ctr"/>
-                <a:endParaRPr lang="ru-RU"/>
-              </a:p>
-            </p:txBody>
-          </p:sp>
-          <p:sp>
-            <p:nvSpPr>
-              <p:cNvPr id="50" name="TextBox 49">
-                <a:extLst>
-                  <a:ext uri="{FF2B5EF4-FFF2-40B4-BE49-F238E27FC236}">
-                    <a16:creationId xmlns:a16="http://schemas.microsoft.com/office/drawing/2014/main" id="{F96F22FA-DD45-B5CA-3948-FD8DFF8B84D7}"/>
-                  </a:ext>
-                </a:extLst>
-              </p:cNvPr>
-              <p:cNvSpPr txBox="1"/>
-              <p:nvPr/>
-            </p:nvSpPr>
-            <p:spPr>
-              <a:xfrm>
-                <a:off x="3132765" y="266601"/>
-                <a:ext cx="1666007" cy="276999"/>
-              </a:xfrm>
-              <a:prstGeom prst="rect">
-                <a:avLst/>
-              </a:prstGeom>
-              <a:noFill/>
-            </p:spPr>
-            <p:txBody>
-              <a:bodyPr wrap="square" rtlCol="0">
-                <a:spAutoFit/>
-              </a:bodyPr>
-              <a:lstStyle/>
-              <a:p>
-                <a:pPr algn="ctr"/>
-                <a:r>
-                  <a:rPr lang="ru-RU" sz="1200" dirty="0"/>
-                  <a:t>Вывод списка команд</a:t>
-                </a:r>
-              </a:p>
-            </p:txBody>
-          </p:sp>
-        </p:grpSp>
-        <p:grpSp>
-          <p:nvGrpSpPr>
-            <p:cNvPr id="51" name="Группа 50">
-              <a:extLst>
-                <a:ext uri="{FF2B5EF4-FFF2-40B4-BE49-F238E27FC236}">
-                  <a16:creationId xmlns:a16="http://schemas.microsoft.com/office/drawing/2014/main" id="{564AE370-E95B-07D7-102A-B73FA5C6DEFB}"/>
-                </a:ext>
-              </a:extLst>
-            </p:cNvPr>
-            <p:cNvGrpSpPr/>
-            <p:nvPr/>
-          </p:nvGrpSpPr>
-          <p:grpSpPr>
-            <a:xfrm>
-              <a:off x="2735885" y="1750815"/>
-              <a:ext cx="1805753" cy="438912"/>
-              <a:chOff x="3132765" y="185644"/>
-              <a:chExt cx="1408875" cy="438912"/>
-            </a:xfrm>
-          </p:grpSpPr>
-          <p:sp>
-            <p:nvSpPr>
-              <p:cNvPr id="52" name="Прямоугольник 51">
-                <a:extLst>
-                  <a:ext uri="{FF2B5EF4-FFF2-40B4-BE49-F238E27FC236}">
-                    <a16:creationId xmlns:a16="http://schemas.microsoft.com/office/drawing/2014/main" id="{E668141D-2422-1762-51CF-B3D9D1DC16DB}"/>
-                  </a:ext>
-                </a:extLst>
-              </p:cNvPr>
-              <p:cNvSpPr/>
-              <p:nvPr/>
-            </p:nvSpPr>
-            <p:spPr>
-              <a:xfrm>
-                <a:off x="3132765" y="185644"/>
-                <a:ext cx="1330727" cy="438912"/>
-              </a:xfrm>
-              <a:prstGeom prst="rect">
-                <a:avLst/>
-              </a:prstGeom>
-            </p:spPr>
-            <p:style>
-              <a:lnRef idx="2">
-                <a:schemeClr val="dk1"/>
-              </a:lnRef>
-              <a:fillRef idx="1">
-                <a:schemeClr val="lt1"/>
-              </a:fillRef>
-              <a:effectRef idx="0">
-                <a:schemeClr val="dk1"/>
-              </a:effectRef>
-              <a:fontRef idx="minor">
-                <a:schemeClr val="dk1"/>
-              </a:fontRef>
-            </p:style>
-            <p:txBody>
-              <a:bodyPr rtlCol="0" anchor="ctr"/>
-              <a:lstStyle/>
-              <a:p>
-                <a:pPr algn="ctr"/>
-                <a:endParaRPr lang="ru-RU"/>
-              </a:p>
-            </p:txBody>
-          </p:sp>
-          <p:sp>
-            <p:nvSpPr>
-              <p:cNvPr id="53" name="TextBox 52">
-                <a:extLst>
-                  <a:ext uri="{FF2B5EF4-FFF2-40B4-BE49-F238E27FC236}">
-                    <a16:creationId xmlns:a16="http://schemas.microsoft.com/office/drawing/2014/main" id="{D06C980A-3BFC-CFFB-B649-31BE4B3DCFA4}"/>
-                  </a:ext>
-                </a:extLst>
-              </p:cNvPr>
-              <p:cNvSpPr txBox="1"/>
-              <p:nvPr/>
-            </p:nvSpPr>
-            <p:spPr>
-              <a:xfrm>
-                <a:off x="3132765" y="266601"/>
-                <a:ext cx="1408875" cy="276999"/>
-              </a:xfrm>
-              <a:prstGeom prst="rect">
-                <a:avLst/>
-              </a:prstGeom>
-              <a:noFill/>
-            </p:spPr>
-            <p:txBody>
-              <a:bodyPr wrap="square" rtlCol="0">
-                <a:spAutoFit/>
-              </a:bodyPr>
-              <a:lstStyle/>
-              <a:p>
-                <a:pPr algn="ctr"/>
-                <a:r>
-                  <a:rPr lang="ru-RU" sz="1200" dirty="0"/>
-                  <a:t>Выход из программы</a:t>
-                </a:r>
-              </a:p>
-            </p:txBody>
-          </p:sp>
-        </p:grpSp>
-        <p:cxnSp>
-          <p:nvCxnSpPr>
-            <p:cNvPr id="55" name="Прямая со стрелкой 54">
-              <a:extLst>
-                <a:ext uri="{FF2B5EF4-FFF2-40B4-BE49-F238E27FC236}">
-                  <a16:creationId xmlns:a16="http://schemas.microsoft.com/office/drawing/2014/main" id="{04F98EB0-A464-B94E-60BD-E2867536AE15}"/>
-                </a:ext>
-              </a:extLst>
-            </p:cNvPr>
-            <p:cNvCxnSpPr>
-              <a:cxnSpLocks/>
-              <a:stCxn id="6" idx="1"/>
-            </p:cNvCxnSpPr>
-            <p:nvPr/>
-          </p:nvCxnSpPr>
-          <p:spPr>
-            <a:xfrm flipH="1" flipV="1">
-              <a:off x="4431960" y="447872"/>
-              <a:ext cx="1277398" cy="943661"/>
-            </a:xfrm>
-            <a:prstGeom prst="straightConnector1">
-              <a:avLst/>
-            </a:prstGeom>
-            <a:ln>
-              <a:tailEnd type="triangle"/>
-            </a:ln>
-          </p:spPr>
-          <p:style>
-            <a:lnRef idx="1">
-              <a:schemeClr val="dk1"/>
-            </a:lnRef>
-            <a:fillRef idx="0">
-              <a:schemeClr val="dk1"/>
-            </a:fillRef>
-            <a:effectRef idx="0">
-              <a:schemeClr val="dk1"/>
-            </a:effectRef>
-            <a:fontRef idx="minor">
-              <a:schemeClr val="tx1"/>
-            </a:fontRef>
-          </p:style>
-        </p:cxnSp>
-        <p:cxnSp>
-          <p:nvCxnSpPr>
-            <p:cNvPr id="58" name="Прямая со стрелкой 57">
-              <a:extLst>
-                <a:ext uri="{FF2B5EF4-FFF2-40B4-BE49-F238E27FC236}">
-                  <a16:creationId xmlns:a16="http://schemas.microsoft.com/office/drawing/2014/main" id="{94831B9A-36D6-C249-0113-66F0BC04D291}"/>
-                </a:ext>
-              </a:extLst>
-            </p:cNvPr>
-            <p:cNvCxnSpPr>
-              <a:stCxn id="6" idx="1"/>
-            </p:cNvCxnSpPr>
-            <p:nvPr/>
-          </p:nvCxnSpPr>
-          <p:spPr>
-            <a:xfrm flipH="1" flipV="1">
-              <a:off x="4431960" y="929030"/>
-              <a:ext cx="1277398" cy="462503"/>
-            </a:xfrm>
-            <a:prstGeom prst="straightConnector1">
-              <a:avLst/>
-            </a:prstGeom>
-            <a:ln>
-              <a:tailEnd type="triangle"/>
-            </a:ln>
-          </p:spPr>
-          <p:style>
-            <a:lnRef idx="1">
-              <a:schemeClr val="dk1"/>
-            </a:lnRef>
-            <a:fillRef idx="0">
-              <a:schemeClr val="dk1"/>
-            </a:fillRef>
-            <a:effectRef idx="0">
-              <a:schemeClr val="dk1"/>
-            </a:effectRef>
-            <a:fontRef idx="minor">
-              <a:schemeClr val="tx1"/>
-            </a:fontRef>
-          </p:style>
-        </p:cxnSp>
-        <p:cxnSp>
-          <p:nvCxnSpPr>
-            <p:cNvPr id="60" name="Прямая со стрелкой 59">
-              <a:extLst>
-                <a:ext uri="{FF2B5EF4-FFF2-40B4-BE49-F238E27FC236}">
-                  <a16:creationId xmlns:a16="http://schemas.microsoft.com/office/drawing/2014/main" id="{2EAD57E1-D808-E54E-300A-143B463D3678}"/>
-                </a:ext>
-              </a:extLst>
-            </p:cNvPr>
-            <p:cNvCxnSpPr>
-              <a:stCxn id="6" idx="1"/>
-            </p:cNvCxnSpPr>
-            <p:nvPr/>
-          </p:nvCxnSpPr>
-          <p:spPr>
-            <a:xfrm flipH="1">
-              <a:off x="4431960" y="1391533"/>
-              <a:ext cx="1277398" cy="71507"/>
-            </a:xfrm>
-            <a:prstGeom prst="straightConnector1">
-              <a:avLst/>
-            </a:prstGeom>
-            <a:ln>
-              <a:tailEnd type="triangle"/>
-            </a:ln>
-          </p:spPr>
-          <p:style>
-            <a:lnRef idx="1">
-              <a:schemeClr val="dk1"/>
-            </a:lnRef>
-            <a:fillRef idx="0">
-              <a:schemeClr val="dk1"/>
-            </a:fillRef>
-            <a:effectRef idx="0">
-              <a:schemeClr val="dk1"/>
-            </a:effectRef>
-            <a:fontRef idx="minor">
-              <a:schemeClr val="tx1"/>
-            </a:fontRef>
-          </p:style>
-        </p:cxnSp>
-        <p:cxnSp>
-          <p:nvCxnSpPr>
-            <p:cNvPr id="62" name="Прямая со стрелкой 61">
-              <a:extLst>
-                <a:ext uri="{FF2B5EF4-FFF2-40B4-BE49-F238E27FC236}">
-                  <a16:creationId xmlns:a16="http://schemas.microsoft.com/office/drawing/2014/main" id="{F5B234B3-E566-9314-6481-F2EE561838EF}"/>
-                </a:ext>
-              </a:extLst>
-            </p:cNvPr>
-            <p:cNvCxnSpPr>
-              <a:stCxn id="6" idx="1"/>
-            </p:cNvCxnSpPr>
-            <p:nvPr/>
-          </p:nvCxnSpPr>
-          <p:spPr>
-            <a:xfrm flipH="1">
-              <a:off x="4431960" y="1391533"/>
-              <a:ext cx="1277398" cy="576256"/>
-            </a:xfrm>
-            <a:prstGeom prst="straightConnector1">
-              <a:avLst/>
-            </a:prstGeom>
-            <a:ln>
-              <a:tailEnd type="triangle"/>
-            </a:ln>
-          </p:spPr>
-          <p:style>
-            <a:lnRef idx="1">
-              <a:schemeClr val="dk1"/>
-            </a:lnRef>
-            <a:fillRef idx="0">
-              <a:schemeClr val="dk1"/>
-            </a:fillRef>
-            <a:effectRef idx="0">
-              <a:schemeClr val="dk1"/>
-            </a:effectRef>
-            <a:fontRef idx="minor">
-              <a:schemeClr val="tx1"/>
-            </a:fontRef>
-          </p:style>
-        </p:cxnSp>
-        <p:grpSp>
-          <p:nvGrpSpPr>
-            <p:cNvPr id="63" name="Группа 62">
-              <a:extLst>
-                <a:ext uri="{FF2B5EF4-FFF2-40B4-BE49-F238E27FC236}">
-                  <a16:creationId xmlns:a16="http://schemas.microsoft.com/office/drawing/2014/main" id="{08111E10-5F2E-93F3-8216-2D66DB0F5C10}"/>
-                </a:ext>
-              </a:extLst>
-            </p:cNvPr>
-            <p:cNvGrpSpPr/>
-            <p:nvPr/>
-          </p:nvGrpSpPr>
-          <p:grpSpPr>
-            <a:xfrm>
-              <a:off x="484127" y="2296902"/>
-              <a:ext cx="1705591" cy="438912"/>
-              <a:chOff x="3132765" y="185644"/>
-              <a:chExt cx="1330727" cy="438912"/>
-            </a:xfrm>
-          </p:grpSpPr>
-          <p:sp>
-            <p:nvSpPr>
-              <p:cNvPr id="64" name="Прямоугольник 63">
-                <a:extLst>
-                  <a:ext uri="{FF2B5EF4-FFF2-40B4-BE49-F238E27FC236}">
-                    <a16:creationId xmlns:a16="http://schemas.microsoft.com/office/drawing/2014/main" id="{16B2FBF9-7E33-B807-2B8B-65CB5EBB0BAE}"/>
-                  </a:ext>
-                </a:extLst>
-              </p:cNvPr>
-              <p:cNvSpPr/>
-              <p:nvPr/>
-            </p:nvSpPr>
-            <p:spPr>
-              <a:xfrm>
-                <a:off x="3132765" y="185644"/>
-                <a:ext cx="1330727" cy="438912"/>
-              </a:xfrm>
-              <a:prstGeom prst="rect">
-                <a:avLst/>
-              </a:prstGeom>
-            </p:spPr>
-            <p:style>
-              <a:lnRef idx="2">
-                <a:schemeClr val="dk1"/>
-              </a:lnRef>
-              <a:fillRef idx="1">
-                <a:schemeClr val="lt1"/>
-              </a:fillRef>
-              <a:effectRef idx="0">
-                <a:schemeClr val="dk1"/>
-              </a:effectRef>
-              <a:fontRef idx="minor">
-                <a:schemeClr val="dk1"/>
-              </a:fontRef>
-            </p:style>
-            <p:txBody>
-              <a:bodyPr rtlCol="0" anchor="ctr"/>
-              <a:lstStyle/>
-              <a:p>
-                <a:pPr algn="ctr"/>
-                <a:endParaRPr lang="ru-RU"/>
-              </a:p>
-            </p:txBody>
-          </p:sp>
-          <p:sp>
-            <p:nvSpPr>
-              <p:cNvPr id="65" name="TextBox 64">
-                <a:extLst>
-                  <a:ext uri="{FF2B5EF4-FFF2-40B4-BE49-F238E27FC236}">
-                    <a16:creationId xmlns:a16="http://schemas.microsoft.com/office/drawing/2014/main" id="{36ED46B9-417D-DC87-D315-8309DF1339D9}"/>
-                  </a:ext>
-                </a:extLst>
-              </p:cNvPr>
-              <p:cNvSpPr txBox="1"/>
-              <p:nvPr/>
-            </p:nvSpPr>
-            <p:spPr>
-              <a:xfrm>
-                <a:off x="3132765" y="266601"/>
-                <a:ext cx="1323301" cy="284757"/>
-              </a:xfrm>
-              <a:prstGeom prst="rect">
-                <a:avLst/>
-              </a:prstGeom>
-              <a:noFill/>
-            </p:spPr>
-            <p:txBody>
-              <a:bodyPr wrap="square" rtlCol="0">
-                <a:spAutoFit/>
-              </a:bodyPr>
-              <a:lstStyle/>
-              <a:p>
-                <a:pPr algn="ctr"/>
-                <a:r>
-                  <a:rPr lang="ru-RU" sz="1200" dirty="0"/>
-                  <a:t>Создание заметки</a:t>
-                </a:r>
-              </a:p>
-            </p:txBody>
-          </p:sp>
-        </p:grpSp>
-        <p:grpSp>
-          <p:nvGrpSpPr>
-            <p:cNvPr id="66" name="Группа 65">
-              <a:extLst>
-                <a:ext uri="{FF2B5EF4-FFF2-40B4-BE49-F238E27FC236}">
-                  <a16:creationId xmlns:a16="http://schemas.microsoft.com/office/drawing/2014/main" id="{24A98C34-92C7-8A4A-914A-5D67B4F8C36C}"/>
-                </a:ext>
-              </a:extLst>
-            </p:cNvPr>
-            <p:cNvGrpSpPr/>
-            <p:nvPr/>
-          </p:nvGrpSpPr>
-          <p:grpSpPr>
-            <a:xfrm>
-              <a:off x="484127" y="2823798"/>
-              <a:ext cx="1705591" cy="438912"/>
-              <a:chOff x="3132765" y="185644"/>
-              <a:chExt cx="1330727" cy="438912"/>
-            </a:xfrm>
-          </p:grpSpPr>
-          <p:sp>
-            <p:nvSpPr>
-              <p:cNvPr id="67" name="Прямоугольник 66">
-                <a:extLst>
-                  <a:ext uri="{FF2B5EF4-FFF2-40B4-BE49-F238E27FC236}">
-                    <a16:creationId xmlns:a16="http://schemas.microsoft.com/office/drawing/2014/main" id="{89FDC152-2BEC-F1C4-FFCE-74EE18753D00}"/>
-                  </a:ext>
-                </a:extLst>
-              </p:cNvPr>
-              <p:cNvSpPr/>
-              <p:nvPr/>
-            </p:nvSpPr>
-            <p:spPr>
-              <a:xfrm>
-                <a:off x="3132765" y="185644"/>
-                <a:ext cx="1330727" cy="438912"/>
-              </a:xfrm>
-              <a:prstGeom prst="rect">
-                <a:avLst/>
-              </a:prstGeom>
-            </p:spPr>
-            <p:style>
-              <a:lnRef idx="2">
-                <a:schemeClr val="dk1"/>
-              </a:lnRef>
-              <a:fillRef idx="1">
-                <a:schemeClr val="lt1"/>
-              </a:fillRef>
-              <a:effectRef idx="0">
-                <a:schemeClr val="dk1"/>
-              </a:effectRef>
-              <a:fontRef idx="minor">
-                <a:schemeClr val="dk1"/>
-              </a:fontRef>
-            </p:style>
-            <p:txBody>
-              <a:bodyPr rtlCol="0" anchor="ctr"/>
-              <a:lstStyle/>
-              <a:p>
-                <a:pPr algn="ctr"/>
-                <a:endParaRPr lang="ru-RU"/>
-              </a:p>
-            </p:txBody>
-          </p:sp>
-          <p:sp>
-            <p:nvSpPr>
-              <p:cNvPr id="68" name="TextBox 67">
-                <a:extLst>
-                  <a:ext uri="{FF2B5EF4-FFF2-40B4-BE49-F238E27FC236}">
-                    <a16:creationId xmlns:a16="http://schemas.microsoft.com/office/drawing/2014/main" id="{5807AAFE-9F96-0656-41F2-9F35415791A7}"/>
-                  </a:ext>
-                </a:extLst>
-              </p:cNvPr>
-              <p:cNvSpPr txBox="1"/>
-              <p:nvPr/>
-            </p:nvSpPr>
-            <p:spPr>
-              <a:xfrm>
-                <a:off x="3132765" y="266601"/>
-                <a:ext cx="1323301" cy="276999"/>
-              </a:xfrm>
-              <a:prstGeom prst="rect">
-                <a:avLst/>
-              </a:prstGeom>
-              <a:noFill/>
-            </p:spPr>
-            <p:txBody>
-              <a:bodyPr wrap="square" rtlCol="0">
-                <a:spAutoFit/>
-              </a:bodyPr>
-              <a:lstStyle/>
-              <a:p>
-                <a:pPr algn="ctr"/>
-                <a:r>
-                  <a:rPr lang="ru-RU" sz="1200" dirty="0"/>
-                  <a:t>Вывод всех заметок</a:t>
-                </a:r>
-              </a:p>
-            </p:txBody>
-          </p:sp>
-        </p:grpSp>
-        <p:grpSp>
-          <p:nvGrpSpPr>
-            <p:cNvPr id="69" name="Группа 68">
-              <a:extLst>
-                <a:ext uri="{FF2B5EF4-FFF2-40B4-BE49-F238E27FC236}">
-                  <a16:creationId xmlns:a16="http://schemas.microsoft.com/office/drawing/2014/main" id="{A560959B-8FBA-1387-BF6D-3B1E7A9D7E8C}"/>
-                </a:ext>
-              </a:extLst>
-            </p:cNvPr>
-            <p:cNvGrpSpPr/>
-            <p:nvPr/>
-          </p:nvGrpSpPr>
-          <p:grpSpPr>
-            <a:xfrm>
-              <a:off x="484123" y="3342935"/>
-              <a:ext cx="1705594" cy="688708"/>
-              <a:chOff x="3132765" y="185644"/>
-              <a:chExt cx="1573600" cy="688708"/>
-            </a:xfrm>
-          </p:grpSpPr>
-          <p:sp>
-            <p:nvSpPr>
-              <p:cNvPr id="70" name="Прямоугольник 69">
-                <a:extLst>
-                  <a:ext uri="{FF2B5EF4-FFF2-40B4-BE49-F238E27FC236}">
-                    <a16:creationId xmlns:a16="http://schemas.microsoft.com/office/drawing/2014/main" id="{0FA3C2F3-3E1A-602E-CC7A-AAD79C0AB78F}"/>
-                  </a:ext>
-                </a:extLst>
-              </p:cNvPr>
-              <p:cNvSpPr/>
-              <p:nvPr/>
-            </p:nvSpPr>
-            <p:spPr>
-              <a:xfrm>
-                <a:off x="3132765" y="185644"/>
-                <a:ext cx="1564817" cy="688708"/>
-              </a:xfrm>
-              <a:prstGeom prst="rect">
-                <a:avLst/>
-              </a:prstGeom>
-            </p:spPr>
-            <p:style>
-              <a:lnRef idx="2">
-                <a:schemeClr val="dk1"/>
-              </a:lnRef>
-              <a:fillRef idx="1">
-                <a:schemeClr val="lt1"/>
-              </a:fillRef>
-              <a:effectRef idx="0">
-                <a:schemeClr val="dk1"/>
-              </a:effectRef>
-              <a:fontRef idx="minor">
-                <a:schemeClr val="dk1"/>
-              </a:fontRef>
-            </p:style>
-            <p:txBody>
-              <a:bodyPr rtlCol="0" anchor="ctr"/>
-              <a:lstStyle/>
-              <a:p>
-                <a:pPr algn="ctr"/>
-                <a:endParaRPr lang="ru-RU"/>
-              </a:p>
-            </p:txBody>
-          </p:sp>
-          <p:sp>
-            <p:nvSpPr>
-              <p:cNvPr id="71" name="TextBox 70">
-                <a:extLst>
-                  <a:ext uri="{FF2B5EF4-FFF2-40B4-BE49-F238E27FC236}">
-                    <a16:creationId xmlns:a16="http://schemas.microsoft.com/office/drawing/2014/main" id="{86119AAE-4081-40B0-386F-3DF554BBBAF3}"/>
-                  </a:ext>
-                </a:extLst>
-              </p:cNvPr>
-              <p:cNvSpPr txBox="1"/>
-              <p:nvPr/>
-            </p:nvSpPr>
-            <p:spPr>
-              <a:xfrm>
-                <a:off x="3132769" y="221191"/>
-                <a:ext cx="1573596" cy="646331"/>
-              </a:xfrm>
-              <a:prstGeom prst="rect">
-                <a:avLst/>
-              </a:prstGeom>
-              <a:noFill/>
-            </p:spPr>
-            <p:txBody>
-              <a:bodyPr wrap="square" rtlCol="0">
-                <a:spAutoFit/>
-              </a:bodyPr>
-              <a:lstStyle/>
-              <a:p>
-                <a:pPr algn="ctr"/>
-                <a:r>
-                  <a:rPr lang="ru-RU" sz="1200" dirty="0"/>
-                  <a:t>Редактирование существующей заметки</a:t>
-                </a:r>
-              </a:p>
-            </p:txBody>
-          </p:sp>
-        </p:grpSp>
-        <p:grpSp>
-          <p:nvGrpSpPr>
-            <p:cNvPr id="72" name="Группа 71">
-              <a:extLst>
-                <a:ext uri="{FF2B5EF4-FFF2-40B4-BE49-F238E27FC236}">
-                  <a16:creationId xmlns:a16="http://schemas.microsoft.com/office/drawing/2014/main" id="{1CB79804-2F7A-816D-71DF-F864CBA7910E}"/>
-                </a:ext>
-              </a:extLst>
-            </p:cNvPr>
-            <p:cNvGrpSpPr/>
-            <p:nvPr/>
-          </p:nvGrpSpPr>
-          <p:grpSpPr>
-            <a:xfrm>
-              <a:off x="484126" y="4140585"/>
-              <a:ext cx="1705591" cy="438912"/>
-              <a:chOff x="3132765" y="185644"/>
-              <a:chExt cx="1330727" cy="438912"/>
-            </a:xfrm>
-          </p:grpSpPr>
-          <p:sp>
-            <p:nvSpPr>
-              <p:cNvPr id="73" name="Прямоугольник 72">
-                <a:extLst>
-                  <a:ext uri="{FF2B5EF4-FFF2-40B4-BE49-F238E27FC236}">
-                    <a16:creationId xmlns:a16="http://schemas.microsoft.com/office/drawing/2014/main" id="{BD3352F5-CCEE-1ED4-8A0C-63ECF0E405A5}"/>
-                  </a:ext>
-                </a:extLst>
-              </p:cNvPr>
-              <p:cNvSpPr/>
-              <p:nvPr/>
-            </p:nvSpPr>
-            <p:spPr>
-              <a:xfrm>
-                <a:off x="3132765" y="185644"/>
-                <a:ext cx="1330727" cy="438912"/>
-              </a:xfrm>
-              <a:prstGeom prst="rect">
-                <a:avLst/>
-              </a:prstGeom>
-            </p:spPr>
-            <p:style>
-              <a:lnRef idx="2">
-                <a:schemeClr val="dk1"/>
-              </a:lnRef>
-              <a:fillRef idx="1">
-                <a:schemeClr val="lt1"/>
-              </a:fillRef>
-              <a:effectRef idx="0">
-                <a:schemeClr val="dk1"/>
-              </a:effectRef>
-              <a:fontRef idx="minor">
-                <a:schemeClr val="dk1"/>
-              </a:fontRef>
-            </p:style>
-            <p:txBody>
-              <a:bodyPr rtlCol="0" anchor="ctr"/>
-              <a:lstStyle/>
-              <a:p>
-                <a:pPr algn="ctr"/>
-                <a:endParaRPr lang="ru-RU"/>
-              </a:p>
-            </p:txBody>
-          </p:sp>
-          <p:sp>
-            <p:nvSpPr>
-              <p:cNvPr id="74" name="TextBox 73">
-                <a:extLst>
-                  <a:ext uri="{FF2B5EF4-FFF2-40B4-BE49-F238E27FC236}">
-                    <a16:creationId xmlns:a16="http://schemas.microsoft.com/office/drawing/2014/main" id="{AF78DB61-1577-F171-BAF9-EB4D65403ADD}"/>
-                  </a:ext>
-                </a:extLst>
-              </p:cNvPr>
-              <p:cNvSpPr txBox="1"/>
-              <p:nvPr/>
-            </p:nvSpPr>
-            <p:spPr>
-              <a:xfrm>
-                <a:off x="3132766" y="266601"/>
-                <a:ext cx="1323302" cy="276999"/>
-              </a:xfrm>
-              <a:prstGeom prst="rect">
-                <a:avLst/>
-              </a:prstGeom>
-              <a:noFill/>
-            </p:spPr>
-            <p:txBody>
-              <a:bodyPr wrap="square" rtlCol="0">
-                <a:spAutoFit/>
-              </a:bodyPr>
-              <a:lstStyle/>
-              <a:p>
-                <a:pPr algn="ctr"/>
-                <a:r>
-                  <a:rPr lang="ru-RU" sz="1200" dirty="0"/>
-                  <a:t>Удаление заметки</a:t>
-                </a:r>
-              </a:p>
-            </p:txBody>
-          </p:sp>
-        </p:grpSp>
-        <p:cxnSp>
-          <p:nvCxnSpPr>
-            <p:cNvPr id="77" name="Прямая со стрелкой 76">
-              <a:extLst>
-                <a:ext uri="{FF2B5EF4-FFF2-40B4-BE49-F238E27FC236}">
-                  <a16:creationId xmlns:a16="http://schemas.microsoft.com/office/drawing/2014/main" id="{BF412B64-D7D8-7BF0-6F72-234DF75BBAF3}"/>
-                </a:ext>
-              </a:extLst>
-            </p:cNvPr>
-            <p:cNvCxnSpPr>
-              <a:stCxn id="7" idx="2"/>
-              <a:endCxn id="65" idx="3"/>
-            </p:cNvCxnSpPr>
-            <p:nvPr/>
-          </p:nvCxnSpPr>
-          <p:spPr>
-            <a:xfrm flipH="1" flipV="1">
-              <a:off x="2180200" y="2520238"/>
-              <a:ext cx="1210396" cy="621639"/>
-            </a:xfrm>
-            <a:prstGeom prst="straightConnector1">
-              <a:avLst/>
-            </a:prstGeom>
-            <a:ln>
-              <a:tailEnd type="triangle"/>
-            </a:ln>
-          </p:spPr>
-          <p:style>
-            <a:lnRef idx="1">
-              <a:schemeClr val="dk1"/>
-            </a:lnRef>
-            <a:fillRef idx="0">
-              <a:schemeClr val="dk1"/>
-            </a:fillRef>
-            <a:effectRef idx="0">
-              <a:schemeClr val="dk1"/>
-            </a:effectRef>
-            <a:fontRef idx="minor">
-              <a:schemeClr val="tx1"/>
-            </a:fontRef>
-          </p:style>
-        </p:cxnSp>
-        <p:cxnSp>
-          <p:nvCxnSpPr>
-            <p:cNvPr id="79" name="Прямая со стрелкой 78">
-              <a:extLst>
-                <a:ext uri="{FF2B5EF4-FFF2-40B4-BE49-F238E27FC236}">
-                  <a16:creationId xmlns:a16="http://schemas.microsoft.com/office/drawing/2014/main" id="{845D6C81-90F8-8757-24B7-4320FDF7C130}"/>
-                </a:ext>
-              </a:extLst>
-            </p:cNvPr>
-            <p:cNvCxnSpPr>
-              <a:stCxn id="7" idx="2"/>
-              <a:endCxn id="68" idx="3"/>
-            </p:cNvCxnSpPr>
-            <p:nvPr/>
-          </p:nvCxnSpPr>
-          <p:spPr>
-            <a:xfrm flipH="1" flipV="1">
-              <a:off x="2180200" y="3043255"/>
-              <a:ext cx="1210396" cy="98622"/>
-            </a:xfrm>
-            <a:prstGeom prst="straightConnector1">
-              <a:avLst/>
-            </a:prstGeom>
-            <a:ln>
-              <a:tailEnd type="triangle"/>
-            </a:ln>
-          </p:spPr>
-          <p:style>
-            <a:lnRef idx="1">
-              <a:schemeClr val="dk1"/>
-            </a:lnRef>
-            <a:fillRef idx="0">
-              <a:schemeClr val="dk1"/>
-            </a:fillRef>
-            <a:effectRef idx="0">
-              <a:schemeClr val="dk1"/>
-            </a:effectRef>
-            <a:fontRef idx="minor">
-              <a:schemeClr val="tx1"/>
-            </a:fontRef>
-          </p:style>
-        </p:cxnSp>
-        <p:cxnSp>
-          <p:nvCxnSpPr>
-            <p:cNvPr id="81" name="Прямая со стрелкой 80">
-              <a:extLst>
-                <a:ext uri="{FF2B5EF4-FFF2-40B4-BE49-F238E27FC236}">
-                  <a16:creationId xmlns:a16="http://schemas.microsoft.com/office/drawing/2014/main" id="{28200E69-D22C-86BC-914D-51857699A0AD}"/>
-                </a:ext>
-              </a:extLst>
-            </p:cNvPr>
-            <p:cNvCxnSpPr>
-              <a:stCxn id="7" idx="2"/>
-              <a:endCxn id="71" idx="3"/>
-            </p:cNvCxnSpPr>
-            <p:nvPr/>
-          </p:nvCxnSpPr>
-          <p:spPr>
-            <a:xfrm flipH="1">
-              <a:off x="2189717" y="3141877"/>
-              <a:ext cx="1200879" cy="559771"/>
-            </a:xfrm>
-            <a:prstGeom prst="straightConnector1">
-              <a:avLst/>
-            </a:prstGeom>
-            <a:ln>
-              <a:tailEnd type="triangle"/>
-            </a:ln>
-          </p:spPr>
-          <p:style>
-            <a:lnRef idx="1">
-              <a:schemeClr val="dk1"/>
-            </a:lnRef>
-            <a:fillRef idx="0">
-              <a:schemeClr val="dk1"/>
-            </a:fillRef>
-            <a:effectRef idx="0">
-              <a:schemeClr val="dk1"/>
-            </a:effectRef>
-            <a:fontRef idx="minor">
-              <a:schemeClr val="tx1"/>
-            </a:fontRef>
-          </p:style>
-        </p:cxnSp>
-        <p:cxnSp>
-          <p:nvCxnSpPr>
-            <p:cNvPr id="83" name="Прямая со стрелкой 82">
-              <a:extLst>
-                <a:ext uri="{FF2B5EF4-FFF2-40B4-BE49-F238E27FC236}">
-                  <a16:creationId xmlns:a16="http://schemas.microsoft.com/office/drawing/2014/main" id="{851E5720-9838-5156-817A-9396CF77ED1B}"/>
-                </a:ext>
-              </a:extLst>
-            </p:cNvPr>
-            <p:cNvCxnSpPr>
-              <a:stCxn id="7" idx="2"/>
-              <a:endCxn id="74" idx="3"/>
-            </p:cNvCxnSpPr>
-            <p:nvPr/>
-          </p:nvCxnSpPr>
-          <p:spPr>
-            <a:xfrm flipH="1">
-              <a:off x="2180201" y="3141877"/>
-              <a:ext cx="1210395" cy="1218165"/>
-            </a:xfrm>
-            <a:prstGeom prst="straightConnector1">
-              <a:avLst/>
-            </a:prstGeom>
-            <a:ln>
-              <a:tailEnd type="triangle"/>
-            </a:ln>
-          </p:spPr>
-          <p:style>
-            <a:lnRef idx="1">
-              <a:schemeClr val="dk1"/>
-            </a:lnRef>
-            <a:fillRef idx="0">
-              <a:schemeClr val="dk1"/>
-            </a:fillRef>
-            <a:effectRef idx="0">
-              <a:schemeClr val="dk1"/>
-            </a:effectRef>
-            <a:fontRef idx="minor">
-              <a:schemeClr val="tx1"/>
-            </a:fontRef>
-          </p:style>
-        </p:cxnSp>
-        <p:grpSp>
-          <p:nvGrpSpPr>
-            <p:cNvPr id="84" name="Группа 83">
-              <a:extLst>
-                <a:ext uri="{FF2B5EF4-FFF2-40B4-BE49-F238E27FC236}">
-                  <a16:creationId xmlns:a16="http://schemas.microsoft.com/office/drawing/2014/main" id="{74C3BE4C-AA2E-44ED-B821-D3AED6034942}"/>
-                </a:ext>
-              </a:extLst>
-            </p:cNvPr>
-            <p:cNvGrpSpPr/>
-            <p:nvPr/>
-          </p:nvGrpSpPr>
-          <p:grpSpPr>
-            <a:xfrm>
-              <a:off x="7503941" y="3917328"/>
-              <a:ext cx="1715108" cy="438912"/>
-              <a:chOff x="3132765" y="185644"/>
-              <a:chExt cx="1338152" cy="438912"/>
-            </a:xfrm>
-          </p:grpSpPr>
-          <p:sp>
-            <p:nvSpPr>
-              <p:cNvPr id="85" name="Прямоугольник 84">
-                <a:extLst>
-                  <a:ext uri="{FF2B5EF4-FFF2-40B4-BE49-F238E27FC236}">
-                    <a16:creationId xmlns:a16="http://schemas.microsoft.com/office/drawing/2014/main" id="{D16B1A19-57B8-245C-70C9-E43EA73AB5F2}"/>
-                  </a:ext>
-                </a:extLst>
-              </p:cNvPr>
-              <p:cNvSpPr/>
-              <p:nvPr/>
-            </p:nvSpPr>
-            <p:spPr>
-              <a:xfrm>
-                <a:off x="3132765" y="185644"/>
-                <a:ext cx="1330727" cy="438912"/>
-              </a:xfrm>
-              <a:prstGeom prst="rect">
-                <a:avLst/>
-              </a:prstGeom>
-            </p:spPr>
-            <p:style>
-              <a:lnRef idx="2">
-                <a:schemeClr val="dk1"/>
-              </a:lnRef>
-              <a:fillRef idx="1">
-                <a:schemeClr val="lt1"/>
-              </a:fillRef>
-              <a:effectRef idx="0">
-                <a:schemeClr val="dk1"/>
-              </a:effectRef>
-              <a:fontRef idx="minor">
-                <a:schemeClr val="dk1"/>
-              </a:fontRef>
-            </p:style>
-            <p:txBody>
-              <a:bodyPr rtlCol="0" anchor="ctr"/>
-              <a:lstStyle/>
-              <a:p>
-                <a:pPr algn="ctr"/>
-                <a:endParaRPr lang="ru-RU"/>
-              </a:p>
-            </p:txBody>
-          </p:sp>
-          <p:sp>
-            <p:nvSpPr>
-              <p:cNvPr id="86" name="TextBox 85">
-                <a:extLst>
-                  <a:ext uri="{FF2B5EF4-FFF2-40B4-BE49-F238E27FC236}">
-                    <a16:creationId xmlns:a16="http://schemas.microsoft.com/office/drawing/2014/main" id="{CD7CBEE8-1DCC-54B4-CC2A-BEAAFA4687F0}"/>
-                  </a:ext>
-                </a:extLst>
-              </p:cNvPr>
-              <p:cNvSpPr txBox="1"/>
-              <p:nvPr/>
-            </p:nvSpPr>
-            <p:spPr>
-              <a:xfrm>
-                <a:off x="3147616" y="266705"/>
-                <a:ext cx="1323301" cy="276999"/>
-              </a:xfrm>
-              <a:prstGeom prst="rect">
-                <a:avLst/>
-              </a:prstGeom>
-              <a:noFill/>
-            </p:spPr>
-            <p:txBody>
-              <a:bodyPr wrap="square" rtlCol="0">
-                <a:spAutoFit/>
-              </a:bodyPr>
-              <a:lstStyle/>
-              <a:p>
-                <a:r>
-                  <a:rPr lang="ru-RU" sz="1200" dirty="0"/>
-                  <a:t>Запуск сбора метрик</a:t>
-                </a:r>
-              </a:p>
-            </p:txBody>
-          </p:sp>
-        </p:grpSp>
-        <p:grpSp>
-          <p:nvGrpSpPr>
-            <p:cNvPr id="87" name="Группа 86">
-              <a:extLst>
-                <a:ext uri="{FF2B5EF4-FFF2-40B4-BE49-F238E27FC236}">
-                  <a16:creationId xmlns:a16="http://schemas.microsoft.com/office/drawing/2014/main" id="{F08D2B92-4090-A598-2C60-0195523F4B7D}"/>
-                </a:ext>
-              </a:extLst>
-            </p:cNvPr>
-            <p:cNvGrpSpPr/>
-            <p:nvPr/>
-          </p:nvGrpSpPr>
-          <p:grpSpPr>
-            <a:xfrm>
-              <a:off x="7494420" y="4444224"/>
-              <a:ext cx="1715112" cy="537814"/>
-              <a:chOff x="3125337" y="185644"/>
-              <a:chExt cx="1338155" cy="486307"/>
-            </a:xfrm>
-          </p:grpSpPr>
-          <p:sp>
-            <p:nvSpPr>
-              <p:cNvPr id="88" name="Прямоугольник 87">
-                <a:extLst>
-                  <a:ext uri="{FF2B5EF4-FFF2-40B4-BE49-F238E27FC236}">
-                    <a16:creationId xmlns:a16="http://schemas.microsoft.com/office/drawing/2014/main" id="{CCE0D82C-47B8-1CDC-78C4-8B02D178E024}"/>
-                  </a:ext>
-                </a:extLst>
-              </p:cNvPr>
-              <p:cNvSpPr/>
-              <p:nvPr/>
-            </p:nvSpPr>
-            <p:spPr>
-              <a:xfrm>
-                <a:off x="3132765" y="185644"/>
-                <a:ext cx="1330727" cy="438912"/>
-              </a:xfrm>
-              <a:prstGeom prst="rect">
-                <a:avLst/>
-              </a:prstGeom>
-            </p:spPr>
-            <p:style>
-              <a:lnRef idx="2">
-                <a:schemeClr val="dk1"/>
-              </a:lnRef>
-              <a:fillRef idx="1">
-                <a:schemeClr val="lt1"/>
-              </a:fillRef>
-              <a:effectRef idx="0">
-                <a:schemeClr val="dk1"/>
-              </a:effectRef>
-              <a:fontRef idx="minor">
-                <a:schemeClr val="dk1"/>
-              </a:fontRef>
-            </p:style>
-            <p:txBody>
-              <a:bodyPr rtlCol="0" anchor="ctr"/>
-              <a:lstStyle/>
-              <a:p>
-                <a:pPr algn="ctr"/>
-                <a:endParaRPr lang="ru-RU"/>
-              </a:p>
-            </p:txBody>
-          </p:sp>
-          <p:sp>
-            <p:nvSpPr>
-              <p:cNvPr id="89" name="TextBox 88">
-                <a:extLst>
-                  <a:ext uri="{FF2B5EF4-FFF2-40B4-BE49-F238E27FC236}">
-                    <a16:creationId xmlns:a16="http://schemas.microsoft.com/office/drawing/2014/main" id="{457CA485-0E09-344D-8906-0C6A55DA25EE}"/>
-                  </a:ext>
-                </a:extLst>
-              </p:cNvPr>
-              <p:cNvSpPr txBox="1"/>
-              <p:nvPr/>
-            </p:nvSpPr>
-            <p:spPr>
-              <a:xfrm>
-                <a:off x="3125337" y="210286"/>
-                <a:ext cx="1330727" cy="461665"/>
-              </a:xfrm>
-              <a:prstGeom prst="rect">
-                <a:avLst/>
-              </a:prstGeom>
-              <a:noFill/>
-            </p:spPr>
-            <p:txBody>
-              <a:bodyPr wrap="square" rtlCol="0">
-                <a:spAutoFit/>
-              </a:bodyPr>
-              <a:lstStyle/>
-              <a:p>
-                <a:pPr algn="ctr"/>
-                <a:r>
-                  <a:rPr lang="ru-RU" sz="1200" dirty="0"/>
-                  <a:t>Остановка сбора метрик</a:t>
-                </a:r>
-              </a:p>
-            </p:txBody>
-          </p:sp>
-        </p:grpSp>
-        <p:grpSp>
-          <p:nvGrpSpPr>
-            <p:cNvPr id="90" name="Группа 89">
-              <a:extLst>
-                <a:ext uri="{FF2B5EF4-FFF2-40B4-BE49-F238E27FC236}">
-                  <a16:creationId xmlns:a16="http://schemas.microsoft.com/office/drawing/2014/main" id="{A1511543-CB25-5315-08CC-96C052B03069}"/>
-                </a:ext>
-              </a:extLst>
-            </p:cNvPr>
-            <p:cNvGrpSpPr/>
-            <p:nvPr/>
-          </p:nvGrpSpPr>
-          <p:grpSpPr>
-            <a:xfrm>
-              <a:off x="7499180" y="4974279"/>
-              <a:ext cx="1719868" cy="461665"/>
-              <a:chOff x="3121626" y="185644"/>
-              <a:chExt cx="1341866" cy="461665"/>
-            </a:xfrm>
-          </p:grpSpPr>
-          <p:sp>
-            <p:nvSpPr>
-              <p:cNvPr id="91" name="Прямоугольник 90">
-                <a:extLst>
-                  <a:ext uri="{FF2B5EF4-FFF2-40B4-BE49-F238E27FC236}">
-                    <a16:creationId xmlns:a16="http://schemas.microsoft.com/office/drawing/2014/main" id="{86A7889C-DEF7-A58C-E939-6A47F6BE1C92}"/>
-                  </a:ext>
-                </a:extLst>
-              </p:cNvPr>
-              <p:cNvSpPr/>
-              <p:nvPr/>
-            </p:nvSpPr>
-            <p:spPr>
-              <a:xfrm>
-                <a:off x="3132765" y="185644"/>
-                <a:ext cx="1330727" cy="438912"/>
-              </a:xfrm>
-              <a:prstGeom prst="rect">
-                <a:avLst/>
-              </a:prstGeom>
-            </p:spPr>
-            <p:style>
-              <a:lnRef idx="2">
-                <a:schemeClr val="dk1"/>
-              </a:lnRef>
-              <a:fillRef idx="1">
-                <a:schemeClr val="lt1"/>
-              </a:fillRef>
-              <a:effectRef idx="0">
-                <a:schemeClr val="dk1"/>
-              </a:effectRef>
-              <a:fontRef idx="minor">
-                <a:schemeClr val="dk1"/>
-              </a:fontRef>
-            </p:style>
-            <p:txBody>
-              <a:bodyPr rtlCol="0" anchor="ctr"/>
-              <a:lstStyle/>
-              <a:p>
-                <a:pPr algn="ctr"/>
-                <a:endParaRPr lang="ru-RU"/>
-              </a:p>
-            </p:txBody>
-          </p:sp>
-          <p:sp>
-            <p:nvSpPr>
-              <p:cNvPr id="92" name="TextBox 91">
-                <a:extLst>
-                  <a:ext uri="{FF2B5EF4-FFF2-40B4-BE49-F238E27FC236}">
-                    <a16:creationId xmlns:a16="http://schemas.microsoft.com/office/drawing/2014/main" id="{FF4F3838-08CF-3232-40A0-9C23D58B26D5}"/>
-                  </a:ext>
-                </a:extLst>
-              </p:cNvPr>
-              <p:cNvSpPr txBox="1"/>
-              <p:nvPr/>
-            </p:nvSpPr>
-            <p:spPr>
-              <a:xfrm>
-                <a:off x="3121626" y="185644"/>
-                <a:ext cx="1323301" cy="461665"/>
-              </a:xfrm>
-              <a:prstGeom prst="rect">
-                <a:avLst/>
-              </a:prstGeom>
-              <a:noFill/>
-            </p:spPr>
-            <p:txBody>
-              <a:bodyPr wrap="square" rtlCol="0">
-                <a:spAutoFit/>
-              </a:bodyPr>
-              <a:lstStyle/>
-              <a:p>
-                <a:pPr algn="ctr"/>
-                <a:r>
-                  <a:rPr lang="ru-RU" sz="1200" dirty="0"/>
-                  <a:t>Изменение интервала сбора данных</a:t>
-                </a:r>
-              </a:p>
-            </p:txBody>
-          </p:sp>
-        </p:grpSp>
-        <p:grpSp>
-          <p:nvGrpSpPr>
-            <p:cNvPr id="93" name="Группа 92">
-              <a:extLst>
-                <a:ext uri="{FF2B5EF4-FFF2-40B4-BE49-F238E27FC236}">
-                  <a16:creationId xmlns:a16="http://schemas.microsoft.com/office/drawing/2014/main" id="{0E1CAB7A-925C-6352-ED13-5BC758DD29DE}"/>
-                </a:ext>
-              </a:extLst>
-            </p:cNvPr>
-            <p:cNvGrpSpPr/>
-            <p:nvPr/>
-          </p:nvGrpSpPr>
-          <p:grpSpPr>
-            <a:xfrm>
-              <a:off x="7513460" y="5501070"/>
-              <a:ext cx="1715108" cy="490417"/>
-              <a:chOff x="3125340" y="185644"/>
-              <a:chExt cx="1338152" cy="490417"/>
-            </a:xfrm>
-          </p:grpSpPr>
-          <p:sp>
-            <p:nvSpPr>
-              <p:cNvPr id="94" name="Прямоугольник 93">
-                <a:extLst>
-                  <a:ext uri="{FF2B5EF4-FFF2-40B4-BE49-F238E27FC236}">
-                    <a16:creationId xmlns:a16="http://schemas.microsoft.com/office/drawing/2014/main" id="{B6CADA4E-6489-DF6B-CA9B-0C0762E7A9D2}"/>
-                  </a:ext>
-                </a:extLst>
-              </p:cNvPr>
-              <p:cNvSpPr/>
-              <p:nvPr/>
-            </p:nvSpPr>
-            <p:spPr>
-              <a:xfrm>
-                <a:off x="3132765" y="185644"/>
-                <a:ext cx="1330727" cy="438912"/>
-              </a:xfrm>
-              <a:prstGeom prst="rect">
-                <a:avLst/>
-              </a:prstGeom>
-            </p:spPr>
-            <p:style>
-              <a:lnRef idx="2">
-                <a:schemeClr val="dk1"/>
-              </a:lnRef>
-              <a:fillRef idx="1">
-                <a:schemeClr val="lt1"/>
-              </a:fillRef>
-              <a:effectRef idx="0">
-                <a:schemeClr val="dk1"/>
-              </a:effectRef>
-              <a:fontRef idx="minor">
-                <a:schemeClr val="dk1"/>
-              </a:fontRef>
-            </p:style>
-            <p:txBody>
-              <a:bodyPr rtlCol="0" anchor="ctr"/>
-              <a:lstStyle/>
-              <a:p>
-                <a:pPr algn="ctr"/>
-                <a:endParaRPr lang="ru-RU"/>
-              </a:p>
-            </p:txBody>
-          </p:sp>
-          <p:sp>
-            <p:nvSpPr>
-              <p:cNvPr id="95" name="TextBox 94">
-                <a:extLst>
-                  <a:ext uri="{FF2B5EF4-FFF2-40B4-BE49-F238E27FC236}">
-                    <a16:creationId xmlns:a16="http://schemas.microsoft.com/office/drawing/2014/main" id="{6EC3C4DD-273D-5327-6035-3CA6D15B1ABC}"/>
-                  </a:ext>
-                </a:extLst>
-              </p:cNvPr>
-              <p:cNvSpPr txBox="1"/>
-              <p:nvPr/>
-            </p:nvSpPr>
-            <p:spPr>
-              <a:xfrm>
-                <a:off x="3125340" y="214396"/>
-                <a:ext cx="1323301" cy="461665"/>
-              </a:xfrm>
-              <a:prstGeom prst="rect">
-                <a:avLst/>
-              </a:prstGeom>
-              <a:noFill/>
-            </p:spPr>
-            <p:txBody>
-              <a:bodyPr wrap="square" rtlCol="0">
-                <a:spAutoFit/>
-              </a:bodyPr>
-              <a:lstStyle/>
-              <a:p>
-                <a:pPr algn="ctr"/>
-                <a:r>
-                  <a:rPr lang="ru-RU" sz="1200" dirty="0"/>
-                  <a:t>Посмотреть статус сборки метрик</a:t>
-                </a:r>
-              </a:p>
-            </p:txBody>
-          </p:sp>
-        </p:grpSp>
-        <p:grpSp>
-          <p:nvGrpSpPr>
-            <p:cNvPr id="96" name="Группа 95">
-              <a:extLst>
-                <a:ext uri="{FF2B5EF4-FFF2-40B4-BE49-F238E27FC236}">
-                  <a16:creationId xmlns:a16="http://schemas.microsoft.com/office/drawing/2014/main" id="{4E741641-9D06-0F5F-D31A-23ECE12EA7AD}"/>
-                </a:ext>
-              </a:extLst>
-            </p:cNvPr>
-            <p:cNvGrpSpPr/>
-            <p:nvPr/>
-          </p:nvGrpSpPr>
-          <p:grpSpPr>
-            <a:xfrm>
-              <a:off x="7494420" y="6055218"/>
-              <a:ext cx="1705591" cy="438912"/>
-              <a:chOff x="3132765" y="185644"/>
-              <a:chExt cx="1330727" cy="438912"/>
-            </a:xfrm>
-          </p:grpSpPr>
-          <p:sp>
-            <p:nvSpPr>
-              <p:cNvPr id="97" name="Прямоугольник 96">
-                <a:extLst>
-                  <a:ext uri="{FF2B5EF4-FFF2-40B4-BE49-F238E27FC236}">
-                    <a16:creationId xmlns:a16="http://schemas.microsoft.com/office/drawing/2014/main" id="{3935F209-DF9A-61F6-362C-66E1B5DC5F8D}"/>
-                  </a:ext>
-                </a:extLst>
-              </p:cNvPr>
-              <p:cNvSpPr/>
-              <p:nvPr/>
-            </p:nvSpPr>
-            <p:spPr>
-              <a:xfrm>
-                <a:off x="3132765" y="185644"/>
-                <a:ext cx="1330727" cy="438912"/>
-              </a:xfrm>
-              <a:prstGeom prst="rect">
-                <a:avLst/>
-              </a:prstGeom>
-            </p:spPr>
-            <p:style>
-              <a:lnRef idx="2">
-                <a:schemeClr val="dk1"/>
-              </a:lnRef>
-              <a:fillRef idx="1">
-                <a:schemeClr val="lt1"/>
-              </a:fillRef>
-              <a:effectRef idx="0">
-                <a:schemeClr val="dk1"/>
-              </a:effectRef>
-              <a:fontRef idx="minor">
-                <a:schemeClr val="dk1"/>
-              </a:fontRef>
-            </p:style>
-            <p:txBody>
-              <a:bodyPr rtlCol="0" anchor="ctr"/>
-              <a:lstStyle/>
-              <a:p>
-                <a:pPr algn="ctr"/>
-                <a:endParaRPr lang="ru-RU"/>
-              </a:p>
-            </p:txBody>
-          </p:sp>
-          <p:sp>
-            <p:nvSpPr>
-              <p:cNvPr id="98" name="TextBox 97">
-                <a:extLst>
-                  <a:ext uri="{FF2B5EF4-FFF2-40B4-BE49-F238E27FC236}">
-                    <a16:creationId xmlns:a16="http://schemas.microsoft.com/office/drawing/2014/main" id="{831C7BF2-D972-AE4E-BA7D-AA2E11E0C4D4}"/>
-                  </a:ext>
-                </a:extLst>
-              </p:cNvPr>
-              <p:cNvSpPr txBox="1"/>
-              <p:nvPr/>
-            </p:nvSpPr>
-            <p:spPr>
-              <a:xfrm>
-                <a:off x="3132765" y="266601"/>
-                <a:ext cx="1323301" cy="276999"/>
-              </a:xfrm>
-              <a:prstGeom prst="rect">
-                <a:avLst/>
-              </a:prstGeom>
-              <a:noFill/>
-            </p:spPr>
-            <p:txBody>
-              <a:bodyPr wrap="square" rtlCol="0">
-                <a:spAutoFit/>
-              </a:bodyPr>
-              <a:lstStyle/>
-              <a:p>
-                <a:pPr algn="ctr"/>
-                <a:r>
-                  <a:rPr lang="ru-RU" sz="1200" dirty="0"/>
-                  <a:t>Вывод списка метрик</a:t>
-                </a:r>
-              </a:p>
-            </p:txBody>
-          </p:sp>
-        </p:grpSp>
-        <p:cxnSp>
-          <p:nvCxnSpPr>
-            <p:cNvPr id="102" name="Прямая со стрелкой 101">
-              <a:extLst>
-                <a:ext uri="{FF2B5EF4-FFF2-40B4-BE49-F238E27FC236}">
-                  <a16:creationId xmlns:a16="http://schemas.microsoft.com/office/drawing/2014/main" id="{7A6B6342-8B9E-DB48-CF7F-CF0C35F77D07}"/>
-                </a:ext>
-              </a:extLst>
-            </p:cNvPr>
-            <p:cNvCxnSpPr>
-              <a:stCxn id="8" idx="6"/>
-              <a:endCxn id="86" idx="1"/>
-            </p:cNvCxnSpPr>
-            <p:nvPr/>
-          </p:nvCxnSpPr>
-          <p:spPr>
-            <a:xfrm flipV="1">
-              <a:off x="6632447" y="4136889"/>
-              <a:ext cx="890529" cy="555812"/>
-            </a:xfrm>
-            <a:prstGeom prst="straightConnector1">
-              <a:avLst/>
-            </a:prstGeom>
-            <a:ln>
-              <a:tailEnd type="triangle"/>
-            </a:ln>
-          </p:spPr>
-          <p:style>
-            <a:lnRef idx="1">
-              <a:schemeClr val="dk1"/>
-            </a:lnRef>
-            <a:fillRef idx="0">
-              <a:schemeClr val="dk1"/>
-            </a:fillRef>
-            <a:effectRef idx="0">
-              <a:schemeClr val="dk1"/>
-            </a:effectRef>
-            <a:fontRef idx="minor">
-              <a:schemeClr val="tx1"/>
-            </a:fontRef>
-          </p:style>
-        </p:cxnSp>
-        <p:cxnSp>
-          <p:nvCxnSpPr>
-            <p:cNvPr id="104" name="Прямая со стрелкой 103">
-              <a:extLst>
-                <a:ext uri="{FF2B5EF4-FFF2-40B4-BE49-F238E27FC236}">
-                  <a16:creationId xmlns:a16="http://schemas.microsoft.com/office/drawing/2014/main" id="{D187E933-2236-F05A-1ED0-55F080448BFC}"/>
-                </a:ext>
-              </a:extLst>
-            </p:cNvPr>
-            <p:cNvCxnSpPr>
-              <a:stCxn id="8" idx="6"/>
-              <a:endCxn id="89" idx="1"/>
-            </p:cNvCxnSpPr>
-            <p:nvPr/>
-          </p:nvCxnSpPr>
-          <p:spPr>
-            <a:xfrm>
-              <a:off x="6632447" y="4692701"/>
-              <a:ext cx="861973" cy="34056"/>
-            </a:xfrm>
-            <a:prstGeom prst="straightConnector1">
-              <a:avLst/>
-            </a:prstGeom>
-            <a:ln>
-              <a:tailEnd type="triangle"/>
-            </a:ln>
-          </p:spPr>
-          <p:style>
-            <a:lnRef idx="1">
-              <a:schemeClr val="dk1"/>
-            </a:lnRef>
-            <a:fillRef idx="0">
-              <a:schemeClr val="dk1"/>
-            </a:fillRef>
-            <a:effectRef idx="0">
-              <a:schemeClr val="dk1"/>
-            </a:effectRef>
-            <a:fontRef idx="minor">
-              <a:schemeClr val="tx1"/>
-            </a:fontRef>
-          </p:style>
-        </p:cxnSp>
-        <p:cxnSp>
-          <p:nvCxnSpPr>
-            <p:cNvPr id="106" name="Прямая со стрелкой 105">
-              <a:extLst>
-                <a:ext uri="{FF2B5EF4-FFF2-40B4-BE49-F238E27FC236}">
-                  <a16:creationId xmlns:a16="http://schemas.microsoft.com/office/drawing/2014/main" id="{DD8FA45D-4F73-CC49-B268-A3F151572091}"/>
-                </a:ext>
-              </a:extLst>
-            </p:cNvPr>
-            <p:cNvCxnSpPr>
-              <a:stCxn id="8" idx="6"/>
-              <a:endCxn id="92" idx="1"/>
-            </p:cNvCxnSpPr>
-            <p:nvPr/>
-          </p:nvCxnSpPr>
-          <p:spPr>
-            <a:xfrm>
-              <a:off x="6632447" y="4692701"/>
-              <a:ext cx="866733" cy="512411"/>
-            </a:xfrm>
-            <a:prstGeom prst="straightConnector1">
-              <a:avLst/>
-            </a:prstGeom>
-            <a:ln>
-              <a:tailEnd type="triangle"/>
-            </a:ln>
-          </p:spPr>
-          <p:style>
-            <a:lnRef idx="1">
-              <a:schemeClr val="dk1"/>
-            </a:lnRef>
-            <a:fillRef idx="0">
-              <a:schemeClr val="dk1"/>
-            </a:fillRef>
-            <a:effectRef idx="0">
-              <a:schemeClr val="dk1"/>
-            </a:effectRef>
-            <a:fontRef idx="minor">
-              <a:schemeClr val="tx1"/>
-            </a:fontRef>
-          </p:style>
-        </p:cxnSp>
-        <p:cxnSp>
-          <p:nvCxnSpPr>
-            <p:cNvPr id="108" name="Прямая со стрелкой 107">
-              <a:extLst>
-                <a:ext uri="{FF2B5EF4-FFF2-40B4-BE49-F238E27FC236}">
-                  <a16:creationId xmlns:a16="http://schemas.microsoft.com/office/drawing/2014/main" id="{27379544-768E-7320-9DAC-DA4B2CE54528}"/>
-                </a:ext>
-              </a:extLst>
-            </p:cNvPr>
-            <p:cNvCxnSpPr>
-              <a:stCxn id="8" idx="6"/>
-              <a:endCxn id="95" idx="1"/>
-            </p:cNvCxnSpPr>
-            <p:nvPr/>
-          </p:nvCxnSpPr>
-          <p:spPr>
-            <a:xfrm>
-              <a:off x="6632447" y="4692701"/>
-              <a:ext cx="881013" cy="1067954"/>
-            </a:xfrm>
-            <a:prstGeom prst="straightConnector1">
-              <a:avLst/>
-            </a:prstGeom>
-            <a:ln>
-              <a:tailEnd type="triangle"/>
-            </a:ln>
-          </p:spPr>
-          <p:style>
-            <a:lnRef idx="1">
-              <a:schemeClr val="dk1"/>
-            </a:lnRef>
-            <a:fillRef idx="0">
-              <a:schemeClr val="dk1"/>
-            </a:fillRef>
-            <a:effectRef idx="0">
-              <a:schemeClr val="dk1"/>
-            </a:effectRef>
-            <a:fontRef idx="minor">
-              <a:schemeClr val="tx1"/>
-            </a:fontRef>
-          </p:style>
-        </p:cxnSp>
-        <p:cxnSp>
-          <p:nvCxnSpPr>
-            <p:cNvPr id="110" name="Прямая со стрелкой 109">
-              <a:extLst>
-                <a:ext uri="{FF2B5EF4-FFF2-40B4-BE49-F238E27FC236}">
-                  <a16:creationId xmlns:a16="http://schemas.microsoft.com/office/drawing/2014/main" id="{DCB55E75-81B6-A09D-3BE5-33E5DF3DCD16}"/>
-                </a:ext>
-              </a:extLst>
-            </p:cNvPr>
-            <p:cNvCxnSpPr>
-              <a:stCxn id="8" idx="6"/>
-              <a:endCxn id="98" idx="1"/>
-            </p:cNvCxnSpPr>
-            <p:nvPr/>
-          </p:nvCxnSpPr>
-          <p:spPr>
-            <a:xfrm>
-              <a:off x="6632447" y="4692701"/>
-              <a:ext cx="861973" cy="1581974"/>
-            </a:xfrm>
-            <a:prstGeom prst="straightConnector1">
-              <a:avLst/>
-            </a:prstGeom>
-            <a:ln>
-              <a:tailEnd type="triangle"/>
-            </a:ln>
-          </p:spPr>
-          <p:style>
-            <a:lnRef idx="1">
-              <a:schemeClr val="dk1"/>
-            </a:lnRef>
-            <a:fillRef idx="0">
-              <a:schemeClr val="dk1"/>
-            </a:fillRef>
-            <a:effectRef idx="0">
-              <a:schemeClr val="dk1"/>
-            </a:effectRef>
-            <a:fontRef idx="minor">
-              <a:schemeClr val="tx1"/>
-            </a:fontRef>
-          </p:style>
-        </p:cxnSp>
-        <p:grpSp>
-          <p:nvGrpSpPr>
-            <p:cNvPr id="111" name="Группа 110">
-              <a:extLst>
-                <a:ext uri="{FF2B5EF4-FFF2-40B4-BE49-F238E27FC236}">
-                  <a16:creationId xmlns:a16="http://schemas.microsoft.com/office/drawing/2014/main" id="{FBD0554F-836F-7AEF-D132-2F6A20AEFCC3}"/>
-                </a:ext>
-              </a:extLst>
-            </p:cNvPr>
-            <p:cNvGrpSpPr/>
-            <p:nvPr/>
-          </p:nvGrpSpPr>
-          <p:grpSpPr>
-            <a:xfrm>
-              <a:off x="10175457" y="384840"/>
-              <a:ext cx="1715108" cy="754241"/>
-              <a:chOff x="3132765" y="185643"/>
-              <a:chExt cx="1338152" cy="754241"/>
-            </a:xfrm>
-          </p:grpSpPr>
-          <p:sp>
-            <p:nvSpPr>
-              <p:cNvPr id="112" name="Прямоугольник 111">
-                <a:extLst>
-                  <a:ext uri="{FF2B5EF4-FFF2-40B4-BE49-F238E27FC236}">
-                    <a16:creationId xmlns:a16="http://schemas.microsoft.com/office/drawing/2014/main" id="{308D05CD-D966-DCB9-8999-703451C5F5BE}"/>
-                  </a:ext>
-                </a:extLst>
-              </p:cNvPr>
-              <p:cNvSpPr/>
-              <p:nvPr/>
-            </p:nvSpPr>
-            <p:spPr>
-              <a:xfrm>
-                <a:off x="3132765" y="185643"/>
-                <a:ext cx="1330727" cy="754241"/>
-              </a:xfrm>
-              <a:prstGeom prst="rect">
-                <a:avLst/>
-              </a:prstGeom>
-            </p:spPr>
-            <p:style>
-              <a:lnRef idx="2">
-                <a:schemeClr val="dk1"/>
-              </a:lnRef>
-              <a:fillRef idx="1">
-                <a:schemeClr val="lt1"/>
-              </a:fillRef>
-              <a:effectRef idx="0">
-                <a:schemeClr val="dk1"/>
-              </a:effectRef>
-              <a:fontRef idx="minor">
-                <a:schemeClr val="dk1"/>
-              </a:fontRef>
-            </p:style>
-            <p:txBody>
-              <a:bodyPr rtlCol="0" anchor="ctr"/>
-              <a:lstStyle/>
-              <a:p>
-                <a:pPr algn="ctr"/>
-                <a:endParaRPr lang="ru-RU"/>
-              </a:p>
-            </p:txBody>
-          </p:sp>
-          <p:sp>
-            <p:nvSpPr>
-              <p:cNvPr id="113" name="TextBox 112">
-                <a:extLst>
-                  <a:ext uri="{FF2B5EF4-FFF2-40B4-BE49-F238E27FC236}">
-                    <a16:creationId xmlns:a16="http://schemas.microsoft.com/office/drawing/2014/main" id="{6C1602A6-6963-9EE4-8FF4-BDA79CD4E61C}"/>
-                  </a:ext>
-                </a:extLst>
-              </p:cNvPr>
-              <p:cNvSpPr txBox="1"/>
-              <p:nvPr/>
-            </p:nvSpPr>
-            <p:spPr>
-              <a:xfrm>
-                <a:off x="3147616" y="266705"/>
-                <a:ext cx="1323301" cy="646331"/>
-              </a:xfrm>
-              <a:prstGeom prst="rect">
-                <a:avLst/>
-              </a:prstGeom>
-              <a:noFill/>
-            </p:spPr>
-            <p:txBody>
-              <a:bodyPr wrap="square" rtlCol="0">
-                <a:spAutoFit/>
-              </a:bodyPr>
-              <a:lstStyle/>
-              <a:p>
-                <a:pPr algn="ctr"/>
-                <a:r>
-                  <a:rPr lang="ru-RU" sz="1200" dirty="0"/>
-                  <a:t>Создание пользователя с определённой ролью</a:t>
-                </a:r>
-              </a:p>
-            </p:txBody>
-          </p:sp>
-        </p:grpSp>
-        <p:grpSp>
-          <p:nvGrpSpPr>
-            <p:cNvPr id="115" name="Группа 114">
-              <a:extLst>
-                <a:ext uri="{FF2B5EF4-FFF2-40B4-BE49-F238E27FC236}">
-                  <a16:creationId xmlns:a16="http://schemas.microsoft.com/office/drawing/2014/main" id="{898ADC2C-520B-6DFA-C749-76E491D2CC8B}"/>
-                </a:ext>
-              </a:extLst>
-            </p:cNvPr>
-            <p:cNvGrpSpPr/>
-            <p:nvPr/>
-          </p:nvGrpSpPr>
-          <p:grpSpPr>
-            <a:xfrm>
-              <a:off x="10184979" y="1270643"/>
-              <a:ext cx="1715103" cy="754240"/>
-              <a:chOff x="3132765" y="185644"/>
-              <a:chExt cx="1338152" cy="542726"/>
-            </a:xfrm>
-          </p:grpSpPr>
-          <p:sp>
-            <p:nvSpPr>
-              <p:cNvPr id="116" name="Прямоугольник 115">
-                <a:extLst>
-                  <a:ext uri="{FF2B5EF4-FFF2-40B4-BE49-F238E27FC236}">
-                    <a16:creationId xmlns:a16="http://schemas.microsoft.com/office/drawing/2014/main" id="{7B1D5E37-5D35-014A-EE02-4FDC0B533E23}"/>
-                  </a:ext>
-                </a:extLst>
-              </p:cNvPr>
-              <p:cNvSpPr/>
-              <p:nvPr/>
-            </p:nvSpPr>
-            <p:spPr>
-              <a:xfrm>
-                <a:off x="3132765" y="185644"/>
-                <a:ext cx="1330727" cy="438912"/>
-              </a:xfrm>
-              <a:prstGeom prst="rect">
-                <a:avLst/>
-              </a:prstGeom>
-            </p:spPr>
-            <p:style>
-              <a:lnRef idx="2">
-                <a:schemeClr val="dk1"/>
-              </a:lnRef>
-              <a:fillRef idx="1">
-                <a:schemeClr val="lt1"/>
-              </a:fillRef>
-              <a:effectRef idx="0">
-                <a:schemeClr val="dk1"/>
-              </a:effectRef>
-              <a:fontRef idx="minor">
-                <a:schemeClr val="dk1"/>
-              </a:fontRef>
-            </p:style>
-            <p:txBody>
-              <a:bodyPr rtlCol="0" anchor="ctr"/>
-              <a:lstStyle/>
-              <a:p>
-                <a:pPr algn="ctr"/>
-                <a:endParaRPr lang="ru-RU"/>
-              </a:p>
-            </p:txBody>
-          </p:sp>
-          <p:sp>
-            <p:nvSpPr>
-              <p:cNvPr id="117" name="TextBox 116">
-                <a:extLst>
-                  <a:ext uri="{FF2B5EF4-FFF2-40B4-BE49-F238E27FC236}">
-                    <a16:creationId xmlns:a16="http://schemas.microsoft.com/office/drawing/2014/main" id="{A7A3EA35-8DA7-BA41-CD71-A9FA03B0ACFC}"/>
-                  </a:ext>
-                </a:extLst>
-              </p:cNvPr>
-              <p:cNvSpPr txBox="1"/>
-              <p:nvPr/>
-            </p:nvSpPr>
-            <p:spPr>
-              <a:xfrm>
-                <a:off x="3147616" y="266705"/>
-                <a:ext cx="1323301" cy="461665"/>
-              </a:xfrm>
-              <a:prstGeom prst="rect">
-                <a:avLst/>
-              </a:prstGeom>
-              <a:noFill/>
-            </p:spPr>
-            <p:txBody>
-              <a:bodyPr wrap="square" rtlCol="0">
-                <a:spAutoFit/>
-              </a:bodyPr>
-              <a:lstStyle/>
-              <a:p>
-                <a:pPr algn="ctr"/>
-                <a:r>
-                  <a:rPr lang="ru-RU" sz="1200" dirty="0"/>
-                  <a:t>Вывод списка пользователей</a:t>
-                </a:r>
-              </a:p>
-            </p:txBody>
-          </p:sp>
-        </p:grpSp>
-        <p:grpSp>
-          <p:nvGrpSpPr>
-            <p:cNvPr id="118" name="Группа 117">
-              <a:extLst>
-                <a:ext uri="{FF2B5EF4-FFF2-40B4-BE49-F238E27FC236}">
-                  <a16:creationId xmlns:a16="http://schemas.microsoft.com/office/drawing/2014/main" id="{79F502DC-5862-6752-5C49-9BFB7D222E2E}"/>
-                </a:ext>
-              </a:extLst>
-            </p:cNvPr>
-            <p:cNvGrpSpPr/>
-            <p:nvPr/>
-          </p:nvGrpSpPr>
-          <p:grpSpPr>
-            <a:xfrm>
-              <a:off x="10194494" y="2007129"/>
-              <a:ext cx="1715106" cy="1148423"/>
-              <a:chOff x="3132767" y="221301"/>
-              <a:chExt cx="1338150" cy="691735"/>
-            </a:xfrm>
-          </p:grpSpPr>
-          <p:sp>
-            <p:nvSpPr>
-              <p:cNvPr id="119" name="Прямоугольник 118">
-                <a:extLst>
-                  <a:ext uri="{FF2B5EF4-FFF2-40B4-BE49-F238E27FC236}">
-                    <a16:creationId xmlns:a16="http://schemas.microsoft.com/office/drawing/2014/main" id="{104D1880-5DB5-E5BC-0708-DD5C95BE94A2}"/>
-                  </a:ext>
-                </a:extLst>
-              </p:cNvPr>
-              <p:cNvSpPr/>
-              <p:nvPr/>
-            </p:nvSpPr>
-            <p:spPr>
-              <a:xfrm>
-                <a:off x="3132767" y="221301"/>
-                <a:ext cx="1330727" cy="438912"/>
-              </a:xfrm>
-              <a:prstGeom prst="rect">
-                <a:avLst/>
-              </a:prstGeom>
-            </p:spPr>
-            <p:style>
-              <a:lnRef idx="2">
-                <a:schemeClr val="dk1"/>
-              </a:lnRef>
-              <a:fillRef idx="1">
-                <a:schemeClr val="lt1"/>
-              </a:fillRef>
-              <a:effectRef idx="0">
-                <a:schemeClr val="dk1"/>
-              </a:effectRef>
-              <a:fontRef idx="minor">
-                <a:schemeClr val="dk1"/>
-              </a:fontRef>
-            </p:style>
-            <p:txBody>
-              <a:bodyPr rtlCol="0" anchor="ctr"/>
-              <a:lstStyle/>
-              <a:p>
-                <a:pPr algn="ctr"/>
-                <a:endParaRPr lang="ru-RU"/>
-              </a:p>
-            </p:txBody>
-          </p:sp>
-          <p:sp>
-            <p:nvSpPr>
-              <p:cNvPr id="120" name="TextBox 119">
-                <a:extLst>
-                  <a:ext uri="{FF2B5EF4-FFF2-40B4-BE49-F238E27FC236}">
-                    <a16:creationId xmlns:a16="http://schemas.microsoft.com/office/drawing/2014/main" id="{EBDDE23A-96EA-CA40-8025-9D7A67CD182D}"/>
-                  </a:ext>
-                </a:extLst>
-              </p:cNvPr>
-              <p:cNvSpPr txBox="1"/>
-              <p:nvPr/>
-            </p:nvSpPr>
-            <p:spPr>
-              <a:xfrm>
-                <a:off x="3147616" y="266705"/>
-                <a:ext cx="1323301" cy="646331"/>
-              </a:xfrm>
-              <a:prstGeom prst="rect">
-                <a:avLst/>
-              </a:prstGeom>
-              <a:noFill/>
-            </p:spPr>
-            <p:txBody>
-              <a:bodyPr wrap="square" rtlCol="0">
-                <a:spAutoFit/>
-              </a:bodyPr>
-              <a:lstStyle/>
-              <a:p>
-                <a:pPr algn="ctr"/>
-                <a:r>
-                  <a:rPr lang="ru-RU" sz="1200" dirty="0"/>
-                  <a:t>Блокировка учётных записей пользователей</a:t>
-                </a:r>
-              </a:p>
-            </p:txBody>
-          </p:sp>
-        </p:grpSp>
-        <p:grpSp>
-          <p:nvGrpSpPr>
-            <p:cNvPr id="121" name="Группа 120">
-              <a:extLst>
-                <a:ext uri="{FF2B5EF4-FFF2-40B4-BE49-F238E27FC236}">
-                  <a16:creationId xmlns:a16="http://schemas.microsoft.com/office/drawing/2014/main" id="{64302286-C6AB-2A3B-DC94-09A3E7234DA9}"/>
-                </a:ext>
-              </a:extLst>
-            </p:cNvPr>
-            <p:cNvGrpSpPr/>
-            <p:nvPr/>
-          </p:nvGrpSpPr>
-          <p:grpSpPr>
-            <a:xfrm>
-              <a:off x="10199250" y="2855389"/>
-              <a:ext cx="1724626" cy="490259"/>
-              <a:chOff x="3125339" y="238111"/>
-              <a:chExt cx="1345578" cy="490259"/>
-            </a:xfrm>
-          </p:grpSpPr>
-          <p:sp>
-            <p:nvSpPr>
-              <p:cNvPr id="122" name="Прямоугольник 121">
-                <a:extLst>
-                  <a:ext uri="{FF2B5EF4-FFF2-40B4-BE49-F238E27FC236}">
-                    <a16:creationId xmlns:a16="http://schemas.microsoft.com/office/drawing/2014/main" id="{7E48E41C-F73B-9A37-8E16-E37EE37AB4DD}"/>
-                  </a:ext>
-                </a:extLst>
-              </p:cNvPr>
-              <p:cNvSpPr/>
-              <p:nvPr/>
-            </p:nvSpPr>
-            <p:spPr>
-              <a:xfrm>
-                <a:off x="3125339" y="238111"/>
-                <a:ext cx="1330727" cy="438912"/>
-              </a:xfrm>
-              <a:prstGeom prst="rect">
-                <a:avLst/>
-              </a:prstGeom>
-            </p:spPr>
-            <p:style>
-              <a:lnRef idx="2">
-                <a:schemeClr val="dk1"/>
-              </a:lnRef>
-              <a:fillRef idx="1">
-                <a:schemeClr val="lt1"/>
-              </a:fillRef>
-              <a:effectRef idx="0">
-                <a:schemeClr val="dk1"/>
-              </a:effectRef>
-              <a:fontRef idx="minor">
-                <a:schemeClr val="dk1"/>
-              </a:fontRef>
-            </p:style>
-            <p:txBody>
-              <a:bodyPr rtlCol="0" anchor="ctr"/>
-              <a:lstStyle/>
-              <a:p>
-                <a:pPr algn="ctr"/>
-                <a:endParaRPr lang="ru-RU"/>
-              </a:p>
-            </p:txBody>
-          </p:sp>
-          <p:sp>
-            <p:nvSpPr>
-              <p:cNvPr id="123" name="TextBox 122">
-                <a:extLst>
-                  <a:ext uri="{FF2B5EF4-FFF2-40B4-BE49-F238E27FC236}">
-                    <a16:creationId xmlns:a16="http://schemas.microsoft.com/office/drawing/2014/main" id="{40489D4C-F3A2-1009-E5C2-4D3C593904E1}"/>
-                  </a:ext>
-                </a:extLst>
-              </p:cNvPr>
-              <p:cNvSpPr txBox="1"/>
-              <p:nvPr/>
-            </p:nvSpPr>
-            <p:spPr>
-              <a:xfrm>
-                <a:off x="3147616" y="266705"/>
-                <a:ext cx="1323301" cy="461665"/>
-              </a:xfrm>
-              <a:prstGeom prst="rect">
-                <a:avLst/>
-              </a:prstGeom>
-              <a:noFill/>
-            </p:spPr>
-            <p:txBody>
-              <a:bodyPr wrap="square" rtlCol="0">
-                <a:spAutoFit/>
-              </a:bodyPr>
-              <a:lstStyle/>
-              <a:p>
-                <a:pPr algn="ctr"/>
-                <a:r>
-                  <a:rPr lang="ru-RU" sz="1200" dirty="0"/>
-                  <a:t>Удаление пользователей</a:t>
-                </a:r>
-              </a:p>
-            </p:txBody>
-          </p:sp>
-        </p:grpSp>
-        <p:grpSp>
-          <p:nvGrpSpPr>
-            <p:cNvPr id="124" name="Группа 123">
-              <a:extLst>
-                <a:ext uri="{FF2B5EF4-FFF2-40B4-BE49-F238E27FC236}">
-                  <a16:creationId xmlns:a16="http://schemas.microsoft.com/office/drawing/2014/main" id="{3A594E63-3914-B928-F1A2-D545670DE86D}"/>
-                </a:ext>
-              </a:extLst>
-            </p:cNvPr>
-            <p:cNvGrpSpPr/>
-            <p:nvPr/>
-          </p:nvGrpSpPr>
-          <p:grpSpPr>
-            <a:xfrm>
-              <a:off x="10194492" y="3429000"/>
-              <a:ext cx="1715108" cy="438912"/>
-              <a:chOff x="3132765" y="185644"/>
-              <a:chExt cx="1338152" cy="438912"/>
-            </a:xfrm>
-          </p:grpSpPr>
-          <p:sp>
-            <p:nvSpPr>
-              <p:cNvPr id="125" name="Прямоугольник 124">
-                <a:extLst>
-                  <a:ext uri="{FF2B5EF4-FFF2-40B4-BE49-F238E27FC236}">
-                    <a16:creationId xmlns:a16="http://schemas.microsoft.com/office/drawing/2014/main" id="{9C471486-4ED4-2BD4-70A8-04F1C9EE1FB7}"/>
-                  </a:ext>
-                </a:extLst>
-              </p:cNvPr>
-              <p:cNvSpPr/>
-              <p:nvPr/>
-            </p:nvSpPr>
-            <p:spPr>
-              <a:xfrm>
-                <a:off x="3132765" y="185644"/>
-                <a:ext cx="1330727" cy="438912"/>
-              </a:xfrm>
-              <a:prstGeom prst="rect">
-                <a:avLst/>
-              </a:prstGeom>
-            </p:spPr>
-            <p:style>
-              <a:lnRef idx="2">
-                <a:schemeClr val="dk1"/>
-              </a:lnRef>
-              <a:fillRef idx="1">
-                <a:schemeClr val="lt1"/>
-              </a:fillRef>
-              <a:effectRef idx="0">
-                <a:schemeClr val="dk1"/>
-              </a:effectRef>
-              <a:fontRef idx="minor">
-                <a:schemeClr val="dk1"/>
-              </a:fontRef>
-            </p:style>
-            <p:txBody>
-              <a:bodyPr rtlCol="0" anchor="ctr"/>
-              <a:lstStyle/>
-              <a:p>
-                <a:pPr algn="ctr"/>
-                <a:endParaRPr lang="ru-RU"/>
-              </a:p>
-            </p:txBody>
-          </p:sp>
-          <p:sp>
-            <p:nvSpPr>
-              <p:cNvPr id="126" name="TextBox 125">
-                <a:extLst>
-                  <a:ext uri="{FF2B5EF4-FFF2-40B4-BE49-F238E27FC236}">
-                    <a16:creationId xmlns:a16="http://schemas.microsoft.com/office/drawing/2014/main" id="{AF2E2BA7-8588-023E-E304-35A30395FFD7}"/>
-                  </a:ext>
-                </a:extLst>
-              </p:cNvPr>
-              <p:cNvSpPr txBox="1"/>
-              <p:nvPr/>
-            </p:nvSpPr>
-            <p:spPr>
-              <a:xfrm>
-                <a:off x="3147616" y="266705"/>
-                <a:ext cx="1323301" cy="276999"/>
-              </a:xfrm>
-              <a:prstGeom prst="rect">
-                <a:avLst/>
-              </a:prstGeom>
-              <a:noFill/>
-            </p:spPr>
-            <p:txBody>
-              <a:bodyPr wrap="square" rtlCol="0">
-                <a:spAutoFit/>
-              </a:bodyPr>
-              <a:lstStyle/>
-              <a:p>
-                <a:r>
-                  <a:rPr lang="ru-RU" sz="1200" dirty="0"/>
-                  <a:t>Вывод логов системы</a:t>
-                </a:r>
-              </a:p>
-            </p:txBody>
-          </p:sp>
-        </p:grpSp>
-        <p:grpSp>
-          <p:nvGrpSpPr>
-            <p:cNvPr id="127" name="Группа 126">
-              <a:extLst>
-                <a:ext uri="{FF2B5EF4-FFF2-40B4-BE49-F238E27FC236}">
-                  <a16:creationId xmlns:a16="http://schemas.microsoft.com/office/drawing/2014/main" id="{E7820DEB-56C7-BF7A-E10E-B6A72C8456EF}"/>
-                </a:ext>
-              </a:extLst>
-            </p:cNvPr>
-            <p:cNvGrpSpPr/>
-            <p:nvPr/>
-          </p:nvGrpSpPr>
-          <p:grpSpPr>
-            <a:xfrm>
-              <a:off x="10194492" y="4032817"/>
-              <a:ext cx="1715108" cy="438912"/>
-              <a:chOff x="3132765" y="185644"/>
-              <a:chExt cx="1338152" cy="438912"/>
-            </a:xfrm>
-          </p:grpSpPr>
-          <p:sp>
-            <p:nvSpPr>
-              <p:cNvPr id="128" name="Прямоугольник 127">
-                <a:extLst>
-                  <a:ext uri="{FF2B5EF4-FFF2-40B4-BE49-F238E27FC236}">
-                    <a16:creationId xmlns:a16="http://schemas.microsoft.com/office/drawing/2014/main" id="{F7950E21-15B0-429D-E778-ABF446C1B10E}"/>
-                  </a:ext>
-                </a:extLst>
-              </p:cNvPr>
-              <p:cNvSpPr/>
-              <p:nvPr/>
-            </p:nvSpPr>
-            <p:spPr>
-              <a:xfrm>
-                <a:off x="3132765" y="185644"/>
-                <a:ext cx="1330727" cy="438912"/>
-              </a:xfrm>
-              <a:prstGeom prst="rect">
-                <a:avLst/>
-              </a:prstGeom>
-            </p:spPr>
-            <p:style>
-              <a:lnRef idx="2">
-                <a:schemeClr val="dk1"/>
-              </a:lnRef>
-              <a:fillRef idx="1">
-                <a:schemeClr val="lt1"/>
-              </a:fillRef>
-              <a:effectRef idx="0">
-                <a:schemeClr val="dk1"/>
-              </a:effectRef>
-              <a:fontRef idx="minor">
-                <a:schemeClr val="dk1"/>
-              </a:fontRef>
-            </p:style>
-            <p:txBody>
-              <a:bodyPr rtlCol="0" anchor="ctr"/>
-              <a:lstStyle/>
-              <a:p>
-                <a:pPr algn="ctr"/>
-                <a:endParaRPr lang="ru-RU"/>
-              </a:p>
-            </p:txBody>
-          </p:sp>
-          <p:sp>
-            <p:nvSpPr>
-              <p:cNvPr id="129" name="TextBox 128">
-                <a:extLst>
-                  <a:ext uri="{FF2B5EF4-FFF2-40B4-BE49-F238E27FC236}">
-                    <a16:creationId xmlns:a16="http://schemas.microsoft.com/office/drawing/2014/main" id="{731EDDA3-6486-FE41-6B9F-034B636B22F4}"/>
-                  </a:ext>
-                </a:extLst>
-              </p:cNvPr>
-              <p:cNvSpPr txBox="1"/>
-              <p:nvPr/>
-            </p:nvSpPr>
-            <p:spPr>
-              <a:xfrm>
-                <a:off x="3147616" y="266705"/>
-                <a:ext cx="1323301" cy="276999"/>
-              </a:xfrm>
-              <a:prstGeom prst="rect">
-                <a:avLst/>
-              </a:prstGeom>
-              <a:noFill/>
-            </p:spPr>
-            <p:txBody>
-              <a:bodyPr wrap="square" rtlCol="0">
-                <a:spAutoFit/>
-              </a:bodyPr>
-              <a:lstStyle/>
-              <a:p>
-                <a:pPr algn="ctr"/>
-                <a:r>
-                  <a:rPr lang="ru-RU" sz="1200" dirty="0"/>
-                  <a:t>Запуск обновления</a:t>
-                </a:r>
-              </a:p>
-            </p:txBody>
-          </p:sp>
-        </p:grpSp>
-        <p:cxnSp>
-          <p:nvCxnSpPr>
-            <p:cNvPr id="131" name="Прямая со стрелкой 130">
-              <a:extLst>
-                <a:ext uri="{FF2B5EF4-FFF2-40B4-BE49-F238E27FC236}">
-                  <a16:creationId xmlns:a16="http://schemas.microsoft.com/office/drawing/2014/main" id="{06B90C8B-2C87-A8AD-CF0E-6B2706670F70}"/>
+                  <a16:creationId xmlns:a16="http://schemas.microsoft.com/office/drawing/2014/main" id="{46A560CF-F510-9A30-C1F8-9995FBE96816}"/>
                 </a:ext>
               </a:extLst>
             </p:cNvPr>
             <p:cNvCxnSpPr>
               <a:stCxn id="9" idx="6"/>
-              <a:endCxn id="112" idx="1"/>
-            </p:cNvCxnSpPr>
-            <p:nvPr/>
-          </p:nvCxnSpPr>
-          <p:spPr>
-            <a:xfrm flipV="1">
-              <a:off x="8801403" y="761961"/>
-              <a:ext cx="1374054" cy="2379917"/>
-            </a:xfrm>
-            <a:prstGeom prst="straightConnector1">
-              <a:avLst/>
-            </a:prstGeom>
-            <a:ln>
-              <a:tailEnd type="triangle"/>
-            </a:ln>
-          </p:spPr>
-          <p:style>
-            <a:lnRef idx="1">
-              <a:schemeClr val="dk1"/>
-            </a:lnRef>
-            <a:fillRef idx="0">
-              <a:schemeClr val="dk1"/>
-            </a:fillRef>
-            <a:effectRef idx="0">
-              <a:schemeClr val="dk1"/>
-            </a:effectRef>
-            <a:fontRef idx="minor">
-              <a:schemeClr val="tx1"/>
-            </a:fontRef>
-          </p:style>
-        </p:cxnSp>
-        <p:cxnSp>
-          <p:nvCxnSpPr>
-            <p:cNvPr id="133" name="Прямая со стрелкой 132">
-              <a:extLst>
-                <a:ext uri="{FF2B5EF4-FFF2-40B4-BE49-F238E27FC236}">
-                  <a16:creationId xmlns:a16="http://schemas.microsoft.com/office/drawing/2014/main" id="{010B91F2-A572-C832-AB66-2DAA9E0C3C54}"/>
-                </a:ext>
-              </a:extLst>
-            </p:cNvPr>
-            <p:cNvCxnSpPr>
-              <a:stCxn id="9" idx="6"/>
-            </p:cNvCxnSpPr>
-            <p:nvPr/>
-          </p:nvCxnSpPr>
-          <p:spPr>
-            <a:xfrm flipV="1">
-              <a:off x="8801403" y="1521562"/>
-              <a:ext cx="1374054" cy="1620316"/>
-            </a:xfrm>
-            <a:prstGeom prst="straightConnector1">
-              <a:avLst/>
-            </a:prstGeom>
-            <a:ln>
-              <a:tailEnd type="triangle"/>
-            </a:ln>
-          </p:spPr>
-          <p:style>
-            <a:lnRef idx="1">
-              <a:schemeClr val="dk1"/>
-            </a:lnRef>
-            <a:fillRef idx="0">
-              <a:schemeClr val="dk1"/>
-            </a:fillRef>
-            <a:effectRef idx="0">
-              <a:schemeClr val="dk1"/>
-            </a:effectRef>
-            <a:fontRef idx="minor">
-              <a:schemeClr val="tx1"/>
-            </a:fontRef>
-          </p:style>
-        </p:cxnSp>
-        <p:cxnSp>
-          <p:nvCxnSpPr>
-            <p:cNvPr id="135" name="Прямая со стрелкой 134">
-              <a:extLst>
-                <a:ext uri="{FF2B5EF4-FFF2-40B4-BE49-F238E27FC236}">
-                  <a16:creationId xmlns:a16="http://schemas.microsoft.com/office/drawing/2014/main" id="{AD62EBD0-B078-DF5E-D565-C2FD3A98160C}"/>
-                </a:ext>
-              </a:extLst>
-            </p:cNvPr>
-            <p:cNvCxnSpPr>
-              <a:stCxn id="9" idx="6"/>
-            </p:cNvCxnSpPr>
-            <p:nvPr/>
-          </p:nvCxnSpPr>
-          <p:spPr>
-            <a:xfrm flipV="1">
-              <a:off x="8801403" y="2371471"/>
-              <a:ext cx="1374054" cy="770407"/>
-            </a:xfrm>
-            <a:prstGeom prst="straightConnector1">
-              <a:avLst/>
-            </a:prstGeom>
-            <a:ln>
-              <a:tailEnd type="triangle"/>
-            </a:ln>
-          </p:spPr>
-          <p:style>
-            <a:lnRef idx="1">
-              <a:schemeClr val="dk1"/>
-            </a:lnRef>
-            <a:fillRef idx="0">
-              <a:schemeClr val="dk1"/>
-            </a:fillRef>
-            <a:effectRef idx="0">
-              <a:schemeClr val="dk1"/>
-            </a:effectRef>
-            <a:fontRef idx="minor">
-              <a:schemeClr val="tx1"/>
-            </a:fontRef>
-          </p:style>
-        </p:cxnSp>
-        <p:cxnSp>
-          <p:nvCxnSpPr>
-            <p:cNvPr id="137" name="Прямая со стрелкой 136">
-              <a:extLst>
-                <a:ext uri="{FF2B5EF4-FFF2-40B4-BE49-F238E27FC236}">
-                  <a16:creationId xmlns:a16="http://schemas.microsoft.com/office/drawing/2014/main" id="{D53F3B6F-CF07-00E5-C810-60A15E47F699}"/>
-                </a:ext>
-              </a:extLst>
-            </p:cNvPr>
-            <p:cNvCxnSpPr>
-              <a:stCxn id="9" idx="6"/>
-              <a:endCxn id="122" idx="1"/>
-            </p:cNvCxnSpPr>
-            <p:nvPr/>
-          </p:nvCxnSpPr>
-          <p:spPr>
-            <a:xfrm flipV="1">
-              <a:off x="8801403" y="3114816"/>
-              <a:ext cx="1426399" cy="27062"/>
-            </a:xfrm>
-            <a:prstGeom prst="straightConnector1">
-              <a:avLst/>
-            </a:prstGeom>
-            <a:ln>
-              <a:tailEnd type="triangle"/>
-            </a:ln>
-          </p:spPr>
-          <p:style>
-            <a:lnRef idx="1">
-              <a:schemeClr val="dk1"/>
-            </a:lnRef>
-            <a:fillRef idx="0">
-              <a:schemeClr val="dk1"/>
-            </a:fillRef>
-            <a:effectRef idx="0">
-              <a:schemeClr val="dk1"/>
-            </a:effectRef>
-            <a:fontRef idx="minor">
-              <a:schemeClr val="tx1"/>
-            </a:fontRef>
-          </p:style>
-        </p:cxnSp>
-        <p:cxnSp>
-          <p:nvCxnSpPr>
-            <p:cNvPr id="139" name="Прямая со стрелкой 138">
-              <a:extLst>
-                <a:ext uri="{FF2B5EF4-FFF2-40B4-BE49-F238E27FC236}">
-                  <a16:creationId xmlns:a16="http://schemas.microsoft.com/office/drawing/2014/main" id="{90125AB2-7104-F5F9-C18B-AA2FFD81E829}"/>
-                </a:ext>
-              </a:extLst>
-            </p:cNvPr>
-            <p:cNvCxnSpPr>
-              <a:stCxn id="9" idx="6"/>
-              <a:endCxn id="126" idx="1"/>
+              <a:endCxn id="4" idx="1"/>
             </p:cNvCxnSpPr>
             <p:nvPr/>
           </p:nvCxnSpPr>
           <p:spPr>
             <a:xfrm>
               <a:off x="8801403" y="3141878"/>
-              <a:ext cx="1412124" cy="506683"/>
-            </a:xfrm>
-            <a:prstGeom prst="straightConnector1">
-              <a:avLst/>
-            </a:prstGeom>
-            <a:ln>
-              <a:tailEnd type="triangle"/>
-            </a:ln>
-          </p:spPr>
-          <p:style>
-            <a:lnRef idx="1">
-              <a:schemeClr val="dk1"/>
-            </a:lnRef>
-            <a:fillRef idx="0">
-              <a:schemeClr val="dk1"/>
-            </a:fillRef>
-            <a:effectRef idx="0">
-              <a:schemeClr val="dk1"/>
-            </a:effectRef>
-            <a:fontRef idx="minor">
-              <a:schemeClr val="tx1"/>
-            </a:fontRef>
-          </p:style>
-        </p:cxnSp>
-        <p:cxnSp>
-          <p:nvCxnSpPr>
-            <p:cNvPr id="141" name="Прямая со стрелкой 140">
-              <a:extLst>
-                <a:ext uri="{FF2B5EF4-FFF2-40B4-BE49-F238E27FC236}">
-                  <a16:creationId xmlns:a16="http://schemas.microsoft.com/office/drawing/2014/main" id="{1D7CE346-08B2-22CD-182A-C4367B9B37DB}"/>
-                </a:ext>
-              </a:extLst>
-            </p:cNvPr>
-            <p:cNvCxnSpPr>
-              <a:stCxn id="9" idx="6"/>
-              <a:endCxn id="129" idx="1"/>
-            </p:cNvCxnSpPr>
-            <p:nvPr/>
-          </p:nvCxnSpPr>
-          <p:spPr>
-            <a:xfrm>
-              <a:off x="8801403" y="3141878"/>
-              <a:ext cx="1412124" cy="1110500"/>
+              <a:ext cx="1383572" cy="1734846"/>
             </a:xfrm>
             <a:prstGeom prst="straightConnector1">
               <a:avLst/>
